--- a/Customer Retention Analysis.pptx
+++ b/Customer Retention Analysis.pptx
@@ -4,9 +4,13 @@
   <p:sldMasterIdLst>
     <p:sldMasterId id="2147483660" r:id="rId1"/>
   </p:sldMasterIdLst>
+  <p:notesMasterIdLst>
+    <p:notesMasterId r:id="rId5"/>
+  </p:notesMasterIdLst>
   <p:sldIdLst>
     <p:sldId id="256" r:id="rId2"/>
     <p:sldId id="257" r:id="rId3"/>
+    <p:sldId id="258" r:id="rId4"/>
   </p:sldIdLst>
   <p:sldSz cx="12192000" cy="6858000"/>
   <p:notesSz cx="6858000" cy="9144000"/>
@@ -106,6 +110,619 @@
     </a:lvl9pPr>
   </p:defaultTextStyle>
 </p:presentation>
+</file>
+
+<file path=ppt/revisionInfo.xml><?xml version="1.0" encoding="utf-8"?>
+<p1510:revInfo xmlns:a="http://schemas.openxmlformats.org/drawingml/2006/main" xmlns:r="http://schemas.openxmlformats.org/officeDocument/2006/relationships" xmlns:p1510="http://schemas.microsoft.com/office/powerpoint/2015/10/main">
+  <p1510:revLst>
+    <p1510:client id="{708AB096-502C-4CC0-9240-ACA9084E787F}" v="864" dt="2025-12-08T21:26:44.864"/>
+  </p1510:revLst>
+</p1510:revInfo>
+</file>
+
+<file path=ppt/changesInfos/changesInfo1.xml><?xml version="1.0" encoding="utf-8"?>
+<pc:chgInfo xmlns:a="http://schemas.openxmlformats.org/drawingml/2006/main" xmlns:r="http://schemas.openxmlformats.org/officeDocument/2006/relationships" xmlns:ac="http://schemas.microsoft.com/office/drawing/2013/main/command" xmlns:pc="http://schemas.microsoft.com/office/powerpoint/2013/main/command">
+  <pc:docChgLst>
+    <pc:chgData name="Henry Vo" userId="c18cca123e130253" providerId="LiveId" clId="{CBED1F73-AEB6-48AF-B30C-D6CFC8A51246}"/>
+    <pc:docChg chg="undo custSel addSld modSld">
+      <pc:chgData name="Henry Vo" userId="c18cca123e130253" providerId="LiveId" clId="{CBED1F73-AEB6-48AF-B30C-D6CFC8A51246}" dt="2025-12-08T21:54:05.681" v="888" actId="680"/>
+      <pc:docMkLst>
+        <pc:docMk/>
+      </pc:docMkLst>
+      <pc:sldChg chg="addSp delSp modSp mod">
+        <pc:chgData name="Henry Vo" userId="c18cca123e130253" providerId="LiveId" clId="{CBED1F73-AEB6-48AF-B30C-D6CFC8A51246}" dt="2025-12-08T21:26:44.864" v="887" actId="1076"/>
+        <pc:sldMkLst>
+          <pc:docMk/>
+          <pc:sldMk cId="2863434639" sldId="257"/>
+        </pc:sldMkLst>
+        <pc:spChg chg="mod">
+          <ac:chgData name="Henry Vo" userId="c18cca123e130253" providerId="LiveId" clId="{CBED1F73-AEB6-48AF-B30C-D6CFC8A51246}" dt="2025-12-08T20:27:21.560" v="17" actId="20577"/>
+          <ac:spMkLst>
+            <pc:docMk/>
+            <pc:sldMk cId="2863434639" sldId="257"/>
+            <ac:spMk id="2" creationId="{D9D8056B-9063-E968-A1F3-E1824812A22F}"/>
+          </ac:spMkLst>
+        </pc:spChg>
+        <pc:spChg chg="add mod">
+          <ac:chgData name="Henry Vo" userId="c18cca123e130253" providerId="LiveId" clId="{CBED1F73-AEB6-48AF-B30C-D6CFC8A51246}" dt="2025-12-08T21:26:34.628" v="886" actId="1076"/>
+          <ac:spMkLst>
+            <pc:docMk/>
+            <pc:sldMk cId="2863434639" sldId="257"/>
+            <ac:spMk id="3" creationId="{919C429F-5C2B-3714-7281-3EDE68F7C32D}"/>
+          </ac:spMkLst>
+        </pc:spChg>
+        <pc:spChg chg="del">
+          <ac:chgData name="Henry Vo" userId="c18cca123e130253" providerId="LiveId" clId="{CBED1F73-AEB6-48AF-B30C-D6CFC8A51246}" dt="2025-12-08T20:27:23.493" v="18" actId="478"/>
+          <ac:spMkLst>
+            <pc:docMk/>
+            <pc:sldMk cId="2863434639" sldId="257"/>
+            <ac:spMk id="4" creationId="{5A20D689-77A8-52F4-7325-83D949F09F0C}"/>
+          </ac:spMkLst>
+        </pc:spChg>
+        <pc:spChg chg="del">
+          <ac:chgData name="Henry Vo" userId="c18cca123e130253" providerId="LiveId" clId="{CBED1F73-AEB6-48AF-B30C-D6CFC8A51246}" dt="2025-12-08T20:27:25.376" v="21" actId="478"/>
+          <ac:spMkLst>
+            <pc:docMk/>
+            <pc:sldMk cId="2863434639" sldId="257"/>
+            <ac:spMk id="5" creationId="{19030DF6-52D1-B41F-8312-3C6939F260A5}"/>
+          </ac:spMkLst>
+        </pc:spChg>
+        <pc:spChg chg="del">
+          <ac:chgData name="Henry Vo" userId="c18cca123e130253" providerId="LiveId" clId="{CBED1F73-AEB6-48AF-B30C-D6CFC8A51246}" dt="2025-12-08T20:27:24.888" v="20" actId="478"/>
+          <ac:spMkLst>
+            <pc:docMk/>
+            <pc:sldMk cId="2863434639" sldId="257"/>
+            <ac:spMk id="6" creationId="{D2B0638C-2EBE-8C48-1D48-4103BE46E1C7}"/>
+          </ac:spMkLst>
+        </pc:spChg>
+        <pc:spChg chg="del">
+          <ac:chgData name="Henry Vo" userId="c18cca123e130253" providerId="LiveId" clId="{CBED1F73-AEB6-48AF-B30C-D6CFC8A51246}" dt="2025-12-08T20:27:24.337" v="19" actId="478"/>
+          <ac:spMkLst>
+            <pc:docMk/>
+            <pc:sldMk cId="2863434639" sldId="257"/>
+            <ac:spMk id="7" creationId="{EC1CA0F9-683D-A436-EC70-F7C63BE8A5DD}"/>
+          </ac:spMkLst>
+        </pc:spChg>
+        <pc:spChg chg="del">
+          <ac:chgData name="Henry Vo" userId="c18cca123e130253" providerId="LiveId" clId="{CBED1F73-AEB6-48AF-B30C-D6CFC8A51246}" dt="2025-12-08T20:27:26.545" v="23" actId="478"/>
+          <ac:spMkLst>
+            <pc:docMk/>
+            <pc:sldMk cId="2863434639" sldId="257"/>
+            <ac:spMk id="8" creationId="{33DCD7A4-7C7D-C0BE-1DEE-F02AA39B44CF}"/>
+          </ac:spMkLst>
+        </pc:spChg>
+        <pc:spChg chg="del">
+          <ac:chgData name="Henry Vo" userId="c18cca123e130253" providerId="LiveId" clId="{CBED1F73-AEB6-48AF-B30C-D6CFC8A51246}" dt="2025-12-08T20:27:26.089" v="22" actId="478"/>
+          <ac:spMkLst>
+            <pc:docMk/>
+            <pc:sldMk cId="2863434639" sldId="257"/>
+            <ac:spMk id="9" creationId="{EC19C215-1F45-049C-7C19-54EA642891B0}"/>
+          </ac:spMkLst>
+        </pc:spChg>
+        <pc:spChg chg="add mod">
+          <ac:chgData name="Henry Vo" userId="c18cca123e130253" providerId="LiveId" clId="{CBED1F73-AEB6-48AF-B30C-D6CFC8A51246}" dt="2025-12-08T21:26:29.962" v="885" actId="1076"/>
+          <ac:spMkLst>
+            <pc:docMk/>
+            <pc:sldMk cId="2863434639" sldId="257"/>
+            <ac:spMk id="10" creationId="{9A195A27-4EA8-1721-3F96-BF7CA2341DA2}"/>
+          </ac:spMkLst>
+        </pc:spChg>
+        <pc:spChg chg="add mod">
+          <ac:chgData name="Henry Vo" userId="c18cca123e130253" providerId="LiveId" clId="{CBED1F73-AEB6-48AF-B30C-D6CFC8A51246}" dt="2025-12-08T21:26:34.628" v="886" actId="1076"/>
+          <ac:spMkLst>
+            <pc:docMk/>
+            <pc:sldMk cId="2863434639" sldId="257"/>
+            <ac:spMk id="14" creationId="{793DB77D-16B2-FCD6-9DDB-5501DFF05DC0}"/>
+          </ac:spMkLst>
+        </pc:spChg>
+        <pc:spChg chg="add del mod">
+          <ac:chgData name="Henry Vo" userId="c18cca123e130253" providerId="LiveId" clId="{CBED1F73-AEB6-48AF-B30C-D6CFC8A51246}" dt="2025-12-08T20:58:56.586" v="73" actId="478"/>
+          <ac:spMkLst>
+            <pc:docMk/>
+            <pc:sldMk cId="2863434639" sldId="257"/>
+            <ac:spMk id="16" creationId="{F67C8F97-F509-30A0-98F1-430AFE3B8DE8}"/>
+          </ac:spMkLst>
+        </pc:spChg>
+        <pc:spChg chg="add mod">
+          <ac:chgData name="Henry Vo" userId="c18cca123e130253" providerId="LiveId" clId="{CBED1F73-AEB6-48AF-B30C-D6CFC8A51246}" dt="2025-12-08T21:26:29.962" v="885" actId="1076"/>
+          <ac:spMkLst>
+            <pc:docMk/>
+            <pc:sldMk cId="2863434639" sldId="257"/>
+            <ac:spMk id="17" creationId="{4B69FF72-BFBE-406B-E11C-5713E52016B7}"/>
+          </ac:spMkLst>
+        </pc:spChg>
+        <pc:spChg chg="add mod">
+          <ac:chgData name="Henry Vo" userId="c18cca123e130253" providerId="LiveId" clId="{CBED1F73-AEB6-48AF-B30C-D6CFC8A51246}" dt="2025-12-08T21:26:34.628" v="886" actId="1076"/>
+          <ac:spMkLst>
+            <pc:docMk/>
+            <pc:sldMk cId="2863434639" sldId="257"/>
+            <ac:spMk id="19" creationId="{2D566DE3-CE67-B22D-1EBB-5C36BDD5B411}"/>
+          </ac:spMkLst>
+        </pc:spChg>
+        <pc:spChg chg="add mod">
+          <ac:chgData name="Henry Vo" userId="c18cca123e130253" providerId="LiveId" clId="{CBED1F73-AEB6-48AF-B30C-D6CFC8A51246}" dt="2025-12-08T21:26:29.962" v="885" actId="1076"/>
+          <ac:spMkLst>
+            <pc:docMk/>
+            <pc:sldMk cId="2863434639" sldId="257"/>
+            <ac:spMk id="21" creationId="{F6FDA69B-B0E0-68A4-6E3F-543C1D2F347F}"/>
+          </ac:spMkLst>
+        </pc:spChg>
+        <pc:spChg chg="add mod">
+          <ac:chgData name="Henry Vo" userId="c18cca123e130253" providerId="LiveId" clId="{CBED1F73-AEB6-48AF-B30C-D6CFC8A51246}" dt="2025-12-08T21:26:34.628" v="886" actId="1076"/>
+          <ac:spMkLst>
+            <pc:docMk/>
+            <pc:sldMk cId="2863434639" sldId="257"/>
+            <ac:spMk id="23" creationId="{35A26B54-C9CE-78D1-33AC-1545F78EA958}"/>
+          </ac:spMkLst>
+        </pc:spChg>
+        <pc:spChg chg="add mod">
+          <ac:chgData name="Henry Vo" userId="c18cca123e130253" providerId="LiveId" clId="{CBED1F73-AEB6-48AF-B30C-D6CFC8A51246}" dt="2025-12-08T21:26:34.628" v="886" actId="1076"/>
+          <ac:spMkLst>
+            <pc:docMk/>
+            <pc:sldMk cId="2863434639" sldId="257"/>
+            <ac:spMk id="30" creationId="{CA0EE695-7346-D7BB-09AE-D0B4E0130873}"/>
+          </ac:spMkLst>
+        </pc:spChg>
+        <pc:spChg chg="add mod">
+          <ac:chgData name="Henry Vo" userId="c18cca123e130253" providerId="LiveId" clId="{CBED1F73-AEB6-48AF-B30C-D6CFC8A51246}" dt="2025-12-08T21:26:44.864" v="887" actId="1076"/>
+          <ac:spMkLst>
+            <pc:docMk/>
+            <pc:sldMk cId="2863434639" sldId="257"/>
+            <ac:spMk id="31" creationId="{DC0E58CB-8570-1F30-D90F-97EA9E5FAFB8}"/>
+          </ac:spMkLst>
+        </pc:spChg>
+        <pc:cxnChg chg="add mod">
+          <ac:chgData name="Henry Vo" userId="c18cca123e130253" providerId="LiveId" clId="{CBED1F73-AEB6-48AF-B30C-D6CFC8A51246}" dt="2025-12-08T21:26:21.572" v="884" actId="12788"/>
+          <ac:cxnSpMkLst>
+            <pc:docMk/>
+            <pc:sldMk cId="2863434639" sldId="257"/>
+            <ac:cxnSpMk id="12" creationId="{9AD999DD-5D6B-BE84-042E-B8208BB54C88}"/>
+          </ac:cxnSpMkLst>
+        </pc:cxnChg>
+      </pc:sldChg>
+      <pc:sldChg chg="new">
+        <pc:chgData name="Henry Vo" userId="c18cca123e130253" providerId="LiveId" clId="{CBED1F73-AEB6-48AF-B30C-D6CFC8A51246}" dt="2025-12-08T21:54:05.681" v="888" actId="680"/>
+        <pc:sldMkLst>
+          <pc:docMk/>
+          <pc:sldMk cId="1201758319" sldId="258"/>
+        </pc:sldMkLst>
+      </pc:sldChg>
+    </pc:docChg>
+  </pc:docChgLst>
+</pc:chgInfo>
+</file>
+
+<file path=ppt/notesMasters/notesMaster1.xml><?xml version="1.0" encoding="utf-8"?>
+<p:notesMaster xmlns:a="http://schemas.openxmlformats.org/drawingml/2006/main" xmlns:r="http://schemas.openxmlformats.org/officeDocument/2006/relationships" xmlns:p="http://schemas.openxmlformats.org/presentationml/2006/main">
+  <p:cSld>
+    <p:bg>
+      <p:bgRef idx="1001">
+        <a:schemeClr val="bg1"/>
+      </p:bgRef>
+    </p:bg>
+    <p:spTree>
+      <p:nvGrpSpPr>
+        <p:cNvPr id="1" name=""/>
+        <p:cNvGrpSpPr/>
+        <p:nvPr/>
+      </p:nvGrpSpPr>
+      <p:grpSpPr>
+        <a:xfrm>
+          <a:off x="0" y="0"/>
+          <a:ext cx="0" cy="0"/>
+          <a:chOff x="0" y="0"/>
+          <a:chExt cx="0" cy="0"/>
+        </a:xfrm>
+      </p:grpSpPr>
+      <p:sp>
+        <p:nvSpPr>
+          <p:cNvPr id="2" name="Header Placeholder 1"/>
+          <p:cNvSpPr>
+            <a:spLocks noGrp="1"/>
+          </p:cNvSpPr>
+          <p:nvPr>
+            <p:ph type="hdr" sz="quarter"/>
+          </p:nvPr>
+        </p:nvSpPr>
+        <p:spPr>
+          <a:xfrm>
+            <a:off x="0" y="0"/>
+            <a:ext cx="2971800" cy="458788"/>
+          </a:xfrm>
+          <a:prstGeom prst="rect">
+            <a:avLst/>
+          </a:prstGeom>
+        </p:spPr>
+        <p:txBody>
+          <a:bodyPr vert="horz" lIns="91440" tIns="45720" rIns="91440" bIns="45720" rtlCol="0"/>
+          <a:lstStyle>
+            <a:lvl1pPr algn="l">
+              <a:defRPr sz="1200"/>
+            </a:lvl1pPr>
+          </a:lstStyle>
+          <a:p>
+            <a:endParaRPr lang="en-US"/>
+          </a:p>
+        </p:txBody>
+      </p:sp>
+      <p:sp>
+        <p:nvSpPr>
+          <p:cNvPr id="3" name="Date Placeholder 2"/>
+          <p:cNvSpPr>
+            <a:spLocks noGrp="1"/>
+          </p:cNvSpPr>
+          <p:nvPr>
+            <p:ph type="dt" idx="1"/>
+          </p:nvPr>
+        </p:nvSpPr>
+        <p:spPr>
+          <a:xfrm>
+            <a:off x="3884613" y="0"/>
+            <a:ext cx="2971800" cy="458788"/>
+          </a:xfrm>
+          <a:prstGeom prst="rect">
+            <a:avLst/>
+          </a:prstGeom>
+        </p:spPr>
+        <p:txBody>
+          <a:bodyPr vert="horz" lIns="91440" tIns="45720" rIns="91440" bIns="45720" rtlCol="0"/>
+          <a:lstStyle>
+            <a:lvl1pPr algn="r">
+              <a:defRPr sz="1200"/>
+            </a:lvl1pPr>
+          </a:lstStyle>
+          <a:p>
+            <a:fld id="{9C049790-B49D-4D8D-B628-59414A006FDF}" type="datetimeFigureOut">
+              <a:rPr lang="en-US" smtClean="0"/>
+              <a:t>12/8/2025</a:t>
+            </a:fld>
+            <a:endParaRPr lang="en-US"/>
+          </a:p>
+        </p:txBody>
+      </p:sp>
+      <p:sp>
+        <p:nvSpPr>
+          <p:cNvPr id="4" name="Slide Image Placeholder 3"/>
+          <p:cNvSpPr>
+            <a:spLocks noGrp="1" noRot="1" noChangeAspect="1"/>
+          </p:cNvSpPr>
+          <p:nvPr>
+            <p:ph type="sldImg" idx="2"/>
+          </p:nvPr>
+        </p:nvSpPr>
+        <p:spPr>
+          <a:xfrm>
+            <a:off x="685800" y="1143000"/>
+            <a:ext cx="5486400" cy="3086100"/>
+          </a:xfrm>
+          <a:prstGeom prst="rect">
+            <a:avLst/>
+          </a:prstGeom>
+          <a:noFill/>
+          <a:ln w="12700">
+            <a:solidFill>
+              <a:prstClr val="black"/>
+            </a:solidFill>
+          </a:ln>
+        </p:spPr>
+        <p:txBody>
+          <a:bodyPr vert="horz" lIns="91440" tIns="45720" rIns="91440" bIns="45720" rtlCol="0" anchor="ctr"/>
+          <a:lstStyle/>
+          <a:p>
+            <a:endParaRPr lang="en-US"/>
+          </a:p>
+        </p:txBody>
+      </p:sp>
+      <p:sp>
+        <p:nvSpPr>
+          <p:cNvPr id="5" name="Notes Placeholder 4"/>
+          <p:cNvSpPr>
+            <a:spLocks noGrp="1"/>
+          </p:cNvSpPr>
+          <p:nvPr>
+            <p:ph type="body" sz="quarter" idx="3"/>
+          </p:nvPr>
+        </p:nvSpPr>
+        <p:spPr>
+          <a:xfrm>
+            <a:off x="685800" y="4400550"/>
+            <a:ext cx="5486400" cy="3600450"/>
+          </a:xfrm>
+          <a:prstGeom prst="rect">
+            <a:avLst/>
+          </a:prstGeom>
+        </p:spPr>
+        <p:txBody>
+          <a:bodyPr vert="horz" lIns="91440" tIns="45720" rIns="91440" bIns="45720" rtlCol="0"/>
+          <a:lstStyle/>
+          <a:p>
+            <a:pPr lvl="0"/>
+            <a:r>
+              <a:rPr lang="en-US"/>
+              <a:t>Click to edit Master text styles</a:t>
+            </a:r>
+          </a:p>
+          <a:p>
+            <a:pPr lvl="1"/>
+            <a:r>
+              <a:rPr lang="en-US"/>
+              <a:t>Second level</a:t>
+            </a:r>
+          </a:p>
+          <a:p>
+            <a:pPr lvl="2"/>
+            <a:r>
+              <a:rPr lang="en-US"/>
+              <a:t>Third level</a:t>
+            </a:r>
+          </a:p>
+          <a:p>
+            <a:pPr lvl="3"/>
+            <a:r>
+              <a:rPr lang="en-US"/>
+              <a:t>Fourth level</a:t>
+            </a:r>
+          </a:p>
+          <a:p>
+            <a:pPr lvl="4"/>
+            <a:r>
+              <a:rPr lang="en-US"/>
+              <a:t>Fifth level</a:t>
+            </a:r>
+          </a:p>
+        </p:txBody>
+      </p:sp>
+      <p:sp>
+        <p:nvSpPr>
+          <p:cNvPr id="6" name="Footer Placeholder 5"/>
+          <p:cNvSpPr>
+            <a:spLocks noGrp="1"/>
+          </p:cNvSpPr>
+          <p:nvPr>
+            <p:ph type="ftr" sz="quarter" idx="4"/>
+          </p:nvPr>
+        </p:nvSpPr>
+        <p:spPr>
+          <a:xfrm>
+            <a:off x="0" y="8685213"/>
+            <a:ext cx="2971800" cy="458787"/>
+          </a:xfrm>
+          <a:prstGeom prst="rect">
+            <a:avLst/>
+          </a:prstGeom>
+        </p:spPr>
+        <p:txBody>
+          <a:bodyPr vert="horz" lIns="91440" tIns="45720" rIns="91440" bIns="45720" rtlCol="0" anchor="b"/>
+          <a:lstStyle>
+            <a:lvl1pPr algn="l">
+              <a:defRPr sz="1200"/>
+            </a:lvl1pPr>
+          </a:lstStyle>
+          <a:p>
+            <a:endParaRPr lang="en-US"/>
+          </a:p>
+        </p:txBody>
+      </p:sp>
+      <p:sp>
+        <p:nvSpPr>
+          <p:cNvPr id="7" name="Slide Number Placeholder 6"/>
+          <p:cNvSpPr>
+            <a:spLocks noGrp="1"/>
+          </p:cNvSpPr>
+          <p:nvPr>
+            <p:ph type="sldNum" sz="quarter" idx="5"/>
+          </p:nvPr>
+        </p:nvSpPr>
+        <p:spPr>
+          <a:xfrm>
+            <a:off x="3884613" y="8685213"/>
+            <a:ext cx="2971800" cy="458787"/>
+          </a:xfrm>
+          <a:prstGeom prst="rect">
+            <a:avLst/>
+          </a:prstGeom>
+        </p:spPr>
+        <p:txBody>
+          <a:bodyPr vert="horz" lIns="91440" tIns="45720" rIns="91440" bIns="45720" rtlCol="0" anchor="b"/>
+          <a:lstStyle>
+            <a:lvl1pPr algn="r">
+              <a:defRPr sz="1200"/>
+            </a:lvl1pPr>
+          </a:lstStyle>
+          <a:p>
+            <a:fld id="{1F6B6D16-8807-4B47-A511-DB6453DC6DDE}" type="slidenum">
+              <a:rPr lang="en-US" smtClean="0"/>
+              <a:t>‹#›</a:t>
+            </a:fld>
+            <a:endParaRPr lang="en-US"/>
+          </a:p>
+        </p:txBody>
+      </p:sp>
+    </p:spTree>
+    <p:extLst>
+      <p:ext uri="{BB962C8B-B14F-4D97-AF65-F5344CB8AC3E}">
+        <p14:creationId xmlns:p14="http://schemas.microsoft.com/office/powerpoint/2010/main" val="1463389292"/>
+      </p:ext>
+    </p:extLst>
+  </p:cSld>
+  <p:clrMap bg1="lt1" tx1="dk1" bg2="lt2" tx2="dk2" accent1="accent1" accent2="accent2" accent3="accent3" accent4="accent4" accent5="accent5" accent6="accent6" hlink="hlink" folHlink="folHlink"/>
+  <p:notesStyle>
+    <a:lvl1pPr marL="0" algn="l" defTabSz="914400" rtl="0" eaLnBrk="1" latinLnBrk="0" hangingPunct="1">
+      <a:defRPr sz="1200" kern="1200">
+        <a:solidFill>
+          <a:schemeClr val="tx1"/>
+        </a:solidFill>
+        <a:latin typeface="+mn-lt"/>
+        <a:ea typeface="+mn-ea"/>
+        <a:cs typeface="+mn-cs"/>
+      </a:defRPr>
+    </a:lvl1pPr>
+    <a:lvl2pPr marL="457200" algn="l" defTabSz="914400" rtl="0" eaLnBrk="1" latinLnBrk="0" hangingPunct="1">
+      <a:defRPr sz="1200" kern="1200">
+        <a:solidFill>
+          <a:schemeClr val="tx1"/>
+        </a:solidFill>
+        <a:latin typeface="+mn-lt"/>
+        <a:ea typeface="+mn-ea"/>
+        <a:cs typeface="+mn-cs"/>
+      </a:defRPr>
+    </a:lvl2pPr>
+    <a:lvl3pPr marL="914400" algn="l" defTabSz="914400" rtl="0" eaLnBrk="1" latinLnBrk="0" hangingPunct="1">
+      <a:defRPr sz="1200" kern="1200">
+        <a:solidFill>
+          <a:schemeClr val="tx1"/>
+        </a:solidFill>
+        <a:latin typeface="+mn-lt"/>
+        <a:ea typeface="+mn-ea"/>
+        <a:cs typeface="+mn-cs"/>
+      </a:defRPr>
+    </a:lvl3pPr>
+    <a:lvl4pPr marL="1371600" algn="l" defTabSz="914400" rtl="0" eaLnBrk="1" latinLnBrk="0" hangingPunct="1">
+      <a:defRPr sz="1200" kern="1200">
+        <a:solidFill>
+          <a:schemeClr val="tx1"/>
+        </a:solidFill>
+        <a:latin typeface="+mn-lt"/>
+        <a:ea typeface="+mn-ea"/>
+        <a:cs typeface="+mn-cs"/>
+      </a:defRPr>
+    </a:lvl4pPr>
+    <a:lvl5pPr marL="1828800" algn="l" defTabSz="914400" rtl="0" eaLnBrk="1" latinLnBrk="0" hangingPunct="1">
+      <a:defRPr sz="1200" kern="1200">
+        <a:solidFill>
+          <a:schemeClr val="tx1"/>
+        </a:solidFill>
+        <a:latin typeface="+mn-lt"/>
+        <a:ea typeface="+mn-ea"/>
+        <a:cs typeface="+mn-cs"/>
+      </a:defRPr>
+    </a:lvl5pPr>
+    <a:lvl6pPr marL="2286000" algn="l" defTabSz="914400" rtl="0" eaLnBrk="1" latinLnBrk="0" hangingPunct="1">
+      <a:defRPr sz="1200" kern="1200">
+        <a:solidFill>
+          <a:schemeClr val="tx1"/>
+        </a:solidFill>
+        <a:latin typeface="+mn-lt"/>
+        <a:ea typeface="+mn-ea"/>
+        <a:cs typeface="+mn-cs"/>
+      </a:defRPr>
+    </a:lvl6pPr>
+    <a:lvl7pPr marL="2743200" algn="l" defTabSz="914400" rtl="0" eaLnBrk="1" latinLnBrk="0" hangingPunct="1">
+      <a:defRPr sz="1200" kern="1200">
+        <a:solidFill>
+          <a:schemeClr val="tx1"/>
+        </a:solidFill>
+        <a:latin typeface="+mn-lt"/>
+        <a:ea typeface="+mn-ea"/>
+        <a:cs typeface="+mn-cs"/>
+      </a:defRPr>
+    </a:lvl7pPr>
+    <a:lvl8pPr marL="3200400" algn="l" defTabSz="914400" rtl="0" eaLnBrk="1" latinLnBrk="0" hangingPunct="1">
+      <a:defRPr sz="1200" kern="1200">
+        <a:solidFill>
+          <a:schemeClr val="tx1"/>
+        </a:solidFill>
+        <a:latin typeface="+mn-lt"/>
+        <a:ea typeface="+mn-ea"/>
+        <a:cs typeface="+mn-cs"/>
+      </a:defRPr>
+    </a:lvl8pPr>
+    <a:lvl9pPr marL="3657600" algn="l" defTabSz="914400" rtl="0" eaLnBrk="1" latinLnBrk="0" hangingPunct="1">
+      <a:defRPr sz="1200" kern="1200">
+        <a:solidFill>
+          <a:schemeClr val="tx1"/>
+        </a:solidFill>
+        <a:latin typeface="+mn-lt"/>
+        <a:ea typeface="+mn-ea"/>
+        <a:cs typeface="+mn-cs"/>
+      </a:defRPr>
+    </a:lvl9pPr>
+  </p:notesStyle>
+</p:notesMaster>
+</file>
+
+<file path=ppt/notesSlides/notesSlide1.xml><?xml version="1.0" encoding="utf-8"?>
+<p:notes xmlns:a="http://schemas.openxmlformats.org/drawingml/2006/main" xmlns:r="http://schemas.openxmlformats.org/officeDocument/2006/relationships" xmlns:p="http://schemas.openxmlformats.org/presentationml/2006/main">
+  <p:cSld>
+    <p:spTree>
+      <p:nvGrpSpPr>
+        <p:cNvPr id="1" name=""/>
+        <p:cNvGrpSpPr/>
+        <p:nvPr/>
+      </p:nvGrpSpPr>
+      <p:grpSpPr>
+        <a:xfrm>
+          <a:off x="0" y="0"/>
+          <a:ext cx="0" cy="0"/>
+          <a:chOff x="0" y="0"/>
+          <a:chExt cx="0" cy="0"/>
+        </a:xfrm>
+      </p:grpSpPr>
+      <p:sp>
+        <p:nvSpPr>
+          <p:cNvPr id="2" name="Slide Image Placeholder 1"/>
+          <p:cNvSpPr>
+            <a:spLocks noGrp="1" noRot="1" noChangeAspect="1"/>
+          </p:cNvSpPr>
+          <p:nvPr>
+            <p:ph type="sldImg"/>
+          </p:nvPr>
+        </p:nvSpPr>
+        <p:spPr/>
+      </p:sp>
+      <p:sp>
+        <p:nvSpPr>
+          <p:cNvPr id="3" name="Notes Placeholder 2"/>
+          <p:cNvSpPr>
+            <a:spLocks noGrp="1"/>
+          </p:cNvSpPr>
+          <p:nvPr>
+            <p:ph type="body" idx="1"/>
+          </p:nvPr>
+        </p:nvSpPr>
+        <p:spPr/>
+        <p:txBody>
+          <a:bodyPr/>
+          <a:lstStyle/>
+          <a:p>
+            <a:endParaRPr lang="en-US"/>
+          </a:p>
+        </p:txBody>
+      </p:sp>
+      <p:sp>
+        <p:nvSpPr>
+          <p:cNvPr id="4" name="Slide Number Placeholder 3"/>
+          <p:cNvSpPr>
+            <a:spLocks noGrp="1"/>
+          </p:cNvSpPr>
+          <p:nvPr>
+            <p:ph type="sldNum" sz="quarter" idx="5"/>
+          </p:nvPr>
+        </p:nvSpPr>
+        <p:spPr/>
+        <p:txBody>
+          <a:bodyPr/>
+          <a:lstStyle/>
+          <a:p>
+            <a:fld id="{1F6B6D16-8807-4B47-A511-DB6453DC6DDE}" type="slidenum">
+              <a:rPr lang="en-US" smtClean="0"/>
+              <a:t>2</a:t>
+            </a:fld>
+            <a:endParaRPr lang="en-US"/>
+          </a:p>
+        </p:txBody>
+      </p:sp>
+    </p:spTree>
+    <p:extLst>
+      <p:ext uri="{BB962C8B-B14F-4D97-AF65-F5344CB8AC3E}">
+        <p14:creationId xmlns:p14="http://schemas.microsoft.com/office/powerpoint/2010/main" val="1217006089"/>
+      </p:ext>
+    </p:extLst>
+  </p:cSld>
+  <p:clrMapOvr>
+    <a:masterClrMapping/>
+  </p:clrMapOvr>
+</p:notes>
 </file>
 
 <file path=ppt/slideLayouts/slideLayout1.xml><?xml version="1.0" encoding="utf-8"?>
@@ -275,6 +892,13 @@
               <a:schemeClr val="lt1"/>
             </a:fontRef>
           </p:style>
+          <p:txBody>
+            <a:bodyPr/>
+            <a:lstStyle/>
+            <a:p>
+              <a:endParaRPr lang="en-US"/>
+            </a:p>
+          </p:txBody>
         </p:sp>
         <p:sp>
           <p:nvSpPr>
@@ -338,6 +962,13 @@
               <a:schemeClr val="lt1"/>
             </a:fontRef>
           </p:style>
+          <p:txBody>
+            <a:bodyPr/>
+            <a:lstStyle/>
+            <a:p>
+              <a:endParaRPr lang="en-US"/>
+            </a:p>
+          </p:txBody>
         </p:sp>
         <p:sp>
           <p:nvSpPr>
@@ -379,6 +1010,13 @@
               <a:schemeClr val="lt1"/>
             </a:fontRef>
           </p:style>
+          <p:txBody>
+            <a:bodyPr/>
+            <a:lstStyle/>
+            <a:p>
+              <a:endParaRPr lang="en-US"/>
+            </a:p>
+          </p:txBody>
         </p:sp>
         <p:sp>
           <p:nvSpPr>
@@ -443,6 +1081,13 @@
               <a:schemeClr val="lt1"/>
             </a:fontRef>
           </p:style>
+          <p:txBody>
+            <a:bodyPr/>
+            <a:lstStyle/>
+            <a:p>
+              <a:endParaRPr lang="en-US"/>
+            </a:p>
+          </p:txBody>
         </p:sp>
         <p:sp>
           <p:nvSpPr>
@@ -508,6 +1153,13 @@
               <a:schemeClr val="lt1"/>
             </a:fontRef>
           </p:style>
+          <p:txBody>
+            <a:bodyPr/>
+            <a:lstStyle/>
+            <a:p>
+              <a:endParaRPr lang="en-US"/>
+            </a:p>
+          </p:txBody>
         </p:sp>
         <p:sp>
           <p:nvSpPr>
@@ -571,6 +1223,13 @@
               <a:schemeClr val="lt1"/>
             </a:fontRef>
           </p:style>
+          <p:txBody>
+            <a:bodyPr/>
+            <a:lstStyle/>
+            <a:p>
+              <a:endParaRPr lang="en-US"/>
+            </a:p>
+          </p:txBody>
         </p:sp>
         <p:sp>
           <p:nvSpPr>
@@ -612,6 +1271,13 @@
               <a:schemeClr val="lt1"/>
             </a:fontRef>
           </p:style>
+          <p:txBody>
+            <a:bodyPr/>
+            <a:lstStyle/>
+            <a:p>
+              <a:endParaRPr lang="en-US"/>
+            </a:p>
+          </p:txBody>
         </p:sp>
         <p:sp>
           <p:nvSpPr>
@@ -653,6 +1319,13 @@
               <a:schemeClr val="lt1"/>
             </a:fontRef>
           </p:style>
+          <p:txBody>
+            <a:bodyPr/>
+            <a:lstStyle/>
+            <a:p>
+              <a:endParaRPr lang="en-US"/>
+            </a:p>
+          </p:txBody>
         </p:sp>
       </p:grpSp>
       <p:sp>
@@ -689,7 +1362,6 @@
               <a:rPr lang="en-US"/>
               <a:t>Click to edit Master title style</a:t>
             </a:r>
-            <a:endParaRPr lang="en-US" dirty="0"/>
           </a:p>
         </p:txBody>
       </p:sp>
@@ -809,7 +1481,6 @@
               <a:rPr lang="en-US"/>
               <a:t>Click to edit Master subtitle style</a:t>
             </a:r>
-            <a:endParaRPr lang="en-US" dirty="0"/>
           </a:p>
         </p:txBody>
       </p:sp>
@@ -830,7 +1501,7 @@
           <a:p>
             <a:fld id="{74411A3F-4DB3-47ED-809A-CD27B21BFB64}" type="datetimeFigureOut">
               <a:rPr lang="en-US" smtClean="0"/>
-              <a:t>11/25/2025</a:t>
+              <a:t>12/8/2025</a:t>
             </a:fld>
             <a:endParaRPr lang="en-US"/>
           </a:p>
@@ -938,7 +1609,6 @@
               <a:rPr lang="en-US"/>
               <a:t>Click to edit Master title style</a:t>
             </a:r>
-            <a:endParaRPr lang="en-US" dirty="0"/>
           </a:p>
         </p:txBody>
       </p:sp>
@@ -1081,7 +1751,7 @@
           <a:p>
             <a:fld id="{74411A3F-4DB3-47ED-809A-CD27B21BFB64}" type="datetimeFigureOut">
               <a:rPr lang="en-US" smtClean="0"/>
-              <a:t>11/25/2025</a:t>
+              <a:t>12/8/2025</a:t>
             </a:fld>
             <a:endParaRPr lang="en-US"/>
           </a:p>
@@ -1189,7 +1859,6 @@
               <a:rPr lang="en-US"/>
               <a:t>Click to edit Master title style</a:t>
             </a:r>
-            <a:endParaRPr lang="en-US" dirty="0"/>
           </a:p>
         </p:txBody>
       </p:sp>
@@ -1395,7 +2064,7 @@
           <a:p>
             <a:fld id="{74411A3F-4DB3-47ED-809A-CD27B21BFB64}" type="datetimeFigureOut">
               <a:rPr lang="en-US" smtClean="0"/>
-              <a:t>11/25/2025</a:t>
+              <a:t>12/8/2025</a:t>
             </a:fld>
             <a:endParaRPr lang="en-US"/>
           </a:p>
@@ -1466,7 +2135,7 @@
           <a:p>
             <a:pPr lvl="0"/>
             <a:r>
-              <a:rPr lang="en-US" sz="8000" baseline="0" dirty="0">
+              <a:rPr lang="en-US" sz="8000" baseline="0">
                 <a:ln w="3175" cmpd="sng">
                   <a:noFill/>
                 </a:ln>
@@ -1507,7 +2176,7 @@
           <a:p>
             <a:pPr lvl="0"/>
             <a:r>
-              <a:rPr lang="en-US" sz="8000" baseline="0" dirty="0">
+              <a:rPr lang="en-US" sz="8000" baseline="0">
                 <a:ln w="3175" cmpd="sng">
                   <a:noFill/>
                 </a:ln>
@@ -1521,7 +2190,7 @@
               </a:rPr>
               <a:t>”</a:t>
             </a:r>
-            <a:endParaRPr lang="en-US" dirty="0">
+            <a:endParaRPr lang="en-US">
               <a:solidFill>
                 <a:schemeClr val="accent1">
                   <a:lumMod val="60000"/>
@@ -1593,7 +2262,6 @@
               <a:rPr lang="en-US"/>
               <a:t>Click to edit Master title style</a:t>
             </a:r>
-            <a:endParaRPr lang="en-US" dirty="0"/>
           </a:p>
         </p:txBody>
       </p:sp>
@@ -1736,7 +2404,7 @@
           <a:p>
             <a:fld id="{74411A3F-4DB3-47ED-809A-CD27B21BFB64}" type="datetimeFigureOut">
               <a:rPr lang="en-US" smtClean="0"/>
-              <a:t>11/25/2025</a:t>
+              <a:t>12/8/2025</a:t>
             </a:fld>
             <a:endParaRPr lang="en-US"/>
           </a:p>
@@ -1844,7 +2512,6 @@
               <a:rPr lang="en-US"/>
               <a:t>Click to edit Master title style</a:t>
             </a:r>
-            <a:endParaRPr lang="en-US" dirty="0"/>
           </a:p>
         </p:txBody>
       </p:sp>
@@ -2050,7 +2717,7 @@
           <a:p>
             <a:fld id="{74411A3F-4DB3-47ED-809A-CD27B21BFB64}" type="datetimeFigureOut">
               <a:rPr lang="en-US" smtClean="0"/>
-              <a:t>11/25/2025</a:t>
+              <a:t>12/8/2025</a:t>
             </a:fld>
             <a:endParaRPr lang="en-US"/>
           </a:p>
@@ -2121,7 +2788,7 @@
           <a:p>
             <a:pPr lvl="0"/>
             <a:r>
-              <a:rPr lang="en-US" sz="8000" baseline="0" dirty="0">
+              <a:rPr lang="en-US" sz="8000" baseline="0">
                 <a:ln w="3175" cmpd="sng">
                   <a:noFill/>
                 </a:ln>
@@ -2162,7 +2829,7 @@
           <a:p>
             <a:pPr lvl="0"/>
             <a:r>
-              <a:rPr lang="en-US" sz="8000" baseline="0" dirty="0">
+              <a:rPr lang="en-US" sz="8000" baseline="0">
                 <a:ln w="3175" cmpd="sng">
                   <a:noFill/>
                 </a:ln>
@@ -2240,7 +2907,6 @@
               <a:rPr lang="en-US"/>
               <a:t>Click to edit Master title style</a:t>
             </a:r>
-            <a:endParaRPr lang="en-US" dirty="0"/>
           </a:p>
         </p:txBody>
       </p:sp>
@@ -2443,7 +3109,7 @@
           <a:p>
             <a:fld id="{74411A3F-4DB3-47ED-809A-CD27B21BFB64}" type="datetimeFigureOut">
               <a:rPr lang="en-US" smtClean="0"/>
-              <a:t>11/25/2025</a:t>
+              <a:t>12/8/2025</a:t>
             </a:fld>
             <a:endParaRPr lang="en-US"/>
           </a:p>
@@ -2540,7 +3206,6 @@
               <a:rPr lang="en-US"/>
               <a:t>Click to edit Master title style</a:t>
             </a:r>
-            <a:endParaRPr lang="en-US" dirty="0"/>
           </a:p>
         </p:txBody>
       </p:sp>
@@ -2592,7 +3257,6 @@
               <a:rPr lang="en-US"/>
               <a:t>Fifth level</a:t>
             </a:r>
-            <a:endParaRPr lang="en-US" dirty="0"/>
           </a:p>
         </p:txBody>
       </p:sp>
@@ -2613,7 +3277,7 @@
           <a:p>
             <a:fld id="{74411A3F-4DB3-47ED-809A-CD27B21BFB64}" type="datetimeFigureOut">
               <a:rPr lang="en-US" smtClean="0"/>
-              <a:t>11/25/2025</a:t>
+              <a:t>12/8/2025</a:t>
             </a:fld>
             <a:endParaRPr lang="en-US"/>
           </a:p>
@@ -2715,7 +3379,6 @@
               <a:rPr lang="en-US"/>
               <a:t>Click to edit Master title style</a:t>
             </a:r>
-            <a:endParaRPr lang="en-US" dirty="0"/>
           </a:p>
         </p:txBody>
       </p:sp>
@@ -2772,7 +3435,6 @@
               <a:rPr lang="en-US"/>
               <a:t>Fifth level</a:t>
             </a:r>
-            <a:endParaRPr lang="en-US" dirty="0"/>
           </a:p>
         </p:txBody>
       </p:sp>
@@ -2793,7 +3455,7 @@
           <a:p>
             <a:fld id="{74411A3F-4DB3-47ED-809A-CD27B21BFB64}" type="datetimeFigureOut">
               <a:rPr lang="en-US" smtClean="0"/>
-              <a:t>11/25/2025</a:t>
+              <a:t>12/8/2025</a:t>
             </a:fld>
             <a:endParaRPr lang="en-US"/>
           </a:p>
@@ -2896,7 +3558,6 @@
               <a:rPr lang="en-US"/>
               <a:t>Click to edit Master title style</a:t>
             </a:r>
-            <a:endParaRPr lang="en-US" dirty="0"/>
           </a:p>
         </p:txBody>
       </p:sp>
@@ -2948,7 +3609,6 @@
               <a:rPr lang="en-US"/>
               <a:t>Fifth level</a:t>
             </a:r>
-            <a:endParaRPr lang="en-US" dirty="0"/>
           </a:p>
         </p:txBody>
       </p:sp>
@@ -2969,7 +3629,7 @@
           <a:p>
             <a:fld id="{74411A3F-4DB3-47ED-809A-CD27B21BFB64}" type="datetimeFigureOut">
               <a:rPr lang="en-US" smtClean="0"/>
-              <a:t>11/25/2025</a:t>
+              <a:t>12/8/2025</a:t>
             </a:fld>
             <a:endParaRPr lang="en-US"/>
           </a:p>
@@ -3075,7 +3735,6 @@
               <a:rPr lang="en-US"/>
               <a:t>Click to edit Master title style</a:t>
             </a:r>
-            <a:endParaRPr lang="en-US" dirty="0"/>
           </a:p>
         </p:txBody>
       </p:sp>
@@ -3216,7 +3875,7 @@
           <a:p>
             <a:fld id="{74411A3F-4DB3-47ED-809A-CD27B21BFB64}" type="datetimeFigureOut">
               <a:rPr lang="en-US" smtClean="0"/>
-              <a:t>11/25/2025</a:t>
+              <a:t>12/8/2025</a:t>
             </a:fld>
             <a:endParaRPr lang="en-US"/>
           </a:p>
@@ -3313,7 +3972,6 @@
               <a:rPr lang="en-US"/>
               <a:t>Click to edit Master title style</a:t>
             </a:r>
-            <a:endParaRPr lang="en-US" dirty="0"/>
           </a:p>
         </p:txBody>
       </p:sp>
@@ -3370,7 +4028,6 @@
               <a:rPr lang="en-US"/>
               <a:t>Fifth level</a:t>
             </a:r>
-            <a:endParaRPr lang="en-US" dirty="0"/>
           </a:p>
         </p:txBody>
       </p:sp>
@@ -3427,7 +4084,6 @@
               <a:rPr lang="en-US"/>
               <a:t>Fifth level</a:t>
             </a:r>
-            <a:endParaRPr lang="en-US" dirty="0"/>
           </a:p>
         </p:txBody>
       </p:sp>
@@ -3448,7 +4104,7 @@
           <a:p>
             <a:fld id="{74411A3F-4DB3-47ED-809A-CD27B21BFB64}" type="datetimeFigureOut">
               <a:rPr lang="en-US" smtClean="0"/>
-              <a:t>11/25/2025</a:t>
+              <a:t>12/8/2025</a:t>
             </a:fld>
             <a:endParaRPr lang="en-US"/>
           </a:p>
@@ -3549,7 +4205,6 @@
               <a:rPr lang="en-US"/>
               <a:t>Click to edit Master title style</a:t>
             </a:r>
-            <a:endParaRPr lang="en-US" dirty="0"/>
           </a:p>
         </p:txBody>
       </p:sp>
@@ -3675,7 +4330,6 @@
               <a:rPr lang="en-US"/>
               <a:t>Fifth level</a:t>
             </a:r>
-            <a:endParaRPr lang="en-US" dirty="0"/>
           </a:p>
         </p:txBody>
       </p:sp>
@@ -3801,7 +4455,6 @@
               <a:rPr lang="en-US"/>
               <a:t>Fifth level</a:t>
             </a:r>
-            <a:endParaRPr lang="en-US" dirty="0"/>
           </a:p>
         </p:txBody>
       </p:sp>
@@ -3822,7 +4475,7 @@
           <a:p>
             <a:fld id="{74411A3F-4DB3-47ED-809A-CD27B21BFB64}" type="datetimeFigureOut">
               <a:rPr lang="en-US" smtClean="0"/>
-              <a:t>11/25/2025</a:t>
+              <a:t>12/8/2025</a:t>
             </a:fld>
             <a:endParaRPr lang="en-US"/>
           </a:p>
@@ -3924,7 +4577,6 @@
               <a:rPr lang="en-US"/>
               <a:t>Click to edit Master title style</a:t>
             </a:r>
-            <a:endParaRPr lang="en-US" dirty="0"/>
           </a:p>
         </p:txBody>
       </p:sp>
@@ -3945,7 +4597,7 @@
           <a:p>
             <a:fld id="{74411A3F-4DB3-47ED-809A-CD27B21BFB64}" type="datetimeFigureOut">
               <a:rPr lang="en-US" smtClean="0"/>
-              <a:t>11/25/2025</a:t>
+              <a:t>12/8/2025</a:t>
             </a:fld>
             <a:endParaRPr lang="en-US"/>
           </a:p>
@@ -4040,7 +4692,7 @@
           <a:p>
             <a:fld id="{74411A3F-4DB3-47ED-809A-CD27B21BFB64}" type="datetimeFigureOut">
               <a:rPr lang="en-US" smtClean="0"/>
-              <a:t>11/25/2025</a:t>
+              <a:t>12/8/2025</a:t>
             </a:fld>
             <a:endParaRPr lang="en-US"/>
           </a:p>
@@ -4148,7 +4800,6 @@
               <a:rPr lang="en-US"/>
               <a:t>Click to edit Master title style</a:t>
             </a:r>
-            <a:endParaRPr lang="en-US" dirty="0"/>
           </a:p>
         </p:txBody>
       </p:sp>
@@ -4207,7 +4858,6 @@
               <a:rPr lang="en-US"/>
               <a:t>Fifth level</a:t>
             </a:r>
-            <a:endParaRPr lang="en-US" dirty="0"/>
           </a:p>
         </p:txBody>
       </p:sp>
@@ -4295,7 +4945,7 @@
           <a:p>
             <a:fld id="{74411A3F-4DB3-47ED-809A-CD27B21BFB64}" type="datetimeFigureOut">
               <a:rPr lang="en-US" smtClean="0"/>
-              <a:t>11/25/2025</a:t>
+              <a:t>12/8/2025</a:t>
             </a:fld>
             <a:endParaRPr lang="en-US"/>
           </a:p>
@@ -4403,7 +5053,6 @@
               <a:rPr lang="en-US"/>
               <a:t>Click to edit Master title style</a:t>
             </a:r>
-            <a:endParaRPr lang="en-US" dirty="0"/>
           </a:p>
         </p:txBody>
       </p:sp>
@@ -4470,7 +5119,6 @@
               <a:rPr lang="en-US"/>
               <a:t>Click icon to add picture</a:t>
             </a:r>
-            <a:endParaRPr lang="en-US" dirty="0"/>
           </a:p>
         </p:txBody>
       </p:sp>
@@ -4558,7 +5206,7 @@
           <a:p>
             <a:fld id="{74411A3F-4DB3-47ED-809A-CD27B21BFB64}" type="datetimeFigureOut">
               <a:rPr lang="en-US" smtClean="0"/>
-              <a:t>11/25/2025</a:t>
+              <a:t>12/8/2025</a:t>
             </a:fld>
             <a:endParaRPr lang="en-US"/>
           </a:p>
@@ -4791,6 +5439,13 @@
               <a:schemeClr val="lt1"/>
             </a:fontRef>
           </p:style>
+          <p:txBody>
+            <a:bodyPr/>
+            <a:lstStyle/>
+            <a:p>
+              <a:endParaRPr lang="en-US"/>
+            </a:p>
+          </p:txBody>
         </p:sp>
         <p:sp>
           <p:nvSpPr>
@@ -4854,6 +5509,13 @@
               <a:schemeClr val="lt1"/>
             </a:fontRef>
           </p:style>
+          <p:txBody>
+            <a:bodyPr/>
+            <a:lstStyle/>
+            <a:p>
+              <a:endParaRPr lang="en-US"/>
+            </a:p>
+          </p:txBody>
         </p:sp>
         <p:sp>
           <p:nvSpPr>
@@ -4895,6 +5557,13 @@
               <a:schemeClr val="lt1"/>
             </a:fontRef>
           </p:style>
+          <p:txBody>
+            <a:bodyPr/>
+            <a:lstStyle/>
+            <a:p>
+              <a:endParaRPr lang="en-US"/>
+            </a:p>
+          </p:txBody>
         </p:sp>
         <p:sp>
           <p:nvSpPr>
@@ -4959,6 +5628,13 @@
               <a:schemeClr val="lt1"/>
             </a:fontRef>
           </p:style>
+          <p:txBody>
+            <a:bodyPr/>
+            <a:lstStyle/>
+            <a:p>
+              <a:endParaRPr lang="en-US"/>
+            </a:p>
+          </p:txBody>
         </p:sp>
         <p:sp>
           <p:nvSpPr>
@@ -5024,6 +5700,13 @@
               <a:schemeClr val="lt1"/>
             </a:fontRef>
           </p:style>
+          <p:txBody>
+            <a:bodyPr/>
+            <a:lstStyle/>
+            <a:p>
+              <a:endParaRPr lang="en-US"/>
+            </a:p>
+          </p:txBody>
         </p:sp>
         <p:sp>
           <p:nvSpPr>
@@ -5087,6 +5770,13 @@
               <a:schemeClr val="lt1"/>
             </a:fontRef>
           </p:style>
+          <p:txBody>
+            <a:bodyPr/>
+            <a:lstStyle/>
+            <a:p>
+              <a:endParaRPr lang="en-US"/>
+            </a:p>
+          </p:txBody>
         </p:sp>
         <p:sp>
           <p:nvSpPr>
@@ -5128,6 +5818,13 @@
               <a:schemeClr val="lt1"/>
             </a:fontRef>
           </p:style>
+          <p:txBody>
+            <a:bodyPr/>
+            <a:lstStyle/>
+            <a:p>
+              <a:endParaRPr lang="en-US"/>
+            </a:p>
+          </p:txBody>
         </p:sp>
         <p:sp>
           <p:nvSpPr>
@@ -5169,6 +5866,13 @@
               <a:schemeClr val="lt1"/>
             </a:fontRef>
           </p:style>
+          <p:txBody>
+            <a:bodyPr/>
+            <a:lstStyle/>
+            <a:p>
+              <a:endParaRPr lang="en-US"/>
+            </a:p>
+          </p:txBody>
         </p:sp>
       </p:grpSp>
       <p:sp>
@@ -5200,7 +5904,6 @@
               <a:rPr lang="en-US"/>
               <a:t>Click to edit Master title style</a:t>
             </a:r>
-            <a:endParaRPr lang="en-US" dirty="0"/>
           </a:p>
         </p:txBody>
       </p:sp>
@@ -5262,7 +5965,6 @@
               <a:rPr lang="en-US"/>
               <a:t>Fifth level</a:t>
             </a:r>
-            <a:endParaRPr lang="en-US" dirty="0"/>
           </a:p>
         </p:txBody>
       </p:sp>
@@ -5301,7 +6003,7 @@
           <a:p>
             <a:fld id="{74411A3F-4DB3-47ED-809A-CD27B21BFB64}" type="datetimeFigureOut">
               <a:rPr lang="en-US" smtClean="0"/>
-              <a:t>11/25/2025</a:t>
+              <a:t>12/8/2025</a:t>
             </a:fld>
             <a:endParaRPr lang="en-US"/>
           </a:p>
@@ -5853,7 +6555,7 @@
           <a:p>
             <a:pPr algn="ctr"/>
             <a:r>
-              <a:rPr lang="en-US" dirty="0"/>
+              <a:rPr lang="en-US"/>
               <a:t>Customer Retention Analysis</a:t>
             </a:r>
           </a:p>
@@ -5918,18 +6620,18 @@
           <a:lstStyle/>
           <a:p>
             <a:r>
-              <a:rPr lang="en-US" dirty="0"/>
-              <a:t>Customer Overview</a:t>
-            </a:r>
-          </a:p>
-        </p:txBody>
-      </p:sp>
-      <p:sp>
-        <p:nvSpPr>
-          <p:cNvPr id="4" name="TextBox 3">
+              <a:rPr lang="en-US"/>
+              <a:t>Business Context</a:t>
+            </a:r>
+          </a:p>
+        </p:txBody>
+      </p:sp>
+      <p:sp>
+        <p:nvSpPr>
+          <p:cNvPr id="3" name="TextBox 2">
             <a:extLst>
               <a:ext uri="{FF2B5EF4-FFF2-40B4-BE49-F238E27FC236}">
-                <a16:creationId xmlns:a16="http://schemas.microsoft.com/office/drawing/2014/main" id="{5A20D689-77A8-52F4-7325-83D949F09F0C}"/>
+                <a16:creationId xmlns:a16="http://schemas.microsoft.com/office/drawing/2014/main" id="{919C429F-5C2B-3714-7281-3EDE68F7C32D}"/>
               </a:ext>
             </a:extLst>
           </p:cNvPr>
@@ -5938,8 +6640,8 @@
         </p:nvSpPr>
         <p:spPr>
           <a:xfrm>
-            <a:off x="1318752" y="1036123"/>
-            <a:ext cx="2079523" cy="822960"/>
+            <a:off x="2598778" y="1240684"/>
+            <a:ext cx="2786340" cy="461665"/>
           </a:xfrm>
           <a:prstGeom prst="rect">
             <a:avLst/>
@@ -5947,29 +6649,24 @@
           <a:noFill/>
         </p:spPr>
         <p:txBody>
-          <a:bodyPr wrap="square" rtlCol="0">
+          <a:bodyPr wrap="none" rtlCol="0">
             <a:spAutoFit/>
           </a:bodyPr>
           <a:lstStyle/>
           <a:p>
-            <a:pPr algn="ctr"/>
-            <a:r>
-              <a:rPr lang="en-US" sz="2800" dirty="0"/>
-              <a:t>Total Customers</a:t>
-            </a:r>
-          </a:p>
-          <a:p>
-            <a:pPr algn="ctr"/>
-            <a:endParaRPr lang="en-US" sz="2800" dirty="0"/>
-          </a:p>
-        </p:txBody>
-      </p:sp>
-      <p:sp>
-        <p:nvSpPr>
-          <p:cNvPr id="5" name="TextBox 4">
+            <a:r>
+              <a:rPr lang="en-US" sz="2400" b="1"/>
+              <a:t>Repeat Customers</a:t>
+            </a:r>
+          </a:p>
+        </p:txBody>
+      </p:sp>
+      <p:sp>
+        <p:nvSpPr>
+          <p:cNvPr id="10" name="TextBox 9">
             <a:extLst>
               <a:ext uri="{FF2B5EF4-FFF2-40B4-BE49-F238E27FC236}">
-                <a16:creationId xmlns:a16="http://schemas.microsoft.com/office/drawing/2014/main" id="{19030DF6-52D1-B41F-8312-3C6939F260A5}"/>
+                <a16:creationId xmlns:a16="http://schemas.microsoft.com/office/drawing/2014/main" id="{9A195A27-4EA8-1721-3F96-BF7CA2341DA2}"/>
               </a:ext>
             </a:extLst>
           </p:cNvPr>
@@ -5978,8 +6675,8 @@
         </p:nvSpPr>
         <p:spPr>
           <a:xfrm>
-            <a:off x="1885466" y="1923911"/>
-            <a:ext cx="946093" cy="461665"/>
+            <a:off x="7138131" y="1243049"/>
+            <a:ext cx="2641877" cy="461665"/>
           </a:xfrm>
           <a:prstGeom prst="rect">
             <a:avLst/>
@@ -5993,18 +6690,57 @@
           <a:lstStyle/>
           <a:p>
             <a:r>
-              <a:rPr lang="en-US" sz="2400" dirty="0"/>
-              <a:t>4,339</a:t>
-            </a:r>
-          </a:p>
-        </p:txBody>
-      </p:sp>
-      <p:sp>
-        <p:nvSpPr>
-          <p:cNvPr id="6" name="TextBox 5">
+              <a:rPr lang="en-US" sz="2400" b="1"/>
+              <a:t>One-Time Buyers</a:t>
+            </a:r>
+          </a:p>
+        </p:txBody>
+      </p:sp>
+      <p:cxnSp>
+        <p:nvCxnSpPr>
+          <p:cNvPr id="12" name="Straight Connector 11">
             <a:extLst>
               <a:ext uri="{FF2B5EF4-FFF2-40B4-BE49-F238E27FC236}">
-                <a16:creationId xmlns:a16="http://schemas.microsoft.com/office/drawing/2014/main" id="{D2B0638C-2EBE-8C48-1D48-4103BE46E1C7}"/>
+                <a16:creationId xmlns:a16="http://schemas.microsoft.com/office/drawing/2014/main" id="{9AD999DD-5D6B-BE84-042E-B8208BB54C88}"/>
+              </a:ext>
+            </a:extLst>
+          </p:cNvPr>
+          <p:cNvCxnSpPr>
+            <a:cxnSpLocks/>
+          </p:cNvCxnSpPr>
+          <p:nvPr/>
+        </p:nvCxnSpPr>
+        <p:spPr>
+          <a:xfrm>
+            <a:off x="6096000" y="1205075"/>
+            <a:ext cx="0" cy="3124673"/>
+          </a:xfrm>
+          <a:prstGeom prst="line">
+            <a:avLst/>
+          </a:prstGeom>
+          <a:ln w="28575"/>
+        </p:spPr>
+        <p:style>
+          <a:lnRef idx="1">
+            <a:schemeClr val="accent1"/>
+          </a:lnRef>
+          <a:fillRef idx="0">
+            <a:schemeClr val="accent1"/>
+          </a:fillRef>
+          <a:effectRef idx="0">
+            <a:schemeClr val="accent1"/>
+          </a:effectRef>
+          <a:fontRef idx="minor">
+            <a:schemeClr val="tx1"/>
+          </a:fontRef>
+        </p:style>
+      </p:cxnSp>
+      <p:sp>
+        <p:nvSpPr>
+          <p:cNvPr id="14" name="TextBox 13">
+            <a:extLst>
+              <a:ext uri="{FF2B5EF4-FFF2-40B4-BE49-F238E27FC236}">
+                <a16:creationId xmlns:a16="http://schemas.microsoft.com/office/drawing/2014/main" id="{793DB77D-16B2-FCD6-9DDB-5501DFF05DC0}"/>
               </a:ext>
             </a:extLst>
           </p:cNvPr>
@@ -6013,8 +6749,8 @@
         </p:nvSpPr>
         <p:spPr>
           <a:xfrm>
-            <a:off x="4845276" y="1935463"/>
-            <a:ext cx="2162236" cy="461665"/>
+            <a:off x="3561944" y="2952948"/>
+            <a:ext cx="860008" cy="338554"/>
           </a:xfrm>
           <a:prstGeom prst="rect">
             <a:avLst/>
@@ -6022,24 +6758,24 @@
           <a:noFill/>
         </p:spPr>
         <p:txBody>
-          <a:bodyPr wrap="square" rtlCol="0">
+          <a:bodyPr wrap="square">
             <a:spAutoFit/>
           </a:bodyPr>
           <a:lstStyle/>
           <a:p>
             <a:r>
-              <a:rPr lang="en-US" sz="2400" dirty="0"/>
-              <a:t>$9,584,624.04</a:t>
-            </a:r>
-          </a:p>
-        </p:txBody>
-      </p:sp>
-      <p:sp>
-        <p:nvSpPr>
-          <p:cNvPr id="7" name="TextBox 6">
+              <a:rPr lang="en-US" sz="1600" b="1"/>
+              <a:t>$8.4M</a:t>
+            </a:r>
+          </a:p>
+        </p:txBody>
+      </p:sp>
+      <p:sp>
+        <p:nvSpPr>
+          <p:cNvPr id="17" name="TextBox 16">
             <a:extLst>
               <a:ext uri="{FF2B5EF4-FFF2-40B4-BE49-F238E27FC236}">
-                <a16:creationId xmlns:a16="http://schemas.microsoft.com/office/drawing/2014/main" id="{EC1CA0F9-683D-A436-EC70-F7C63BE8A5DD}"/>
+                <a16:creationId xmlns:a16="http://schemas.microsoft.com/office/drawing/2014/main" id="{4B69FF72-BFBE-406B-E11C-5713E52016B7}"/>
               </a:ext>
             </a:extLst>
           </p:cNvPr>
@@ -6048,8 +6784,8 @@
         </p:nvSpPr>
         <p:spPr>
           <a:xfrm>
-            <a:off x="4717027" y="1185993"/>
-            <a:ext cx="2418735" cy="523220"/>
+            <a:off x="7770049" y="2952948"/>
+            <a:ext cx="879674" cy="338554"/>
           </a:xfrm>
           <a:prstGeom prst="rect">
             <a:avLst/>
@@ -6057,25 +6793,24 @@
           <a:noFill/>
         </p:spPr>
         <p:txBody>
-          <a:bodyPr wrap="square" rtlCol="0">
+          <a:bodyPr wrap="square">
             <a:spAutoFit/>
           </a:bodyPr>
           <a:lstStyle/>
           <a:p>
-            <a:pPr algn="ctr"/>
-            <a:r>
-              <a:rPr lang="en-US" sz="2800" dirty="0"/>
-              <a:t>Total Revenue</a:t>
-            </a:r>
-          </a:p>
-        </p:txBody>
-      </p:sp>
-      <p:sp>
-        <p:nvSpPr>
-          <p:cNvPr id="8" name="TextBox 7">
+            <a:r>
+              <a:rPr lang="en-US" sz="1600" b="1"/>
+              <a:t>$600K</a:t>
+            </a:r>
+          </a:p>
+        </p:txBody>
+      </p:sp>
+      <p:sp>
+        <p:nvSpPr>
+          <p:cNvPr id="19" name="TextBox 18">
             <a:extLst>
               <a:ext uri="{FF2B5EF4-FFF2-40B4-BE49-F238E27FC236}">
-                <a16:creationId xmlns:a16="http://schemas.microsoft.com/office/drawing/2014/main" id="{33DCD7A4-7C7D-C0BE-1DEE-F02AA39B44CF}"/>
+                <a16:creationId xmlns:a16="http://schemas.microsoft.com/office/drawing/2014/main" id="{2D566DE3-CE67-B22D-1EBB-5C36BDD5B411}"/>
               </a:ext>
             </a:extLst>
           </p:cNvPr>
@@ -6084,8 +6819,8 @@
         </p:nvSpPr>
         <p:spPr>
           <a:xfrm>
-            <a:off x="9109883" y="1935463"/>
-            <a:ext cx="1107996" cy="461665"/>
+            <a:off x="3683738" y="3840029"/>
+            <a:ext cx="738214" cy="338554"/>
           </a:xfrm>
           <a:prstGeom prst="rect">
             <a:avLst/>
@@ -6093,24 +6828,24 @@
           <a:noFill/>
         </p:spPr>
         <p:txBody>
-          <a:bodyPr wrap="none" rtlCol="0">
+          <a:bodyPr wrap="square">
             <a:spAutoFit/>
           </a:bodyPr>
           <a:lstStyle/>
           <a:p>
             <a:r>
-              <a:rPr lang="en-US" sz="2400" dirty="0"/>
-              <a:t>$23.00</a:t>
-            </a:r>
-          </a:p>
-        </p:txBody>
-      </p:sp>
-      <p:sp>
-        <p:nvSpPr>
-          <p:cNvPr id="9" name="TextBox 8">
+              <a:rPr lang="en-US" sz="1600"/>
+              <a:t>2845</a:t>
+            </a:r>
+          </a:p>
+        </p:txBody>
+      </p:sp>
+      <p:sp>
+        <p:nvSpPr>
+          <p:cNvPr id="21" name="TextBox 20">
             <a:extLst>
               <a:ext uri="{FF2B5EF4-FFF2-40B4-BE49-F238E27FC236}">
-                <a16:creationId xmlns:a16="http://schemas.microsoft.com/office/drawing/2014/main" id="{EC19C215-1F45-049C-7C19-54EA642891B0}"/>
+                <a16:creationId xmlns:a16="http://schemas.microsoft.com/office/drawing/2014/main" id="{F6FDA69B-B0E0-68A4-6E3F-543C1D2F347F}"/>
               </a:ext>
             </a:extLst>
           </p:cNvPr>
@@ -6119,8 +6854,8 @@
         </p:nvSpPr>
         <p:spPr>
           <a:xfrm>
-            <a:off x="8454514" y="970550"/>
-            <a:ext cx="2418735" cy="954107"/>
+            <a:off x="7852237" y="3842394"/>
+            <a:ext cx="715297" cy="338554"/>
           </a:xfrm>
           <a:prstGeom prst="rect">
             <a:avLst/>
@@ -6128,6 +6863,111 @@
           <a:noFill/>
         </p:spPr>
         <p:txBody>
+          <a:bodyPr wrap="square">
+            <a:spAutoFit/>
+          </a:bodyPr>
+          <a:lstStyle/>
+          <a:p>
+            <a:r>
+              <a:rPr lang="en-US" sz="1600"/>
+              <a:t>1494</a:t>
+            </a:r>
+          </a:p>
+        </p:txBody>
+      </p:sp>
+      <p:sp>
+        <p:nvSpPr>
+          <p:cNvPr id="23" name="TextBox 22">
+            <a:extLst>
+              <a:ext uri="{FF2B5EF4-FFF2-40B4-BE49-F238E27FC236}">
+                <a16:creationId xmlns:a16="http://schemas.microsoft.com/office/drawing/2014/main" id="{35A26B54-C9CE-78D1-33AC-1545F78EA958}"/>
+              </a:ext>
+            </a:extLst>
+          </p:cNvPr>
+          <p:cNvSpPr txBox="1"/>
+          <p:nvPr/>
+        </p:nvSpPr>
+        <p:spPr>
+          <a:xfrm>
+            <a:off x="1635612" y="2973139"/>
+            <a:ext cx="1226120" cy="369332"/>
+          </a:xfrm>
+          <a:prstGeom prst="rect">
+            <a:avLst/>
+          </a:prstGeom>
+          <a:noFill/>
+        </p:spPr>
+        <p:txBody>
+          <a:bodyPr wrap="square">
+            <a:spAutoFit/>
+          </a:bodyPr>
+          <a:lstStyle/>
+          <a:p>
+            <a:r>
+              <a:rPr lang="en-US" b="1"/>
+              <a:t>Revenue</a:t>
+            </a:r>
+          </a:p>
+        </p:txBody>
+      </p:sp>
+      <p:sp>
+        <p:nvSpPr>
+          <p:cNvPr id="30" name="TextBox 29">
+            <a:extLst>
+              <a:ext uri="{FF2B5EF4-FFF2-40B4-BE49-F238E27FC236}">
+                <a16:creationId xmlns:a16="http://schemas.microsoft.com/office/drawing/2014/main" id="{CA0EE695-7346-D7BB-09AE-D0B4E0130873}"/>
+              </a:ext>
+            </a:extLst>
+          </p:cNvPr>
+          <p:cNvSpPr txBox="1"/>
+          <p:nvPr/>
+        </p:nvSpPr>
+        <p:spPr>
+          <a:xfrm>
+            <a:off x="1508538" y="3686140"/>
+            <a:ext cx="1584298" cy="646331"/>
+          </a:xfrm>
+          <a:prstGeom prst="rect">
+            <a:avLst/>
+          </a:prstGeom>
+          <a:noFill/>
+        </p:spPr>
+        <p:txBody>
+          <a:bodyPr wrap="square">
+            <a:spAutoFit/>
+          </a:bodyPr>
+          <a:lstStyle/>
+          <a:p>
+            <a:r>
+              <a:rPr lang="en-US" b="1"/>
+              <a:t> Number of Customers</a:t>
+            </a:r>
+          </a:p>
+        </p:txBody>
+      </p:sp>
+      <p:sp>
+        <p:nvSpPr>
+          <p:cNvPr id="31" name="TextBox 30">
+            <a:extLst>
+              <a:ext uri="{FF2B5EF4-FFF2-40B4-BE49-F238E27FC236}">
+                <a16:creationId xmlns:a16="http://schemas.microsoft.com/office/drawing/2014/main" id="{DC0E58CB-8570-1F30-D90F-97EA9E5FAFB8}"/>
+              </a:ext>
+            </a:extLst>
+          </p:cNvPr>
+          <p:cNvSpPr txBox="1"/>
+          <p:nvPr/>
+        </p:nvSpPr>
+        <p:spPr>
+          <a:xfrm>
+            <a:off x="1003413" y="4821928"/>
+            <a:ext cx="10185174" cy="830997"/>
+          </a:xfrm>
+          <a:prstGeom prst="rect">
+            <a:avLst/>
+          </a:prstGeom>
+          <a:noFill/>
+        </p:spPr>
+        <p:txBody>
           <a:bodyPr wrap="square" rtlCol="0">
             <a:spAutoFit/>
           </a:bodyPr>
@@ -6135,8 +6975,8 @@
           <a:p>
             <a:pPr algn="ctr"/>
             <a:r>
-              <a:rPr lang="en-US" sz="2800" dirty="0"/>
-              <a:t>Avg Revenue Per Order</a:t>
+              <a:rPr lang="en-US" sz="2400"/>
+              <a:t>Repeat Customers generate 93% of revenue, making retention a crucial driver of business growth</a:t>
             </a:r>
           </a:p>
         </p:txBody>
@@ -6145,6 +6985,86 @@
     <p:extLst>
       <p:ext uri="{BB962C8B-B14F-4D97-AF65-F5344CB8AC3E}">
         <p14:creationId xmlns:p14="http://schemas.microsoft.com/office/powerpoint/2010/main" val="2863434639"/>
+      </p:ext>
+    </p:extLst>
+  </p:cSld>
+  <p:clrMapOvr>
+    <a:masterClrMapping/>
+  </p:clrMapOvr>
+</p:sld>
+</file>
+
+<file path=ppt/slides/slide3.xml><?xml version="1.0" encoding="utf-8"?>
+<p:sld xmlns:a="http://schemas.openxmlformats.org/drawingml/2006/main" xmlns:r="http://schemas.openxmlformats.org/officeDocument/2006/relationships" xmlns:p="http://schemas.openxmlformats.org/presentationml/2006/main">
+  <p:cSld>
+    <p:spTree>
+      <p:nvGrpSpPr>
+        <p:cNvPr id="1" name=""/>
+        <p:cNvGrpSpPr/>
+        <p:nvPr/>
+      </p:nvGrpSpPr>
+      <p:grpSpPr>
+        <a:xfrm>
+          <a:off x="0" y="0"/>
+          <a:ext cx="0" cy="0"/>
+          <a:chOff x="0" y="0"/>
+          <a:chExt cx="0" cy="0"/>
+        </a:xfrm>
+      </p:grpSpPr>
+      <p:sp>
+        <p:nvSpPr>
+          <p:cNvPr id="2" name="Title 1">
+            <a:extLst>
+              <a:ext uri="{FF2B5EF4-FFF2-40B4-BE49-F238E27FC236}">
+                <a16:creationId xmlns:a16="http://schemas.microsoft.com/office/drawing/2014/main" id="{1B15FACE-2255-138A-5949-69A528584C32}"/>
+              </a:ext>
+            </a:extLst>
+          </p:cNvPr>
+          <p:cNvSpPr>
+            <a:spLocks noGrp="1"/>
+          </p:cNvSpPr>
+          <p:nvPr>
+            <p:ph type="title"/>
+          </p:nvPr>
+        </p:nvSpPr>
+        <p:spPr/>
+        <p:txBody>
+          <a:bodyPr/>
+          <a:lstStyle/>
+          <a:p>
+            <a:endParaRPr lang="en-US"/>
+          </a:p>
+        </p:txBody>
+      </p:sp>
+      <p:sp>
+        <p:nvSpPr>
+          <p:cNvPr id="3" name="Content Placeholder 2">
+            <a:extLst>
+              <a:ext uri="{FF2B5EF4-FFF2-40B4-BE49-F238E27FC236}">
+                <a16:creationId xmlns:a16="http://schemas.microsoft.com/office/drawing/2014/main" id="{CC14CC32-C534-49C6-FCB1-378613075213}"/>
+              </a:ext>
+            </a:extLst>
+          </p:cNvPr>
+          <p:cNvSpPr>
+            <a:spLocks noGrp="1"/>
+          </p:cNvSpPr>
+          <p:nvPr>
+            <p:ph idx="1"/>
+          </p:nvPr>
+        </p:nvSpPr>
+        <p:spPr/>
+        <p:txBody>
+          <a:bodyPr/>
+          <a:lstStyle/>
+          <a:p>
+            <a:endParaRPr lang="en-US"/>
+          </a:p>
+        </p:txBody>
+      </p:sp>
+    </p:spTree>
+    <p:extLst>
+      <p:ext uri="{BB962C8B-B14F-4D97-AF65-F5344CB8AC3E}">
+        <p14:creationId xmlns:p14="http://schemas.microsoft.com/office/powerpoint/2010/main" val="1201758319"/>
       </p:ext>
     </p:extLst>
   </p:cSld>
@@ -6409,4 +7329,319 @@
     </a:ext>
   </a:extLst>
 </a:theme>
+</file>
+
+<file path=ppt/theme/theme2.xml><?xml version="1.0" encoding="utf-8"?>
+<a:theme xmlns:a="http://schemas.openxmlformats.org/drawingml/2006/main" name="Office Theme">
+  <a:themeElements>
+    <a:clrScheme name="Office">
+      <a:dk1>
+        <a:sysClr val="windowText" lastClr="000000"/>
+      </a:dk1>
+      <a:lt1>
+        <a:sysClr val="window" lastClr="FFFFFF"/>
+      </a:lt1>
+      <a:dk2>
+        <a:srgbClr val="0E2841"/>
+      </a:dk2>
+      <a:lt2>
+        <a:srgbClr val="E8E8E8"/>
+      </a:lt2>
+      <a:accent1>
+        <a:srgbClr val="156082"/>
+      </a:accent1>
+      <a:accent2>
+        <a:srgbClr val="E97132"/>
+      </a:accent2>
+      <a:accent3>
+        <a:srgbClr val="196B24"/>
+      </a:accent3>
+      <a:accent4>
+        <a:srgbClr val="0F9ED5"/>
+      </a:accent4>
+      <a:accent5>
+        <a:srgbClr val="A02B93"/>
+      </a:accent5>
+      <a:accent6>
+        <a:srgbClr val="4EA72E"/>
+      </a:accent6>
+      <a:hlink>
+        <a:srgbClr val="467886"/>
+      </a:hlink>
+      <a:folHlink>
+        <a:srgbClr val="96607D"/>
+      </a:folHlink>
+    </a:clrScheme>
+    <a:fontScheme name="Office">
+      <a:majorFont>
+        <a:latin typeface="Aptos Display" panose="02110004020202020204"/>
+        <a:ea typeface=""/>
+        <a:cs typeface=""/>
+        <a:font script="Jpan" typeface="游ゴシック Light"/>
+        <a:font script="Hang" typeface="맑은 고딕"/>
+        <a:font script="Hans" typeface="等线 Light"/>
+        <a:font script="Hant" typeface="新細明體"/>
+        <a:font script="Arab" typeface="Times New Roman"/>
+        <a:font script="Hebr" typeface="Times New Roman"/>
+        <a:font script="Thai" typeface="Angsana New"/>
+        <a:font script="Ethi" typeface="Nyala"/>
+        <a:font script="Beng" typeface="Vrinda"/>
+        <a:font script="Gujr" typeface="Shruti"/>
+        <a:font script="Khmr" typeface="MoolBoran"/>
+        <a:font script="Knda" typeface="Tunga"/>
+        <a:font script="Guru" typeface="Raavi"/>
+        <a:font script="Cans" typeface="Euphemia"/>
+        <a:font script="Cher" typeface="Plantagenet Cherokee"/>
+        <a:font script="Yiii" typeface="Microsoft Yi Baiti"/>
+        <a:font script="Tibt" typeface="Microsoft Himalaya"/>
+        <a:font script="Thaa" typeface="MV Boli"/>
+        <a:font script="Deva" typeface="Mangal"/>
+        <a:font script="Telu" typeface="Gautami"/>
+        <a:font script="Taml" typeface="Latha"/>
+        <a:font script="Syrc" typeface="Estrangelo Edessa"/>
+        <a:font script="Orya" typeface="Kalinga"/>
+        <a:font script="Mlym" typeface="Kartika"/>
+        <a:font script="Laoo" typeface="DokChampa"/>
+        <a:font script="Sinh" typeface="Iskoola Pota"/>
+        <a:font script="Mong" typeface="Mongolian Baiti"/>
+        <a:font script="Viet" typeface="Times New Roman"/>
+        <a:font script="Uigh" typeface="Microsoft Uighur"/>
+        <a:font script="Geor" typeface="Sylfaen"/>
+        <a:font script="Armn" typeface="Arial"/>
+        <a:font script="Bugi" typeface="Leelawadee UI"/>
+        <a:font script="Bopo" typeface="Microsoft JhengHei"/>
+        <a:font script="Java" typeface="Javanese Text"/>
+        <a:font script="Lisu" typeface="Segoe UI"/>
+        <a:font script="Mymr" typeface="Myanmar Text"/>
+        <a:font script="Nkoo" typeface="Ebrima"/>
+        <a:font script="Olck" typeface="Nirmala UI"/>
+        <a:font script="Osma" typeface="Ebrima"/>
+        <a:font script="Phag" typeface="Phagspa"/>
+        <a:font script="Syrn" typeface="Estrangelo Edessa"/>
+        <a:font script="Syrj" typeface="Estrangelo Edessa"/>
+        <a:font script="Syre" typeface="Estrangelo Edessa"/>
+        <a:font script="Sora" typeface="Nirmala UI"/>
+        <a:font script="Tale" typeface="Microsoft Tai Le"/>
+        <a:font script="Talu" typeface="Microsoft New Tai Lue"/>
+        <a:font script="Tfng" typeface="Ebrima"/>
+      </a:majorFont>
+      <a:minorFont>
+        <a:latin typeface="Aptos" panose="02110004020202020204"/>
+        <a:ea typeface=""/>
+        <a:cs typeface=""/>
+        <a:font script="Jpan" typeface="游ゴシック"/>
+        <a:font script="Hang" typeface="맑은 고딕"/>
+        <a:font script="Hans" typeface="等线"/>
+        <a:font script="Hant" typeface="新細明體"/>
+        <a:font script="Arab" typeface="Arial"/>
+        <a:font script="Hebr" typeface="Arial"/>
+        <a:font script="Thai" typeface="Cordia New"/>
+        <a:font script="Ethi" typeface="Nyala"/>
+        <a:font script="Beng" typeface="Vrinda"/>
+        <a:font script="Gujr" typeface="Shruti"/>
+        <a:font script="Khmr" typeface="DaunPenh"/>
+        <a:font script="Knda" typeface="Tunga"/>
+        <a:font script="Guru" typeface="Raavi"/>
+        <a:font script="Cans" typeface="Euphemia"/>
+        <a:font script="Cher" typeface="Plantagenet Cherokee"/>
+        <a:font script="Yiii" typeface="Microsoft Yi Baiti"/>
+        <a:font script="Tibt" typeface="Microsoft Himalaya"/>
+        <a:font script="Thaa" typeface="MV Boli"/>
+        <a:font script="Deva" typeface="Mangal"/>
+        <a:font script="Telu" typeface="Gautami"/>
+        <a:font script="Taml" typeface="Latha"/>
+        <a:font script="Syrc" typeface="Estrangelo Edessa"/>
+        <a:font script="Orya" typeface="Kalinga"/>
+        <a:font script="Mlym" typeface="Kartika"/>
+        <a:font script="Laoo" typeface="DokChampa"/>
+        <a:font script="Sinh" typeface="Iskoola Pota"/>
+        <a:font script="Mong" typeface="Mongolian Baiti"/>
+        <a:font script="Viet" typeface="Arial"/>
+        <a:font script="Uigh" typeface="Microsoft Uighur"/>
+        <a:font script="Geor" typeface="Sylfaen"/>
+        <a:font script="Armn" typeface="Arial"/>
+        <a:font script="Bugi" typeface="Leelawadee UI"/>
+        <a:font script="Bopo" typeface="Microsoft JhengHei"/>
+        <a:font script="Java" typeface="Javanese Text"/>
+        <a:font script="Lisu" typeface="Segoe UI"/>
+        <a:font script="Mymr" typeface="Myanmar Text"/>
+        <a:font script="Nkoo" typeface="Ebrima"/>
+        <a:font script="Olck" typeface="Nirmala UI"/>
+        <a:font script="Osma" typeface="Ebrima"/>
+        <a:font script="Phag" typeface="Phagspa"/>
+        <a:font script="Syrn" typeface="Estrangelo Edessa"/>
+        <a:font script="Syrj" typeface="Estrangelo Edessa"/>
+        <a:font script="Syre" typeface="Estrangelo Edessa"/>
+        <a:font script="Sora" typeface="Nirmala UI"/>
+        <a:font script="Tale" typeface="Microsoft Tai Le"/>
+        <a:font script="Talu" typeface="Microsoft New Tai Lue"/>
+        <a:font script="Tfng" typeface="Ebrima"/>
+      </a:minorFont>
+    </a:fontScheme>
+    <a:fmtScheme name="Office">
+      <a:fillStyleLst>
+        <a:solidFill>
+          <a:schemeClr val="phClr"/>
+        </a:solidFill>
+        <a:gradFill rotWithShape="1">
+          <a:gsLst>
+            <a:gs pos="0">
+              <a:schemeClr val="phClr">
+                <a:lumMod val="110000"/>
+                <a:satMod val="105000"/>
+                <a:tint val="67000"/>
+              </a:schemeClr>
+            </a:gs>
+            <a:gs pos="50000">
+              <a:schemeClr val="phClr">
+                <a:lumMod val="105000"/>
+                <a:satMod val="103000"/>
+                <a:tint val="73000"/>
+              </a:schemeClr>
+            </a:gs>
+            <a:gs pos="100000">
+              <a:schemeClr val="phClr">
+                <a:lumMod val="105000"/>
+                <a:satMod val="109000"/>
+                <a:tint val="81000"/>
+              </a:schemeClr>
+            </a:gs>
+          </a:gsLst>
+          <a:lin ang="5400000" scaled="0"/>
+        </a:gradFill>
+        <a:gradFill rotWithShape="1">
+          <a:gsLst>
+            <a:gs pos="0">
+              <a:schemeClr val="phClr">
+                <a:satMod val="103000"/>
+                <a:lumMod val="102000"/>
+                <a:tint val="94000"/>
+              </a:schemeClr>
+            </a:gs>
+            <a:gs pos="50000">
+              <a:schemeClr val="phClr">
+                <a:satMod val="110000"/>
+                <a:lumMod val="100000"/>
+                <a:shade val="100000"/>
+              </a:schemeClr>
+            </a:gs>
+            <a:gs pos="100000">
+              <a:schemeClr val="phClr">
+                <a:lumMod val="99000"/>
+                <a:satMod val="120000"/>
+                <a:shade val="78000"/>
+              </a:schemeClr>
+            </a:gs>
+          </a:gsLst>
+          <a:lin ang="5400000" scaled="0"/>
+        </a:gradFill>
+      </a:fillStyleLst>
+      <a:lnStyleLst>
+        <a:ln w="12700" cap="flat" cmpd="sng" algn="ctr">
+          <a:solidFill>
+            <a:schemeClr val="phClr"/>
+          </a:solidFill>
+          <a:prstDash val="solid"/>
+          <a:miter lim="800000"/>
+        </a:ln>
+        <a:ln w="19050" cap="flat" cmpd="sng" algn="ctr">
+          <a:solidFill>
+            <a:schemeClr val="phClr"/>
+          </a:solidFill>
+          <a:prstDash val="solid"/>
+          <a:miter lim="800000"/>
+        </a:ln>
+        <a:ln w="25400" cap="flat" cmpd="sng" algn="ctr">
+          <a:solidFill>
+            <a:schemeClr val="phClr"/>
+          </a:solidFill>
+          <a:prstDash val="solid"/>
+          <a:miter lim="800000"/>
+        </a:ln>
+      </a:lnStyleLst>
+      <a:effectStyleLst>
+        <a:effectStyle>
+          <a:effectLst/>
+        </a:effectStyle>
+        <a:effectStyle>
+          <a:effectLst/>
+        </a:effectStyle>
+        <a:effectStyle>
+          <a:effectLst>
+            <a:outerShdw blurRad="57150" dist="19050" dir="5400000" algn="ctr" rotWithShape="0">
+              <a:srgbClr val="000000">
+                <a:alpha val="63000"/>
+              </a:srgbClr>
+            </a:outerShdw>
+          </a:effectLst>
+        </a:effectStyle>
+      </a:effectStyleLst>
+      <a:bgFillStyleLst>
+        <a:solidFill>
+          <a:schemeClr val="phClr"/>
+        </a:solidFill>
+        <a:solidFill>
+          <a:schemeClr val="phClr">
+            <a:tint val="95000"/>
+            <a:satMod val="170000"/>
+          </a:schemeClr>
+        </a:solidFill>
+        <a:gradFill rotWithShape="1">
+          <a:gsLst>
+            <a:gs pos="0">
+              <a:schemeClr val="phClr">
+                <a:tint val="93000"/>
+                <a:satMod val="150000"/>
+                <a:shade val="98000"/>
+                <a:lumMod val="102000"/>
+              </a:schemeClr>
+            </a:gs>
+            <a:gs pos="50000">
+              <a:schemeClr val="phClr">
+                <a:tint val="98000"/>
+                <a:satMod val="130000"/>
+                <a:shade val="90000"/>
+                <a:lumMod val="103000"/>
+              </a:schemeClr>
+            </a:gs>
+            <a:gs pos="100000">
+              <a:schemeClr val="phClr">
+                <a:shade val="63000"/>
+                <a:satMod val="120000"/>
+              </a:schemeClr>
+            </a:gs>
+          </a:gsLst>
+          <a:lin ang="5400000" scaled="0"/>
+        </a:gradFill>
+      </a:bgFillStyleLst>
+    </a:fmtScheme>
+  </a:themeElements>
+  <a:objectDefaults>
+    <a:lnDef>
+      <a:spPr/>
+      <a:bodyPr/>
+      <a:lstStyle/>
+      <a:style>
+        <a:lnRef idx="2">
+          <a:schemeClr val="accent1"/>
+        </a:lnRef>
+        <a:fillRef idx="0">
+          <a:schemeClr val="accent1"/>
+        </a:fillRef>
+        <a:effectRef idx="1">
+          <a:schemeClr val="accent1"/>
+        </a:effectRef>
+        <a:fontRef idx="minor">
+          <a:schemeClr val="tx1"/>
+        </a:fontRef>
+      </a:style>
+    </a:lnDef>
+  </a:objectDefaults>
+  <a:extraClrSchemeLst/>
+  <a:extLst>
+    <a:ext uri="{05A4C25C-085E-4340-85A3-A5531E510DB2}">
+      <thm15:themeFamily xmlns:thm15="http://schemas.microsoft.com/office/thememl/2012/main" name="Office Theme" id="{2E142A2C-CD16-42D6-873A-C26D2A0506FA}" vid="{1BDDFF52-6CD6-40A5-AB3C-68EB2F1E4D0A}"/>
+    </a:ext>
+  </a:extLst>
+</a:theme>
 </file>
--- a/Customer Retention Analysis.pptx
+++ b/Customer Retention Analysis.pptx
@@ -5,12 +5,15 @@
     <p:sldMasterId id="2147483660" r:id="rId1"/>
   </p:sldMasterIdLst>
   <p:notesMasterIdLst>
-    <p:notesMasterId r:id="rId5"/>
+    <p:notesMasterId r:id="rId8"/>
   </p:notesMasterIdLst>
   <p:sldIdLst>
     <p:sldId id="256" r:id="rId2"/>
     <p:sldId id="257" r:id="rId3"/>
     <p:sldId id="258" r:id="rId4"/>
+    <p:sldId id="259" r:id="rId5"/>
+    <p:sldId id="260" r:id="rId6"/>
+    <p:sldId id="261" r:id="rId7"/>
   </p:sldIdLst>
   <p:sldSz cx="12192000" cy="6858000"/>
   <p:notesSz cx="6858000" cy="9144000"/>
@@ -109,13 +112,18 @@
       </a:defRPr>
     </a:lvl9pPr>
   </p:defaultTextStyle>
+  <p:extLst>
+    <p:ext uri="{EFAFB233-063F-42B5-8137-9DF3F51BA10A}">
+      <p15:sldGuideLst xmlns:p15="http://schemas.microsoft.com/office/powerpoint/2012/main"/>
+    </p:ext>
+  </p:extLst>
 </p:presentation>
 </file>
 
 <file path=ppt/revisionInfo.xml><?xml version="1.0" encoding="utf-8"?>
 <p1510:revInfo xmlns:a="http://schemas.openxmlformats.org/drawingml/2006/main" xmlns:r="http://schemas.openxmlformats.org/officeDocument/2006/relationships" xmlns:p1510="http://schemas.microsoft.com/office/powerpoint/2015/10/main">
   <p1510:revLst>
-    <p1510:client id="{708AB096-502C-4CC0-9240-ACA9084E787F}" v="864" dt="2025-12-08T21:26:44.864"/>
+    <p1510:client id="{708AB096-502C-4CC0-9240-ACA9084E787F}" v="2722" dt="2025-12-14T06:01:05.040"/>
   </p1510:revLst>
 </p1510:revInfo>
 </file>
@@ -125,138 +133,97 @@
   <pc:docChgLst>
     <pc:chgData name="Henry Vo" userId="c18cca123e130253" providerId="LiveId" clId="{CBED1F73-AEB6-48AF-B30C-D6CFC8A51246}"/>
     <pc:docChg chg="undo custSel addSld modSld">
-      <pc:chgData name="Henry Vo" userId="c18cca123e130253" providerId="LiveId" clId="{CBED1F73-AEB6-48AF-B30C-D6CFC8A51246}" dt="2025-12-08T21:54:05.681" v="888" actId="680"/>
+      <pc:chgData name="Henry Vo" userId="c18cca123e130253" providerId="LiveId" clId="{CBED1F73-AEB6-48AF-B30C-D6CFC8A51246}" dt="2025-12-14T06:01:11.482" v="3630" actId="20577"/>
       <pc:docMkLst>
         <pc:docMk/>
       </pc:docMkLst>
+      <pc:sldChg chg="modSp mod">
+        <pc:chgData name="Henry Vo" userId="c18cca123e130253" providerId="LiveId" clId="{CBED1F73-AEB6-48AF-B30C-D6CFC8A51246}" dt="2025-12-09T03:58:31.185" v="1029"/>
+        <pc:sldMkLst>
+          <pc:docMk/>
+          <pc:sldMk cId="1747761490" sldId="256"/>
+        </pc:sldMkLst>
+        <pc:spChg chg="mod">
+          <ac:chgData name="Henry Vo" userId="c18cca123e130253" providerId="LiveId" clId="{CBED1F73-AEB6-48AF-B30C-D6CFC8A51246}" dt="2025-12-09T03:58:31.185" v="1029"/>
+          <ac:spMkLst>
+            <pc:docMk/>
+            <pc:sldMk cId="1747761490" sldId="256"/>
+            <ac:spMk id="2" creationId="{63B1AEAF-7047-3489-8B51-E909FA6B81B0}"/>
+          </ac:spMkLst>
+        </pc:spChg>
+      </pc:sldChg>
       <pc:sldChg chg="addSp delSp modSp mod">
-        <pc:chgData name="Henry Vo" userId="c18cca123e130253" providerId="LiveId" clId="{CBED1F73-AEB6-48AF-B30C-D6CFC8A51246}" dt="2025-12-08T21:26:44.864" v="887" actId="1076"/>
+        <pc:chgData name="Henry Vo" userId="c18cca123e130253" providerId="LiveId" clId="{CBED1F73-AEB6-48AF-B30C-D6CFC8A51246}" dt="2025-12-09T04:07:19.297" v="1935" actId="14100"/>
         <pc:sldMkLst>
           <pc:docMk/>
           <pc:sldMk cId="2863434639" sldId="257"/>
         </pc:sldMkLst>
         <pc:spChg chg="mod">
-          <ac:chgData name="Henry Vo" userId="c18cca123e130253" providerId="LiveId" clId="{CBED1F73-AEB6-48AF-B30C-D6CFC8A51246}" dt="2025-12-08T20:27:21.560" v="17" actId="20577"/>
+          <ac:chgData name="Henry Vo" userId="c18cca123e130253" providerId="LiveId" clId="{CBED1F73-AEB6-48AF-B30C-D6CFC8A51246}" dt="2025-12-09T04:07:19.297" v="1935" actId="14100"/>
           <ac:spMkLst>
             <pc:docMk/>
             <pc:sldMk cId="2863434639" sldId="257"/>
             <ac:spMk id="2" creationId="{D9D8056B-9063-E968-A1F3-E1824812A22F}"/>
           </ac:spMkLst>
         </pc:spChg>
-        <pc:spChg chg="add mod">
-          <ac:chgData name="Henry Vo" userId="c18cca123e130253" providerId="LiveId" clId="{CBED1F73-AEB6-48AF-B30C-D6CFC8A51246}" dt="2025-12-08T21:26:34.628" v="886" actId="1076"/>
+        <pc:spChg chg="add mod topLvl">
+          <ac:chgData name="Henry Vo" userId="c18cca123e130253" providerId="LiveId" clId="{CBED1F73-AEB6-48AF-B30C-D6CFC8A51246}" dt="2025-12-09T03:57:38.751" v="1007" actId="122"/>
           <ac:spMkLst>
             <pc:docMk/>
             <pc:sldMk cId="2863434639" sldId="257"/>
             <ac:spMk id="3" creationId="{919C429F-5C2B-3714-7281-3EDE68F7C32D}"/>
           </ac:spMkLst>
         </pc:spChg>
-        <pc:spChg chg="del">
-          <ac:chgData name="Henry Vo" userId="c18cca123e130253" providerId="LiveId" clId="{CBED1F73-AEB6-48AF-B30C-D6CFC8A51246}" dt="2025-12-08T20:27:23.493" v="18" actId="478"/>
-          <ac:spMkLst>
-            <pc:docMk/>
-            <pc:sldMk cId="2863434639" sldId="257"/>
-            <ac:spMk id="4" creationId="{5A20D689-77A8-52F4-7325-83D949F09F0C}"/>
-          </ac:spMkLst>
-        </pc:spChg>
-        <pc:spChg chg="del">
-          <ac:chgData name="Henry Vo" userId="c18cca123e130253" providerId="LiveId" clId="{CBED1F73-AEB6-48AF-B30C-D6CFC8A51246}" dt="2025-12-08T20:27:25.376" v="21" actId="478"/>
-          <ac:spMkLst>
-            <pc:docMk/>
-            <pc:sldMk cId="2863434639" sldId="257"/>
-            <ac:spMk id="5" creationId="{19030DF6-52D1-B41F-8312-3C6939F260A5}"/>
-          </ac:spMkLst>
-        </pc:spChg>
-        <pc:spChg chg="del">
-          <ac:chgData name="Henry Vo" userId="c18cca123e130253" providerId="LiveId" clId="{CBED1F73-AEB6-48AF-B30C-D6CFC8A51246}" dt="2025-12-08T20:27:24.888" v="20" actId="478"/>
-          <ac:spMkLst>
-            <pc:docMk/>
-            <pc:sldMk cId="2863434639" sldId="257"/>
-            <ac:spMk id="6" creationId="{D2B0638C-2EBE-8C48-1D48-4103BE46E1C7}"/>
-          </ac:spMkLst>
-        </pc:spChg>
-        <pc:spChg chg="del">
-          <ac:chgData name="Henry Vo" userId="c18cca123e130253" providerId="LiveId" clId="{CBED1F73-AEB6-48AF-B30C-D6CFC8A51246}" dt="2025-12-08T20:27:24.337" v="19" actId="478"/>
-          <ac:spMkLst>
-            <pc:docMk/>
-            <pc:sldMk cId="2863434639" sldId="257"/>
-            <ac:spMk id="7" creationId="{EC1CA0F9-683D-A436-EC70-F7C63BE8A5DD}"/>
-          </ac:spMkLst>
-        </pc:spChg>
-        <pc:spChg chg="del">
-          <ac:chgData name="Henry Vo" userId="c18cca123e130253" providerId="LiveId" clId="{CBED1F73-AEB6-48AF-B30C-D6CFC8A51246}" dt="2025-12-08T20:27:26.545" v="23" actId="478"/>
-          <ac:spMkLst>
-            <pc:docMk/>
-            <pc:sldMk cId="2863434639" sldId="257"/>
-            <ac:spMk id="8" creationId="{33DCD7A4-7C7D-C0BE-1DEE-F02AA39B44CF}"/>
-          </ac:spMkLst>
-        </pc:spChg>
-        <pc:spChg chg="del">
-          <ac:chgData name="Henry Vo" userId="c18cca123e130253" providerId="LiveId" clId="{CBED1F73-AEB6-48AF-B30C-D6CFC8A51246}" dt="2025-12-08T20:27:26.089" v="22" actId="478"/>
-          <ac:spMkLst>
-            <pc:docMk/>
-            <pc:sldMk cId="2863434639" sldId="257"/>
-            <ac:spMk id="9" creationId="{EC19C215-1F45-049C-7C19-54EA642891B0}"/>
-          </ac:spMkLst>
-        </pc:spChg>
-        <pc:spChg chg="add mod">
-          <ac:chgData name="Henry Vo" userId="c18cca123e130253" providerId="LiveId" clId="{CBED1F73-AEB6-48AF-B30C-D6CFC8A51246}" dt="2025-12-08T21:26:29.962" v="885" actId="1076"/>
+        <pc:spChg chg="add mod topLvl">
+          <ac:chgData name="Henry Vo" userId="c18cca123e130253" providerId="LiveId" clId="{CBED1F73-AEB6-48AF-B30C-D6CFC8A51246}" dt="2025-12-09T03:57:02.103" v="996" actId="164"/>
           <ac:spMkLst>
             <pc:docMk/>
             <pc:sldMk cId="2863434639" sldId="257"/>
             <ac:spMk id="10" creationId="{9A195A27-4EA8-1721-3F96-BF7CA2341DA2}"/>
           </ac:spMkLst>
         </pc:spChg>
-        <pc:spChg chg="add mod">
-          <ac:chgData name="Henry Vo" userId="c18cca123e130253" providerId="LiveId" clId="{CBED1F73-AEB6-48AF-B30C-D6CFC8A51246}" dt="2025-12-08T21:26:34.628" v="886" actId="1076"/>
+        <pc:spChg chg="add mod topLvl">
+          <ac:chgData name="Henry Vo" userId="c18cca123e130253" providerId="LiveId" clId="{CBED1F73-AEB6-48AF-B30C-D6CFC8A51246}" dt="2025-12-09T03:57:37.070" v="1006" actId="14100"/>
           <ac:spMkLst>
             <pc:docMk/>
             <pc:sldMk cId="2863434639" sldId="257"/>
             <ac:spMk id="14" creationId="{793DB77D-16B2-FCD6-9DDB-5501DFF05DC0}"/>
           </ac:spMkLst>
         </pc:spChg>
-        <pc:spChg chg="add del mod">
-          <ac:chgData name="Henry Vo" userId="c18cca123e130253" providerId="LiveId" clId="{CBED1F73-AEB6-48AF-B30C-D6CFC8A51246}" dt="2025-12-08T20:58:56.586" v="73" actId="478"/>
-          <ac:spMkLst>
-            <pc:docMk/>
-            <pc:sldMk cId="2863434639" sldId="257"/>
-            <ac:spMk id="16" creationId="{F67C8F97-F509-30A0-98F1-430AFE3B8DE8}"/>
-          </ac:spMkLst>
-        </pc:spChg>
-        <pc:spChg chg="add mod">
-          <ac:chgData name="Henry Vo" userId="c18cca123e130253" providerId="LiveId" clId="{CBED1F73-AEB6-48AF-B30C-D6CFC8A51246}" dt="2025-12-08T21:26:29.962" v="885" actId="1076"/>
+        <pc:spChg chg="add mod topLvl">
+          <ac:chgData name="Henry Vo" userId="c18cca123e130253" providerId="LiveId" clId="{CBED1F73-AEB6-48AF-B30C-D6CFC8A51246}" dt="2025-12-09T03:57:10.083" v="999" actId="14100"/>
           <ac:spMkLst>
             <pc:docMk/>
             <pc:sldMk cId="2863434639" sldId="257"/>
             <ac:spMk id="17" creationId="{4B69FF72-BFBE-406B-E11C-5713E52016B7}"/>
           </ac:spMkLst>
         </pc:spChg>
-        <pc:spChg chg="add mod">
-          <ac:chgData name="Henry Vo" userId="c18cca123e130253" providerId="LiveId" clId="{CBED1F73-AEB6-48AF-B30C-D6CFC8A51246}" dt="2025-12-08T21:26:34.628" v="886" actId="1076"/>
+        <pc:spChg chg="add mod topLvl">
+          <ac:chgData name="Henry Vo" userId="c18cca123e130253" providerId="LiveId" clId="{CBED1F73-AEB6-48AF-B30C-D6CFC8A51246}" dt="2025-12-09T03:57:34.953" v="1005" actId="14100"/>
           <ac:spMkLst>
             <pc:docMk/>
             <pc:sldMk cId="2863434639" sldId="257"/>
             <ac:spMk id="19" creationId="{2D566DE3-CE67-B22D-1EBB-5C36BDD5B411}"/>
           </ac:spMkLst>
         </pc:spChg>
-        <pc:spChg chg="add mod">
-          <ac:chgData name="Henry Vo" userId="c18cca123e130253" providerId="LiveId" clId="{CBED1F73-AEB6-48AF-B30C-D6CFC8A51246}" dt="2025-12-08T21:26:29.962" v="885" actId="1076"/>
+        <pc:spChg chg="add mod topLvl">
+          <ac:chgData name="Henry Vo" userId="c18cca123e130253" providerId="LiveId" clId="{CBED1F73-AEB6-48AF-B30C-D6CFC8A51246}" dt="2025-12-09T03:57:11.734" v="1000" actId="14100"/>
           <ac:spMkLst>
             <pc:docMk/>
             <pc:sldMk cId="2863434639" sldId="257"/>
             <ac:spMk id="21" creationId="{F6FDA69B-B0E0-68A4-6E3F-543C1D2F347F}"/>
           </ac:spMkLst>
         </pc:spChg>
-        <pc:spChg chg="add mod">
-          <ac:chgData name="Henry Vo" userId="c18cca123e130253" providerId="LiveId" clId="{CBED1F73-AEB6-48AF-B30C-D6CFC8A51246}" dt="2025-12-08T21:26:34.628" v="886" actId="1076"/>
+        <pc:spChg chg="add mod topLvl">
+          <ac:chgData name="Henry Vo" userId="c18cca123e130253" providerId="LiveId" clId="{CBED1F73-AEB6-48AF-B30C-D6CFC8A51246}" dt="2025-12-09T03:58:01.163" v="1015" actId="12788"/>
           <ac:spMkLst>
             <pc:docMk/>
             <pc:sldMk cId="2863434639" sldId="257"/>
             <ac:spMk id="23" creationId="{35A26B54-C9CE-78D1-33AC-1545F78EA958}"/>
           </ac:spMkLst>
         </pc:spChg>
-        <pc:spChg chg="add mod">
-          <ac:chgData name="Henry Vo" userId="c18cca123e130253" providerId="LiveId" clId="{CBED1F73-AEB6-48AF-B30C-D6CFC8A51246}" dt="2025-12-08T21:26:34.628" v="886" actId="1076"/>
+        <pc:spChg chg="add del mod topLvl">
+          <ac:chgData name="Henry Vo" userId="c18cca123e130253" providerId="LiveId" clId="{CBED1F73-AEB6-48AF-B30C-D6CFC8A51246}" dt="2025-12-09T03:58:01.163" v="1015" actId="12788"/>
           <ac:spMkLst>
             <pc:docMk/>
             <pc:sldMk cId="2863434639" sldId="257"/>
@@ -271,8 +238,16 @@
             <ac:spMk id="31" creationId="{DC0E58CB-8570-1F30-D90F-97EA9E5FAFB8}"/>
           </ac:spMkLst>
         </pc:spChg>
+        <pc:grpChg chg="add mod">
+          <ac:chgData name="Henry Vo" userId="c18cca123e130253" providerId="LiveId" clId="{CBED1F73-AEB6-48AF-B30C-D6CFC8A51246}" dt="2025-12-09T03:57:08.433" v="998" actId="1076"/>
+          <ac:grpSpMkLst>
+            <pc:docMk/>
+            <pc:sldMk cId="2863434639" sldId="257"/>
+            <ac:grpSpMk id="9" creationId="{3D4C74FA-BE3B-3F4A-3E74-80B0FFF1E258}"/>
+          </ac:grpSpMkLst>
+        </pc:grpChg>
         <pc:cxnChg chg="add mod">
-          <ac:chgData name="Henry Vo" userId="c18cca123e130253" providerId="LiveId" clId="{CBED1F73-AEB6-48AF-B30C-D6CFC8A51246}" dt="2025-12-08T21:26:21.572" v="884" actId="12788"/>
+          <ac:chgData name="Henry Vo" userId="c18cca123e130253" providerId="LiveId" clId="{CBED1F73-AEB6-48AF-B30C-D6CFC8A51246}" dt="2025-12-09T03:56:26.471" v="984" actId="12788"/>
           <ac:cxnSpMkLst>
             <pc:docMk/>
             <pc:sldMk cId="2863434639" sldId="257"/>
@@ -280,16 +255,1544 @@
           </ac:cxnSpMkLst>
         </pc:cxnChg>
       </pc:sldChg>
-      <pc:sldChg chg="new">
-        <pc:chgData name="Henry Vo" userId="c18cca123e130253" providerId="LiveId" clId="{CBED1F73-AEB6-48AF-B30C-D6CFC8A51246}" dt="2025-12-08T21:54:05.681" v="888" actId="680"/>
+      <pc:sldChg chg="addSp delSp modSp new mod">
+        <pc:chgData name="Henry Vo" userId="c18cca123e130253" providerId="LiveId" clId="{CBED1F73-AEB6-48AF-B30C-D6CFC8A51246}" dt="2025-12-10T15:13:53.914" v="2911" actId="1076"/>
         <pc:sldMkLst>
           <pc:docMk/>
           <pc:sldMk cId="1201758319" sldId="258"/>
         </pc:sldMkLst>
+        <pc:spChg chg="add mod">
+          <ac:chgData name="Henry Vo" userId="c18cca123e130253" providerId="LiveId" clId="{CBED1F73-AEB6-48AF-B30C-D6CFC8A51246}" dt="2025-12-10T15:13:53.914" v="2911" actId="1076"/>
+          <ac:spMkLst>
+            <pc:docMk/>
+            <pc:sldMk cId="1201758319" sldId="258"/>
+            <ac:spMk id="2" creationId="{030A29F2-43E6-A0BD-7F79-6B5DDECF4C7E}"/>
+          </ac:spMkLst>
+        </pc:spChg>
+        <pc:spChg chg="add mod">
+          <ac:chgData name="Henry Vo" userId="c18cca123e130253" providerId="LiveId" clId="{CBED1F73-AEB6-48AF-B30C-D6CFC8A51246}" dt="2025-12-09T04:08:36.021" v="1962" actId="20577"/>
+          <ac:spMkLst>
+            <pc:docMk/>
+            <pc:sldMk cId="1201758319" sldId="258"/>
+            <ac:spMk id="4" creationId="{B0766AAF-2B3E-AD6E-4751-B0E7E1DA740E}"/>
+          </ac:spMkLst>
+        </pc:spChg>
+        <pc:spChg chg="add mod">
+          <ac:chgData name="Henry Vo" userId="c18cca123e130253" providerId="LiveId" clId="{CBED1F73-AEB6-48AF-B30C-D6CFC8A51246}" dt="2025-12-09T04:02:49.951" v="1441" actId="120"/>
+          <ac:spMkLst>
+            <pc:docMk/>
+            <pc:sldMk cId="1201758319" sldId="258"/>
+            <ac:spMk id="8" creationId="{672139E3-B1CA-8CC6-9E24-7512BE5CE0AE}"/>
+          </ac:spMkLst>
+        </pc:spChg>
+        <pc:graphicFrameChg chg="add mod">
+          <ac:chgData name="Henry Vo" userId="c18cca123e130253" providerId="LiveId" clId="{CBED1F73-AEB6-48AF-B30C-D6CFC8A51246}" dt="2025-12-09T04:04:08.235" v="1451"/>
+          <ac:graphicFrameMkLst>
+            <pc:docMk/>
+            <pc:sldMk cId="1201758319" sldId="258"/>
+            <ac:graphicFrameMk id="6" creationId="{3F6B7EF6-81DB-8E3D-3AC7-3F9ABC236B5C}"/>
+          </ac:graphicFrameMkLst>
+        </pc:graphicFrameChg>
+      </pc:sldChg>
+      <pc:sldChg chg="addSp delSp modSp new mod">
+        <pc:chgData name="Henry Vo" userId="c18cca123e130253" providerId="LiveId" clId="{CBED1F73-AEB6-48AF-B30C-D6CFC8A51246}" dt="2025-12-10T15:12:49.657" v="2746" actId="1076"/>
+        <pc:sldMkLst>
+          <pc:docMk/>
+          <pc:sldMk cId="2199859215" sldId="259"/>
+        </pc:sldMkLst>
+        <pc:spChg chg="add mod">
+          <ac:chgData name="Henry Vo" userId="c18cca123e130253" providerId="LiveId" clId="{CBED1F73-AEB6-48AF-B30C-D6CFC8A51246}" dt="2025-12-09T04:22:00.455" v="2137" actId="14100"/>
+          <ac:spMkLst>
+            <pc:docMk/>
+            <pc:sldMk cId="2199859215" sldId="259"/>
+            <ac:spMk id="14" creationId="{04F140DE-E0A3-024D-3F34-D5FF4EBA6563}"/>
+          </ac:spMkLst>
+        </pc:spChg>
+        <pc:spChg chg="add mod">
+          <ac:chgData name="Henry Vo" userId="c18cca123e130253" providerId="LiveId" clId="{CBED1F73-AEB6-48AF-B30C-D6CFC8A51246}" dt="2025-12-10T15:12:49.657" v="2746" actId="1076"/>
+          <ac:spMkLst>
+            <pc:docMk/>
+            <pc:sldMk cId="2199859215" sldId="259"/>
+            <ac:spMk id="20" creationId="{AFDB625E-7765-A5E4-723B-70D4D991BF09}"/>
+          </ac:spMkLst>
+        </pc:spChg>
+        <pc:spChg chg="add mod ord">
+          <ac:chgData name="Henry Vo" userId="c18cca123e130253" providerId="LiveId" clId="{CBED1F73-AEB6-48AF-B30C-D6CFC8A51246}" dt="2025-12-09T04:37:40.427" v="2725" actId="12788"/>
+          <ac:spMkLst>
+            <pc:docMk/>
+            <pc:sldMk cId="2199859215" sldId="259"/>
+            <ac:spMk id="21" creationId="{B65BD222-C80C-C118-817D-E583CE1BD587}"/>
+          </ac:spMkLst>
+        </pc:spChg>
+        <pc:picChg chg="add mod">
+          <ac:chgData name="Henry Vo" userId="c18cca123e130253" providerId="LiveId" clId="{CBED1F73-AEB6-48AF-B30C-D6CFC8A51246}" dt="2025-12-09T04:37:40.427" v="2725" actId="12788"/>
+          <ac:picMkLst>
+            <pc:docMk/>
+            <pc:sldMk cId="2199859215" sldId="259"/>
+            <ac:picMk id="27" creationId="{3ED2E026-1164-F8DB-1417-AB07C60BCD94}"/>
+          </ac:picMkLst>
+        </pc:picChg>
+      </pc:sldChg>
+      <pc:sldChg chg="addSp delSp modSp new mod">
+        <pc:chgData name="Henry Vo" userId="c18cca123e130253" providerId="LiveId" clId="{CBED1F73-AEB6-48AF-B30C-D6CFC8A51246}" dt="2025-12-10T15:46:37.961" v="3578" actId="20577"/>
+        <pc:sldMkLst>
+          <pc:docMk/>
+          <pc:sldMk cId="3564352135" sldId="260"/>
+        </pc:sldMkLst>
+        <pc:spChg chg="add mod">
+          <ac:chgData name="Henry Vo" userId="c18cca123e130253" providerId="LiveId" clId="{CBED1F73-AEB6-48AF-B30C-D6CFC8A51246}" dt="2025-12-10T15:46:37.961" v="3578" actId="20577"/>
+          <ac:spMkLst>
+            <pc:docMk/>
+            <pc:sldMk cId="3564352135" sldId="260"/>
+            <ac:spMk id="12" creationId="{009599A0-8BEE-E10F-54F5-BE1CE508E0A9}"/>
+          </ac:spMkLst>
+        </pc:spChg>
+        <pc:spChg chg="add mod">
+          <ac:chgData name="Henry Vo" userId="c18cca123e130253" providerId="LiveId" clId="{CBED1F73-AEB6-48AF-B30C-D6CFC8A51246}" dt="2025-12-10T15:43:46.124" v="3572" actId="1076"/>
+          <ac:spMkLst>
+            <pc:docMk/>
+            <pc:sldMk cId="3564352135" sldId="260"/>
+            <ac:spMk id="13" creationId="{7C74998D-4E22-C14D-5840-D965F19B83B1}"/>
+          </ac:spMkLst>
+        </pc:spChg>
+        <pc:spChg chg="add mod">
+          <ac:chgData name="Henry Vo" userId="c18cca123e130253" providerId="LiveId" clId="{CBED1F73-AEB6-48AF-B30C-D6CFC8A51246}" dt="2025-12-10T15:43:49.194" v="3573" actId="14100"/>
+          <ac:spMkLst>
+            <pc:docMk/>
+            <pc:sldMk cId="3564352135" sldId="260"/>
+            <ac:spMk id="14" creationId="{77FF48D3-557A-B22F-DFAB-BF9A0E988FBF}"/>
+          </ac:spMkLst>
+        </pc:spChg>
+        <pc:picChg chg="add del mod">
+          <ac:chgData name="Henry Vo" userId="c18cca123e130253" providerId="LiveId" clId="{CBED1F73-AEB6-48AF-B30C-D6CFC8A51246}" dt="2025-12-10T15:44:13.628" v="3575" actId="478"/>
+          <ac:picMkLst>
+            <pc:docMk/>
+            <pc:sldMk cId="3564352135" sldId="260"/>
+            <ac:picMk id="11" creationId="{D15C045D-2C4A-5DE4-9401-D87936C74347}"/>
+          </ac:picMkLst>
+        </pc:picChg>
+      </pc:sldChg>
+      <pc:sldChg chg="addSp delSp modSp new mod">
+        <pc:chgData name="Henry Vo" userId="c18cca123e130253" providerId="LiveId" clId="{CBED1F73-AEB6-48AF-B30C-D6CFC8A51246}" dt="2025-12-14T06:01:11.482" v="3630" actId="20577"/>
+        <pc:sldMkLst>
+          <pc:docMk/>
+          <pc:sldMk cId="3083110177" sldId="261"/>
+        </pc:sldMkLst>
+        <pc:spChg chg="del">
+          <ac:chgData name="Henry Vo" userId="c18cca123e130253" providerId="LiveId" clId="{CBED1F73-AEB6-48AF-B30C-D6CFC8A51246}" dt="2025-12-14T05:57:07.842" v="3580" actId="478"/>
+          <ac:spMkLst>
+            <pc:docMk/>
+            <pc:sldMk cId="3083110177" sldId="261"/>
+            <ac:spMk id="2" creationId="{AB1DF493-1A6D-C8F7-B185-2ED9E46BB76C}"/>
+          </ac:spMkLst>
+        </pc:spChg>
+        <pc:spChg chg="del">
+          <ac:chgData name="Henry Vo" userId="c18cca123e130253" providerId="LiveId" clId="{CBED1F73-AEB6-48AF-B30C-D6CFC8A51246}" dt="2025-12-14T05:57:06.449" v="3579" actId="478"/>
+          <ac:spMkLst>
+            <pc:docMk/>
+            <pc:sldMk cId="3083110177" sldId="261"/>
+            <ac:spMk id="3" creationId="{3A1AC856-690B-2C8E-83B1-008C098CE9CD}"/>
+          </ac:spMkLst>
+        </pc:spChg>
+        <pc:spChg chg="add del mod">
+          <ac:chgData name="Henry Vo" userId="c18cca123e130253" providerId="LiveId" clId="{CBED1F73-AEB6-48AF-B30C-D6CFC8A51246}" dt="2025-12-14T06:01:00.906" v="3583"/>
+          <ac:spMkLst>
+            <pc:docMk/>
+            <pc:sldMk cId="3083110177" sldId="261"/>
+            <ac:spMk id="4" creationId="{0D7E053D-9B6B-D4BC-3FB4-FB817B9A4FE0}"/>
+          </ac:spMkLst>
+        </pc:spChg>
+        <pc:spChg chg="add mod">
+          <ac:chgData name="Henry Vo" userId="c18cca123e130253" providerId="LiveId" clId="{CBED1F73-AEB6-48AF-B30C-D6CFC8A51246}" dt="2025-12-14T06:01:11.482" v="3630" actId="20577"/>
+          <ac:spMkLst>
+            <pc:docMk/>
+            <pc:sldMk cId="3083110177" sldId="261"/>
+            <ac:spMk id="5" creationId="{169B1C97-AA5B-69E9-2059-E2997052D437}"/>
+          </ac:spMkLst>
+        </pc:spChg>
       </pc:sldChg>
     </pc:docChg>
   </pc:docChgLst>
 </pc:chgInfo>
+</file>
+
+<file path=ppt/charts/chart1.xml><?xml version="1.0" encoding="utf-8"?>
+<c:chartSpace xmlns:c="http://schemas.openxmlformats.org/drawingml/2006/chart" xmlns:a="http://schemas.openxmlformats.org/drawingml/2006/main" xmlns:r="http://schemas.openxmlformats.org/officeDocument/2006/relationships" xmlns:c16r2="http://schemas.microsoft.com/office/drawing/2015/06/chart">
+  <c:date1904 val="0"/>
+  <c:lang val="en-US"/>
+  <c:roundedCorners val="0"/>
+  <mc:AlternateContent xmlns:mc="http://schemas.openxmlformats.org/markup-compatibility/2006">
+    <mc:Choice xmlns:c14="http://schemas.microsoft.com/office/drawing/2007/8/2/chart" Requires="c14">
+      <c14:style val="102"/>
+    </mc:Choice>
+    <mc:Fallback>
+      <c:style val="2"/>
+    </mc:Fallback>
+  </mc:AlternateContent>
+  <c:chart>
+    <c:autoTitleDeleted val="1"/>
+    <c:plotArea>
+      <c:layout>
+        <c:manualLayout>
+          <c:layoutTarget val="inner"/>
+          <c:xMode val="edge"/>
+          <c:yMode val="edge"/>
+          <c:x val="8.2952380535462597E-2"/>
+          <c:y val="5.3248516650990431E-2"/>
+          <c:w val="0.72936124200970576"/>
+          <c:h val="0.78711632794680964"/>
+        </c:manualLayout>
+      </c:layout>
+      <c:lineChart>
+        <c:grouping val="standard"/>
+        <c:varyColors val="0"/>
+        <c:ser>
+          <c:idx val="0"/>
+          <c:order val="0"/>
+          <c:tx>
+            <c:v>New</c:v>
+          </c:tx>
+          <c:spPr>
+            <a:ln w="28575" cap="rnd">
+              <a:solidFill>
+                <a:schemeClr val="accent2"/>
+              </a:solidFill>
+              <a:round/>
+            </a:ln>
+            <a:effectLst/>
+          </c:spPr>
+          <c:marker>
+            <c:symbol val="none"/>
+          </c:marker>
+          <c:dLbls>
+            <c:dLbl>
+              <c:idx val="0"/>
+              <c:layout>
+                <c:manualLayout>
+                  <c:x val="4.0680046522598087E-3"/>
+                  <c:y val="-4.4907109467267316E-2"/>
+                </c:manualLayout>
+              </c:layout>
+              <c:showLegendKey val="0"/>
+              <c:showVal val="1"/>
+              <c:showCatName val="0"/>
+              <c:showSerName val="0"/>
+              <c:showPercent val="0"/>
+              <c:showBubbleSize val="0"/>
+              <c:extLst>
+                <c:ext xmlns:c15="http://schemas.microsoft.com/office/drawing/2012/chart" uri="{CE6537A1-D6FC-4f65-9D91-7224C49458BB}"/>
+                <c:ext xmlns:c16="http://schemas.microsoft.com/office/drawing/2014/chart" uri="{C3380CC4-5D6E-409C-BE32-E72D297353CC}">
+                  <c16:uniqueId val="{00000003-7A9A-44DE-8A76-D83767A67C88}"/>
+                </c:ext>
+              </c:extLst>
+            </c:dLbl>
+            <c:dLbl>
+              <c:idx val="1"/>
+              <c:delete val="1"/>
+              <c:extLst>
+                <c:ext xmlns:c15="http://schemas.microsoft.com/office/drawing/2012/chart" uri="{CE6537A1-D6FC-4f65-9D91-7224C49458BB}"/>
+                <c:ext xmlns:c16="http://schemas.microsoft.com/office/drawing/2014/chart" uri="{C3380CC4-5D6E-409C-BE32-E72D297353CC}">
+                  <c16:uniqueId val="{00000002-7A9A-44DE-8A76-D83767A67C88}"/>
+                </c:ext>
+              </c:extLst>
+            </c:dLbl>
+            <c:dLbl>
+              <c:idx val="2"/>
+              <c:delete val="1"/>
+              <c:extLst>
+                <c:ext xmlns:c15="http://schemas.microsoft.com/office/drawing/2012/chart" uri="{CE6537A1-D6FC-4f65-9D91-7224C49458BB}"/>
+                <c:ext xmlns:c16="http://schemas.microsoft.com/office/drawing/2014/chart" uri="{C3380CC4-5D6E-409C-BE32-E72D297353CC}">
+                  <c16:uniqueId val="{00000004-7A9A-44DE-8A76-D83767A67C88}"/>
+                </c:ext>
+              </c:extLst>
+            </c:dLbl>
+            <c:dLbl>
+              <c:idx val="3"/>
+              <c:delete val="1"/>
+              <c:extLst>
+                <c:ext xmlns:c15="http://schemas.microsoft.com/office/drawing/2012/chart" uri="{CE6537A1-D6FC-4f65-9D91-7224C49458BB}"/>
+                <c:ext xmlns:c16="http://schemas.microsoft.com/office/drawing/2014/chart" uri="{C3380CC4-5D6E-409C-BE32-E72D297353CC}">
+                  <c16:uniqueId val="{00000005-7A9A-44DE-8A76-D83767A67C88}"/>
+                </c:ext>
+              </c:extLst>
+            </c:dLbl>
+            <c:dLbl>
+              <c:idx val="4"/>
+              <c:delete val="1"/>
+              <c:extLst>
+                <c:ext xmlns:c15="http://schemas.microsoft.com/office/drawing/2012/chart" uri="{CE6537A1-D6FC-4f65-9D91-7224C49458BB}"/>
+                <c:ext xmlns:c16="http://schemas.microsoft.com/office/drawing/2014/chart" uri="{C3380CC4-5D6E-409C-BE32-E72D297353CC}">
+                  <c16:uniqueId val="{00000006-7A9A-44DE-8A76-D83767A67C88}"/>
+                </c:ext>
+              </c:extLst>
+            </c:dLbl>
+            <c:dLbl>
+              <c:idx val="5"/>
+              <c:delete val="1"/>
+              <c:extLst>
+                <c:ext xmlns:c15="http://schemas.microsoft.com/office/drawing/2012/chart" uri="{CE6537A1-D6FC-4f65-9D91-7224C49458BB}"/>
+                <c:ext xmlns:c16="http://schemas.microsoft.com/office/drawing/2014/chart" uri="{C3380CC4-5D6E-409C-BE32-E72D297353CC}">
+                  <c16:uniqueId val="{00000007-7A9A-44DE-8A76-D83767A67C88}"/>
+                </c:ext>
+              </c:extLst>
+            </c:dLbl>
+            <c:dLbl>
+              <c:idx val="6"/>
+              <c:delete val="1"/>
+              <c:extLst>
+                <c:ext xmlns:c15="http://schemas.microsoft.com/office/drawing/2012/chart" uri="{CE6537A1-D6FC-4f65-9D91-7224C49458BB}"/>
+                <c:ext xmlns:c16="http://schemas.microsoft.com/office/drawing/2014/chart" uri="{C3380CC4-5D6E-409C-BE32-E72D297353CC}">
+                  <c16:uniqueId val="{00000008-7A9A-44DE-8A76-D83767A67C88}"/>
+                </c:ext>
+              </c:extLst>
+            </c:dLbl>
+            <c:dLbl>
+              <c:idx val="7"/>
+              <c:layout>
+                <c:manualLayout>
+                  <c:x val="0"/>
+                  <c:y val="1.0363179107830791E-2"/>
+                </c:manualLayout>
+              </c:layout>
+              <c:showLegendKey val="0"/>
+              <c:showVal val="1"/>
+              <c:showCatName val="0"/>
+              <c:showSerName val="0"/>
+              <c:showPercent val="0"/>
+              <c:showBubbleSize val="0"/>
+              <c:extLst>
+                <c:ext xmlns:c15="http://schemas.microsoft.com/office/drawing/2012/chart" uri="{CE6537A1-D6FC-4f65-9D91-7224C49458BB}"/>
+                <c:ext xmlns:c16="http://schemas.microsoft.com/office/drawing/2014/chart" uri="{C3380CC4-5D6E-409C-BE32-E72D297353CC}">
+                  <c16:uniqueId val="{0000000B-7A9A-44DE-8A76-D83767A67C88}"/>
+                </c:ext>
+              </c:extLst>
+            </c:dLbl>
+            <c:dLbl>
+              <c:idx val="8"/>
+              <c:delete val="1"/>
+              <c:extLst>
+                <c:ext xmlns:c15="http://schemas.microsoft.com/office/drawing/2012/chart" uri="{CE6537A1-D6FC-4f65-9D91-7224C49458BB}"/>
+                <c:ext xmlns:c16="http://schemas.microsoft.com/office/drawing/2014/chart" uri="{C3380CC4-5D6E-409C-BE32-E72D297353CC}">
+                  <c16:uniqueId val="{00000009-7A9A-44DE-8A76-D83767A67C88}"/>
+                </c:ext>
+              </c:extLst>
+            </c:dLbl>
+            <c:dLbl>
+              <c:idx val="9"/>
+              <c:delete val="1"/>
+              <c:extLst>
+                <c:ext xmlns:c15="http://schemas.microsoft.com/office/drawing/2012/chart" uri="{CE6537A1-D6FC-4f65-9D91-7224C49458BB}"/>
+                <c:ext xmlns:c16="http://schemas.microsoft.com/office/drawing/2014/chart" uri="{C3380CC4-5D6E-409C-BE32-E72D297353CC}">
+                  <c16:uniqueId val="{0000000A-7A9A-44DE-8A76-D83767A67C88}"/>
+                </c:ext>
+              </c:extLst>
+            </c:dLbl>
+            <c:dLbl>
+              <c:idx val="10"/>
+              <c:layout>
+                <c:manualLayout>
+                  <c:x val="4.0680046522598087E-3"/>
+                  <c:y val="-1.7271965179718199E-2"/>
+                </c:manualLayout>
+              </c:layout>
+              <c:showLegendKey val="0"/>
+              <c:showVal val="1"/>
+              <c:showCatName val="0"/>
+              <c:showSerName val="0"/>
+              <c:showPercent val="0"/>
+              <c:showBubbleSize val="0"/>
+              <c:extLst>
+                <c:ext xmlns:c15="http://schemas.microsoft.com/office/drawing/2012/chart" uri="{CE6537A1-D6FC-4f65-9D91-7224C49458BB}"/>
+                <c:ext xmlns:c16="http://schemas.microsoft.com/office/drawing/2014/chart" uri="{C3380CC4-5D6E-409C-BE32-E72D297353CC}">
+                  <c16:uniqueId val="{0000000C-7A9A-44DE-8A76-D83767A67C88}"/>
+                </c:ext>
+              </c:extLst>
+            </c:dLbl>
+            <c:spPr>
+              <a:noFill/>
+              <a:ln>
+                <a:noFill/>
+              </a:ln>
+              <a:effectLst/>
+            </c:spPr>
+            <c:txPr>
+              <a:bodyPr rot="0" spcFirstLastPara="1" vertOverflow="ellipsis" vert="horz" wrap="square" lIns="38100" tIns="19050" rIns="38100" bIns="19050" anchor="ctr" anchorCtr="1">
+                <a:spAutoFit/>
+              </a:bodyPr>
+              <a:lstStyle/>
+              <a:p>
+                <a:pPr>
+                  <a:defRPr sz="900" b="0" i="0" u="none" strike="noStrike" kern="1200" baseline="0">
+                    <a:solidFill>
+                      <a:schemeClr val="tx1">
+                        <a:lumMod val="75000"/>
+                        <a:lumOff val="25000"/>
+                      </a:schemeClr>
+                    </a:solidFill>
+                    <a:latin typeface="+mn-lt"/>
+                    <a:ea typeface="+mn-ea"/>
+                    <a:cs typeface="+mn-cs"/>
+                  </a:defRPr>
+                </a:pPr>
+                <a:endParaRPr lang="en-US"/>
+              </a:p>
+            </c:txPr>
+            <c:showLegendKey val="0"/>
+            <c:showVal val="1"/>
+            <c:showCatName val="0"/>
+            <c:showSerName val="0"/>
+            <c:showPercent val="0"/>
+            <c:showBubbleSize val="0"/>
+            <c:showLeaderLines val="0"/>
+            <c:extLst>
+              <c:ext xmlns:c15="http://schemas.microsoft.com/office/drawing/2012/chart" uri="{CE6537A1-D6FC-4f65-9D91-7224C49458BB}">
+                <c15:showLeaderLines val="1"/>
+                <c15:leaderLines>
+                  <c:spPr>
+                    <a:ln w="9525" cap="flat" cmpd="sng" algn="ctr">
+                      <a:solidFill>
+                        <a:schemeClr val="tx1">
+                          <a:lumMod val="35000"/>
+                          <a:lumOff val="65000"/>
+                        </a:schemeClr>
+                      </a:solidFill>
+                      <a:round/>
+                    </a:ln>
+                    <a:effectLst/>
+                  </c:spPr>
+                </c15:leaderLines>
+              </c:ext>
+            </c:extLst>
+          </c:dLbls>
+          <c:cat>
+            <c:numRef>
+              <c:f>'New vs. Return'!$A$2:$A$14</c:f>
+              <c:numCache>
+                <c:formatCode>mmm\-yy</c:formatCode>
+                <c:ptCount val="13"/>
+                <c:pt idx="0">
+                  <c:v>40513</c:v>
+                </c:pt>
+                <c:pt idx="1">
+                  <c:v>40544</c:v>
+                </c:pt>
+                <c:pt idx="2">
+                  <c:v>40575</c:v>
+                </c:pt>
+                <c:pt idx="3">
+                  <c:v>40603</c:v>
+                </c:pt>
+                <c:pt idx="4">
+                  <c:v>40634</c:v>
+                </c:pt>
+                <c:pt idx="5">
+                  <c:v>40664</c:v>
+                </c:pt>
+                <c:pt idx="6">
+                  <c:v>40695</c:v>
+                </c:pt>
+                <c:pt idx="7">
+                  <c:v>40725</c:v>
+                </c:pt>
+                <c:pt idx="8">
+                  <c:v>40756</c:v>
+                </c:pt>
+                <c:pt idx="9">
+                  <c:v>40787</c:v>
+                </c:pt>
+                <c:pt idx="10">
+                  <c:v>40817</c:v>
+                </c:pt>
+                <c:pt idx="11">
+                  <c:v>40848</c:v>
+                </c:pt>
+                <c:pt idx="12">
+                  <c:v>40878</c:v>
+                </c:pt>
+              </c:numCache>
+            </c:numRef>
+          </c:cat>
+          <c:val>
+            <c:numRef>
+              <c:f>'New vs. Return'!$B$3:$B$13</c:f>
+              <c:numCache>
+                <c:formatCode>General</c:formatCode>
+                <c:ptCount val="11"/>
+                <c:pt idx="0">
+                  <c:v>417</c:v>
+                </c:pt>
+                <c:pt idx="1">
+                  <c:v>380</c:v>
+                </c:pt>
+                <c:pt idx="2">
+                  <c:v>452</c:v>
+                </c:pt>
+                <c:pt idx="3">
+                  <c:v>300</c:v>
+                </c:pt>
+                <c:pt idx="4">
+                  <c:v>284</c:v>
+                </c:pt>
+                <c:pt idx="5">
+                  <c:v>242</c:v>
+                </c:pt>
+                <c:pt idx="6">
+                  <c:v>188</c:v>
+                </c:pt>
+                <c:pt idx="7">
+                  <c:v>169</c:v>
+                </c:pt>
+                <c:pt idx="8">
+                  <c:v>299</c:v>
+                </c:pt>
+                <c:pt idx="9">
+                  <c:v>358</c:v>
+                </c:pt>
+                <c:pt idx="10">
+                  <c:v>324</c:v>
+                </c:pt>
+              </c:numCache>
+            </c:numRef>
+          </c:val>
+          <c:smooth val="0"/>
+          <c:extLst>
+            <c:ext xmlns:c16="http://schemas.microsoft.com/office/drawing/2014/chart" uri="{C3380CC4-5D6E-409C-BE32-E72D297353CC}">
+              <c16:uniqueId val="{00000000-7A9A-44DE-8A76-D83767A67C88}"/>
+            </c:ext>
+          </c:extLst>
+        </c:ser>
+        <c:ser>
+          <c:idx val="1"/>
+          <c:order val="1"/>
+          <c:tx>
+            <c:v>Returning</c:v>
+          </c:tx>
+          <c:spPr>
+            <a:ln w="28575" cap="rnd">
+              <a:solidFill>
+                <a:schemeClr val="accent4"/>
+              </a:solidFill>
+              <a:round/>
+            </a:ln>
+            <a:effectLst/>
+          </c:spPr>
+          <c:marker>
+            <c:symbol val="none"/>
+          </c:marker>
+          <c:dLbls>
+            <c:dLbl>
+              <c:idx val="0"/>
+              <c:layout>
+                <c:manualLayout>
+                  <c:x val="4.0680046522598087E-3"/>
+                  <c:y val="3.4543930359436266E-2"/>
+                </c:manualLayout>
+              </c:layout>
+              <c:showLegendKey val="0"/>
+              <c:showVal val="1"/>
+              <c:showCatName val="0"/>
+              <c:showSerName val="0"/>
+              <c:showPercent val="0"/>
+              <c:showBubbleSize val="0"/>
+              <c:extLst>
+                <c:ext xmlns:c15="http://schemas.microsoft.com/office/drawing/2012/chart" uri="{CE6537A1-D6FC-4f65-9D91-7224C49458BB}"/>
+                <c:ext xmlns:c16="http://schemas.microsoft.com/office/drawing/2014/chart" uri="{C3380CC4-5D6E-409C-BE32-E72D297353CC}">
+                  <c16:uniqueId val="{0000000D-7A9A-44DE-8A76-D83767A67C88}"/>
+                </c:ext>
+              </c:extLst>
+            </c:dLbl>
+            <c:dLbl>
+              <c:idx val="1"/>
+              <c:delete val="1"/>
+              <c:extLst>
+                <c:ext xmlns:c15="http://schemas.microsoft.com/office/drawing/2012/chart" uri="{CE6537A1-D6FC-4f65-9D91-7224C49458BB}"/>
+                <c:ext xmlns:c16="http://schemas.microsoft.com/office/drawing/2014/chart" uri="{C3380CC4-5D6E-409C-BE32-E72D297353CC}">
+                  <c16:uniqueId val="{0000000E-7A9A-44DE-8A76-D83767A67C88}"/>
+                </c:ext>
+              </c:extLst>
+            </c:dLbl>
+            <c:dLbl>
+              <c:idx val="2"/>
+              <c:delete val="1"/>
+              <c:extLst>
+                <c:ext xmlns:c15="http://schemas.microsoft.com/office/drawing/2012/chart" uri="{CE6537A1-D6FC-4f65-9D91-7224C49458BB}"/>
+                <c:ext xmlns:c16="http://schemas.microsoft.com/office/drawing/2014/chart" uri="{C3380CC4-5D6E-409C-BE32-E72D297353CC}">
+                  <c16:uniqueId val="{0000000F-7A9A-44DE-8A76-D83767A67C88}"/>
+                </c:ext>
+              </c:extLst>
+            </c:dLbl>
+            <c:dLbl>
+              <c:idx val="3"/>
+              <c:delete val="1"/>
+              <c:extLst>
+                <c:ext xmlns:c15="http://schemas.microsoft.com/office/drawing/2012/chart" uri="{CE6537A1-D6FC-4f65-9D91-7224C49458BB}"/>
+                <c:ext xmlns:c16="http://schemas.microsoft.com/office/drawing/2014/chart" uri="{C3380CC4-5D6E-409C-BE32-E72D297353CC}">
+                  <c16:uniqueId val="{00000010-7A9A-44DE-8A76-D83767A67C88}"/>
+                </c:ext>
+              </c:extLst>
+            </c:dLbl>
+            <c:dLbl>
+              <c:idx val="4"/>
+              <c:delete val="1"/>
+              <c:extLst>
+                <c:ext xmlns:c15="http://schemas.microsoft.com/office/drawing/2012/chart" uri="{CE6537A1-D6FC-4f65-9D91-7224C49458BB}"/>
+                <c:ext xmlns:c16="http://schemas.microsoft.com/office/drawing/2014/chart" uri="{C3380CC4-5D6E-409C-BE32-E72D297353CC}">
+                  <c16:uniqueId val="{00000011-7A9A-44DE-8A76-D83767A67C88}"/>
+                </c:ext>
+              </c:extLst>
+            </c:dLbl>
+            <c:dLbl>
+              <c:idx val="5"/>
+              <c:delete val="1"/>
+              <c:extLst>
+                <c:ext xmlns:c15="http://schemas.microsoft.com/office/drawing/2012/chart" uri="{CE6537A1-D6FC-4f65-9D91-7224C49458BB}"/>
+                <c:ext xmlns:c16="http://schemas.microsoft.com/office/drawing/2014/chart" uri="{C3380CC4-5D6E-409C-BE32-E72D297353CC}">
+                  <c16:uniqueId val="{00000012-7A9A-44DE-8A76-D83767A67C88}"/>
+                </c:ext>
+              </c:extLst>
+            </c:dLbl>
+            <c:dLbl>
+              <c:idx val="6"/>
+              <c:delete val="1"/>
+              <c:extLst>
+                <c:ext xmlns:c15="http://schemas.microsoft.com/office/drawing/2012/chart" uri="{CE6537A1-D6FC-4f65-9D91-7224C49458BB}"/>
+                <c:ext xmlns:c16="http://schemas.microsoft.com/office/drawing/2014/chart" uri="{C3380CC4-5D6E-409C-BE32-E72D297353CC}">
+                  <c16:uniqueId val="{00000013-7A9A-44DE-8A76-D83767A67C88}"/>
+                </c:ext>
+              </c:extLst>
+            </c:dLbl>
+            <c:dLbl>
+              <c:idx val="7"/>
+              <c:layout>
+                <c:manualLayout>
+                  <c:x val="-1.3560015507532695E-3"/>
+                  <c:y val="3.4543930359436398E-2"/>
+                </c:manualLayout>
+              </c:layout>
+              <c:showLegendKey val="0"/>
+              <c:showVal val="1"/>
+              <c:showCatName val="0"/>
+              <c:showSerName val="0"/>
+              <c:showPercent val="0"/>
+              <c:showBubbleSize val="0"/>
+              <c:extLst>
+                <c:ext xmlns:c15="http://schemas.microsoft.com/office/drawing/2012/chart" uri="{CE6537A1-D6FC-4f65-9D91-7224C49458BB}"/>
+                <c:ext xmlns:c16="http://schemas.microsoft.com/office/drawing/2014/chart" uri="{C3380CC4-5D6E-409C-BE32-E72D297353CC}">
+                  <c16:uniqueId val="{00000014-7A9A-44DE-8A76-D83767A67C88}"/>
+                </c:ext>
+              </c:extLst>
+            </c:dLbl>
+            <c:dLbl>
+              <c:idx val="8"/>
+              <c:delete val="1"/>
+              <c:extLst>
+                <c:ext xmlns:c15="http://schemas.microsoft.com/office/drawing/2012/chart" uri="{CE6537A1-D6FC-4f65-9D91-7224C49458BB}"/>
+                <c:ext xmlns:c16="http://schemas.microsoft.com/office/drawing/2014/chart" uri="{C3380CC4-5D6E-409C-BE32-E72D297353CC}">
+                  <c16:uniqueId val="{00000015-7A9A-44DE-8A76-D83767A67C88}"/>
+                </c:ext>
+              </c:extLst>
+            </c:dLbl>
+            <c:dLbl>
+              <c:idx val="9"/>
+              <c:delete val="1"/>
+              <c:extLst>
+                <c:ext xmlns:c15="http://schemas.microsoft.com/office/drawing/2012/chart" uri="{CE6537A1-D6FC-4f65-9D91-7224C49458BB}"/>
+                <c:ext xmlns:c16="http://schemas.microsoft.com/office/drawing/2014/chart" uri="{C3380CC4-5D6E-409C-BE32-E72D297353CC}">
+                  <c16:uniqueId val="{00000016-7A9A-44DE-8A76-D83767A67C88}"/>
+                </c:ext>
+              </c:extLst>
+            </c:dLbl>
+            <c:spPr>
+              <a:noFill/>
+              <a:ln>
+                <a:noFill/>
+              </a:ln>
+              <a:effectLst/>
+            </c:spPr>
+            <c:txPr>
+              <a:bodyPr rot="0" spcFirstLastPara="1" vertOverflow="ellipsis" vert="horz" wrap="square" lIns="38100" tIns="19050" rIns="38100" bIns="19050" anchor="ctr" anchorCtr="1">
+                <a:spAutoFit/>
+              </a:bodyPr>
+              <a:lstStyle/>
+              <a:p>
+                <a:pPr>
+                  <a:defRPr sz="900" b="0" i="0" u="none" strike="noStrike" kern="1200" baseline="0">
+                    <a:solidFill>
+                      <a:schemeClr val="tx1">
+                        <a:lumMod val="75000"/>
+                        <a:lumOff val="25000"/>
+                      </a:schemeClr>
+                    </a:solidFill>
+                    <a:latin typeface="+mn-lt"/>
+                    <a:ea typeface="+mn-ea"/>
+                    <a:cs typeface="+mn-cs"/>
+                  </a:defRPr>
+                </a:pPr>
+                <a:endParaRPr lang="en-US"/>
+              </a:p>
+            </c:txPr>
+            <c:showLegendKey val="0"/>
+            <c:showVal val="1"/>
+            <c:showCatName val="0"/>
+            <c:showSerName val="0"/>
+            <c:showPercent val="0"/>
+            <c:showBubbleSize val="0"/>
+            <c:showLeaderLines val="0"/>
+            <c:extLst>
+              <c:ext xmlns:c15="http://schemas.microsoft.com/office/drawing/2012/chart" uri="{CE6537A1-D6FC-4f65-9D91-7224C49458BB}">
+                <c15:showLeaderLines val="1"/>
+                <c15:leaderLines>
+                  <c:spPr>
+                    <a:ln w="9525" cap="flat" cmpd="sng" algn="ctr">
+                      <a:solidFill>
+                        <a:schemeClr val="tx1">
+                          <a:lumMod val="35000"/>
+                          <a:lumOff val="65000"/>
+                        </a:schemeClr>
+                      </a:solidFill>
+                      <a:round/>
+                    </a:ln>
+                    <a:effectLst/>
+                  </c:spPr>
+                </c15:leaderLines>
+              </c:ext>
+            </c:extLst>
+          </c:dLbls>
+          <c:cat>
+            <c:numRef>
+              <c:f>'New vs. Return'!$A$2:$A$14</c:f>
+              <c:numCache>
+                <c:formatCode>mmm\-yy</c:formatCode>
+                <c:ptCount val="13"/>
+                <c:pt idx="0">
+                  <c:v>40513</c:v>
+                </c:pt>
+                <c:pt idx="1">
+                  <c:v>40544</c:v>
+                </c:pt>
+                <c:pt idx="2">
+                  <c:v>40575</c:v>
+                </c:pt>
+                <c:pt idx="3">
+                  <c:v>40603</c:v>
+                </c:pt>
+                <c:pt idx="4">
+                  <c:v>40634</c:v>
+                </c:pt>
+                <c:pt idx="5">
+                  <c:v>40664</c:v>
+                </c:pt>
+                <c:pt idx="6">
+                  <c:v>40695</c:v>
+                </c:pt>
+                <c:pt idx="7">
+                  <c:v>40725</c:v>
+                </c:pt>
+                <c:pt idx="8">
+                  <c:v>40756</c:v>
+                </c:pt>
+                <c:pt idx="9">
+                  <c:v>40787</c:v>
+                </c:pt>
+                <c:pt idx="10">
+                  <c:v>40817</c:v>
+                </c:pt>
+                <c:pt idx="11">
+                  <c:v>40848</c:v>
+                </c:pt>
+                <c:pt idx="12">
+                  <c:v>40878</c:v>
+                </c:pt>
+              </c:numCache>
+            </c:numRef>
+          </c:cat>
+          <c:val>
+            <c:numRef>
+              <c:f>'New vs. Return'!$C$3:$C$13</c:f>
+              <c:numCache>
+                <c:formatCode>General</c:formatCode>
+                <c:ptCount val="11"/>
+                <c:pt idx="0">
+                  <c:v>324</c:v>
+                </c:pt>
+                <c:pt idx="1">
+                  <c:v>378</c:v>
+                </c:pt>
+                <c:pt idx="2">
+                  <c:v>522</c:v>
+                </c:pt>
+                <c:pt idx="3">
+                  <c:v>556</c:v>
+                </c:pt>
+                <c:pt idx="4">
+                  <c:v>772</c:v>
+                </c:pt>
+                <c:pt idx="5">
+                  <c:v>749</c:v>
+                </c:pt>
+                <c:pt idx="6">
+                  <c:v>761</c:v>
+                </c:pt>
+                <c:pt idx="7">
+                  <c:v>766</c:v>
+                </c:pt>
+                <c:pt idx="8">
+                  <c:v>967</c:v>
+                </c:pt>
+                <c:pt idx="9">
+                  <c:v>1006</c:v>
+                </c:pt>
+                <c:pt idx="10">
+                  <c:v>1341</c:v>
+                </c:pt>
+              </c:numCache>
+            </c:numRef>
+          </c:val>
+          <c:smooth val="0"/>
+          <c:extLst>
+            <c:ext xmlns:c16="http://schemas.microsoft.com/office/drawing/2014/chart" uri="{C3380CC4-5D6E-409C-BE32-E72D297353CC}">
+              <c16:uniqueId val="{00000001-7A9A-44DE-8A76-D83767A67C88}"/>
+            </c:ext>
+          </c:extLst>
+        </c:ser>
+        <c:dLbls>
+          <c:showLegendKey val="0"/>
+          <c:showVal val="0"/>
+          <c:showCatName val="0"/>
+          <c:showSerName val="0"/>
+          <c:showPercent val="0"/>
+          <c:showBubbleSize val="0"/>
+        </c:dLbls>
+        <c:smooth val="0"/>
+        <c:axId val="1578916048"/>
+        <c:axId val="1578940048"/>
+      </c:lineChart>
+      <c:dateAx>
+        <c:axId val="1578916048"/>
+        <c:scaling>
+          <c:orientation val="minMax"/>
+        </c:scaling>
+        <c:delete val="0"/>
+        <c:axPos val="b"/>
+        <c:numFmt formatCode="mmm\-yy" sourceLinked="1"/>
+        <c:majorTickMark val="out"/>
+        <c:minorTickMark val="none"/>
+        <c:tickLblPos val="nextTo"/>
+        <c:spPr>
+          <a:noFill/>
+          <a:ln w="9525" cap="flat" cmpd="sng" algn="ctr">
+            <a:solidFill>
+              <a:schemeClr val="tx1">
+                <a:lumMod val="15000"/>
+                <a:lumOff val="85000"/>
+              </a:schemeClr>
+            </a:solidFill>
+            <a:round/>
+          </a:ln>
+          <a:effectLst/>
+        </c:spPr>
+        <c:txPr>
+          <a:bodyPr rot="-60000000" spcFirstLastPara="1" vertOverflow="ellipsis" vert="horz" wrap="square" anchor="ctr" anchorCtr="1"/>
+          <a:lstStyle/>
+          <a:p>
+            <a:pPr>
+              <a:defRPr sz="900" b="0" i="0" u="none" strike="noStrike" kern="1200" baseline="0">
+                <a:solidFill>
+                  <a:schemeClr val="tx1">
+                    <a:lumMod val="65000"/>
+                    <a:lumOff val="35000"/>
+                  </a:schemeClr>
+                </a:solidFill>
+                <a:latin typeface="+mn-lt"/>
+                <a:ea typeface="+mn-ea"/>
+                <a:cs typeface="+mn-cs"/>
+              </a:defRPr>
+            </a:pPr>
+            <a:endParaRPr lang="en-US"/>
+          </a:p>
+        </c:txPr>
+        <c:crossAx val="1578940048"/>
+        <c:crosses val="autoZero"/>
+        <c:auto val="1"/>
+        <c:lblOffset val="100"/>
+        <c:baseTimeUnit val="months"/>
+      </c:dateAx>
+      <c:valAx>
+        <c:axId val="1578940048"/>
+        <c:scaling>
+          <c:orientation val="minMax"/>
+        </c:scaling>
+        <c:delete val="0"/>
+        <c:axPos val="l"/>
+        <c:numFmt formatCode="General" sourceLinked="1"/>
+        <c:majorTickMark val="none"/>
+        <c:minorTickMark val="none"/>
+        <c:tickLblPos val="nextTo"/>
+        <c:spPr>
+          <a:noFill/>
+          <a:ln>
+            <a:noFill/>
+          </a:ln>
+          <a:effectLst/>
+        </c:spPr>
+        <c:txPr>
+          <a:bodyPr rot="-60000000" spcFirstLastPara="1" vertOverflow="ellipsis" vert="horz" wrap="square" anchor="ctr" anchorCtr="1"/>
+          <a:lstStyle/>
+          <a:p>
+            <a:pPr>
+              <a:defRPr sz="900" b="0" i="0" u="none" strike="noStrike" kern="1200" baseline="0">
+                <a:solidFill>
+                  <a:schemeClr val="tx1">
+                    <a:lumMod val="65000"/>
+                    <a:lumOff val="35000"/>
+                  </a:schemeClr>
+                </a:solidFill>
+                <a:latin typeface="+mn-lt"/>
+                <a:ea typeface="+mn-ea"/>
+                <a:cs typeface="+mn-cs"/>
+              </a:defRPr>
+            </a:pPr>
+            <a:endParaRPr lang="en-US"/>
+          </a:p>
+        </c:txPr>
+        <c:crossAx val="1578916048"/>
+        <c:crosses val="autoZero"/>
+        <c:crossBetween val="between"/>
+      </c:valAx>
+      <c:spPr>
+        <a:noFill/>
+        <a:ln>
+          <a:noFill/>
+        </a:ln>
+        <a:effectLst/>
+      </c:spPr>
+    </c:plotArea>
+    <c:legend>
+      <c:legendPos val="r"/>
+      <c:layout>
+        <c:manualLayout>
+          <c:xMode val="edge"/>
+          <c:yMode val="edge"/>
+          <c:x val="0.82333529496262869"/>
+          <c:y val="0.43114137335787101"/>
+          <c:w val="0.16215305084446466"/>
+          <c:h val="0.22618423688850972"/>
+        </c:manualLayout>
+      </c:layout>
+      <c:overlay val="0"/>
+      <c:spPr>
+        <a:noFill/>
+        <a:ln>
+          <a:noFill/>
+        </a:ln>
+        <a:effectLst/>
+      </c:spPr>
+      <c:txPr>
+        <a:bodyPr rot="0" spcFirstLastPara="1" vertOverflow="ellipsis" vert="horz" wrap="square" anchor="ctr" anchorCtr="1"/>
+        <a:lstStyle/>
+        <a:p>
+          <a:pPr>
+            <a:defRPr sz="900" b="0" i="0" u="none" strike="noStrike" kern="1200" baseline="0">
+              <a:solidFill>
+                <a:schemeClr val="tx1">
+                  <a:lumMod val="65000"/>
+                  <a:lumOff val="35000"/>
+                </a:schemeClr>
+              </a:solidFill>
+              <a:latin typeface="+mn-lt"/>
+              <a:ea typeface="+mn-ea"/>
+              <a:cs typeface="+mn-cs"/>
+            </a:defRPr>
+          </a:pPr>
+          <a:endParaRPr lang="en-US"/>
+        </a:p>
+      </c:txPr>
+    </c:legend>
+    <c:plotVisOnly val="1"/>
+    <c:dispBlanksAs val="gap"/>
+    <c:showDLblsOverMax val="0"/>
+    <c:extLst>
+      <c:ext xmlns:c16r3="http://schemas.microsoft.com/office/drawing/2017/03/chart" uri="{56B9EC1D-385E-4148-901F-78D8002777C0}">
+        <c16r3:dataDisplayOptions16>
+          <c16r3:dispNaAsBlank val="1"/>
+        </c16r3:dataDisplayOptions16>
+      </c:ext>
+    </c:extLst>
+  </c:chart>
+  <c:spPr>
+    <a:noFill/>
+    <a:ln>
+      <a:noFill/>
+    </a:ln>
+    <a:effectLst/>
+  </c:spPr>
+  <c:txPr>
+    <a:bodyPr/>
+    <a:lstStyle/>
+    <a:p>
+      <a:pPr>
+        <a:defRPr/>
+      </a:pPr>
+      <a:endParaRPr lang="en-US"/>
+    </a:p>
+  </c:txPr>
+  <c:externalData r:id="rId3">
+    <c:autoUpdate val="0"/>
+  </c:externalData>
+</c:chartSpace>
+</file>
+
+<file path=ppt/charts/colors1.xml><?xml version="1.0" encoding="utf-8"?>
+<cs:colorStyle xmlns:cs="http://schemas.microsoft.com/office/drawing/2012/chartStyle" xmlns:a="http://schemas.openxmlformats.org/drawingml/2006/main" meth="cycle" id="12">
+  <a:schemeClr val="accent2"/>
+  <a:schemeClr val="accent4"/>
+  <a:schemeClr val="accent6"/>
+  <cs:variation/>
+  <cs:variation>
+    <a:lumMod val="60000"/>
+  </cs:variation>
+  <cs:variation>
+    <a:lumMod val="80000"/>
+    <a:lumOff val="20000"/>
+  </cs:variation>
+  <cs:variation>
+    <a:lumMod val="80000"/>
+  </cs:variation>
+  <cs:variation>
+    <a:lumMod val="60000"/>
+    <a:lumOff val="40000"/>
+  </cs:variation>
+  <cs:variation>
+    <a:lumMod val="50000"/>
+  </cs:variation>
+  <cs:variation>
+    <a:lumMod val="70000"/>
+    <a:lumOff val="30000"/>
+  </cs:variation>
+  <cs:variation>
+    <a:lumMod val="70000"/>
+  </cs:variation>
+  <cs:variation>
+    <a:lumMod val="50000"/>
+    <a:lumOff val="50000"/>
+  </cs:variation>
+</cs:colorStyle>
+</file>
+
+<file path=ppt/charts/style1.xml><?xml version="1.0" encoding="utf-8"?>
+<cs:chartStyle xmlns:cs="http://schemas.microsoft.com/office/drawing/2012/chartStyle" xmlns:a="http://schemas.openxmlformats.org/drawingml/2006/main" id="227">
+  <cs:axisTitle>
+    <cs:lnRef idx="0"/>
+    <cs:fillRef idx="0"/>
+    <cs:effectRef idx="0"/>
+    <cs:fontRef idx="minor">
+      <a:schemeClr val="tx1">
+        <a:lumMod val="65000"/>
+        <a:lumOff val="35000"/>
+      </a:schemeClr>
+    </cs:fontRef>
+    <cs:defRPr sz="1000" kern="1200"/>
+  </cs:axisTitle>
+  <cs:categoryAxis>
+    <cs:lnRef idx="0"/>
+    <cs:fillRef idx="0"/>
+    <cs:effectRef idx="0"/>
+    <cs:fontRef idx="minor">
+      <a:schemeClr val="tx1">
+        <a:lumMod val="65000"/>
+        <a:lumOff val="35000"/>
+      </a:schemeClr>
+    </cs:fontRef>
+    <cs:spPr>
+      <a:ln w="9525" cap="flat" cmpd="sng" algn="ctr">
+        <a:solidFill>
+          <a:schemeClr val="tx1">
+            <a:lumMod val="15000"/>
+            <a:lumOff val="85000"/>
+          </a:schemeClr>
+        </a:solidFill>
+        <a:round/>
+      </a:ln>
+    </cs:spPr>
+    <cs:defRPr sz="900" kern="1200"/>
+  </cs:categoryAxis>
+  <cs:chartArea mods="allowNoFillOverride allowNoLineOverride">
+    <cs:lnRef idx="0"/>
+    <cs:fillRef idx="0"/>
+    <cs:effectRef idx="0"/>
+    <cs:fontRef idx="minor">
+      <a:schemeClr val="tx1"/>
+    </cs:fontRef>
+    <cs:spPr>
+      <a:solidFill>
+        <a:schemeClr val="bg1"/>
+      </a:solidFill>
+      <a:ln w="9525" cap="flat" cmpd="sng" algn="ctr">
+        <a:solidFill>
+          <a:schemeClr val="tx1">
+            <a:lumMod val="15000"/>
+            <a:lumOff val="85000"/>
+          </a:schemeClr>
+        </a:solidFill>
+        <a:round/>
+      </a:ln>
+    </cs:spPr>
+    <cs:defRPr sz="1000" kern="1200"/>
+  </cs:chartArea>
+  <cs:dataLabel>
+    <cs:lnRef idx="0"/>
+    <cs:fillRef idx="0"/>
+    <cs:effectRef idx="0"/>
+    <cs:fontRef idx="minor">
+      <a:schemeClr val="tx1">
+        <a:lumMod val="75000"/>
+        <a:lumOff val="25000"/>
+      </a:schemeClr>
+    </cs:fontRef>
+    <cs:defRPr sz="900" kern="1200"/>
+  </cs:dataLabel>
+  <cs:dataLabelCallout>
+    <cs:lnRef idx="0"/>
+    <cs:fillRef idx="0"/>
+    <cs:effectRef idx="0"/>
+    <cs:fontRef idx="minor">
+      <a:schemeClr val="dk1">
+        <a:lumMod val="65000"/>
+        <a:lumOff val="35000"/>
+      </a:schemeClr>
+    </cs:fontRef>
+    <cs:spPr>
+      <a:solidFill>
+        <a:schemeClr val="lt1"/>
+      </a:solidFill>
+      <a:ln>
+        <a:solidFill>
+          <a:schemeClr val="dk1">
+            <a:lumMod val="25000"/>
+            <a:lumOff val="75000"/>
+          </a:schemeClr>
+        </a:solidFill>
+      </a:ln>
+    </cs:spPr>
+    <cs:defRPr sz="900" kern="1200"/>
+    <cs:bodyPr rot="0" spcFirstLastPara="1" vertOverflow="clip" horzOverflow="clip" vert="horz" wrap="square" lIns="36576" tIns="18288" rIns="36576" bIns="18288" anchor="ctr" anchorCtr="1">
+      <a:spAutoFit/>
+    </cs:bodyPr>
+  </cs:dataLabelCallout>
+  <cs:dataPoint>
+    <cs:lnRef idx="0"/>
+    <cs:fillRef idx="1">
+      <cs:styleClr val="auto"/>
+    </cs:fillRef>
+    <cs:effectRef idx="0"/>
+    <cs:fontRef idx="minor">
+      <a:schemeClr val="tx1"/>
+    </cs:fontRef>
+    <cs:spPr>
+      <a:solidFill>
+        <a:schemeClr val="phClr"/>
+      </a:solidFill>
+    </cs:spPr>
+  </cs:dataPoint>
+  <cs:dataPoint3D>
+    <cs:lnRef idx="0"/>
+    <cs:fillRef idx="1">
+      <cs:styleClr val="auto"/>
+    </cs:fillRef>
+    <cs:effectRef idx="0"/>
+    <cs:fontRef idx="minor">
+      <a:schemeClr val="tx1"/>
+    </cs:fontRef>
+    <cs:spPr>
+      <a:solidFill>
+        <a:schemeClr val="phClr"/>
+      </a:solidFill>
+    </cs:spPr>
+  </cs:dataPoint3D>
+  <cs:dataPointLine>
+    <cs:lnRef idx="0">
+      <cs:styleClr val="auto"/>
+    </cs:lnRef>
+    <cs:fillRef idx="1"/>
+    <cs:effectRef idx="0"/>
+    <cs:fontRef idx="minor">
+      <a:schemeClr val="tx1"/>
+    </cs:fontRef>
+    <cs:spPr>
+      <a:ln w="28575" cap="rnd">
+        <a:solidFill>
+          <a:schemeClr val="phClr"/>
+        </a:solidFill>
+        <a:round/>
+      </a:ln>
+    </cs:spPr>
+  </cs:dataPointLine>
+  <cs:dataPointMarker>
+    <cs:lnRef idx="0">
+      <cs:styleClr val="auto"/>
+    </cs:lnRef>
+    <cs:fillRef idx="1">
+      <cs:styleClr val="auto"/>
+    </cs:fillRef>
+    <cs:effectRef idx="0"/>
+    <cs:fontRef idx="minor">
+      <a:schemeClr val="tx1"/>
+    </cs:fontRef>
+    <cs:spPr>
+      <a:solidFill>
+        <a:schemeClr val="phClr"/>
+      </a:solidFill>
+      <a:ln w="9525">
+        <a:solidFill>
+          <a:schemeClr val="phClr"/>
+        </a:solidFill>
+      </a:ln>
+    </cs:spPr>
+  </cs:dataPointMarker>
+  <cs:dataPointMarkerLayout symbol="circle" size="5"/>
+  <cs:dataPointWireframe>
+    <cs:lnRef idx="0">
+      <cs:styleClr val="auto"/>
+    </cs:lnRef>
+    <cs:fillRef idx="1"/>
+    <cs:effectRef idx="0"/>
+    <cs:fontRef idx="minor">
+      <a:schemeClr val="tx1"/>
+    </cs:fontRef>
+    <cs:spPr>
+      <a:ln w="9525" cap="rnd">
+        <a:solidFill>
+          <a:schemeClr val="phClr"/>
+        </a:solidFill>
+        <a:round/>
+      </a:ln>
+    </cs:spPr>
+  </cs:dataPointWireframe>
+  <cs:dataTable>
+    <cs:lnRef idx="0"/>
+    <cs:fillRef idx="0"/>
+    <cs:effectRef idx="0"/>
+    <cs:fontRef idx="minor">
+      <a:schemeClr val="tx1">
+        <a:lumMod val="65000"/>
+        <a:lumOff val="35000"/>
+      </a:schemeClr>
+    </cs:fontRef>
+    <cs:spPr>
+      <a:noFill/>
+      <a:ln w="9525" cap="flat" cmpd="sng" algn="ctr">
+        <a:solidFill>
+          <a:schemeClr val="tx1">
+            <a:lumMod val="15000"/>
+            <a:lumOff val="85000"/>
+          </a:schemeClr>
+        </a:solidFill>
+        <a:round/>
+      </a:ln>
+    </cs:spPr>
+    <cs:defRPr sz="900" kern="1200"/>
+  </cs:dataTable>
+  <cs:downBar>
+    <cs:lnRef idx="0"/>
+    <cs:fillRef idx="0"/>
+    <cs:effectRef idx="0"/>
+    <cs:fontRef idx="minor">
+      <a:schemeClr val="dk1"/>
+    </cs:fontRef>
+    <cs:spPr>
+      <a:solidFill>
+        <a:schemeClr val="dk1">
+          <a:lumMod val="65000"/>
+          <a:lumOff val="35000"/>
+        </a:schemeClr>
+      </a:solidFill>
+      <a:ln w="9525">
+        <a:solidFill>
+          <a:schemeClr val="tx1">
+            <a:lumMod val="65000"/>
+            <a:lumOff val="35000"/>
+          </a:schemeClr>
+        </a:solidFill>
+      </a:ln>
+    </cs:spPr>
+  </cs:downBar>
+  <cs:dropLine>
+    <cs:lnRef idx="0"/>
+    <cs:fillRef idx="0"/>
+    <cs:effectRef idx="0"/>
+    <cs:fontRef idx="minor">
+      <a:schemeClr val="tx1"/>
+    </cs:fontRef>
+    <cs:spPr>
+      <a:ln w="9525" cap="flat" cmpd="sng" algn="ctr">
+        <a:solidFill>
+          <a:schemeClr val="tx1">
+            <a:lumMod val="35000"/>
+            <a:lumOff val="65000"/>
+          </a:schemeClr>
+        </a:solidFill>
+        <a:round/>
+      </a:ln>
+    </cs:spPr>
+  </cs:dropLine>
+  <cs:errorBar>
+    <cs:lnRef idx="0"/>
+    <cs:fillRef idx="0"/>
+    <cs:effectRef idx="0"/>
+    <cs:fontRef idx="minor">
+      <a:schemeClr val="tx1"/>
+    </cs:fontRef>
+    <cs:spPr>
+      <a:ln w="9525" cap="flat" cmpd="sng" algn="ctr">
+        <a:solidFill>
+          <a:schemeClr val="tx1">
+            <a:lumMod val="65000"/>
+            <a:lumOff val="35000"/>
+          </a:schemeClr>
+        </a:solidFill>
+        <a:round/>
+      </a:ln>
+    </cs:spPr>
+  </cs:errorBar>
+  <cs:floor>
+    <cs:lnRef idx="0"/>
+    <cs:fillRef idx="0"/>
+    <cs:effectRef idx="0"/>
+    <cs:fontRef idx="minor">
+      <a:schemeClr val="tx1"/>
+    </cs:fontRef>
+    <cs:spPr>
+      <a:noFill/>
+      <a:ln>
+        <a:noFill/>
+      </a:ln>
+    </cs:spPr>
+  </cs:floor>
+  <cs:gridlineMajor>
+    <cs:lnRef idx="0"/>
+    <cs:fillRef idx="0"/>
+    <cs:effectRef idx="0"/>
+    <cs:fontRef idx="minor">
+      <a:schemeClr val="tx1"/>
+    </cs:fontRef>
+    <cs:spPr>
+      <a:ln w="9525" cap="flat" cmpd="sng" algn="ctr">
+        <a:solidFill>
+          <a:schemeClr val="tx1">
+            <a:lumMod val="15000"/>
+            <a:lumOff val="85000"/>
+          </a:schemeClr>
+        </a:solidFill>
+        <a:round/>
+      </a:ln>
+    </cs:spPr>
+  </cs:gridlineMajor>
+  <cs:gridlineMinor>
+    <cs:lnRef idx="0"/>
+    <cs:fillRef idx="0"/>
+    <cs:effectRef idx="0"/>
+    <cs:fontRef idx="minor">
+      <a:schemeClr val="tx1"/>
+    </cs:fontRef>
+    <cs:spPr>
+      <a:ln w="9525" cap="flat" cmpd="sng" algn="ctr">
+        <a:solidFill>
+          <a:schemeClr val="tx1">
+            <a:lumMod val="5000"/>
+            <a:lumOff val="95000"/>
+          </a:schemeClr>
+        </a:solidFill>
+        <a:round/>
+      </a:ln>
+    </cs:spPr>
+  </cs:gridlineMinor>
+  <cs:hiLoLine>
+    <cs:lnRef idx="0"/>
+    <cs:fillRef idx="0"/>
+    <cs:effectRef idx="0"/>
+    <cs:fontRef idx="minor">
+      <a:schemeClr val="tx1"/>
+    </cs:fontRef>
+    <cs:spPr>
+      <a:ln w="9525" cap="flat" cmpd="sng" algn="ctr">
+        <a:solidFill>
+          <a:schemeClr val="tx1">
+            <a:lumMod val="75000"/>
+            <a:lumOff val="25000"/>
+          </a:schemeClr>
+        </a:solidFill>
+        <a:round/>
+      </a:ln>
+    </cs:spPr>
+  </cs:hiLoLine>
+  <cs:leaderLine>
+    <cs:lnRef idx="0"/>
+    <cs:fillRef idx="0"/>
+    <cs:effectRef idx="0"/>
+    <cs:fontRef idx="minor">
+      <a:schemeClr val="tx1"/>
+    </cs:fontRef>
+    <cs:spPr>
+      <a:ln w="9525" cap="flat" cmpd="sng" algn="ctr">
+        <a:solidFill>
+          <a:schemeClr val="tx1">
+            <a:lumMod val="35000"/>
+            <a:lumOff val="65000"/>
+          </a:schemeClr>
+        </a:solidFill>
+        <a:round/>
+      </a:ln>
+    </cs:spPr>
+  </cs:leaderLine>
+  <cs:legend>
+    <cs:lnRef idx="0"/>
+    <cs:fillRef idx="0"/>
+    <cs:effectRef idx="0"/>
+    <cs:fontRef idx="minor">
+      <a:schemeClr val="tx1">
+        <a:lumMod val="65000"/>
+        <a:lumOff val="35000"/>
+      </a:schemeClr>
+    </cs:fontRef>
+    <cs:defRPr sz="900" kern="1200"/>
+  </cs:legend>
+  <cs:plotArea mods="allowNoFillOverride allowNoLineOverride">
+    <cs:lnRef idx="0"/>
+    <cs:fillRef idx="0"/>
+    <cs:effectRef idx="0"/>
+    <cs:fontRef idx="minor">
+      <a:schemeClr val="tx1"/>
+    </cs:fontRef>
+  </cs:plotArea>
+  <cs:plotArea3D mods="allowNoFillOverride allowNoLineOverride">
+    <cs:lnRef idx="0"/>
+    <cs:fillRef idx="0"/>
+    <cs:effectRef idx="0"/>
+    <cs:fontRef idx="minor">
+      <a:schemeClr val="tx1"/>
+    </cs:fontRef>
+  </cs:plotArea3D>
+  <cs:seriesAxis>
+    <cs:lnRef idx="0"/>
+    <cs:fillRef idx="0"/>
+    <cs:effectRef idx="0"/>
+    <cs:fontRef idx="minor">
+      <a:schemeClr val="tx1">
+        <a:lumMod val="65000"/>
+        <a:lumOff val="35000"/>
+      </a:schemeClr>
+    </cs:fontRef>
+    <cs:defRPr sz="900" kern="1200"/>
+  </cs:seriesAxis>
+  <cs:seriesLine>
+    <cs:lnRef idx="0"/>
+    <cs:fillRef idx="0"/>
+    <cs:effectRef idx="0"/>
+    <cs:fontRef idx="minor">
+      <a:schemeClr val="tx1"/>
+    </cs:fontRef>
+    <cs:spPr>
+      <a:ln w="9525" cap="flat" cmpd="sng" algn="ctr">
+        <a:solidFill>
+          <a:schemeClr val="tx1">
+            <a:lumMod val="35000"/>
+            <a:lumOff val="65000"/>
+          </a:schemeClr>
+        </a:solidFill>
+        <a:round/>
+      </a:ln>
+    </cs:spPr>
+  </cs:seriesLine>
+  <cs:title>
+    <cs:lnRef idx="0"/>
+    <cs:fillRef idx="0"/>
+    <cs:effectRef idx="0"/>
+    <cs:fontRef idx="minor">
+      <a:schemeClr val="tx1">
+        <a:lumMod val="65000"/>
+        <a:lumOff val="35000"/>
+      </a:schemeClr>
+    </cs:fontRef>
+    <cs:defRPr sz="1400" b="0" kern="1200" spc="0" baseline="0"/>
+  </cs:title>
+  <cs:trendline>
+    <cs:lnRef idx="0">
+      <cs:styleClr val="auto"/>
+    </cs:lnRef>
+    <cs:fillRef idx="0"/>
+    <cs:effectRef idx="0"/>
+    <cs:fontRef idx="minor">
+      <a:schemeClr val="tx1"/>
+    </cs:fontRef>
+    <cs:spPr>
+      <a:ln w="19050" cap="rnd">
+        <a:solidFill>
+          <a:schemeClr val="phClr"/>
+        </a:solidFill>
+        <a:prstDash val="sysDot"/>
+      </a:ln>
+    </cs:spPr>
+  </cs:trendline>
+  <cs:trendlineLabel>
+    <cs:lnRef idx="0"/>
+    <cs:fillRef idx="0"/>
+    <cs:effectRef idx="0"/>
+    <cs:fontRef idx="minor">
+      <a:schemeClr val="tx1">
+        <a:lumMod val="65000"/>
+        <a:lumOff val="35000"/>
+      </a:schemeClr>
+    </cs:fontRef>
+    <cs:defRPr sz="900" kern="1200"/>
+  </cs:trendlineLabel>
+  <cs:upBar>
+    <cs:lnRef idx="0"/>
+    <cs:fillRef idx="0"/>
+    <cs:effectRef idx="0"/>
+    <cs:fontRef idx="minor">
+      <a:schemeClr val="dk1"/>
+    </cs:fontRef>
+    <cs:spPr>
+      <a:solidFill>
+        <a:schemeClr val="lt1"/>
+      </a:solidFill>
+      <a:ln w="9525">
+        <a:solidFill>
+          <a:schemeClr val="tx1">
+            <a:lumMod val="15000"/>
+            <a:lumOff val="85000"/>
+          </a:schemeClr>
+        </a:solidFill>
+      </a:ln>
+    </cs:spPr>
+  </cs:upBar>
+  <cs:valueAxis>
+    <cs:lnRef idx="0"/>
+    <cs:fillRef idx="0"/>
+    <cs:effectRef idx="0"/>
+    <cs:fontRef idx="minor">
+      <a:schemeClr val="tx1">
+        <a:lumMod val="65000"/>
+        <a:lumOff val="35000"/>
+      </a:schemeClr>
+    </cs:fontRef>
+    <cs:defRPr sz="900" kern="1200"/>
+  </cs:valueAxis>
+  <cs:wall>
+    <cs:lnRef idx="0"/>
+    <cs:fillRef idx="0"/>
+    <cs:effectRef idx="0"/>
+    <cs:fontRef idx="minor">
+      <a:schemeClr val="tx1"/>
+    </cs:fontRef>
+    <cs:spPr>
+      <a:noFill/>
+      <a:ln>
+        <a:noFill/>
+      </a:ln>
+    </cs:spPr>
+  </cs:wall>
+</cs:chartStyle>
 </file>
 
 <file path=ppt/notesMasters/notesMaster1.xml><?xml version="1.0" encoding="utf-8"?>
@@ -374,7 +1877,7 @@
           <a:p>
             <a:fld id="{9C049790-B49D-4D8D-B628-59414A006FDF}" type="datetimeFigureOut">
               <a:rPr lang="en-US" smtClean="0"/>
-              <a:t>12/8/2025</a:t>
+              <a:t>12/13/2025</a:t>
             </a:fld>
             <a:endParaRPr lang="en-US"/>
           </a:p>
@@ -716,6 +2219,90 @@
     <p:extLst>
       <p:ext uri="{BB962C8B-B14F-4D97-AF65-F5344CB8AC3E}">
         <p14:creationId xmlns:p14="http://schemas.microsoft.com/office/powerpoint/2010/main" val="1217006089"/>
+      </p:ext>
+    </p:extLst>
+  </p:cSld>
+  <p:clrMapOvr>
+    <a:masterClrMapping/>
+  </p:clrMapOvr>
+</p:notes>
+</file>
+
+<file path=ppt/notesSlides/notesSlide2.xml><?xml version="1.0" encoding="utf-8"?>
+<p:notes xmlns:a="http://schemas.openxmlformats.org/drawingml/2006/main" xmlns:r="http://schemas.openxmlformats.org/officeDocument/2006/relationships" xmlns:p="http://schemas.openxmlformats.org/presentationml/2006/main">
+  <p:cSld>
+    <p:spTree>
+      <p:nvGrpSpPr>
+        <p:cNvPr id="1" name=""/>
+        <p:cNvGrpSpPr/>
+        <p:nvPr/>
+      </p:nvGrpSpPr>
+      <p:grpSpPr>
+        <a:xfrm>
+          <a:off x="0" y="0"/>
+          <a:ext cx="0" cy="0"/>
+          <a:chOff x="0" y="0"/>
+          <a:chExt cx="0" cy="0"/>
+        </a:xfrm>
+      </p:grpSpPr>
+      <p:sp>
+        <p:nvSpPr>
+          <p:cNvPr id="2" name="Slide Image Placeholder 1"/>
+          <p:cNvSpPr>
+            <a:spLocks noGrp="1" noRot="1" noChangeAspect="1"/>
+          </p:cNvSpPr>
+          <p:nvPr>
+            <p:ph type="sldImg"/>
+          </p:nvPr>
+        </p:nvSpPr>
+        <p:spPr/>
+      </p:sp>
+      <p:sp>
+        <p:nvSpPr>
+          <p:cNvPr id="3" name="Notes Placeholder 2"/>
+          <p:cNvSpPr>
+            <a:spLocks noGrp="1"/>
+          </p:cNvSpPr>
+          <p:nvPr>
+            <p:ph type="body" idx="1"/>
+          </p:nvPr>
+        </p:nvSpPr>
+        <p:spPr/>
+        <p:txBody>
+          <a:bodyPr/>
+          <a:lstStyle/>
+          <a:p>
+            <a:endParaRPr lang="en-US" dirty="0"/>
+          </a:p>
+        </p:txBody>
+      </p:sp>
+      <p:sp>
+        <p:nvSpPr>
+          <p:cNvPr id="4" name="Slide Number Placeholder 3"/>
+          <p:cNvSpPr>
+            <a:spLocks noGrp="1"/>
+          </p:cNvSpPr>
+          <p:nvPr>
+            <p:ph type="sldNum" sz="quarter" idx="5"/>
+          </p:nvPr>
+        </p:nvSpPr>
+        <p:spPr/>
+        <p:txBody>
+          <a:bodyPr/>
+          <a:lstStyle/>
+          <a:p>
+            <a:fld id="{1F6B6D16-8807-4B47-A511-DB6453DC6DDE}" type="slidenum">
+              <a:rPr lang="en-US" smtClean="0"/>
+              <a:t>5</a:t>
+            </a:fld>
+            <a:endParaRPr lang="en-US"/>
+          </a:p>
+        </p:txBody>
+      </p:sp>
+    </p:spTree>
+    <p:extLst>
+      <p:ext uri="{BB962C8B-B14F-4D97-AF65-F5344CB8AC3E}">
+        <p14:creationId xmlns:p14="http://schemas.microsoft.com/office/powerpoint/2010/main" val="906764456"/>
       </p:ext>
     </p:extLst>
   </p:cSld>
@@ -1501,7 +3088,7 @@
           <a:p>
             <a:fld id="{74411A3F-4DB3-47ED-809A-CD27B21BFB64}" type="datetimeFigureOut">
               <a:rPr lang="en-US" smtClean="0"/>
-              <a:t>12/8/2025</a:t>
+              <a:t>12/13/2025</a:t>
             </a:fld>
             <a:endParaRPr lang="en-US"/>
           </a:p>
@@ -1751,7 +3338,7 @@
           <a:p>
             <a:fld id="{74411A3F-4DB3-47ED-809A-CD27B21BFB64}" type="datetimeFigureOut">
               <a:rPr lang="en-US" smtClean="0"/>
-              <a:t>12/8/2025</a:t>
+              <a:t>12/13/2025</a:t>
             </a:fld>
             <a:endParaRPr lang="en-US"/>
           </a:p>
@@ -2064,7 +3651,7 @@
           <a:p>
             <a:fld id="{74411A3F-4DB3-47ED-809A-CD27B21BFB64}" type="datetimeFigureOut">
               <a:rPr lang="en-US" smtClean="0"/>
-              <a:t>12/8/2025</a:t>
+              <a:t>12/13/2025</a:t>
             </a:fld>
             <a:endParaRPr lang="en-US"/>
           </a:p>
@@ -2404,7 +3991,7 @@
           <a:p>
             <a:fld id="{74411A3F-4DB3-47ED-809A-CD27B21BFB64}" type="datetimeFigureOut">
               <a:rPr lang="en-US" smtClean="0"/>
-              <a:t>12/8/2025</a:t>
+              <a:t>12/13/2025</a:t>
             </a:fld>
             <a:endParaRPr lang="en-US"/>
           </a:p>
@@ -2717,7 +4304,7 @@
           <a:p>
             <a:fld id="{74411A3F-4DB3-47ED-809A-CD27B21BFB64}" type="datetimeFigureOut">
               <a:rPr lang="en-US" smtClean="0"/>
-              <a:t>12/8/2025</a:t>
+              <a:t>12/13/2025</a:t>
             </a:fld>
             <a:endParaRPr lang="en-US"/>
           </a:p>
@@ -3109,7 +4696,7 @@
           <a:p>
             <a:fld id="{74411A3F-4DB3-47ED-809A-CD27B21BFB64}" type="datetimeFigureOut">
               <a:rPr lang="en-US" smtClean="0"/>
-              <a:t>12/8/2025</a:t>
+              <a:t>12/13/2025</a:t>
             </a:fld>
             <a:endParaRPr lang="en-US"/>
           </a:p>
@@ -3277,7 +4864,7 @@
           <a:p>
             <a:fld id="{74411A3F-4DB3-47ED-809A-CD27B21BFB64}" type="datetimeFigureOut">
               <a:rPr lang="en-US" smtClean="0"/>
-              <a:t>12/8/2025</a:t>
+              <a:t>12/13/2025</a:t>
             </a:fld>
             <a:endParaRPr lang="en-US"/>
           </a:p>
@@ -3455,7 +5042,7 @@
           <a:p>
             <a:fld id="{74411A3F-4DB3-47ED-809A-CD27B21BFB64}" type="datetimeFigureOut">
               <a:rPr lang="en-US" smtClean="0"/>
-              <a:t>12/8/2025</a:t>
+              <a:t>12/13/2025</a:t>
             </a:fld>
             <a:endParaRPr lang="en-US"/>
           </a:p>
@@ -3629,7 +5216,7 @@
           <a:p>
             <a:fld id="{74411A3F-4DB3-47ED-809A-CD27B21BFB64}" type="datetimeFigureOut">
               <a:rPr lang="en-US" smtClean="0"/>
-              <a:t>12/8/2025</a:t>
+              <a:t>12/13/2025</a:t>
             </a:fld>
             <a:endParaRPr lang="en-US"/>
           </a:p>
@@ -3875,7 +5462,7 @@
           <a:p>
             <a:fld id="{74411A3F-4DB3-47ED-809A-CD27B21BFB64}" type="datetimeFigureOut">
               <a:rPr lang="en-US" smtClean="0"/>
-              <a:t>12/8/2025</a:t>
+              <a:t>12/13/2025</a:t>
             </a:fld>
             <a:endParaRPr lang="en-US"/>
           </a:p>
@@ -4104,7 +5691,7 @@
           <a:p>
             <a:fld id="{74411A3F-4DB3-47ED-809A-CD27B21BFB64}" type="datetimeFigureOut">
               <a:rPr lang="en-US" smtClean="0"/>
-              <a:t>12/8/2025</a:t>
+              <a:t>12/13/2025</a:t>
             </a:fld>
             <a:endParaRPr lang="en-US"/>
           </a:p>
@@ -4475,7 +6062,7 @@
           <a:p>
             <a:fld id="{74411A3F-4DB3-47ED-809A-CD27B21BFB64}" type="datetimeFigureOut">
               <a:rPr lang="en-US" smtClean="0"/>
-              <a:t>12/8/2025</a:t>
+              <a:t>12/13/2025</a:t>
             </a:fld>
             <a:endParaRPr lang="en-US"/>
           </a:p>
@@ -4597,7 +6184,7 @@
           <a:p>
             <a:fld id="{74411A3F-4DB3-47ED-809A-CD27B21BFB64}" type="datetimeFigureOut">
               <a:rPr lang="en-US" smtClean="0"/>
-              <a:t>12/8/2025</a:t>
+              <a:t>12/13/2025</a:t>
             </a:fld>
             <a:endParaRPr lang="en-US"/>
           </a:p>
@@ -4692,7 +6279,7 @@
           <a:p>
             <a:fld id="{74411A3F-4DB3-47ED-809A-CD27B21BFB64}" type="datetimeFigureOut">
               <a:rPr lang="en-US" smtClean="0"/>
-              <a:t>12/8/2025</a:t>
+              <a:t>12/13/2025</a:t>
             </a:fld>
             <a:endParaRPr lang="en-US"/>
           </a:p>
@@ -4945,7 +6532,7 @@
           <a:p>
             <a:fld id="{74411A3F-4DB3-47ED-809A-CD27B21BFB64}" type="datetimeFigureOut">
               <a:rPr lang="en-US" smtClean="0"/>
-              <a:t>12/8/2025</a:t>
+              <a:t>12/13/2025</a:t>
             </a:fld>
             <a:endParaRPr lang="en-US"/>
           </a:p>
@@ -5206,7 +6793,7 @@
           <a:p>
             <a:fld id="{74411A3F-4DB3-47ED-809A-CD27B21BFB64}" type="datetimeFigureOut">
               <a:rPr lang="en-US" smtClean="0"/>
-              <a:t>12/8/2025</a:t>
+              <a:t>12/13/2025</a:t>
             </a:fld>
             <a:endParaRPr lang="en-US"/>
           </a:p>
@@ -6003,7 +7590,7 @@
           <a:p>
             <a:fld id="{74411A3F-4DB3-47ED-809A-CD27B21BFB64}" type="datetimeFigureOut">
               <a:rPr lang="en-US" smtClean="0"/>
-              <a:t>12/8/2025</a:t>
+              <a:t>12/13/2025</a:t>
             </a:fld>
             <a:endParaRPr lang="en-US"/>
           </a:p>
@@ -6610,88 +8197,18 @@
         <p:spPr>
           <a:xfrm>
             <a:off x="156225" y="236535"/>
-            <a:ext cx="4209298" cy="580103"/>
+            <a:ext cx="4209298" cy="830997"/>
           </a:xfrm>
         </p:spPr>
         <p:txBody>
           <a:bodyPr>
-            <a:normAutofit fontScale="90000"/>
+            <a:noAutofit/>
           </a:bodyPr>
           <a:lstStyle/>
           <a:p>
             <a:r>
-              <a:rPr lang="en-US"/>
-              <a:t>Business Context</a:t>
-            </a:r>
-          </a:p>
-        </p:txBody>
-      </p:sp>
-      <p:sp>
-        <p:nvSpPr>
-          <p:cNvPr id="3" name="TextBox 2">
-            <a:extLst>
-              <a:ext uri="{FF2B5EF4-FFF2-40B4-BE49-F238E27FC236}">
-                <a16:creationId xmlns:a16="http://schemas.microsoft.com/office/drawing/2014/main" id="{919C429F-5C2B-3714-7281-3EDE68F7C32D}"/>
-              </a:ext>
-            </a:extLst>
-          </p:cNvPr>
-          <p:cNvSpPr txBox="1"/>
-          <p:nvPr/>
-        </p:nvSpPr>
-        <p:spPr>
-          <a:xfrm>
-            <a:off x="2598778" y="1240684"/>
-            <a:ext cx="2786340" cy="461665"/>
-          </a:xfrm>
-          <a:prstGeom prst="rect">
-            <a:avLst/>
-          </a:prstGeom>
-          <a:noFill/>
-        </p:spPr>
-        <p:txBody>
-          <a:bodyPr wrap="none" rtlCol="0">
-            <a:spAutoFit/>
-          </a:bodyPr>
-          <a:lstStyle/>
-          <a:p>
-            <a:r>
-              <a:rPr lang="en-US" sz="2400" b="1"/>
-              <a:t>Repeat Customers</a:t>
-            </a:r>
-          </a:p>
-        </p:txBody>
-      </p:sp>
-      <p:sp>
-        <p:nvSpPr>
-          <p:cNvPr id="10" name="TextBox 9">
-            <a:extLst>
-              <a:ext uri="{FF2B5EF4-FFF2-40B4-BE49-F238E27FC236}">
-                <a16:creationId xmlns:a16="http://schemas.microsoft.com/office/drawing/2014/main" id="{9A195A27-4EA8-1721-3F96-BF7CA2341DA2}"/>
-              </a:ext>
-            </a:extLst>
-          </p:cNvPr>
-          <p:cNvSpPr txBox="1"/>
-          <p:nvPr/>
-        </p:nvSpPr>
-        <p:spPr>
-          <a:xfrm>
-            <a:off x="7138131" y="1243049"/>
-            <a:ext cx="2641877" cy="461665"/>
-          </a:xfrm>
-          <a:prstGeom prst="rect">
-            <a:avLst/>
-          </a:prstGeom>
-          <a:noFill/>
-        </p:spPr>
-        <p:txBody>
-          <a:bodyPr wrap="none" rtlCol="0">
-            <a:spAutoFit/>
-          </a:bodyPr>
-          <a:lstStyle/>
-          <a:p>
-            <a:r>
-              <a:rPr lang="en-US" sz="2400" b="1"/>
-              <a:t>One-Time Buyers</a:t>
+              <a:rPr lang="en-US" sz="2400"/>
+              <a:t>Repeat Customers vs. One-Time Buyers</a:t>
             </a:r>
           </a:p>
         </p:txBody>
@@ -6712,7 +8229,7 @@
         </p:nvCxnSpPr>
         <p:spPr>
           <a:xfrm>
-            <a:off x="6096000" y="1205075"/>
+            <a:off x="6096000" y="1375472"/>
             <a:ext cx="0" cy="3124673"/>
           </a:xfrm>
           <a:prstGeom prst="line">
@@ -6737,6 +8254,42 @@
       </p:cxnSp>
       <p:sp>
         <p:nvSpPr>
+          <p:cNvPr id="3" name="TextBox 2">
+            <a:extLst>
+              <a:ext uri="{FF2B5EF4-FFF2-40B4-BE49-F238E27FC236}">
+                <a16:creationId xmlns:a16="http://schemas.microsoft.com/office/drawing/2014/main" id="{919C429F-5C2B-3714-7281-3EDE68F7C32D}"/>
+              </a:ext>
+            </a:extLst>
+          </p:cNvPr>
+          <p:cNvSpPr txBox="1"/>
+          <p:nvPr/>
+        </p:nvSpPr>
+        <p:spPr>
+          <a:xfrm>
+            <a:off x="3478064" y="1451126"/>
+            <a:ext cx="2053731" cy="646331"/>
+          </a:xfrm>
+          <a:prstGeom prst="rect">
+            <a:avLst/>
+          </a:prstGeom>
+          <a:noFill/>
+        </p:spPr>
+        <p:txBody>
+          <a:bodyPr wrap="square" rtlCol="0">
+            <a:spAutoFit/>
+          </a:bodyPr>
+          <a:lstStyle/>
+          <a:p>
+            <a:pPr algn="ctr"/>
+            <a:r>
+              <a:rPr lang="en-US" b="1"/>
+              <a:t>Repeat Customers</a:t>
+            </a:r>
+          </a:p>
+        </p:txBody>
+      </p:sp>
+      <p:sp>
+        <p:nvSpPr>
           <p:cNvPr id="14" name="TextBox 13">
             <a:extLst>
               <a:ext uri="{FF2B5EF4-FFF2-40B4-BE49-F238E27FC236}">
@@ -6749,8 +8302,8 @@
         </p:nvSpPr>
         <p:spPr>
           <a:xfrm>
-            <a:off x="3561944" y="2952948"/>
-            <a:ext cx="860008" cy="338554"/>
+            <a:off x="3968478" y="2884139"/>
+            <a:ext cx="739402" cy="307777"/>
           </a:xfrm>
           <a:prstGeom prst="rect">
             <a:avLst/>
@@ -6764,43 +8317,8 @@
           <a:lstStyle/>
           <a:p>
             <a:r>
-              <a:rPr lang="en-US" sz="1600" b="1"/>
+              <a:rPr lang="en-US" sz="1400" b="1"/>
               <a:t>$8.4M</a:t>
-            </a:r>
-          </a:p>
-        </p:txBody>
-      </p:sp>
-      <p:sp>
-        <p:nvSpPr>
-          <p:cNvPr id="17" name="TextBox 16">
-            <a:extLst>
-              <a:ext uri="{FF2B5EF4-FFF2-40B4-BE49-F238E27FC236}">
-                <a16:creationId xmlns:a16="http://schemas.microsoft.com/office/drawing/2014/main" id="{4B69FF72-BFBE-406B-E11C-5713E52016B7}"/>
-              </a:ext>
-            </a:extLst>
-          </p:cNvPr>
-          <p:cNvSpPr txBox="1"/>
-          <p:nvPr/>
-        </p:nvSpPr>
-        <p:spPr>
-          <a:xfrm>
-            <a:off x="7770049" y="2952948"/>
-            <a:ext cx="879674" cy="338554"/>
-          </a:xfrm>
-          <a:prstGeom prst="rect">
-            <a:avLst/>
-          </a:prstGeom>
-          <a:noFill/>
-        </p:spPr>
-        <p:txBody>
-          <a:bodyPr wrap="square">
-            <a:spAutoFit/>
-          </a:bodyPr>
-          <a:lstStyle/>
-          <a:p>
-            <a:r>
-              <a:rPr lang="en-US" sz="1600" b="1"/>
-              <a:t>$600K</a:t>
             </a:r>
           </a:p>
         </p:txBody>
@@ -6819,8 +8337,8 @@
         </p:nvSpPr>
         <p:spPr>
           <a:xfrm>
-            <a:off x="3683738" y="3840029"/>
-            <a:ext cx="738214" cy="338554"/>
+            <a:off x="4050467" y="4017269"/>
+            <a:ext cx="610020" cy="307777"/>
           </a:xfrm>
           <a:prstGeom prst="rect">
             <a:avLst/>
@@ -6834,47 +8352,139 @@
           <a:lstStyle/>
           <a:p>
             <a:r>
-              <a:rPr lang="en-US" sz="1600"/>
+              <a:rPr lang="en-US" sz="1400"/>
               <a:t>2845</a:t>
             </a:r>
           </a:p>
         </p:txBody>
       </p:sp>
-      <p:sp>
-        <p:nvSpPr>
-          <p:cNvPr id="21" name="TextBox 20">
+      <p:grpSp>
+        <p:nvGrpSpPr>
+          <p:cNvPr id="9" name="Group 8">
             <a:extLst>
               <a:ext uri="{FF2B5EF4-FFF2-40B4-BE49-F238E27FC236}">
-                <a16:creationId xmlns:a16="http://schemas.microsoft.com/office/drawing/2014/main" id="{F6FDA69B-B0E0-68A4-6E3F-543C1D2F347F}"/>
+                <a16:creationId xmlns:a16="http://schemas.microsoft.com/office/drawing/2014/main" id="{3D4C74FA-BE3B-3F4A-3E74-80B0FFF1E258}"/>
               </a:ext>
             </a:extLst>
           </p:cNvPr>
-          <p:cNvSpPr txBox="1"/>
+          <p:cNvGrpSpPr/>
           <p:nvPr/>
-        </p:nvSpPr>
-        <p:spPr>
+        </p:nvGrpSpPr>
+        <p:grpSpPr>
           <a:xfrm>
-            <a:off x="7852237" y="3842394"/>
-            <a:ext cx="715297" cy="338554"/>
+            <a:off x="6562371" y="1477956"/>
+            <a:ext cx="1916908" cy="2873920"/>
+            <a:chOff x="7012170" y="1485459"/>
+            <a:chExt cx="1916908" cy="2873920"/>
           </a:xfrm>
-          <a:prstGeom prst="rect">
-            <a:avLst/>
-          </a:prstGeom>
-          <a:noFill/>
-        </p:spPr>
-        <p:txBody>
-          <a:bodyPr wrap="square">
-            <a:spAutoFit/>
-          </a:bodyPr>
-          <a:lstStyle/>
-          <a:p>
-            <a:r>
-              <a:rPr lang="en-US" sz="1600"/>
-              <a:t>1494</a:t>
-            </a:r>
-          </a:p>
-        </p:txBody>
-      </p:sp>
+        </p:grpSpPr>
+        <p:sp>
+          <p:nvSpPr>
+            <p:cNvPr id="10" name="TextBox 9">
+              <a:extLst>
+                <a:ext uri="{FF2B5EF4-FFF2-40B4-BE49-F238E27FC236}">
+                  <a16:creationId xmlns:a16="http://schemas.microsoft.com/office/drawing/2014/main" id="{9A195A27-4EA8-1721-3F96-BF7CA2341DA2}"/>
+                </a:ext>
+              </a:extLst>
+            </p:cNvPr>
+            <p:cNvSpPr txBox="1"/>
+            <p:nvPr/>
+          </p:nvSpPr>
+          <p:spPr>
+            <a:xfrm>
+              <a:off x="7012170" y="1485459"/>
+              <a:ext cx="1916908" cy="646331"/>
+            </a:xfrm>
+            <a:prstGeom prst="rect">
+              <a:avLst/>
+            </a:prstGeom>
+            <a:noFill/>
+          </p:spPr>
+          <p:txBody>
+            <a:bodyPr wrap="square" rtlCol="0">
+              <a:spAutoFit/>
+            </a:bodyPr>
+            <a:lstStyle/>
+            <a:p>
+              <a:pPr algn="ctr"/>
+              <a:r>
+                <a:rPr lang="en-US" b="1"/>
+                <a:t>One-Time Buyers</a:t>
+              </a:r>
+            </a:p>
+          </p:txBody>
+        </p:sp>
+        <p:sp>
+          <p:nvSpPr>
+            <p:cNvPr id="17" name="TextBox 16">
+              <a:extLst>
+                <a:ext uri="{FF2B5EF4-FFF2-40B4-BE49-F238E27FC236}">
+                  <a16:creationId xmlns:a16="http://schemas.microsoft.com/office/drawing/2014/main" id="{4B69FF72-BFBE-406B-E11C-5713E52016B7}"/>
+                </a:ext>
+              </a:extLst>
+            </p:cNvPr>
+            <p:cNvSpPr txBox="1"/>
+            <p:nvPr/>
+          </p:nvSpPr>
+          <p:spPr>
+            <a:xfrm>
+              <a:off x="7636913" y="2898322"/>
+              <a:ext cx="718020" cy="307777"/>
+            </a:xfrm>
+            <a:prstGeom prst="rect">
+              <a:avLst/>
+            </a:prstGeom>
+            <a:noFill/>
+          </p:spPr>
+          <p:txBody>
+            <a:bodyPr wrap="square">
+              <a:spAutoFit/>
+            </a:bodyPr>
+            <a:lstStyle/>
+            <a:p>
+              <a:r>
+                <a:rPr lang="en-US" sz="1400" b="1"/>
+                <a:t>$600K</a:t>
+              </a:r>
+            </a:p>
+          </p:txBody>
+        </p:sp>
+        <p:sp>
+          <p:nvSpPr>
+            <p:cNvPr id="21" name="TextBox 20">
+              <a:extLst>
+                <a:ext uri="{FF2B5EF4-FFF2-40B4-BE49-F238E27FC236}">
+                  <a16:creationId xmlns:a16="http://schemas.microsoft.com/office/drawing/2014/main" id="{F6FDA69B-B0E0-68A4-6E3F-543C1D2F347F}"/>
+                </a:ext>
+              </a:extLst>
+            </p:cNvPr>
+            <p:cNvSpPr txBox="1"/>
+            <p:nvPr/>
+          </p:nvSpPr>
+          <p:spPr>
+            <a:xfrm>
+              <a:off x="7692240" y="4051602"/>
+              <a:ext cx="662691" cy="307777"/>
+            </a:xfrm>
+            <a:prstGeom prst="rect">
+              <a:avLst/>
+            </a:prstGeom>
+            <a:noFill/>
+          </p:spPr>
+          <p:txBody>
+            <a:bodyPr wrap="square">
+              <a:spAutoFit/>
+            </a:bodyPr>
+            <a:lstStyle/>
+            <a:p>
+              <a:r>
+                <a:rPr lang="en-US" sz="1400"/>
+                <a:t>1494</a:t>
+              </a:r>
+            </a:p>
+          </p:txBody>
+        </p:sp>
+      </p:grpSp>
       <p:sp>
         <p:nvSpPr>
           <p:cNvPr id="23" name="TextBox 22">
@@ -6889,8 +8499,8 @@
         </p:nvSpPr>
         <p:spPr>
           <a:xfrm>
-            <a:off x="1635612" y="2973139"/>
-            <a:ext cx="1226120" cy="369332"/>
+            <a:off x="1905434" y="2884139"/>
+            <a:ext cx="972861" cy="307777"/>
           </a:xfrm>
           <a:prstGeom prst="rect">
             <a:avLst/>
@@ -6904,7 +8514,7 @@
           <a:lstStyle/>
           <a:p>
             <a:r>
-              <a:rPr lang="en-US" b="1"/>
+              <a:rPr lang="en-US" sz="1400" b="1"/>
               <a:t>Revenue</a:t>
             </a:r>
           </a:p>
@@ -6924,8 +8534,8 @@
         </p:nvSpPr>
         <p:spPr>
           <a:xfrm>
-            <a:off x="1508538" y="3686140"/>
-            <a:ext cx="1584298" cy="646331"/>
+            <a:off x="1401430" y="4017269"/>
+            <a:ext cx="1980868" cy="307777"/>
           </a:xfrm>
           <a:prstGeom prst="rect">
             <a:avLst/>
@@ -6938,9 +8548,10 @@
           </a:bodyPr>
           <a:lstStyle/>
           <a:p>
-            <a:r>
-              <a:rPr lang="en-US" b="1"/>
-              <a:t> Number of Customers</a:t>
+            <a:pPr algn="ctr"/>
+            <a:r>
+              <a:rPr lang="en-US" sz="1400" b="1"/>
+              <a:t>Number of Customers</a:t>
             </a:r>
           </a:p>
         </p:txBody>
@@ -7011,53 +8622,140 @@
           <a:chExt cx="0" cy="0"/>
         </a:xfrm>
       </p:grpSpPr>
-      <p:sp>
-        <p:nvSpPr>
-          <p:cNvPr id="2" name="Title 1">
+      <p:graphicFrame>
+        <p:nvGraphicFramePr>
+          <p:cNvPr id="6" name="Chart 5">
             <a:extLst>
               <a:ext uri="{FF2B5EF4-FFF2-40B4-BE49-F238E27FC236}">
-                <a16:creationId xmlns:a16="http://schemas.microsoft.com/office/drawing/2014/main" id="{1B15FACE-2255-138A-5949-69A528584C32}"/>
+                <a16:creationId xmlns:a16="http://schemas.microsoft.com/office/drawing/2014/main" id="{3F6B7EF6-81DB-8E3D-3AC7-3F9ABC236B5C}"/>
               </a:ext>
             </a:extLst>
           </p:cNvPr>
-          <p:cNvSpPr>
-            <a:spLocks noGrp="1"/>
-          </p:cNvSpPr>
-          <p:nvPr>
-            <p:ph type="title"/>
-          </p:nvPr>
-        </p:nvSpPr>
-        <p:spPr/>
-        <p:txBody>
-          <a:bodyPr/>
-          <a:lstStyle/>
-          <a:p>
-            <a:endParaRPr lang="en-US"/>
-          </a:p>
-        </p:txBody>
-      </p:sp>
-      <p:sp>
-        <p:nvSpPr>
-          <p:cNvPr id="3" name="Content Placeholder 2">
+          <p:cNvGraphicFramePr>
+            <a:graphicFrameLocks/>
+          </p:cNvGraphicFramePr>
+          <p:nvPr>
+            <p:extLst>
+              <p:ext uri="{D42A27DB-BD31-4B8C-83A1-F6EECF244321}">
+                <p14:modId xmlns:p14="http://schemas.microsoft.com/office/powerpoint/2010/main" val="3883312639"/>
+              </p:ext>
+            </p:extLst>
+          </p:nvPr>
+        </p:nvGraphicFramePr>
+        <p:xfrm>
+          <a:off x="1413114" y="1110415"/>
+          <a:ext cx="9365771" cy="3676478"/>
+        </p:xfrm>
+        <a:graphic>
+          <a:graphicData uri="http://schemas.openxmlformats.org/drawingml/2006/chart">
+            <c:chart xmlns:c="http://schemas.openxmlformats.org/drawingml/2006/chart" xmlns:r="http://schemas.openxmlformats.org/officeDocument/2006/relationships" r:id="rId2"/>
+          </a:graphicData>
+        </a:graphic>
+      </p:graphicFrame>
+      <p:sp>
+        <p:nvSpPr>
+          <p:cNvPr id="4" name="TextBox 3">
             <a:extLst>
               <a:ext uri="{FF2B5EF4-FFF2-40B4-BE49-F238E27FC236}">
-                <a16:creationId xmlns:a16="http://schemas.microsoft.com/office/drawing/2014/main" id="{CC14CC32-C534-49C6-FCB1-378613075213}"/>
+                <a16:creationId xmlns:a16="http://schemas.microsoft.com/office/drawing/2014/main" id="{B0766AAF-2B3E-AD6E-4751-B0E7E1DA740E}"/>
               </a:ext>
             </a:extLst>
           </p:cNvPr>
-          <p:cNvSpPr>
-            <a:spLocks noGrp="1"/>
-          </p:cNvSpPr>
-          <p:nvPr>
-            <p:ph idx="1"/>
-          </p:nvPr>
-        </p:nvSpPr>
-        <p:spPr/>
-        <p:txBody>
-          <a:bodyPr/>
+          <p:cNvSpPr txBox="1"/>
+          <p:nvPr/>
+        </p:nvSpPr>
+        <p:spPr>
+          <a:xfrm>
+            <a:off x="1413115" y="5166102"/>
+            <a:ext cx="9982472" cy="707886"/>
+          </a:xfrm>
+          <a:prstGeom prst="rect">
+            <a:avLst/>
+          </a:prstGeom>
+          <a:noFill/>
+        </p:spPr>
+        <p:txBody>
+          <a:bodyPr wrap="square" rtlCol="0">
+            <a:spAutoFit/>
+          </a:bodyPr>
           <a:lstStyle/>
           <a:p>
-            <a:endParaRPr lang="en-US"/>
+            <a:pPr algn="ctr"/>
+            <a:r>
+              <a:rPr lang="en-US" sz="2000" dirty="0"/>
+              <a:t>To sustain the growth of returning customers, we must understand customer retention and churn behaviors</a:t>
+            </a:r>
+          </a:p>
+        </p:txBody>
+      </p:sp>
+      <p:sp>
+        <p:nvSpPr>
+          <p:cNvPr id="8" name="Title 1">
+            <a:extLst>
+              <a:ext uri="{FF2B5EF4-FFF2-40B4-BE49-F238E27FC236}">
+                <a16:creationId xmlns:a16="http://schemas.microsoft.com/office/drawing/2014/main" id="{672139E3-B1CA-8CC6-9E24-7512BE5CE0AE}"/>
+              </a:ext>
+            </a:extLst>
+          </p:cNvPr>
+          <p:cNvSpPr>
+            <a:spLocks noGrp="1"/>
+          </p:cNvSpPr>
+          <p:nvPr>
+            <p:ph type="title"/>
+          </p:nvPr>
+        </p:nvSpPr>
+        <p:spPr>
+          <a:xfrm>
+            <a:off x="126728" y="151103"/>
+            <a:ext cx="4917220" cy="580103"/>
+          </a:xfrm>
+        </p:spPr>
+        <p:txBody>
+          <a:bodyPr>
+            <a:noAutofit/>
+          </a:bodyPr>
+          <a:lstStyle/>
+          <a:p>
+            <a:r>
+              <a:rPr lang="en-US" sz="2400"/>
+              <a:t>Growth driven by Returning Customers</a:t>
+            </a:r>
+          </a:p>
+        </p:txBody>
+      </p:sp>
+      <p:sp>
+        <p:nvSpPr>
+          <p:cNvPr id="2" name="TextBox 1">
+            <a:extLst>
+              <a:ext uri="{FF2B5EF4-FFF2-40B4-BE49-F238E27FC236}">
+                <a16:creationId xmlns:a16="http://schemas.microsoft.com/office/drawing/2014/main" id="{030A29F2-43E6-A0BD-7F79-6B5DDECF4C7E}"/>
+              </a:ext>
+            </a:extLst>
+          </p:cNvPr>
+          <p:cNvSpPr txBox="1"/>
+          <p:nvPr/>
+        </p:nvSpPr>
+        <p:spPr>
+          <a:xfrm>
+            <a:off x="1104763" y="6053142"/>
+            <a:ext cx="9982472" cy="400110"/>
+          </a:xfrm>
+          <a:prstGeom prst="rect">
+            <a:avLst/>
+          </a:prstGeom>
+          <a:noFill/>
+        </p:spPr>
+        <p:txBody>
+          <a:bodyPr wrap="square" rtlCol="0">
+            <a:spAutoFit/>
+          </a:bodyPr>
+          <a:lstStyle/>
+          <a:p>
+            <a:pPr algn="ctr"/>
+            <a:r>
+              <a:rPr lang="en-US" sz="2000" dirty="0"/>
+              <a:t>Returning customers are becoming an increasingly more important revenue driver </a:t>
+            </a:r>
           </a:p>
         </p:txBody>
       </p:sp>
@@ -7065,6 +8763,434 @@
     <p:extLst>
       <p:ext uri="{BB962C8B-B14F-4D97-AF65-F5344CB8AC3E}">
         <p14:creationId xmlns:p14="http://schemas.microsoft.com/office/powerpoint/2010/main" val="1201758319"/>
+      </p:ext>
+    </p:extLst>
+  </p:cSld>
+  <p:clrMapOvr>
+    <a:masterClrMapping/>
+  </p:clrMapOvr>
+</p:sld>
+</file>
+
+<file path=ppt/slides/slide4.xml><?xml version="1.0" encoding="utf-8"?>
+<p:sld xmlns:a="http://schemas.openxmlformats.org/drawingml/2006/main" xmlns:r="http://schemas.openxmlformats.org/officeDocument/2006/relationships" xmlns:p="http://schemas.openxmlformats.org/presentationml/2006/main">
+  <p:cSld>
+    <p:spTree>
+      <p:nvGrpSpPr>
+        <p:cNvPr id="1" name=""/>
+        <p:cNvGrpSpPr/>
+        <p:nvPr/>
+      </p:nvGrpSpPr>
+      <p:grpSpPr>
+        <a:xfrm>
+          <a:off x="0" y="0"/>
+          <a:ext cx="0" cy="0"/>
+          <a:chOff x="0" y="0"/>
+          <a:chExt cx="0" cy="0"/>
+        </a:xfrm>
+      </p:grpSpPr>
+      <p:sp>
+        <p:nvSpPr>
+          <p:cNvPr id="14" name="Title 1">
+            <a:extLst>
+              <a:ext uri="{FF2B5EF4-FFF2-40B4-BE49-F238E27FC236}">
+                <a16:creationId xmlns:a16="http://schemas.microsoft.com/office/drawing/2014/main" id="{04F140DE-E0A3-024D-3F34-D5FF4EBA6563}"/>
+              </a:ext>
+            </a:extLst>
+          </p:cNvPr>
+          <p:cNvSpPr>
+            <a:spLocks noGrp="1"/>
+          </p:cNvSpPr>
+          <p:nvPr>
+            <p:ph type="title"/>
+          </p:nvPr>
+        </p:nvSpPr>
+        <p:spPr>
+          <a:xfrm>
+            <a:off x="126728" y="151103"/>
+            <a:ext cx="4917220" cy="891116"/>
+          </a:xfrm>
+        </p:spPr>
+        <p:txBody>
+          <a:bodyPr>
+            <a:noAutofit/>
+          </a:bodyPr>
+          <a:lstStyle/>
+          <a:p>
+            <a:r>
+              <a:rPr lang="en-US" sz="2400" dirty="0"/>
+              <a:t>Most Customers churn within the first 3 months</a:t>
+            </a:r>
+          </a:p>
+        </p:txBody>
+      </p:sp>
+      <p:sp>
+        <p:nvSpPr>
+          <p:cNvPr id="20" name="TextBox 19">
+            <a:extLst>
+              <a:ext uri="{FF2B5EF4-FFF2-40B4-BE49-F238E27FC236}">
+                <a16:creationId xmlns:a16="http://schemas.microsoft.com/office/drawing/2014/main" id="{AFDB625E-7765-A5E4-723B-70D4D991BF09}"/>
+              </a:ext>
+            </a:extLst>
+          </p:cNvPr>
+          <p:cNvSpPr txBox="1"/>
+          <p:nvPr/>
+        </p:nvSpPr>
+        <p:spPr>
+          <a:xfrm>
+            <a:off x="1533832" y="4826675"/>
+            <a:ext cx="9124336" cy="2031325"/>
+          </a:xfrm>
+          <a:prstGeom prst="rect">
+            <a:avLst/>
+          </a:prstGeom>
+          <a:noFill/>
+        </p:spPr>
+        <p:txBody>
+          <a:bodyPr wrap="square" rtlCol="0">
+            <a:spAutoFit/>
+          </a:bodyPr>
+          <a:lstStyle/>
+          <a:p>
+            <a:pPr algn="ctr"/>
+            <a:r>
+              <a:rPr lang="en-US" dirty="0"/>
+              <a:t>79% of Customers churn after the first month </a:t>
+            </a:r>
+          </a:p>
+          <a:p>
+            <a:pPr algn="ctr"/>
+            <a:endParaRPr lang="en-US" dirty="0"/>
+          </a:p>
+          <a:p>
+            <a:pPr algn="ctr"/>
+            <a:r>
+              <a:rPr lang="en-US" dirty="0"/>
+              <a:t>Retention generally improves in months 5-7</a:t>
+            </a:r>
+          </a:p>
+          <a:p>
+            <a:pPr algn="ctr"/>
+            <a:endParaRPr lang="en-US" dirty="0"/>
+          </a:p>
+          <a:p>
+            <a:pPr algn="ctr"/>
+            <a:r>
+              <a:rPr lang="en-US" dirty="0"/>
+              <a:t>Retention varies widely by cohort, signifying inconsistent customer experience </a:t>
+            </a:r>
+          </a:p>
+          <a:p>
+            <a:pPr algn="ctr"/>
+            <a:endParaRPr lang="en-US" dirty="0"/>
+          </a:p>
+          <a:p>
+            <a:pPr algn="ctr"/>
+            <a:endParaRPr lang="en-US" dirty="0"/>
+          </a:p>
+        </p:txBody>
+      </p:sp>
+      <p:sp>
+        <p:nvSpPr>
+          <p:cNvPr id="21" name="TextBox 20">
+            <a:extLst>
+              <a:ext uri="{FF2B5EF4-FFF2-40B4-BE49-F238E27FC236}">
+                <a16:creationId xmlns:a16="http://schemas.microsoft.com/office/drawing/2014/main" id="{B65BD222-C80C-C118-817D-E583CE1BD587}"/>
+              </a:ext>
+            </a:extLst>
+          </p:cNvPr>
+          <p:cNvSpPr txBox="1"/>
+          <p:nvPr/>
+        </p:nvSpPr>
+        <p:spPr>
+          <a:xfrm>
+            <a:off x="3818390" y="1069569"/>
+            <a:ext cx="4555221" cy="369332"/>
+          </a:xfrm>
+          <a:prstGeom prst="rect">
+            <a:avLst/>
+          </a:prstGeom>
+          <a:noFill/>
+        </p:spPr>
+        <p:txBody>
+          <a:bodyPr wrap="none" rtlCol="0">
+            <a:spAutoFit/>
+          </a:bodyPr>
+          <a:lstStyle/>
+          <a:p>
+            <a:r>
+              <a:rPr lang="en-US"/>
+              <a:t>Percentage change in Customer Per Month</a:t>
+            </a:r>
+          </a:p>
+        </p:txBody>
+      </p:sp>
+      <p:pic>
+        <p:nvPicPr>
+          <p:cNvPr id="27" name="Picture 26" descr="A graph with numbers and percentages&#10;&#10;AI-generated content may be incorrect.">
+            <a:extLst>
+              <a:ext uri="{FF2B5EF4-FFF2-40B4-BE49-F238E27FC236}">
+                <a16:creationId xmlns:a16="http://schemas.microsoft.com/office/drawing/2014/main" id="{3ED2E026-1164-F8DB-1417-AB07C60BCD94}"/>
+              </a:ext>
+            </a:extLst>
+          </p:cNvPr>
+          <p:cNvPicPr>
+            <a:picLocks noChangeAspect="1"/>
+          </p:cNvPicPr>
+          <p:nvPr/>
+        </p:nvPicPr>
+        <p:blipFill>
+          <a:blip r:embed="rId2"/>
+          <a:stretch>
+            <a:fillRect/>
+          </a:stretch>
+        </p:blipFill>
+        <p:spPr>
+          <a:xfrm>
+            <a:off x="1292300" y="1567482"/>
+            <a:ext cx="9607400" cy="3249562"/>
+          </a:xfrm>
+          <a:prstGeom prst="rect">
+            <a:avLst/>
+          </a:prstGeom>
+        </p:spPr>
+      </p:pic>
+    </p:spTree>
+    <p:extLst>
+      <p:ext uri="{BB962C8B-B14F-4D97-AF65-F5344CB8AC3E}">
+        <p14:creationId xmlns:p14="http://schemas.microsoft.com/office/powerpoint/2010/main" val="2199859215"/>
+      </p:ext>
+    </p:extLst>
+  </p:cSld>
+  <p:clrMapOvr>
+    <a:masterClrMapping/>
+  </p:clrMapOvr>
+</p:sld>
+</file>
+
+<file path=ppt/slides/slide5.xml><?xml version="1.0" encoding="utf-8"?>
+<p:sld xmlns:a="http://schemas.openxmlformats.org/drawingml/2006/main" xmlns:r="http://schemas.openxmlformats.org/officeDocument/2006/relationships" xmlns:p="http://schemas.openxmlformats.org/presentationml/2006/main">
+  <p:cSld>
+    <p:spTree>
+      <p:nvGrpSpPr>
+        <p:cNvPr id="1" name=""/>
+        <p:cNvGrpSpPr/>
+        <p:nvPr/>
+      </p:nvGrpSpPr>
+      <p:grpSpPr>
+        <a:xfrm>
+          <a:off x="0" y="0"/>
+          <a:ext cx="0" cy="0"/>
+          <a:chOff x="0" y="0"/>
+          <a:chExt cx="0" cy="0"/>
+        </a:xfrm>
+      </p:grpSpPr>
+      <p:pic>
+        <p:nvPicPr>
+          <p:cNvPr id="11" name="Picture 10" descr="A screenshot of a graph&#10;&#10;AI-generated content may be incorrect.">
+            <a:extLst>
+              <a:ext uri="{FF2B5EF4-FFF2-40B4-BE49-F238E27FC236}">
+                <a16:creationId xmlns:a16="http://schemas.microsoft.com/office/drawing/2014/main" id="{D15C045D-2C4A-5DE4-9401-D87936C74347}"/>
+              </a:ext>
+            </a:extLst>
+          </p:cNvPr>
+          <p:cNvPicPr>
+            <a:picLocks noChangeAspect="1"/>
+          </p:cNvPicPr>
+          <p:nvPr/>
+        </p:nvPicPr>
+        <p:blipFill>
+          <a:blip r:embed="rId3"/>
+          <a:stretch>
+            <a:fillRect/>
+          </a:stretch>
+        </p:blipFill>
+        <p:spPr>
+          <a:xfrm>
+            <a:off x="685045" y="2028629"/>
+            <a:ext cx="10821910" cy="2800741"/>
+          </a:xfrm>
+          <a:prstGeom prst="rect">
+            <a:avLst/>
+          </a:prstGeom>
+        </p:spPr>
+      </p:pic>
+      <p:sp>
+        <p:nvSpPr>
+          <p:cNvPr id="12" name="Title 1">
+            <a:extLst>
+              <a:ext uri="{FF2B5EF4-FFF2-40B4-BE49-F238E27FC236}">
+                <a16:creationId xmlns:a16="http://schemas.microsoft.com/office/drawing/2014/main" id="{009599A0-8BEE-E10F-54F5-BE1CE508E0A9}"/>
+              </a:ext>
+            </a:extLst>
+          </p:cNvPr>
+          <p:cNvSpPr>
+            <a:spLocks noGrp="1"/>
+          </p:cNvSpPr>
+          <p:nvPr>
+            <p:ph type="title"/>
+          </p:nvPr>
+        </p:nvSpPr>
+        <p:spPr>
+          <a:xfrm>
+            <a:off x="126728" y="151103"/>
+            <a:ext cx="4917220" cy="891116"/>
+          </a:xfrm>
+        </p:spPr>
+        <p:txBody>
+          <a:bodyPr>
+            <a:noAutofit/>
+          </a:bodyPr>
+          <a:lstStyle/>
+          <a:p>
+            <a:r>
+              <a:rPr lang="en-US" sz="2400" dirty="0"/>
+              <a:t>Most Revenue is driven by a small customer group</a:t>
+            </a:r>
+          </a:p>
+        </p:txBody>
+      </p:sp>
+      <p:sp>
+        <p:nvSpPr>
+          <p:cNvPr id="13" name="TextBox 12">
+            <a:extLst>
+              <a:ext uri="{FF2B5EF4-FFF2-40B4-BE49-F238E27FC236}">
+                <a16:creationId xmlns:a16="http://schemas.microsoft.com/office/drawing/2014/main" id="{7C74998D-4E22-C14D-5840-D965F19B83B1}"/>
+              </a:ext>
+            </a:extLst>
+          </p:cNvPr>
+          <p:cNvSpPr txBox="1"/>
+          <p:nvPr/>
+        </p:nvSpPr>
+        <p:spPr>
+          <a:xfrm>
+            <a:off x="685045" y="5515896"/>
+            <a:ext cx="6449961" cy="923330"/>
+          </a:xfrm>
+          <a:prstGeom prst="rect">
+            <a:avLst/>
+          </a:prstGeom>
+          <a:noFill/>
+        </p:spPr>
+        <p:txBody>
+          <a:bodyPr wrap="square" rtlCol="0">
+            <a:spAutoFit/>
+          </a:bodyPr>
+          <a:lstStyle/>
+          <a:p>
+            <a:pPr algn="ctr"/>
+            <a:r>
+              <a:rPr lang="en-US" dirty="0"/>
+              <a:t>Nearly half of our customers are either “Lost” or “At-Risk High Value,” representing the largest opportunity for retention </a:t>
+            </a:r>
+          </a:p>
+        </p:txBody>
+      </p:sp>
+      <p:sp>
+        <p:nvSpPr>
+          <p:cNvPr id="14" name="TextBox 13">
+            <a:extLst>
+              <a:ext uri="{FF2B5EF4-FFF2-40B4-BE49-F238E27FC236}">
+                <a16:creationId xmlns:a16="http://schemas.microsoft.com/office/drawing/2014/main" id="{77FF48D3-557A-B22F-DFAB-BF9A0E988FBF}"/>
+              </a:ext>
+            </a:extLst>
+          </p:cNvPr>
+          <p:cNvSpPr txBox="1"/>
+          <p:nvPr/>
+        </p:nvSpPr>
+        <p:spPr>
+          <a:xfrm>
+            <a:off x="7872425" y="5515896"/>
+            <a:ext cx="3634530" cy="923330"/>
+          </a:xfrm>
+          <a:prstGeom prst="rect">
+            <a:avLst/>
+          </a:prstGeom>
+          <a:noFill/>
+        </p:spPr>
+        <p:txBody>
+          <a:bodyPr wrap="square" rtlCol="0">
+            <a:spAutoFit/>
+          </a:bodyPr>
+          <a:lstStyle/>
+          <a:p>
+            <a:pPr algn="ctr"/>
+            <a:r>
+              <a:rPr lang="en-US" dirty="0"/>
+              <a:t>These two groups make up over 20% of revenue, providing the biggest growth potential</a:t>
+            </a:r>
+          </a:p>
+        </p:txBody>
+      </p:sp>
+    </p:spTree>
+    <p:extLst>
+      <p:ext uri="{BB962C8B-B14F-4D97-AF65-F5344CB8AC3E}">
+        <p14:creationId xmlns:p14="http://schemas.microsoft.com/office/powerpoint/2010/main" val="3564352135"/>
+      </p:ext>
+    </p:extLst>
+  </p:cSld>
+  <p:clrMapOvr>
+    <a:masterClrMapping/>
+  </p:clrMapOvr>
+</p:sld>
+</file>
+
+<file path=ppt/slides/slide6.xml><?xml version="1.0" encoding="utf-8"?>
+<p:sld xmlns:a="http://schemas.openxmlformats.org/drawingml/2006/main" xmlns:r="http://schemas.openxmlformats.org/officeDocument/2006/relationships" xmlns:p="http://schemas.openxmlformats.org/presentationml/2006/main">
+  <p:cSld>
+    <p:spTree>
+      <p:nvGrpSpPr>
+        <p:cNvPr id="1" name=""/>
+        <p:cNvGrpSpPr/>
+        <p:nvPr/>
+      </p:nvGrpSpPr>
+      <p:grpSpPr>
+        <a:xfrm>
+          <a:off x="0" y="0"/>
+          <a:ext cx="0" cy="0"/>
+          <a:chOff x="0" y="0"/>
+          <a:chExt cx="0" cy="0"/>
+        </a:xfrm>
+      </p:grpSpPr>
+      <p:sp>
+        <p:nvSpPr>
+          <p:cNvPr id="5" name="Title 1">
+            <a:extLst>
+              <a:ext uri="{FF2B5EF4-FFF2-40B4-BE49-F238E27FC236}">
+                <a16:creationId xmlns:a16="http://schemas.microsoft.com/office/drawing/2014/main" id="{169B1C97-AA5B-69E9-2059-E2997052D437}"/>
+              </a:ext>
+            </a:extLst>
+          </p:cNvPr>
+          <p:cNvSpPr>
+            <a:spLocks noGrp="1"/>
+          </p:cNvSpPr>
+          <p:nvPr>
+            <p:ph type="title"/>
+          </p:nvPr>
+        </p:nvSpPr>
+        <p:spPr>
+          <a:xfrm>
+            <a:off x="126728" y="151103"/>
+            <a:ext cx="4917220" cy="891116"/>
+          </a:xfrm>
+        </p:spPr>
+        <p:txBody>
+          <a:bodyPr>
+            <a:noAutofit/>
+          </a:bodyPr>
+          <a:lstStyle/>
+          <a:p>
+            <a:r>
+              <a:rPr lang="en-US" sz="2400" dirty="0"/>
+              <a:t>Customers are considered churned after 86 days</a:t>
+            </a:r>
+          </a:p>
+        </p:txBody>
+      </p:sp>
+    </p:spTree>
+    <p:extLst>
+      <p:ext uri="{BB962C8B-B14F-4D97-AF65-F5344CB8AC3E}">
+        <p14:creationId xmlns:p14="http://schemas.microsoft.com/office/powerpoint/2010/main" val="3083110177"/>
       </p:ext>
     </p:extLst>
   </p:cSld>

--- a/Customer Retention Analysis.pptx
+++ b/Customer Retention Analysis.pptx
@@ -5,7 +5,7 @@
     <p:sldMasterId id="2147483660" r:id="rId1"/>
   </p:sldMasterIdLst>
   <p:notesMasterIdLst>
-    <p:notesMasterId r:id="rId8"/>
+    <p:notesMasterId r:id="rId9"/>
   </p:notesMasterIdLst>
   <p:sldIdLst>
     <p:sldId id="256" r:id="rId2"/>
@@ -14,6 +14,7 @@
     <p:sldId id="259" r:id="rId5"/>
     <p:sldId id="260" r:id="rId6"/>
     <p:sldId id="261" r:id="rId7"/>
+    <p:sldId id="262" r:id="rId8"/>
   </p:sldIdLst>
   <p:sldSz cx="12192000" cy="6858000"/>
   <p:notesSz cx="6858000" cy="9144000"/>
@@ -123,7 +124,7 @@
 <file path=ppt/revisionInfo.xml><?xml version="1.0" encoding="utf-8"?>
 <p1510:revInfo xmlns:a="http://schemas.openxmlformats.org/drawingml/2006/main" xmlns:r="http://schemas.openxmlformats.org/officeDocument/2006/relationships" xmlns:p1510="http://schemas.microsoft.com/office/powerpoint/2015/10/main">
   <p1510:revLst>
-    <p1510:client id="{708AB096-502C-4CC0-9240-ACA9084E787F}" v="2722" dt="2025-12-14T06:01:05.040"/>
+    <p1510:client id="{708AB096-502C-4CC0-9240-ACA9084E787F}" v="2723" dt="2025-12-15T05:03:49.977"/>
   </p1510:revLst>
 </p1510:revInfo>
 </file>
@@ -133,7 +134,7 @@
   <pc:docChgLst>
     <pc:chgData name="Henry Vo" userId="c18cca123e130253" providerId="LiveId" clId="{CBED1F73-AEB6-48AF-B30C-D6CFC8A51246}"/>
     <pc:docChg chg="undo custSel addSld modSld">
-      <pc:chgData name="Henry Vo" userId="c18cca123e130253" providerId="LiveId" clId="{CBED1F73-AEB6-48AF-B30C-D6CFC8A51246}" dt="2025-12-14T06:01:11.482" v="3630" actId="20577"/>
+      <pc:chgData name="Henry Vo" userId="c18cca123e130253" providerId="LiveId" clId="{CBED1F73-AEB6-48AF-B30C-D6CFC8A51246}" dt="2025-12-15T05:15:40.175" v="4174" actId="113"/>
       <pc:docMkLst>
         <pc:docMk/>
       </pc:docMkLst>
@@ -256,13 +257,13 @@
         </pc:cxnChg>
       </pc:sldChg>
       <pc:sldChg chg="addSp delSp modSp new mod">
-        <pc:chgData name="Henry Vo" userId="c18cca123e130253" providerId="LiveId" clId="{CBED1F73-AEB6-48AF-B30C-D6CFC8A51246}" dt="2025-12-10T15:13:53.914" v="2911" actId="1076"/>
+        <pc:chgData name="Henry Vo" userId="c18cca123e130253" providerId="LiveId" clId="{CBED1F73-AEB6-48AF-B30C-D6CFC8A51246}" dt="2025-12-15T05:14:27.898" v="4156" actId="1076"/>
         <pc:sldMkLst>
           <pc:docMk/>
           <pc:sldMk cId="1201758319" sldId="258"/>
         </pc:sldMkLst>
         <pc:spChg chg="add mod">
-          <ac:chgData name="Henry Vo" userId="c18cca123e130253" providerId="LiveId" clId="{CBED1F73-AEB6-48AF-B30C-D6CFC8A51246}" dt="2025-12-10T15:13:53.914" v="2911" actId="1076"/>
+          <ac:chgData name="Henry Vo" userId="c18cca123e130253" providerId="LiveId" clId="{CBED1F73-AEB6-48AF-B30C-D6CFC8A51246}" dt="2025-12-15T05:14:27.898" v="4156" actId="1076"/>
           <ac:spMkLst>
             <pc:docMk/>
             <pc:sldMk cId="1201758319" sldId="258"/>
@@ -270,7 +271,7 @@
           </ac:spMkLst>
         </pc:spChg>
         <pc:spChg chg="add mod">
-          <ac:chgData name="Henry Vo" userId="c18cca123e130253" providerId="LiveId" clId="{CBED1F73-AEB6-48AF-B30C-D6CFC8A51246}" dt="2025-12-09T04:08:36.021" v="1962" actId="20577"/>
+          <ac:chgData name="Henry Vo" userId="c18cca123e130253" providerId="LiveId" clId="{CBED1F73-AEB6-48AF-B30C-D6CFC8A51246}" dt="2025-12-15T05:14:25.113" v="4155" actId="1076"/>
           <ac:spMkLst>
             <pc:docMk/>
             <pc:sldMk cId="1201758319" sldId="258"/>
@@ -295,7 +296,7 @@
         </pc:graphicFrameChg>
       </pc:sldChg>
       <pc:sldChg chg="addSp delSp modSp new mod">
-        <pc:chgData name="Henry Vo" userId="c18cca123e130253" providerId="LiveId" clId="{CBED1F73-AEB6-48AF-B30C-D6CFC8A51246}" dt="2025-12-10T15:12:49.657" v="2746" actId="1076"/>
+        <pc:chgData name="Henry Vo" userId="c18cca123e130253" providerId="LiveId" clId="{CBED1F73-AEB6-48AF-B30C-D6CFC8A51246}" dt="2025-12-15T05:15:40.175" v="4174" actId="113"/>
         <pc:sldMkLst>
           <pc:docMk/>
           <pc:sldMk cId="2199859215" sldId="259"/>
@@ -309,7 +310,7 @@
           </ac:spMkLst>
         </pc:spChg>
         <pc:spChg chg="add mod">
-          <ac:chgData name="Henry Vo" userId="c18cca123e130253" providerId="LiveId" clId="{CBED1F73-AEB6-48AF-B30C-D6CFC8A51246}" dt="2025-12-10T15:12:49.657" v="2746" actId="1076"/>
+          <ac:chgData name="Henry Vo" userId="c18cca123e130253" providerId="LiveId" clId="{CBED1F73-AEB6-48AF-B30C-D6CFC8A51246}" dt="2025-12-15T05:15:40.175" v="4174" actId="113"/>
           <ac:spMkLst>
             <pc:docMk/>
             <pc:sldMk cId="2199859215" sldId="259"/>
@@ -334,7 +335,7 @@
         </pc:picChg>
       </pc:sldChg>
       <pc:sldChg chg="addSp delSp modSp new mod">
-        <pc:chgData name="Henry Vo" userId="c18cca123e130253" providerId="LiveId" clId="{CBED1F73-AEB6-48AF-B30C-D6CFC8A51246}" dt="2025-12-10T15:46:37.961" v="3578" actId="20577"/>
+        <pc:chgData name="Henry Vo" userId="c18cca123e130253" providerId="LiveId" clId="{CBED1F73-AEB6-48AF-B30C-D6CFC8A51246}" dt="2025-12-15T05:15:32.675" v="4172" actId="113"/>
         <pc:sldMkLst>
           <pc:docMk/>
           <pc:sldMk cId="3564352135" sldId="260"/>
@@ -348,7 +349,7 @@
           </ac:spMkLst>
         </pc:spChg>
         <pc:spChg chg="add mod">
-          <ac:chgData name="Henry Vo" userId="c18cca123e130253" providerId="LiveId" clId="{CBED1F73-AEB6-48AF-B30C-D6CFC8A51246}" dt="2025-12-10T15:43:46.124" v="3572" actId="1076"/>
+          <ac:chgData name="Henry Vo" userId="c18cca123e130253" providerId="LiveId" clId="{CBED1F73-AEB6-48AF-B30C-D6CFC8A51246}" dt="2025-12-15T05:15:26.980" v="4171" actId="113"/>
           <ac:spMkLst>
             <pc:docMk/>
             <pc:sldMk cId="3564352135" sldId="260"/>
@@ -356,7 +357,7 @@
           </ac:spMkLst>
         </pc:spChg>
         <pc:spChg chg="add mod">
-          <ac:chgData name="Henry Vo" userId="c18cca123e130253" providerId="LiveId" clId="{CBED1F73-AEB6-48AF-B30C-D6CFC8A51246}" dt="2025-12-10T15:43:49.194" v="3573" actId="14100"/>
+          <ac:chgData name="Henry Vo" userId="c18cca123e130253" providerId="LiveId" clId="{CBED1F73-AEB6-48AF-B30C-D6CFC8A51246}" dt="2025-12-15T05:15:32.675" v="4172" actId="113"/>
           <ac:spMkLst>
             <pc:docMk/>
             <pc:sldMk cId="3564352135" sldId="260"/>
@@ -364,7 +365,7 @@
           </ac:spMkLst>
         </pc:spChg>
         <pc:picChg chg="add del mod">
-          <ac:chgData name="Henry Vo" userId="c18cca123e130253" providerId="LiveId" clId="{CBED1F73-AEB6-48AF-B30C-D6CFC8A51246}" dt="2025-12-10T15:44:13.628" v="3575" actId="478"/>
+          <ac:chgData name="Henry Vo" userId="c18cca123e130253" providerId="LiveId" clId="{CBED1F73-AEB6-48AF-B30C-D6CFC8A51246}" dt="2025-12-15T05:10:16.103" v="4140" actId="1076"/>
           <ac:picMkLst>
             <pc:docMk/>
             <pc:sldMk cId="3564352135" sldId="260"/>
@@ -373,7 +374,7 @@
         </pc:picChg>
       </pc:sldChg>
       <pc:sldChg chg="addSp delSp modSp new mod">
-        <pc:chgData name="Henry Vo" userId="c18cca123e130253" providerId="LiveId" clId="{CBED1F73-AEB6-48AF-B30C-D6CFC8A51246}" dt="2025-12-14T06:01:11.482" v="3630" actId="20577"/>
+        <pc:chgData name="Henry Vo" userId="c18cca123e130253" providerId="LiveId" clId="{CBED1F73-AEB6-48AF-B30C-D6CFC8A51246}" dt="2025-12-15T05:15:16.388" v="4168" actId="113"/>
         <pc:sldMkLst>
           <pc:docMk/>
           <pc:sldMk cId="3083110177" sldId="261"/>
@@ -403,13 +404,60 @@
           </ac:spMkLst>
         </pc:spChg>
         <pc:spChg chg="add mod">
-          <ac:chgData name="Henry Vo" userId="c18cca123e130253" providerId="LiveId" clId="{CBED1F73-AEB6-48AF-B30C-D6CFC8A51246}" dt="2025-12-14T06:01:11.482" v="3630" actId="20577"/>
+          <ac:chgData name="Henry Vo" userId="c18cca123e130253" providerId="LiveId" clId="{CBED1F73-AEB6-48AF-B30C-D6CFC8A51246}" dt="2025-12-15T05:03:30.850" v="3654" actId="20577"/>
           <ac:spMkLst>
             <pc:docMk/>
             <pc:sldMk cId="3083110177" sldId="261"/>
             <ac:spMk id="5" creationId="{169B1C97-AA5B-69E9-2059-E2997052D437}"/>
           </ac:spMkLst>
         </pc:spChg>
+        <pc:spChg chg="add mod">
+          <ac:chgData name="Henry Vo" userId="c18cca123e130253" providerId="LiveId" clId="{CBED1F73-AEB6-48AF-B30C-D6CFC8A51246}" dt="2025-12-15T05:15:16.388" v="4168" actId="113"/>
+          <ac:spMkLst>
+            <pc:docMk/>
+            <pc:sldMk cId="3083110177" sldId="261"/>
+            <ac:spMk id="7" creationId="{142FC0C8-9160-88FE-AEBB-0AA357C23B78}"/>
+          </ac:spMkLst>
+        </pc:spChg>
+        <pc:picChg chg="add del mod">
+          <ac:chgData name="Henry Vo" userId="c18cca123e130253" providerId="LiveId" clId="{CBED1F73-AEB6-48AF-B30C-D6CFC8A51246}" dt="2025-12-15T05:01:48.666" v="3635" actId="478"/>
+          <ac:picMkLst>
+            <pc:docMk/>
+            <pc:sldMk cId="3083110177" sldId="261"/>
+            <ac:picMk id="3" creationId="{1E43CEDE-26D2-785F-ADE8-298D4196E218}"/>
+          </ac:picMkLst>
+        </pc:picChg>
+        <pc:picChg chg="add del mod modCrop">
+          <ac:chgData name="Henry Vo" userId="c18cca123e130253" providerId="LiveId" clId="{CBED1F73-AEB6-48AF-B30C-D6CFC8A51246}" dt="2025-12-15T05:13:07.888" v="4147" actId="478"/>
+          <ac:picMkLst>
+            <pc:docMk/>
+            <pc:sldMk cId="3083110177" sldId="261"/>
+            <ac:picMk id="6" creationId="{7AD20D24-1A39-E8D2-A488-C3AC8B13991F}"/>
+          </ac:picMkLst>
+        </pc:picChg>
+        <pc:picChg chg="add del">
+          <ac:chgData name="Henry Vo" userId="c18cca123e130253" providerId="LiveId" clId="{CBED1F73-AEB6-48AF-B30C-D6CFC8A51246}" dt="2025-12-15T05:13:06.941" v="4146" actId="22"/>
+          <ac:picMkLst>
+            <pc:docMk/>
+            <pc:sldMk cId="3083110177" sldId="261"/>
+            <ac:picMk id="9" creationId="{3B5718B7-8060-2485-AEA3-A6796F58A697}"/>
+          </ac:picMkLst>
+        </pc:picChg>
+        <pc:picChg chg="add mod">
+          <ac:chgData name="Henry Vo" userId="c18cca123e130253" providerId="LiveId" clId="{CBED1F73-AEB6-48AF-B30C-D6CFC8A51246}" dt="2025-12-15T05:15:05.875" v="4163" actId="1076"/>
+          <ac:picMkLst>
+            <pc:docMk/>
+            <pc:sldMk cId="3083110177" sldId="261"/>
+            <ac:picMk id="11" creationId="{43484889-9244-8A37-1EF2-2AA451491DCB}"/>
+          </ac:picMkLst>
+        </pc:picChg>
+      </pc:sldChg>
+      <pc:sldChg chg="new">
+        <pc:chgData name="Henry Vo" userId="c18cca123e130253" providerId="LiveId" clId="{CBED1F73-AEB6-48AF-B30C-D6CFC8A51246}" dt="2025-12-15T05:14:43.825" v="4157" actId="680"/>
+        <pc:sldMkLst>
+          <pc:docMk/>
+          <pc:sldMk cId="3533779975" sldId="262"/>
+        </pc:sldMkLst>
       </pc:sldChg>
     </pc:docChg>
   </pc:docChgLst>
@@ -1877,7 +1925,7 @@
           <a:p>
             <a:fld id="{9C049790-B49D-4D8D-B628-59414A006FDF}" type="datetimeFigureOut">
               <a:rPr lang="en-US" smtClean="0"/>
-              <a:t>12/13/2025</a:t>
+              <a:t>12/14/2025</a:t>
             </a:fld>
             <a:endParaRPr lang="en-US"/>
           </a:p>
@@ -3088,7 +3136,7 @@
           <a:p>
             <a:fld id="{74411A3F-4DB3-47ED-809A-CD27B21BFB64}" type="datetimeFigureOut">
               <a:rPr lang="en-US" smtClean="0"/>
-              <a:t>12/13/2025</a:t>
+              <a:t>12/14/2025</a:t>
             </a:fld>
             <a:endParaRPr lang="en-US"/>
           </a:p>
@@ -3338,7 +3386,7 @@
           <a:p>
             <a:fld id="{74411A3F-4DB3-47ED-809A-CD27B21BFB64}" type="datetimeFigureOut">
               <a:rPr lang="en-US" smtClean="0"/>
-              <a:t>12/13/2025</a:t>
+              <a:t>12/14/2025</a:t>
             </a:fld>
             <a:endParaRPr lang="en-US"/>
           </a:p>
@@ -3651,7 +3699,7 @@
           <a:p>
             <a:fld id="{74411A3F-4DB3-47ED-809A-CD27B21BFB64}" type="datetimeFigureOut">
               <a:rPr lang="en-US" smtClean="0"/>
-              <a:t>12/13/2025</a:t>
+              <a:t>12/14/2025</a:t>
             </a:fld>
             <a:endParaRPr lang="en-US"/>
           </a:p>
@@ -3991,7 +4039,7 @@
           <a:p>
             <a:fld id="{74411A3F-4DB3-47ED-809A-CD27B21BFB64}" type="datetimeFigureOut">
               <a:rPr lang="en-US" smtClean="0"/>
-              <a:t>12/13/2025</a:t>
+              <a:t>12/14/2025</a:t>
             </a:fld>
             <a:endParaRPr lang="en-US"/>
           </a:p>
@@ -4304,7 +4352,7 @@
           <a:p>
             <a:fld id="{74411A3F-4DB3-47ED-809A-CD27B21BFB64}" type="datetimeFigureOut">
               <a:rPr lang="en-US" smtClean="0"/>
-              <a:t>12/13/2025</a:t>
+              <a:t>12/14/2025</a:t>
             </a:fld>
             <a:endParaRPr lang="en-US"/>
           </a:p>
@@ -4696,7 +4744,7 @@
           <a:p>
             <a:fld id="{74411A3F-4DB3-47ED-809A-CD27B21BFB64}" type="datetimeFigureOut">
               <a:rPr lang="en-US" smtClean="0"/>
-              <a:t>12/13/2025</a:t>
+              <a:t>12/14/2025</a:t>
             </a:fld>
             <a:endParaRPr lang="en-US"/>
           </a:p>
@@ -4864,7 +4912,7 @@
           <a:p>
             <a:fld id="{74411A3F-4DB3-47ED-809A-CD27B21BFB64}" type="datetimeFigureOut">
               <a:rPr lang="en-US" smtClean="0"/>
-              <a:t>12/13/2025</a:t>
+              <a:t>12/14/2025</a:t>
             </a:fld>
             <a:endParaRPr lang="en-US"/>
           </a:p>
@@ -5042,7 +5090,7 @@
           <a:p>
             <a:fld id="{74411A3F-4DB3-47ED-809A-CD27B21BFB64}" type="datetimeFigureOut">
               <a:rPr lang="en-US" smtClean="0"/>
-              <a:t>12/13/2025</a:t>
+              <a:t>12/14/2025</a:t>
             </a:fld>
             <a:endParaRPr lang="en-US"/>
           </a:p>
@@ -5216,7 +5264,7 @@
           <a:p>
             <a:fld id="{74411A3F-4DB3-47ED-809A-CD27B21BFB64}" type="datetimeFigureOut">
               <a:rPr lang="en-US" smtClean="0"/>
-              <a:t>12/13/2025</a:t>
+              <a:t>12/14/2025</a:t>
             </a:fld>
             <a:endParaRPr lang="en-US"/>
           </a:p>
@@ -5462,7 +5510,7 @@
           <a:p>
             <a:fld id="{74411A3F-4DB3-47ED-809A-CD27B21BFB64}" type="datetimeFigureOut">
               <a:rPr lang="en-US" smtClean="0"/>
-              <a:t>12/13/2025</a:t>
+              <a:t>12/14/2025</a:t>
             </a:fld>
             <a:endParaRPr lang="en-US"/>
           </a:p>
@@ -5691,7 +5739,7 @@
           <a:p>
             <a:fld id="{74411A3F-4DB3-47ED-809A-CD27B21BFB64}" type="datetimeFigureOut">
               <a:rPr lang="en-US" smtClean="0"/>
-              <a:t>12/13/2025</a:t>
+              <a:t>12/14/2025</a:t>
             </a:fld>
             <a:endParaRPr lang="en-US"/>
           </a:p>
@@ -6062,7 +6110,7 @@
           <a:p>
             <a:fld id="{74411A3F-4DB3-47ED-809A-CD27B21BFB64}" type="datetimeFigureOut">
               <a:rPr lang="en-US" smtClean="0"/>
-              <a:t>12/13/2025</a:t>
+              <a:t>12/14/2025</a:t>
             </a:fld>
             <a:endParaRPr lang="en-US"/>
           </a:p>
@@ -6184,7 +6232,7 @@
           <a:p>
             <a:fld id="{74411A3F-4DB3-47ED-809A-CD27B21BFB64}" type="datetimeFigureOut">
               <a:rPr lang="en-US" smtClean="0"/>
-              <a:t>12/13/2025</a:t>
+              <a:t>12/14/2025</a:t>
             </a:fld>
             <a:endParaRPr lang="en-US"/>
           </a:p>
@@ -6279,7 +6327,7 @@
           <a:p>
             <a:fld id="{74411A3F-4DB3-47ED-809A-CD27B21BFB64}" type="datetimeFigureOut">
               <a:rPr lang="en-US" smtClean="0"/>
-              <a:t>12/13/2025</a:t>
+              <a:t>12/14/2025</a:t>
             </a:fld>
             <a:endParaRPr lang="en-US"/>
           </a:p>
@@ -6532,7 +6580,7 @@
           <a:p>
             <a:fld id="{74411A3F-4DB3-47ED-809A-CD27B21BFB64}" type="datetimeFigureOut">
               <a:rPr lang="en-US" smtClean="0"/>
-              <a:t>12/13/2025</a:t>
+              <a:t>12/14/2025</a:t>
             </a:fld>
             <a:endParaRPr lang="en-US"/>
           </a:p>
@@ -6793,7 +6841,7 @@
           <a:p>
             <a:fld id="{74411A3F-4DB3-47ED-809A-CD27B21BFB64}" type="datetimeFigureOut">
               <a:rPr lang="en-US" smtClean="0"/>
-              <a:t>12/13/2025</a:t>
+              <a:t>12/14/2025</a:t>
             </a:fld>
             <a:endParaRPr lang="en-US"/>
           </a:p>
@@ -7590,7 +7638,7 @@
           <a:p>
             <a:fld id="{74411A3F-4DB3-47ED-809A-CD27B21BFB64}" type="datetimeFigureOut">
               <a:rPr lang="en-US" smtClean="0"/>
-              <a:t>12/13/2025</a:t>
+              <a:t>12/14/2025</a:t>
             </a:fld>
             <a:endParaRPr lang="en-US"/>
           </a:p>
@@ -8666,7 +8714,7 @@
         </p:nvSpPr>
         <p:spPr>
           <a:xfrm>
-            <a:off x="1413115" y="5166102"/>
+            <a:off x="1413115" y="5747585"/>
             <a:ext cx="9982472" cy="707886"/>
           </a:xfrm>
           <a:prstGeom prst="rect">
@@ -8737,7 +8785,7 @@
         </p:nvSpPr>
         <p:spPr>
           <a:xfrm>
-            <a:off x="1104763" y="6053142"/>
+            <a:off x="1413115" y="5067184"/>
             <a:ext cx="9982472" cy="400110"/>
           </a:xfrm>
           <a:prstGeom prst="rect">
@@ -8854,8 +8902,12 @@
           <a:p>
             <a:pPr algn="ctr"/>
             <a:r>
+              <a:rPr lang="en-US" b="1" dirty="0"/>
+              <a:t>79% of Customers churn </a:t>
+            </a:r>
+            <a:r>
               <a:rPr lang="en-US" dirty="0"/>
-              <a:t>79% of Customers churn after the first month </a:t>
+              <a:t>after the first month </a:t>
             </a:r>
           </a:p>
           <a:p>
@@ -8866,7 +8918,11 @@
             <a:pPr algn="ctr"/>
             <a:r>
               <a:rPr lang="en-US" dirty="0"/>
-              <a:t>Retention generally improves in months 5-7</a:t>
+              <a:t>Retention generally improves in </a:t>
+            </a:r>
+            <a:r>
+              <a:rPr lang="en-US" b="1" dirty="0"/>
+              <a:t>months 5-7</a:t>
             </a:r>
           </a:p>
           <a:p>
@@ -9007,7 +9063,7 @@
         </p:blipFill>
         <p:spPr>
           <a:xfrm>
-            <a:off x="685045" y="2028629"/>
+            <a:off x="685045" y="1228529"/>
             <a:ext cx="10821910" cy="2800741"/>
           </a:xfrm>
           <a:prstGeom prst="rect">
@@ -9080,8 +9136,28 @@
           <a:p>
             <a:pPr algn="ctr"/>
             <a:r>
+              <a:rPr lang="en-US" b="1" dirty="0"/>
+              <a:t>Nearly half </a:t>
+            </a:r>
+            <a:r>
               <a:rPr lang="en-US" dirty="0"/>
-              <a:t>Nearly half of our customers are either “Lost” or “At-Risk High Value,” representing the largest opportunity for retention </a:t>
+              <a:t>of our customers are either </a:t>
+            </a:r>
+            <a:r>
+              <a:rPr lang="en-US" b="1" dirty="0"/>
+              <a:t>“Lost”</a:t>
+            </a:r>
+            <a:r>
+              <a:rPr lang="en-US" dirty="0"/>
+              <a:t> or </a:t>
+            </a:r>
+            <a:r>
+              <a:rPr lang="en-US" b="1" dirty="0"/>
+              <a:t>“At-Risk High Value</a:t>
+            </a:r>
+            <a:r>
+              <a:rPr lang="en-US" dirty="0"/>
+              <a:t>,” representing the largest opportunity for retention </a:t>
             </a:r>
           </a:p>
         </p:txBody>
@@ -9117,7 +9193,15 @@
             <a:pPr algn="ctr"/>
             <a:r>
               <a:rPr lang="en-US" dirty="0"/>
-              <a:t>These two groups make up over 20% of revenue, providing the biggest growth potential</a:t>
+              <a:t>These two groups make up over </a:t>
+            </a:r>
+            <a:r>
+              <a:rPr lang="en-US" b="1" dirty="0"/>
+              <a:t>20% of revenue</a:t>
+            </a:r>
+            <a:r>
+              <a:rPr lang="en-US" dirty="0"/>
+              <a:t>, providing the biggest growth potential</a:t>
             </a:r>
           </a:p>
         </p:txBody>
@@ -9182,15 +9266,169 @@
           <a:p>
             <a:r>
               <a:rPr lang="en-US" sz="2400" dirty="0"/>
-              <a:t>Customers are considered churned after 86 days</a:t>
-            </a:r>
-          </a:p>
-        </p:txBody>
-      </p:sp>
+              <a:t>Customers are considered churned after ~70 days</a:t>
+            </a:r>
+          </a:p>
+        </p:txBody>
+      </p:sp>
+      <p:sp>
+        <p:nvSpPr>
+          <p:cNvPr id="7" name="TextBox 6">
+            <a:extLst>
+              <a:ext uri="{FF2B5EF4-FFF2-40B4-BE49-F238E27FC236}">
+                <a16:creationId xmlns:a16="http://schemas.microsoft.com/office/drawing/2014/main" id="{142FC0C8-9160-88FE-AEBB-0AA357C23B78}"/>
+              </a:ext>
+            </a:extLst>
+          </p:cNvPr>
+          <p:cNvSpPr txBox="1"/>
+          <p:nvPr/>
+        </p:nvSpPr>
+        <p:spPr>
+          <a:xfrm>
+            <a:off x="2366010" y="5812802"/>
+            <a:ext cx="7459980" cy="646331"/>
+          </a:xfrm>
+          <a:prstGeom prst="rect">
+            <a:avLst/>
+          </a:prstGeom>
+          <a:noFill/>
+        </p:spPr>
+        <p:txBody>
+          <a:bodyPr wrap="square" rtlCol="0">
+            <a:spAutoFit/>
+          </a:bodyPr>
+          <a:lstStyle/>
+          <a:p>
+            <a:pPr algn="ctr"/>
+            <a:r>
+              <a:rPr lang="en-US" dirty="0"/>
+              <a:t>Defining the churn window </a:t>
+            </a:r>
+            <a:r>
+              <a:rPr lang="en-US" b="1" dirty="0"/>
+              <a:t>enables retention outreach </a:t>
+            </a:r>
+            <a:r>
+              <a:rPr lang="en-US" dirty="0"/>
+              <a:t>by identifying when intervention is most optimal</a:t>
+            </a:r>
+          </a:p>
+        </p:txBody>
+      </p:sp>
+      <p:pic>
+        <p:nvPicPr>
+          <p:cNvPr id="11" name="Picture 10" descr="A graph of a chart&#10;&#10;AI-generated content may be incorrect.">
+            <a:extLst>
+              <a:ext uri="{FF2B5EF4-FFF2-40B4-BE49-F238E27FC236}">
+                <a16:creationId xmlns:a16="http://schemas.microsoft.com/office/drawing/2014/main" id="{43484889-9244-8A37-1EF2-2AA451491DCB}"/>
+              </a:ext>
+            </a:extLst>
+          </p:cNvPr>
+          <p:cNvPicPr>
+            <a:picLocks noChangeAspect="1"/>
+          </p:cNvPicPr>
+          <p:nvPr/>
+        </p:nvPicPr>
+        <p:blipFill>
+          <a:blip r:embed="rId2"/>
+          <a:stretch>
+            <a:fillRect/>
+          </a:stretch>
+        </p:blipFill>
+        <p:spPr>
+          <a:xfrm>
+            <a:off x="1140542" y="1045198"/>
+            <a:ext cx="9910916" cy="4767604"/>
+          </a:xfrm>
+          <a:prstGeom prst="rect">
+            <a:avLst/>
+          </a:prstGeom>
+        </p:spPr>
+      </p:pic>
     </p:spTree>
     <p:extLst>
       <p:ext uri="{BB962C8B-B14F-4D97-AF65-F5344CB8AC3E}">
         <p14:creationId xmlns:p14="http://schemas.microsoft.com/office/powerpoint/2010/main" val="3083110177"/>
+      </p:ext>
+    </p:extLst>
+  </p:cSld>
+  <p:clrMapOvr>
+    <a:masterClrMapping/>
+  </p:clrMapOvr>
+</p:sld>
+</file>
+
+<file path=ppt/slides/slide7.xml><?xml version="1.0" encoding="utf-8"?>
+<p:sld xmlns:a="http://schemas.openxmlformats.org/drawingml/2006/main" xmlns:r="http://schemas.openxmlformats.org/officeDocument/2006/relationships" xmlns:p="http://schemas.openxmlformats.org/presentationml/2006/main">
+  <p:cSld>
+    <p:spTree>
+      <p:nvGrpSpPr>
+        <p:cNvPr id="1" name=""/>
+        <p:cNvGrpSpPr/>
+        <p:nvPr/>
+      </p:nvGrpSpPr>
+      <p:grpSpPr>
+        <a:xfrm>
+          <a:off x="0" y="0"/>
+          <a:ext cx="0" cy="0"/>
+          <a:chOff x="0" y="0"/>
+          <a:chExt cx="0" cy="0"/>
+        </a:xfrm>
+      </p:grpSpPr>
+      <p:sp>
+        <p:nvSpPr>
+          <p:cNvPr id="2" name="Title 1">
+            <a:extLst>
+              <a:ext uri="{FF2B5EF4-FFF2-40B4-BE49-F238E27FC236}">
+                <a16:creationId xmlns:a16="http://schemas.microsoft.com/office/drawing/2014/main" id="{C25EEB97-A683-1B60-28CE-C085CD9548B0}"/>
+              </a:ext>
+            </a:extLst>
+          </p:cNvPr>
+          <p:cNvSpPr>
+            <a:spLocks noGrp="1"/>
+          </p:cNvSpPr>
+          <p:nvPr>
+            <p:ph type="title"/>
+          </p:nvPr>
+        </p:nvSpPr>
+        <p:spPr/>
+        <p:txBody>
+          <a:bodyPr/>
+          <a:lstStyle/>
+          <a:p>
+            <a:endParaRPr lang="en-US"/>
+          </a:p>
+        </p:txBody>
+      </p:sp>
+      <p:sp>
+        <p:nvSpPr>
+          <p:cNvPr id="3" name="Content Placeholder 2">
+            <a:extLst>
+              <a:ext uri="{FF2B5EF4-FFF2-40B4-BE49-F238E27FC236}">
+                <a16:creationId xmlns:a16="http://schemas.microsoft.com/office/drawing/2014/main" id="{08F07BE0-530E-DBC5-0506-8821B3863CCE}"/>
+              </a:ext>
+            </a:extLst>
+          </p:cNvPr>
+          <p:cNvSpPr>
+            <a:spLocks noGrp="1"/>
+          </p:cNvSpPr>
+          <p:nvPr>
+            <p:ph idx="1"/>
+          </p:nvPr>
+        </p:nvSpPr>
+        <p:spPr/>
+        <p:txBody>
+          <a:bodyPr/>
+          <a:lstStyle/>
+          <a:p>
+            <a:endParaRPr lang="en-US"/>
+          </a:p>
+        </p:txBody>
+      </p:sp>
+    </p:spTree>
+    <p:extLst>
+      <p:ext uri="{BB962C8B-B14F-4D97-AF65-F5344CB8AC3E}">
+        <p14:creationId xmlns:p14="http://schemas.microsoft.com/office/powerpoint/2010/main" val="3533779975"/>
       </p:ext>
     </p:extLst>
   </p:cSld>

--- a/Customer Retention Analysis.pptx
+++ b/Customer Retention Analysis.pptx
@@ -9421,7 +9421,7 @@
           <a:bodyPr/>
           <a:lstStyle/>
           <a:p>
-            <a:endParaRPr lang="en-US"/>
+            <a:endParaRPr lang="en-US" dirty="0"/>
           </a:p>
         </p:txBody>
       </p:sp>

--- a/Customer Retention Analysis.pptx
+++ b/Customer Retention Analysis.pptx
@@ -2,10 +2,10 @@
 <file path=ppt/presentation.xml><?xml version="1.0" encoding="utf-8"?>
 <p:presentation xmlns:a="http://schemas.openxmlformats.org/drawingml/2006/main" xmlns:r="http://schemas.openxmlformats.org/officeDocument/2006/relationships" xmlns:p="http://schemas.openxmlformats.org/presentationml/2006/main" saveSubsetFonts="1">
   <p:sldMasterIdLst>
-    <p:sldMasterId id="2147483660" r:id="rId1"/>
+    <p:sldMasterId id="2147483743" r:id="rId1"/>
   </p:sldMasterIdLst>
   <p:notesMasterIdLst>
-    <p:notesMasterId r:id="rId9"/>
+    <p:notesMasterId r:id="rId10"/>
   </p:notesMasterIdLst>
   <p:sldIdLst>
     <p:sldId id="256" r:id="rId2"/>
@@ -15,6 +15,7 @@
     <p:sldId id="260" r:id="rId6"/>
     <p:sldId id="261" r:id="rId7"/>
     <p:sldId id="262" r:id="rId8"/>
+    <p:sldId id="263" r:id="rId9"/>
   </p:sldIdLst>
   <p:sldSz cx="12192000" cy="6858000"/>
   <p:notesSz cx="6858000" cy="9144000"/>
@@ -124,7 +125,7 @@
 <file path=ppt/revisionInfo.xml><?xml version="1.0" encoding="utf-8"?>
 <p1510:revInfo xmlns:a="http://schemas.openxmlformats.org/drawingml/2006/main" xmlns:r="http://schemas.openxmlformats.org/officeDocument/2006/relationships" xmlns:p1510="http://schemas.microsoft.com/office/powerpoint/2015/10/main">
   <p1510:revLst>
-    <p1510:client id="{708AB096-502C-4CC0-9240-ACA9084E787F}" v="2723" dt="2025-12-15T05:03:49.977"/>
+    <p1510:client id="{708AB096-502C-4CC0-9240-ACA9084E787F}" v="2752" dt="2025-12-15T16:30:46.654"/>
   </p1510:revLst>
 </p1510:revInfo>
 </file>
@@ -134,22 +135,30 @@
   <pc:docChgLst>
     <pc:chgData name="Henry Vo" userId="c18cca123e130253" providerId="LiveId" clId="{CBED1F73-AEB6-48AF-B30C-D6CFC8A51246}"/>
     <pc:docChg chg="undo custSel addSld modSld">
-      <pc:chgData name="Henry Vo" userId="c18cca123e130253" providerId="LiveId" clId="{CBED1F73-AEB6-48AF-B30C-D6CFC8A51246}" dt="2025-12-15T05:15:40.175" v="4174" actId="113"/>
+      <pc:chgData name="Henry Vo" userId="c18cca123e130253" providerId="LiveId" clId="{CBED1F73-AEB6-48AF-B30C-D6CFC8A51246}" dt="2025-12-15T16:30:46.654" v="5497" actId="164"/>
       <pc:docMkLst>
         <pc:docMk/>
       </pc:docMkLst>
-      <pc:sldChg chg="modSp mod">
-        <pc:chgData name="Henry Vo" userId="c18cca123e130253" providerId="LiveId" clId="{CBED1F73-AEB6-48AF-B30C-D6CFC8A51246}" dt="2025-12-09T03:58:31.185" v="1029"/>
+      <pc:sldChg chg="addSp modSp mod">
+        <pc:chgData name="Henry Vo" userId="c18cca123e130253" providerId="LiveId" clId="{CBED1F73-AEB6-48AF-B30C-D6CFC8A51246}" dt="2025-12-15T16:28:58.121" v="5467" actId="1076"/>
         <pc:sldMkLst>
           <pc:docMk/>
           <pc:sldMk cId="1747761490" sldId="256"/>
         </pc:sldMkLst>
         <pc:spChg chg="mod">
-          <ac:chgData name="Henry Vo" userId="c18cca123e130253" providerId="LiveId" clId="{CBED1F73-AEB6-48AF-B30C-D6CFC8A51246}" dt="2025-12-09T03:58:31.185" v="1029"/>
+          <ac:chgData name="Henry Vo" userId="c18cca123e130253" providerId="LiveId" clId="{CBED1F73-AEB6-48AF-B30C-D6CFC8A51246}" dt="2025-12-15T16:24:48.332" v="5202" actId="27636"/>
           <ac:spMkLst>
             <pc:docMk/>
             <pc:sldMk cId="1747761490" sldId="256"/>
             <ac:spMk id="2" creationId="{63B1AEAF-7047-3489-8B51-E909FA6B81B0}"/>
+          </ac:spMkLst>
+        </pc:spChg>
+        <pc:spChg chg="add mod">
+          <ac:chgData name="Henry Vo" userId="c18cca123e130253" providerId="LiveId" clId="{CBED1F73-AEB6-48AF-B30C-D6CFC8A51246}" dt="2025-12-15T16:28:58.121" v="5467" actId="1076"/>
+          <ac:spMkLst>
+            <pc:docMk/>
+            <pc:sldMk cId="1747761490" sldId="256"/>
+            <ac:spMk id="3" creationId="{CE407946-C4CB-8B60-36BF-8DAD28B0824C}"/>
           </ac:spMkLst>
         </pc:spChg>
       </pc:sldChg>
@@ -335,7 +344,7 @@
         </pc:picChg>
       </pc:sldChg>
       <pc:sldChg chg="addSp delSp modSp new mod">
-        <pc:chgData name="Henry Vo" userId="c18cca123e130253" providerId="LiveId" clId="{CBED1F73-AEB6-48AF-B30C-D6CFC8A51246}" dt="2025-12-15T05:15:32.675" v="4172" actId="113"/>
+        <pc:chgData name="Henry Vo" userId="c18cca123e130253" providerId="LiveId" clId="{CBED1F73-AEB6-48AF-B30C-D6CFC8A51246}" dt="2025-12-15T14:02:53.560" v="4927" actId="14100"/>
         <pc:sldMkLst>
           <pc:docMk/>
           <pc:sldMk cId="3564352135" sldId="260"/>
@@ -365,7 +374,7 @@
           </ac:spMkLst>
         </pc:spChg>
         <pc:picChg chg="add del mod">
-          <ac:chgData name="Henry Vo" userId="c18cca123e130253" providerId="LiveId" clId="{CBED1F73-AEB6-48AF-B30C-D6CFC8A51246}" dt="2025-12-15T05:10:16.103" v="4140" actId="1076"/>
+          <ac:chgData name="Henry Vo" userId="c18cca123e130253" providerId="LiveId" clId="{CBED1F73-AEB6-48AF-B30C-D6CFC8A51246}" dt="2025-12-15T14:02:53.560" v="4927" actId="14100"/>
           <ac:picMkLst>
             <pc:docMk/>
             <pc:sldMk cId="3564352135" sldId="260"/>
@@ -452,12 +461,275 @@
           </ac:picMkLst>
         </pc:picChg>
       </pc:sldChg>
-      <pc:sldChg chg="new">
-        <pc:chgData name="Henry Vo" userId="c18cca123e130253" providerId="LiveId" clId="{CBED1F73-AEB6-48AF-B30C-D6CFC8A51246}" dt="2025-12-15T05:14:43.825" v="4157" actId="680"/>
+      <pc:sldChg chg="addSp delSp modSp new mod">
+        <pc:chgData name="Henry Vo" userId="c18cca123e130253" providerId="LiveId" clId="{CBED1F73-AEB6-48AF-B30C-D6CFC8A51246}" dt="2025-12-15T16:30:46.654" v="5497" actId="164"/>
         <pc:sldMkLst>
           <pc:docMk/>
           <pc:sldMk cId="3533779975" sldId="262"/>
         </pc:sldMkLst>
+        <pc:spChg chg="del">
+          <ac:chgData name="Henry Vo" userId="c18cca123e130253" providerId="LiveId" clId="{CBED1F73-AEB6-48AF-B30C-D6CFC8A51246}" dt="2025-12-15T13:15:23.645" v="4176" actId="478"/>
+          <ac:spMkLst>
+            <pc:docMk/>
+            <pc:sldMk cId="3533779975" sldId="262"/>
+            <ac:spMk id="2" creationId="{C25EEB97-A683-1B60-28CE-C085CD9548B0}"/>
+          </ac:spMkLst>
+        </pc:spChg>
+        <pc:spChg chg="del">
+          <ac:chgData name="Henry Vo" userId="c18cca123e130253" providerId="LiveId" clId="{CBED1F73-AEB6-48AF-B30C-D6CFC8A51246}" dt="2025-12-15T13:15:23.131" v="4175" actId="478"/>
+          <ac:spMkLst>
+            <pc:docMk/>
+            <pc:sldMk cId="3533779975" sldId="262"/>
+            <ac:spMk id="3" creationId="{08F07BE0-530E-DBC5-0506-8821B3863CCE}"/>
+          </ac:spMkLst>
+        </pc:spChg>
+        <pc:spChg chg="add mod">
+          <ac:chgData name="Henry Vo" userId="c18cca123e130253" providerId="LiveId" clId="{CBED1F73-AEB6-48AF-B30C-D6CFC8A51246}" dt="2025-12-15T13:37:54.526" v="4181"/>
+          <ac:spMkLst>
+            <pc:docMk/>
+            <pc:sldMk cId="3533779975" sldId="262"/>
+            <ac:spMk id="6" creationId="{F465791A-C9DC-FE1D-94FF-0CA76773CB65}"/>
+          </ac:spMkLst>
+        </pc:spChg>
+        <pc:spChg chg="add mod">
+          <ac:chgData name="Henry Vo" userId="c18cca123e130253" providerId="LiveId" clId="{CBED1F73-AEB6-48AF-B30C-D6CFC8A51246}" dt="2025-12-15T13:52:35.733" v="4502" actId="20577"/>
+          <ac:spMkLst>
+            <pc:docMk/>
+            <pc:sldMk cId="3533779975" sldId="262"/>
+            <ac:spMk id="9" creationId="{8662D2DB-45BE-4561-C692-DA85293F1E52}"/>
+          </ac:spMkLst>
+        </pc:spChg>
+        <pc:spChg chg="add mod">
+          <ac:chgData name="Henry Vo" userId="c18cca123e130253" providerId="LiveId" clId="{CBED1F73-AEB6-48AF-B30C-D6CFC8A51246}" dt="2025-12-15T14:02:42.570" v="4923" actId="1076"/>
+          <ac:spMkLst>
+            <pc:docMk/>
+            <pc:sldMk cId="3533779975" sldId="262"/>
+            <ac:spMk id="10" creationId="{96CEF7AF-6F29-5A7A-BCAF-EC122AAAB7F6}"/>
+          </ac:spMkLst>
+        </pc:spChg>
+        <pc:spChg chg="add mod">
+          <ac:chgData name="Henry Vo" userId="c18cca123e130253" providerId="LiveId" clId="{CBED1F73-AEB6-48AF-B30C-D6CFC8A51246}" dt="2025-12-15T14:02:40.525" v="4922" actId="1076"/>
+          <ac:spMkLst>
+            <pc:docMk/>
+            <pc:sldMk cId="3533779975" sldId="262"/>
+            <ac:spMk id="21" creationId="{E4343AA8-350A-43A4-2DD6-46742022C8B9}"/>
+          </ac:spMkLst>
+        </pc:spChg>
+        <pc:spChg chg="add mod">
+          <ac:chgData name="Henry Vo" userId="c18cca123e130253" providerId="LiveId" clId="{CBED1F73-AEB6-48AF-B30C-D6CFC8A51246}" dt="2025-12-15T16:30:46.654" v="5497" actId="164"/>
+          <ac:spMkLst>
+            <pc:docMk/>
+            <pc:sldMk cId="3533779975" sldId="262"/>
+            <ac:spMk id="22" creationId="{9D2886ED-69E5-A58C-80E7-8ED978B8B5A8}"/>
+          </ac:spMkLst>
+        </pc:spChg>
+        <pc:grpChg chg="add mod">
+          <ac:chgData name="Henry Vo" userId="c18cca123e130253" providerId="LiveId" clId="{CBED1F73-AEB6-48AF-B30C-D6CFC8A51246}" dt="2025-12-15T16:30:46.654" v="5497" actId="164"/>
+          <ac:grpSpMkLst>
+            <pc:docMk/>
+            <pc:sldMk cId="3533779975" sldId="262"/>
+            <ac:grpSpMk id="23" creationId="{7FFC5566-F06D-4F99-D24F-FCF027ED4D94}"/>
+          </ac:grpSpMkLst>
+        </pc:grpChg>
+        <pc:picChg chg="add del mod">
+          <ac:chgData name="Henry Vo" userId="c18cca123e130253" providerId="LiveId" clId="{CBED1F73-AEB6-48AF-B30C-D6CFC8A51246}" dt="2025-12-15T13:38:32.966" v="4182" actId="478"/>
+          <ac:picMkLst>
+            <pc:docMk/>
+            <pc:sldMk cId="3533779975" sldId="262"/>
+            <ac:picMk id="5" creationId="{42594865-F5C4-B32A-7950-FF2CBC023A45}"/>
+          </ac:picMkLst>
+        </pc:picChg>
+        <pc:picChg chg="add del mod modCrop">
+          <ac:chgData name="Henry Vo" userId="c18cca123e130253" providerId="LiveId" clId="{CBED1F73-AEB6-48AF-B30C-D6CFC8A51246}" dt="2025-12-15T13:44:38.170" v="4429" actId="478"/>
+          <ac:picMkLst>
+            <pc:docMk/>
+            <pc:sldMk cId="3533779975" sldId="262"/>
+            <ac:picMk id="8" creationId="{A5AFF69B-C0DB-6E5A-90D6-85E7EB6AB749}"/>
+          </ac:picMkLst>
+        </pc:picChg>
+        <pc:picChg chg="add del mod modCrop">
+          <ac:chgData name="Henry Vo" userId="c18cca123e130253" providerId="LiveId" clId="{CBED1F73-AEB6-48AF-B30C-D6CFC8A51246}" dt="2025-12-15T13:51:24.316" v="4450" actId="478"/>
+          <ac:picMkLst>
+            <pc:docMk/>
+            <pc:sldMk cId="3533779975" sldId="262"/>
+            <ac:picMk id="12" creationId="{E89309F8-8047-BA25-4E90-20796C96B838}"/>
+          </ac:picMkLst>
+        </pc:picChg>
+        <pc:picChg chg="add del mod">
+          <ac:chgData name="Henry Vo" userId="c18cca123e130253" providerId="LiveId" clId="{CBED1F73-AEB6-48AF-B30C-D6CFC8A51246}" dt="2025-12-15T13:50:50.928" v="4444" actId="22"/>
+          <ac:picMkLst>
+            <pc:docMk/>
+            <pc:sldMk cId="3533779975" sldId="262"/>
+            <ac:picMk id="14" creationId="{0E0EB9BC-AA39-D1D7-7B8D-37759C8B4297}"/>
+          </ac:picMkLst>
+        </pc:picChg>
+        <pc:picChg chg="add del mod">
+          <ac:chgData name="Henry Vo" userId="c18cca123e130253" providerId="LiveId" clId="{CBED1F73-AEB6-48AF-B30C-D6CFC8A51246}" dt="2025-12-15T13:51:25.717" v="4451" actId="478"/>
+          <ac:picMkLst>
+            <pc:docMk/>
+            <pc:sldMk cId="3533779975" sldId="262"/>
+            <ac:picMk id="16" creationId="{2D0C862B-5246-334E-0DA9-5AEE12385207}"/>
+          </ac:picMkLst>
+        </pc:picChg>
+        <pc:picChg chg="add mod modCrop">
+          <ac:chgData name="Henry Vo" userId="c18cca123e130253" providerId="LiveId" clId="{CBED1F73-AEB6-48AF-B30C-D6CFC8A51246}" dt="2025-12-15T16:30:46.654" v="5497" actId="164"/>
+          <ac:picMkLst>
+            <pc:docMk/>
+            <pc:sldMk cId="3533779975" sldId="262"/>
+            <ac:picMk id="18" creationId="{550DEA39-8CD8-88CA-D507-40D6F7FEFA54}"/>
+          </ac:picMkLst>
+        </pc:picChg>
+        <pc:picChg chg="add mod modCrop">
+          <ac:chgData name="Henry Vo" userId="c18cca123e130253" providerId="LiveId" clId="{CBED1F73-AEB6-48AF-B30C-D6CFC8A51246}" dt="2025-12-15T16:30:46.654" v="5497" actId="164"/>
+          <ac:picMkLst>
+            <pc:docMk/>
+            <pc:sldMk cId="3533779975" sldId="262"/>
+            <ac:picMk id="20" creationId="{C878D4C1-C2A3-9B5E-687A-6A95AC47D582}"/>
+          </ac:picMkLst>
+        </pc:picChg>
+      </pc:sldChg>
+      <pc:sldChg chg="addSp delSp modSp new mod">
+        <pc:chgData name="Henry Vo" userId="c18cca123e130253" providerId="LiveId" clId="{CBED1F73-AEB6-48AF-B30C-D6CFC8A51246}" dt="2025-12-15T16:28:23.131" v="5466" actId="20577"/>
+        <pc:sldMkLst>
+          <pc:docMk/>
+          <pc:sldMk cId="2465465039" sldId="263"/>
+        </pc:sldMkLst>
+        <pc:spChg chg="del">
+          <ac:chgData name="Henry Vo" userId="c18cca123e130253" providerId="LiveId" clId="{CBED1F73-AEB6-48AF-B30C-D6CFC8A51246}" dt="2025-12-15T16:20:27.527" v="4940" actId="478"/>
+          <ac:spMkLst>
+            <pc:docMk/>
+            <pc:sldMk cId="2465465039" sldId="263"/>
+            <ac:spMk id="2" creationId="{B94D5BD8-CD09-7839-B672-6224B7780DE6}"/>
+          </ac:spMkLst>
+        </pc:spChg>
+        <pc:spChg chg="del">
+          <ac:chgData name="Henry Vo" userId="c18cca123e130253" providerId="LiveId" clId="{CBED1F73-AEB6-48AF-B30C-D6CFC8A51246}" dt="2025-12-15T16:20:28.106" v="4941" actId="478"/>
+          <ac:spMkLst>
+            <pc:docMk/>
+            <pc:sldMk cId="2465465039" sldId="263"/>
+            <ac:spMk id="3" creationId="{D01E0126-8F80-EE1C-76CC-A99B9F982934}"/>
+          </ac:spMkLst>
+        </pc:spChg>
+        <pc:spChg chg="add mod">
+          <ac:chgData name="Henry Vo" userId="c18cca123e130253" providerId="LiveId" clId="{CBED1F73-AEB6-48AF-B30C-D6CFC8A51246}" dt="2025-12-15T16:20:37.714" v="4969" actId="20577"/>
+          <ac:spMkLst>
+            <pc:docMk/>
+            <pc:sldMk cId="2465465039" sldId="263"/>
+            <ac:spMk id="4" creationId="{A1941F0A-540A-DFB1-12F4-A44E2508BAA4}"/>
+          </ac:spMkLst>
+        </pc:spChg>
+        <pc:spChg chg="add del mod">
+          <ac:chgData name="Henry Vo" userId="c18cca123e130253" providerId="LiveId" clId="{CBED1F73-AEB6-48AF-B30C-D6CFC8A51246}" dt="2025-12-15T16:20:46.356" v="4971" actId="478"/>
+          <ac:spMkLst>
+            <pc:docMk/>
+            <pc:sldMk cId="2465465039" sldId="263"/>
+            <ac:spMk id="5" creationId="{13202E03-213D-EBEE-CB24-B5D63BE23DD0}"/>
+          </ac:spMkLst>
+        </pc:spChg>
+        <pc:spChg chg="add del mod">
+          <ac:chgData name="Henry Vo" userId="c18cca123e130253" providerId="LiveId" clId="{CBED1F73-AEB6-48AF-B30C-D6CFC8A51246}" dt="2025-12-15T16:21:14.714" v="4973" actId="478"/>
+          <ac:spMkLst>
+            <pc:docMk/>
+            <pc:sldMk cId="2465465039" sldId="263"/>
+            <ac:spMk id="6" creationId="{6196663A-FCD1-B8F7-72EA-7C612BEA2BE9}"/>
+          </ac:spMkLst>
+        </pc:spChg>
+        <pc:spChg chg="add mod">
+          <ac:chgData name="Henry Vo" userId="c18cca123e130253" providerId="LiveId" clId="{CBED1F73-AEB6-48AF-B30C-D6CFC8A51246}" dt="2025-12-15T16:27:24.587" v="5317" actId="12788"/>
+          <ac:spMkLst>
+            <pc:docMk/>
+            <pc:sldMk cId="2465465039" sldId="263"/>
+            <ac:spMk id="7" creationId="{8BBCFF16-94ED-75DF-2802-91E1D291C33A}"/>
+          </ac:spMkLst>
+        </pc:spChg>
+        <pc:spChg chg="add mod">
+          <ac:chgData name="Henry Vo" userId="c18cca123e130253" providerId="LiveId" clId="{CBED1F73-AEB6-48AF-B30C-D6CFC8A51246}" dt="2025-12-15T16:23:35.914" v="5083" actId="1076"/>
+          <ac:spMkLst>
+            <pc:docMk/>
+            <pc:sldMk cId="2465465039" sldId="263"/>
+            <ac:spMk id="8" creationId="{760A639C-DA42-C084-100A-BA995FABC5C5}"/>
+          </ac:spMkLst>
+        </pc:spChg>
+        <pc:spChg chg="add del mod">
+          <ac:chgData name="Henry Vo" userId="c18cca123e130253" providerId="LiveId" clId="{CBED1F73-AEB6-48AF-B30C-D6CFC8A51246}" dt="2025-12-15T16:27:12.378" v="5313" actId="478"/>
+          <ac:spMkLst>
+            <pc:docMk/>
+            <pc:sldMk cId="2465465039" sldId="263"/>
+            <ac:spMk id="15" creationId="{6FBA7CF3-32E6-CBE9-8A50-F4FCD026D42E}"/>
+          </ac:spMkLst>
+        </pc:spChg>
+        <pc:spChg chg="add mod">
+          <ac:chgData name="Henry Vo" userId="c18cca123e130253" providerId="LiveId" clId="{CBED1F73-AEB6-48AF-B30C-D6CFC8A51246}" dt="2025-12-15T16:24:31.220" v="5200" actId="1076"/>
+          <ac:spMkLst>
+            <pc:docMk/>
+            <pc:sldMk cId="2465465039" sldId="263"/>
+            <ac:spMk id="16" creationId="{D84DBEFF-5B15-C7AB-D8A8-28520C6632DD}"/>
+          </ac:spMkLst>
+        </pc:spChg>
+        <pc:spChg chg="add mod">
+          <ac:chgData name="Henry Vo" userId="c18cca123e130253" providerId="LiveId" clId="{CBED1F73-AEB6-48AF-B30C-D6CFC8A51246}" dt="2025-12-15T16:27:24.587" v="5317" actId="12788"/>
+          <ac:spMkLst>
+            <pc:docMk/>
+            <pc:sldMk cId="2465465039" sldId="263"/>
+            <ac:spMk id="17" creationId="{E5F98863-FBBB-852D-CFF4-A9964EF562D0}"/>
+          </ac:spMkLst>
+        </pc:spChg>
+        <pc:spChg chg="add mod">
+          <ac:chgData name="Henry Vo" userId="c18cca123e130253" providerId="LiveId" clId="{CBED1F73-AEB6-48AF-B30C-D6CFC8A51246}" dt="2025-12-15T16:27:24.587" v="5317" actId="12788"/>
+          <ac:spMkLst>
+            <pc:docMk/>
+            <pc:sldMk cId="2465465039" sldId="263"/>
+            <ac:spMk id="18" creationId="{1B4EF4B1-F89B-3439-8CB6-2A5917BAE757}"/>
+          </ac:spMkLst>
+        </pc:spChg>
+        <pc:spChg chg="add mod">
+          <ac:chgData name="Henry Vo" userId="c18cca123e130253" providerId="LiveId" clId="{CBED1F73-AEB6-48AF-B30C-D6CFC8A51246}" dt="2025-12-15T16:27:24.587" v="5317" actId="12788"/>
+          <ac:spMkLst>
+            <pc:docMk/>
+            <pc:sldMk cId="2465465039" sldId="263"/>
+            <ac:spMk id="19" creationId="{0BFB29CB-1E4F-87AF-4704-89BE268B1726}"/>
+          </ac:spMkLst>
+        </pc:spChg>
+        <pc:spChg chg="add mod">
+          <ac:chgData name="Henry Vo" userId="c18cca123e130253" providerId="LiveId" clId="{CBED1F73-AEB6-48AF-B30C-D6CFC8A51246}" dt="2025-12-15T16:27:29.551" v="5318"/>
+          <ac:spMkLst>
+            <pc:docMk/>
+            <pc:sldMk cId="2465465039" sldId="263"/>
+            <ac:spMk id="20" creationId="{0A05155A-2F55-30F3-0D56-EDAF1CA8F640}"/>
+          </ac:spMkLst>
+        </pc:spChg>
+        <pc:spChg chg="add mod">
+          <ac:chgData name="Henry Vo" userId="c18cca123e130253" providerId="LiveId" clId="{CBED1F73-AEB6-48AF-B30C-D6CFC8A51246}" dt="2025-12-15T16:28:04.534" v="5391" actId="20577"/>
+          <ac:spMkLst>
+            <pc:docMk/>
+            <pc:sldMk cId="2465465039" sldId="263"/>
+            <ac:spMk id="21" creationId="{4FD161EC-D2B9-7082-A154-58415D1E9440}"/>
+          </ac:spMkLst>
+        </pc:spChg>
+        <pc:spChg chg="add mod">
+          <ac:chgData name="Henry Vo" userId="c18cca123e130253" providerId="LiveId" clId="{CBED1F73-AEB6-48AF-B30C-D6CFC8A51246}" dt="2025-12-15T16:28:23.131" v="5466" actId="20577"/>
+          <ac:spMkLst>
+            <pc:docMk/>
+            <pc:sldMk cId="2465465039" sldId="263"/>
+            <ac:spMk id="22" creationId="{37CDBEF9-2C53-A1AF-D118-D49418A2E8F4}"/>
+          </ac:spMkLst>
+        </pc:spChg>
+        <pc:cxnChg chg="add del">
+          <ac:chgData name="Henry Vo" userId="c18cca123e130253" providerId="LiveId" clId="{CBED1F73-AEB6-48AF-B30C-D6CFC8A51246}" dt="2025-12-15T16:21:57.343" v="4989" actId="11529"/>
+          <ac:cxnSpMkLst>
+            <pc:docMk/>
+            <pc:sldMk cId="2465465039" sldId="263"/>
+            <ac:cxnSpMk id="10" creationId="{350A1064-1E33-AA1B-CBF4-1EDD1247096C}"/>
+          </ac:cxnSpMkLst>
+        </pc:cxnChg>
+        <pc:cxnChg chg="add mod">
+          <ac:chgData name="Henry Vo" userId="c18cca123e130253" providerId="LiveId" clId="{CBED1F73-AEB6-48AF-B30C-D6CFC8A51246}" dt="2025-12-15T16:23:03.690" v="5044" actId="14100"/>
+          <ac:cxnSpMkLst>
+            <pc:docMk/>
+            <pc:sldMk cId="2465465039" sldId="263"/>
+            <ac:cxnSpMk id="12" creationId="{6A78AD94-558E-4320-7A8B-1491AAEEA1B0}"/>
+          </ac:cxnSpMkLst>
+        </pc:cxnChg>
       </pc:sldChg>
     </pc:docChg>
   </pc:docChgLst>
@@ -1925,7 +2197,7 @@
           <a:p>
             <a:fld id="{9C049790-B49D-4D8D-B628-59414A006FDF}" type="datetimeFigureOut">
               <a:rPr lang="en-US" smtClean="0"/>
-              <a:t>12/14/2025</a:t>
+              <a:t>12/15/2025</a:t>
             </a:fld>
             <a:endParaRPr lang="en-US"/>
           </a:p>
@@ -2361,7 +2633,7 @@
 </file>
 
 <file path=ppt/slideLayouts/slideLayout1.xml><?xml version="1.0" encoding="utf-8"?>
-<p:sldLayout xmlns:a="http://schemas.openxmlformats.org/drawingml/2006/main" xmlns:r="http://schemas.openxmlformats.org/officeDocument/2006/relationships" xmlns:p="http://schemas.openxmlformats.org/presentationml/2006/main" showMasterSp="0" type="title" preserve="1">
+<p:sldLayout xmlns:a="http://schemas.openxmlformats.org/drawingml/2006/main" xmlns:r="http://schemas.openxmlformats.org/officeDocument/2006/relationships" xmlns:p="http://schemas.openxmlformats.org/presentationml/2006/main" type="title" preserve="1">
   <p:cSld name="Title Slide">
     <p:spTree>
       <p:nvGrpSpPr>
@@ -2377,592 +2649,6 @@
           <a:chExt cx="0" cy="0"/>
         </a:xfrm>
       </p:grpSpPr>
-      <p:grpSp>
-        <p:nvGrpSpPr>
-          <p:cNvPr id="7" name="Group 6"/>
-          <p:cNvGrpSpPr/>
-          <p:nvPr/>
-        </p:nvGrpSpPr>
-        <p:grpSpPr>
-          <a:xfrm>
-            <a:off x="0" y="-8467"/>
-            <a:ext cx="12192000" cy="6866467"/>
-            <a:chOff x="0" y="-8467"/>
-            <a:chExt cx="12192000" cy="6866467"/>
-          </a:xfrm>
-        </p:grpSpPr>
-        <p:cxnSp>
-          <p:nvCxnSpPr>
-            <p:cNvPr id="32" name="Straight Connector 31"/>
-            <p:cNvCxnSpPr/>
-            <p:nvPr/>
-          </p:nvCxnSpPr>
-          <p:spPr>
-            <a:xfrm>
-              <a:off x="9371012" y="0"/>
-              <a:ext cx="1219200" cy="6858000"/>
-            </a:xfrm>
-            <a:prstGeom prst="line">
-              <a:avLst/>
-            </a:prstGeom>
-            <a:ln w="9525">
-              <a:solidFill>
-                <a:schemeClr val="bg1">
-                  <a:lumMod val="75000"/>
-                </a:schemeClr>
-              </a:solidFill>
-            </a:ln>
-          </p:spPr>
-          <p:style>
-            <a:lnRef idx="2">
-              <a:schemeClr val="accent1"/>
-            </a:lnRef>
-            <a:fillRef idx="0">
-              <a:schemeClr val="accent1"/>
-            </a:fillRef>
-            <a:effectRef idx="1">
-              <a:schemeClr val="accent1"/>
-            </a:effectRef>
-            <a:fontRef idx="minor">
-              <a:schemeClr val="tx1"/>
-            </a:fontRef>
-          </p:style>
-        </p:cxnSp>
-        <p:cxnSp>
-          <p:nvCxnSpPr>
-            <p:cNvPr id="21" name="Straight Connector 20"/>
-            <p:cNvCxnSpPr/>
-            <p:nvPr/>
-          </p:nvCxnSpPr>
-          <p:spPr>
-            <a:xfrm flipH="1">
-              <a:off x="7425267" y="3681413"/>
-              <a:ext cx="4763558" cy="3176587"/>
-            </a:xfrm>
-            <a:prstGeom prst="line">
-              <a:avLst/>
-            </a:prstGeom>
-            <a:ln w="9525">
-              <a:solidFill>
-                <a:schemeClr val="bg1">
-                  <a:lumMod val="85000"/>
-                </a:schemeClr>
-              </a:solidFill>
-            </a:ln>
-          </p:spPr>
-          <p:style>
-            <a:lnRef idx="2">
-              <a:schemeClr val="accent1"/>
-            </a:lnRef>
-            <a:fillRef idx="0">
-              <a:schemeClr val="accent1"/>
-            </a:fillRef>
-            <a:effectRef idx="1">
-              <a:schemeClr val="accent1"/>
-            </a:effectRef>
-            <a:fontRef idx="minor">
-              <a:schemeClr val="tx1"/>
-            </a:fontRef>
-          </p:style>
-        </p:cxnSp>
-        <p:sp>
-          <p:nvSpPr>
-            <p:cNvPr id="24" name="Rectangle 23"/>
-            <p:cNvSpPr/>
-            <p:nvPr/>
-          </p:nvSpPr>
-          <p:spPr>
-            <a:xfrm>
-              <a:off x="9181476" y="-8467"/>
-              <a:ext cx="3007349" cy="6866467"/>
-            </a:xfrm>
-            <a:custGeom>
-              <a:avLst/>
-              <a:gdLst/>
-              <a:ahLst/>
-              <a:cxnLst/>
-              <a:rect l="l" t="t" r="r" b="b"/>
-              <a:pathLst>
-                <a:path w="3007349" h="6866467">
-                  <a:moveTo>
-                    <a:pt x="2045532" y="0"/>
-                  </a:moveTo>
-                  <a:lnTo>
-                    <a:pt x="3007349" y="0"/>
-                  </a:lnTo>
-                  <a:lnTo>
-                    <a:pt x="3007349" y="6866467"/>
-                  </a:lnTo>
-                  <a:lnTo>
-                    <a:pt x="0" y="6866467"/>
-                  </a:lnTo>
-                  <a:lnTo>
-                    <a:pt x="2045532" y="0"/>
-                  </a:lnTo>
-                  <a:close/>
-                </a:path>
-              </a:pathLst>
-            </a:custGeom>
-            <a:solidFill>
-              <a:schemeClr val="accent1">
-                <a:alpha val="30000"/>
-              </a:schemeClr>
-            </a:solidFill>
-            <a:ln>
-              <a:noFill/>
-            </a:ln>
-            <a:effectLst/>
-          </p:spPr>
-          <p:style>
-            <a:lnRef idx="1">
-              <a:schemeClr val="accent1"/>
-            </a:lnRef>
-            <a:fillRef idx="3">
-              <a:schemeClr val="accent1"/>
-            </a:fillRef>
-            <a:effectRef idx="2">
-              <a:schemeClr val="accent1"/>
-            </a:effectRef>
-            <a:fontRef idx="minor">
-              <a:schemeClr val="lt1"/>
-            </a:fontRef>
-          </p:style>
-          <p:txBody>
-            <a:bodyPr/>
-            <a:lstStyle/>
-            <a:p>
-              <a:endParaRPr lang="en-US"/>
-            </a:p>
-          </p:txBody>
-        </p:sp>
-        <p:sp>
-          <p:nvSpPr>
-            <p:cNvPr id="26" name="Rectangle 25"/>
-            <p:cNvSpPr/>
-            <p:nvPr/>
-          </p:nvSpPr>
-          <p:spPr>
-            <a:xfrm>
-              <a:off x="9603442" y="-8467"/>
-              <a:ext cx="2588558" cy="6866467"/>
-            </a:xfrm>
-            <a:custGeom>
-              <a:avLst/>
-              <a:gdLst/>
-              <a:ahLst/>
-              <a:cxnLst/>
-              <a:rect l="l" t="t" r="r" b="b"/>
-              <a:pathLst>
-                <a:path w="2573311" h="6866467">
-                  <a:moveTo>
-                    <a:pt x="0" y="0"/>
-                  </a:moveTo>
-                  <a:lnTo>
-                    <a:pt x="2573311" y="0"/>
-                  </a:lnTo>
-                  <a:lnTo>
-                    <a:pt x="2573311" y="6866467"/>
-                  </a:lnTo>
-                  <a:lnTo>
-                    <a:pt x="1202336" y="6866467"/>
-                  </a:lnTo>
-                  <a:lnTo>
-                    <a:pt x="0" y="0"/>
-                  </a:lnTo>
-                  <a:close/>
-                </a:path>
-              </a:pathLst>
-            </a:custGeom>
-            <a:solidFill>
-              <a:schemeClr val="accent1">
-                <a:alpha val="20000"/>
-              </a:schemeClr>
-            </a:solidFill>
-            <a:ln>
-              <a:noFill/>
-            </a:ln>
-            <a:effectLst/>
-          </p:spPr>
-          <p:style>
-            <a:lnRef idx="1">
-              <a:schemeClr val="accent1"/>
-            </a:lnRef>
-            <a:fillRef idx="3">
-              <a:schemeClr val="accent1"/>
-            </a:fillRef>
-            <a:effectRef idx="2">
-              <a:schemeClr val="accent1"/>
-            </a:effectRef>
-            <a:fontRef idx="minor">
-              <a:schemeClr val="lt1"/>
-            </a:fontRef>
-          </p:style>
-          <p:txBody>
-            <a:bodyPr/>
-            <a:lstStyle/>
-            <a:p>
-              <a:endParaRPr lang="en-US"/>
-            </a:p>
-          </p:txBody>
-        </p:sp>
-        <p:sp>
-          <p:nvSpPr>
-            <p:cNvPr id="27" name="Isosceles Triangle 26"/>
-            <p:cNvSpPr/>
-            <p:nvPr/>
-          </p:nvSpPr>
-          <p:spPr>
-            <a:xfrm>
-              <a:off x="8932333" y="3048000"/>
-              <a:ext cx="3259667" cy="3810000"/>
-            </a:xfrm>
-            <a:prstGeom prst="triangle">
-              <a:avLst>
-                <a:gd name="adj" fmla="val 100000"/>
-              </a:avLst>
-            </a:prstGeom>
-            <a:solidFill>
-              <a:schemeClr val="accent2">
-                <a:alpha val="72000"/>
-              </a:schemeClr>
-            </a:solidFill>
-            <a:ln>
-              <a:noFill/>
-            </a:ln>
-            <a:effectLst/>
-          </p:spPr>
-          <p:style>
-            <a:lnRef idx="1">
-              <a:schemeClr val="accent1"/>
-            </a:lnRef>
-            <a:fillRef idx="3">
-              <a:schemeClr val="accent1"/>
-            </a:fillRef>
-            <a:effectRef idx="2">
-              <a:schemeClr val="accent1"/>
-            </a:effectRef>
-            <a:fontRef idx="minor">
-              <a:schemeClr val="lt1"/>
-            </a:fontRef>
-          </p:style>
-          <p:txBody>
-            <a:bodyPr/>
-            <a:lstStyle/>
-            <a:p>
-              <a:endParaRPr lang="en-US"/>
-            </a:p>
-          </p:txBody>
-        </p:sp>
-        <p:sp>
-          <p:nvSpPr>
-            <p:cNvPr id="28" name="Rectangle 27"/>
-            <p:cNvSpPr/>
-            <p:nvPr/>
-          </p:nvSpPr>
-          <p:spPr>
-            <a:xfrm>
-              <a:off x="9334500" y="-8467"/>
-              <a:ext cx="2854326" cy="6866467"/>
-            </a:xfrm>
-            <a:custGeom>
-              <a:avLst/>
-              <a:gdLst/>
-              <a:ahLst/>
-              <a:cxnLst/>
-              <a:rect l="l" t="t" r="r" b="b"/>
-              <a:pathLst>
-                <a:path w="2858013" h="6866467">
-                  <a:moveTo>
-                    <a:pt x="0" y="0"/>
-                  </a:moveTo>
-                  <a:lnTo>
-                    <a:pt x="2858013" y="0"/>
-                  </a:lnTo>
-                  <a:lnTo>
-                    <a:pt x="2858013" y="6866467"/>
-                  </a:lnTo>
-                  <a:lnTo>
-                    <a:pt x="2473942" y="6866467"/>
-                  </a:lnTo>
-                  <a:lnTo>
-                    <a:pt x="0" y="0"/>
-                  </a:lnTo>
-                  <a:close/>
-                </a:path>
-              </a:pathLst>
-            </a:custGeom>
-            <a:solidFill>
-              <a:schemeClr val="accent2">
-                <a:lumMod val="75000"/>
-                <a:alpha val="70000"/>
-              </a:schemeClr>
-            </a:solidFill>
-            <a:ln>
-              <a:noFill/>
-            </a:ln>
-            <a:effectLst/>
-          </p:spPr>
-          <p:style>
-            <a:lnRef idx="1">
-              <a:schemeClr val="accent1"/>
-            </a:lnRef>
-            <a:fillRef idx="3">
-              <a:schemeClr val="accent1"/>
-            </a:fillRef>
-            <a:effectRef idx="2">
-              <a:schemeClr val="accent1"/>
-            </a:effectRef>
-            <a:fontRef idx="minor">
-              <a:schemeClr val="lt1"/>
-            </a:fontRef>
-          </p:style>
-          <p:txBody>
-            <a:bodyPr/>
-            <a:lstStyle/>
-            <a:p>
-              <a:endParaRPr lang="en-US"/>
-            </a:p>
-          </p:txBody>
-        </p:sp>
-        <p:sp>
-          <p:nvSpPr>
-            <p:cNvPr id="29" name="Rectangle 28"/>
-            <p:cNvSpPr/>
-            <p:nvPr/>
-          </p:nvSpPr>
-          <p:spPr>
-            <a:xfrm>
-              <a:off x="10898730" y="-8467"/>
-              <a:ext cx="1290094" cy="6866467"/>
-            </a:xfrm>
-            <a:custGeom>
-              <a:avLst/>
-              <a:gdLst/>
-              <a:ahLst/>
-              <a:cxnLst/>
-              <a:rect l="l" t="t" r="r" b="b"/>
-              <a:pathLst>
-                <a:path w="1290094" h="6858000">
-                  <a:moveTo>
-                    <a:pt x="1019735" y="0"/>
-                  </a:moveTo>
-                  <a:lnTo>
-                    <a:pt x="1290094" y="0"/>
-                  </a:lnTo>
-                  <a:lnTo>
-                    <a:pt x="1290094" y="6858000"/>
-                  </a:lnTo>
-                  <a:lnTo>
-                    <a:pt x="0" y="6858000"/>
-                  </a:lnTo>
-                  <a:lnTo>
-                    <a:pt x="1019735" y="0"/>
-                  </a:lnTo>
-                  <a:close/>
-                </a:path>
-              </a:pathLst>
-            </a:custGeom>
-            <a:solidFill>
-              <a:schemeClr val="accent1">
-                <a:lumMod val="60000"/>
-                <a:lumOff val="40000"/>
-                <a:alpha val="70000"/>
-              </a:schemeClr>
-            </a:solidFill>
-            <a:ln>
-              <a:noFill/>
-            </a:ln>
-            <a:effectLst/>
-          </p:spPr>
-          <p:style>
-            <a:lnRef idx="1">
-              <a:schemeClr val="accent1"/>
-            </a:lnRef>
-            <a:fillRef idx="3">
-              <a:schemeClr val="accent1"/>
-            </a:fillRef>
-            <a:effectRef idx="2">
-              <a:schemeClr val="accent1"/>
-            </a:effectRef>
-            <a:fontRef idx="minor">
-              <a:schemeClr val="lt1"/>
-            </a:fontRef>
-          </p:style>
-          <p:txBody>
-            <a:bodyPr/>
-            <a:lstStyle/>
-            <a:p>
-              <a:endParaRPr lang="en-US"/>
-            </a:p>
-          </p:txBody>
-        </p:sp>
-        <p:sp>
-          <p:nvSpPr>
-            <p:cNvPr id="30" name="Rectangle 29"/>
-            <p:cNvSpPr/>
-            <p:nvPr/>
-          </p:nvSpPr>
-          <p:spPr>
-            <a:xfrm>
-              <a:off x="10938999" y="-8467"/>
-              <a:ext cx="1249825" cy="6866467"/>
-            </a:xfrm>
-            <a:custGeom>
-              <a:avLst/>
-              <a:gdLst/>
-              <a:ahLst/>
-              <a:cxnLst/>
-              <a:rect l="l" t="t" r="r" b="b"/>
-              <a:pathLst>
-                <a:path w="1249825" h="6858000">
-                  <a:moveTo>
-                    <a:pt x="0" y="0"/>
-                  </a:moveTo>
-                  <a:lnTo>
-                    <a:pt x="1249825" y="0"/>
-                  </a:lnTo>
-                  <a:lnTo>
-                    <a:pt x="1249825" y="6858000"/>
-                  </a:lnTo>
-                  <a:lnTo>
-                    <a:pt x="1109382" y="6858000"/>
-                  </a:lnTo>
-                  <a:lnTo>
-                    <a:pt x="0" y="0"/>
-                  </a:lnTo>
-                  <a:close/>
-                </a:path>
-              </a:pathLst>
-            </a:custGeom>
-            <a:solidFill>
-              <a:schemeClr val="accent1">
-                <a:alpha val="65000"/>
-              </a:schemeClr>
-            </a:solidFill>
-            <a:ln>
-              <a:noFill/>
-            </a:ln>
-            <a:effectLst/>
-          </p:spPr>
-          <p:style>
-            <a:lnRef idx="1">
-              <a:schemeClr val="accent1"/>
-            </a:lnRef>
-            <a:fillRef idx="3">
-              <a:schemeClr val="accent1"/>
-            </a:fillRef>
-            <a:effectRef idx="2">
-              <a:schemeClr val="accent1"/>
-            </a:effectRef>
-            <a:fontRef idx="minor">
-              <a:schemeClr val="lt1"/>
-            </a:fontRef>
-          </p:style>
-          <p:txBody>
-            <a:bodyPr/>
-            <a:lstStyle/>
-            <a:p>
-              <a:endParaRPr lang="en-US"/>
-            </a:p>
-          </p:txBody>
-        </p:sp>
-        <p:sp>
-          <p:nvSpPr>
-            <p:cNvPr id="31" name="Isosceles Triangle 30"/>
-            <p:cNvSpPr/>
-            <p:nvPr/>
-          </p:nvSpPr>
-          <p:spPr>
-            <a:xfrm>
-              <a:off x="10371666" y="3589867"/>
-              <a:ext cx="1817159" cy="3268133"/>
-            </a:xfrm>
-            <a:prstGeom prst="triangle">
-              <a:avLst>
-                <a:gd name="adj" fmla="val 100000"/>
-              </a:avLst>
-            </a:prstGeom>
-            <a:solidFill>
-              <a:schemeClr val="accent1">
-                <a:alpha val="80000"/>
-              </a:schemeClr>
-            </a:solidFill>
-            <a:ln>
-              <a:noFill/>
-            </a:ln>
-            <a:effectLst/>
-          </p:spPr>
-          <p:style>
-            <a:lnRef idx="1">
-              <a:schemeClr val="accent1"/>
-            </a:lnRef>
-            <a:fillRef idx="3">
-              <a:schemeClr val="accent1"/>
-            </a:fillRef>
-            <a:effectRef idx="2">
-              <a:schemeClr val="accent1"/>
-            </a:effectRef>
-            <a:fontRef idx="minor">
-              <a:schemeClr val="lt1"/>
-            </a:fontRef>
-          </p:style>
-          <p:txBody>
-            <a:bodyPr/>
-            <a:lstStyle/>
-            <a:p>
-              <a:endParaRPr lang="en-US"/>
-            </a:p>
-          </p:txBody>
-        </p:sp>
-        <p:sp>
-          <p:nvSpPr>
-            <p:cNvPr id="19" name="Isosceles Triangle 18"/>
-            <p:cNvSpPr/>
-            <p:nvPr/>
-          </p:nvSpPr>
-          <p:spPr>
-            <a:xfrm rot="10800000">
-              <a:off x="0" y="0"/>
-              <a:ext cx="842596" cy="5666154"/>
-            </a:xfrm>
-            <a:prstGeom prst="triangle">
-              <a:avLst>
-                <a:gd name="adj" fmla="val 100000"/>
-              </a:avLst>
-            </a:prstGeom>
-            <a:solidFill>
-              <a:schemeClr val="accent1">
-                <a:alpha val="85000"/>
-              </a:schemeClr>
-            </a:solidFill>
-            <a:ln>
-              <a:noFill/>
-            </a:ln>
-            <a:effectLst/>
-          </p:spPr>
-          <p:style>
-            <a:lnRef idx="1">
-              <a:schemeClr val="accent1"/>
-            </a:lnRef>
-            <a:fillRef idx="3">
-              <a:schemeClr val="accent1"/>
-            </a:fillRef>
-            <a:effectRef idx="2">
-              <a:schemeClr val="accent1"/>
-            </a:effectRef>
-            <a:fontRef idx="minor">
-              <a:schemeClr val="lt1"/>
-            </a:fontRef>
-          </p:style>
-          <p:txBody>
-            <a:bodyPr/>
-            <a:lstStyle/>
-            <a:p>
-              <a:endParaRPr lang="en-US"/>
-            </a:p>
-          </p:txBody>
-        </p:sp>
-      </p:grpSp>
       <p:sp>
         <p:nvSpPr>
           <p:cNvPr id="2" name="Title 1"/>
@@ -2975,21 +2661,17 @@
         </p:nvSpPr>
         <p:spPr>
           <a:xfrm>
-            <a:off x="1507067" y="2404534"/>
-            <a:ext cx="7766936" cy="1646302"/>
+            <a:off x="1370693" y="1769540"/>
+            <a:ext cx="9440034" cy="1828801"/>
           </a:xfrm>
         </p:spPr>
         <p:txBody>
           <a:bodyPr anchor="b">
-            <a:noAutofit/>
+            <a:normAutofit/>
           </a:bodyPr>
           <a:lstStyle>
-            <a:lvl1pPr algn="r">
-              <a:defRPr sz="5400">
-                <a:solidFill>
-                  <a:schemeClr val="accent1"/>
-                </a:solidFill>
-              </a:defRPr>
+            <a:lvl1pPr algn="ctr">
+              <a:defRPr sz="5400"/>
             </a:lvl1pPr>
           </a:lstStyle>
           <a:p>
@@ -2997,6 +2679,7 @@
               <a:rPr lang="en-US"/>
               <a:t>Click to edit Master title style</a:t>
             </a:r>
+            <a:endParaRPr lang="en-US" dirty="0"/>
           </a:p>
         </p:txBody>
       </p:sp>
@@ -3012,21 +2695,18 @@
         </p:nvSpPr>
         <p:spPr>
           <a:xfrm>
-            <a:off x="1507067" y="4050833"/>
-            <a:ext cx="7766936" cy="1096899"/>
+            <a:off x="1370693" y="3598339"/>
+            <a:ext cx="9440034" cy="1049867"/>
           </a:xfrm>
         </p:spPr>
         <p:txBody>
           <a:bodyPr anchor="t"/>
           <a:lstStyle>
-            <a:lvl1pPr marL="0" indent="0" algn="r">
+            <a:lvl1pPr marL="0" indent="0" algn="ctr">
               <a:buNone/>
               <a:defRPr>
                 <a:solidFill>
-                  <a:schemeClr val="tx1">
-                    <a:lumMod val="50000"/>
-                    <a:lumOff val="50000"/>
-                  </a:schemeClr>
+                  <a:schemeClr val="tx1"/>
                 </a:solidFill>
               </a:defRPr>
             </a:lvl1pPr>
@@ -3116,6 +2796,7 @@
               <a:rPr lang="en-US"/>
               <a:t>Click to edit Master subtitle style</a:t>
             </a:r>
+            <a:endParaRPr lang="en-US" dirty="0"/>
           </a:p>
         </p:txBody>
       </p:sp>
@@ -3136,7 +2817,7 @@
           <a:p>
             <a:fld id="{74411A3F-4DB3-47ED-809A-CD27B21BFB64}" type="datetimeFigureOut">
               <a:rPr lang="en-US" smtClean="0"/>
-              <a:t>12/14/2025</a:t>
+              <a:t>12/15/2025</a:t>
             </a:fld>
             <a:endParaRPr lang="en-US"/>
           </a:p>
@@ -3187,7 +2868,7 @@
     </p:spTree>
     <p:extLst>
       <p:ext uri="{BB962C8B-B14F-4D97-AF65-F5344CB8AC3E}">
-        <p14:creationId xmlns:p14="http://schemas.microsoft.com/office/powerpoint/2010/main" val="4027739643"/>
+        <p14:creationId xmlns:p14="http://schemas.microsoft.com/office/powerpoint/2010/main" val="3111333300"/>
       </p:ext>
     </p:extLst>
   </p:cSld>
@@ -3198,6 +2879,304 @@
 </file>
 
 <file path=ppt/slideLayouts/slideLayout10.xml><?xml version="1.0" encoding="utf-8"?>
+<p:sldLayout xmlns:a="http://schemas.openxmlformats.org/drawingml/2006/main" xmlns:r="http://schemas.openxmlformats.org/officeDocument/2006/relationships" xmlns:p="http://schemas.openxmlformats.org/presentationml/2006/main" preserve="1">
+  <p:cSld name="Panoramic Picture with Caption">
+    <p:spTree>
+      <p:nvGrpSpPr>
+        <p:cNvPr id="1" name=""/>
+        <p:cNvGrpSpPr/>
+        <p:nvPr/>
+      </p:nvGrpSpPr>
+      <p:grpSpPr>
+        <a:xfrm>
+          <a:off x="0" y="0"/>
+          <a:ext cx="0" cy="0"/>
+          <a:chOff x="0" y="0"/>
+          <a:chExt cx="0" cy="0"/>
+        </a:xfrm>
+      </p:grpSpPr>
+      <p:pic>
+        <p:nvPicPr>
+          <p:cNvPr id="16" name="Picture 15" descr="Slate-V2-HD-panoPhotoInset.png"/>
+          <p:cNvPicPr>
+            <a:picLocks noChangeAspect="1"/>
+          </p:cNvPicPr>
+          <p:nvPr/>
+        </p:nvPicPr>
+        <p:blipFill>
+          <a:blip r:embed="rId2">
+            <a:extLst>
+              <a:ext uri="{28A0092B-C50C-407E-A947-70E740481C1C}">
+                <a14:useLocalDpi xmlns:a14="http://schemas.microsoft.com/office/drawing/2010/main" val="0"/>
+              </a:ext>
+            </a:extLst>
+          </a:blip>
+          <a:stretch>
+            <a:fillRect/>
+          </a:stretch>
+        </p:blipFill>
+        <p:spPr>
+          <a:xfrm>
+            <a:off x="1013883" y="547807"/>
+            <a:ext cx="10141799" cy="3816806"/>
+          </a:xfrm>
+          <a:prstGeom prst="rect">
+            <a:avLst/>
+          </a:prstGeom>
+        </p:spPr>
+      </p:pic>
+      <p:sp>
+        <p:nvSpPr>
+          <p:cNvPr id="2" name="Title 1"/>
+          <p:cNvSpPr>
+            <a:spLocks noGrp="1"/>
+          </p:cNvSpPr>
+          <p:nvPr>
+            <p:ph type="title"/>
+          </p:nvPr>
+        </p:nvSpPr>
+        <p:spPr>
+          <a:xfrm>
+            <a:off x="913806" y="4565255"/>
+            <a:ext cx="10355326" cy="543472"/>
+          </a:xfrm>
+        </p:spPr>
+        <p:txBody>
+          <a:bodyPr anchor="b">
+            <a:normAutofit/>
+          </a:bodyPr>
+          <a:lstStyle>
+            <a:lvl1pPr algn="ctr">
+              <a:defRPr sz="2800"/>
+            </a:lvl1pPr>
+          </a:lstStyle>
+          <a:p>
+            <a:r>
+              <a:rPr lang="en-US"/>
+              <a:t>Click to edit Master title style</a:t>
+            </a:r>
+            <a:endParaRPr lang="en-US" dirty="0"/>
+          </a:p>
+        </p:txBody>
+      </p:sp>
+      <p:sp>
+        <p:nvSpPr>
+          <p:cNvPr id="3" name="Picture Placeholder 2"/>
+          <p:cNvSpPr>
+            <a:spLocks noGrp="1" noChangeAspect="1"/>
+          </p:cNvSpPr>
+          <p:nvPr>
+            <p:ph type="pic" idx="1"/>
+          </p:nvPr>
+        </p:nvSpPr>
+        <p:spPr>
+          <a:xfrm>
+            <a:off x="1169349" y="695009"/>
+            <a:ext cx="9845346" cy="3525671"/>
+          </a:xfrm>
+          <a:effectLst>
+            <a:outerShdw blurRad="38100" dist="25400" dir="4440000">
+              <a:srgbClr val="000000">
+                <a:alpha val="36000"/>
+              </a:srgbClr>
+            </a:outerShdw>
+          </a:effectLst>
+        </p:spPr>
+        <p:txBody>
+          <a:bodyPr anchor="t">
+            <a:normAutofit/>
+          </a:bodyPr>
+          <a:lstStyle>
+            <a:lvl1pPr marL="0" indent="0" algn="ctr">
+              <a:buNone/>
+              <a:defRPr sz="2000"/>
+            </a:lvl1pPr>
+            <a:lvl2pPr marL="457200" indent="0">
+              <a:buNone/>
+              <a:defRPr sz="2000"/>
+            </a:lvl2pPr>
+            <a:lvl3pPr marL="914400" indent="0">
+              <a:buNone/>
+              <a:defRPr sz="2000"/>
+            </a:lvl3pPr>
+            <a:lvl4pPr marL="1371600" indent="0">
+              <a:buNone/>
+              <a:defRPr sz="2000"/>
+            </a:lvl4pPr>
+            <a:lvl5pPr marL="1828800" indent="0">
+              <a:buNone/>
+              <a:defRPr sz="2000"/>
+            </a:lvl5pPr>
+            <a:lvl6pPr marL="2286000" indent="0">
+              <a:buNone/>
+              <a:defRPr sz="2000"/>
+            </a:lvl6pPr>
+            <a:lvl7pPr marL="2743200" indent="0">
+              <a:buNone/>
+              <a:defRPr sz="2000"/>
+            </a:lvl7pPr>
+            <a:lvl8pPr marL="3200400" indent="0">
+              <a:buNone/>
+              <a:defRPr sz="2000"/>
+            </a:lvl8pPr>
+            <a:lvl9pPr marL="3657600" indent="0">
+              <a:buNone/>
+              <a:defRPr sz="2000"/>
+            </a:lvl9pPr>
+          </a:lstStyle>
+          <a:p>
+            <a:r>
+              <a:rPr lang="en-US"/>
+              <a:t>Click icon to add picture</a:t>
+            </a:r>
+            <a:endParaRPr lang="en-US" dirty="0"/>
+          </a:p>
+        </p:txBody>
+      </p:sp>
+      <p:sp>
+        <p:nvSpPr>
+          <p:cNvPr id="4" name="Text Placeholder 3"/>
+          <p:cNvSpPr>
+            <a:spLocks noGrp="1"/>
+          </p:cNvSpPr>
+          <p:nvPr>
+            <p:ph type="body" sz="half" idx="2"/>
+          </p:nvPr>
+        </p:nvSpPr>
+        <p:spPr>
+          <a:xfrm>
+            <a:off x="913795" y="5108728"/>
+            <a:ext cx="10353762" cy="682472"/>
+          </a:xfrm>
+        </p:spPr>
+        <p:txBody>
+          <a:bodyPr anchor="t"/>
+          <a:lstStyle>
+            <a:lvl1pPr marL="0" indent="0" algn="ctr">
+              <a:buNone/>
+              <a:defRPr sz="1600"/>
+            </a:lvl1pPr>
+            <a:lvl2pPr marL="457200" indent="0">
+              <a:buNone/>
+              <a:defRPr sz="1400"/>
+            </a:lvl2pPr>
+            <a:lvl3pPr marL="914400" indent="0">
+              <a:buNone/>
+              <a:defRPr sz="1200"/>
+            </a:lvl3pPr>
+            <a:lvl4pPr marL="1371600" indent="0">
+              <a:buNone/>
+              <a:defRPr sz="1000"/>
+            </a:lvl4pPr>
+            <a:lvl5pPr marL="1828800" indent="0">
+              <a:buNone/>
+              <a:defRPr sz="1000"/>
+            </a:lvl5pPr>
+            <a:lvl6pPr marL="2286000" indent="0">
+              <a:buNone/>
+              <a:defRPr sz="1000"/>
+            </a:lvl6pPr>
+            <a:lvl7pPr marL="2743200" indent="0">
+              <a:buNone/>
+              <a:defRPr sz="1000"/>
+            </a:lvl7pPr>
+            <a:lvl8pPr marL="3200400" indent="0">
+              <a:buNone/>
+              <a:defRPr sz="1000"/>
+            </a:lvl8pPr>
+            <a:lvl9pPr marL="3657600" indent="0">
+              <a:buNone/>
+              <a:defRPr sz="1000"/>
+            </a:lvl9pPr>
+          </a:lstStyle>
+          <a:p>
+            <a:pPr lvl="0"/>
+            <a:r>
+              <a:rPr lang="en-US"/>
+              <a:t>Click to edit Master text styles</a:t>
+            </a:r>
+          </a:p>
+        </p:txBody>
+      </p:sp>
+      <p:sp>
+        <p:nvSpPr>
+          <p:cNvPr id="5" name="Date Placeholder 4"/>
+          <p:cNvSpPr>
+            <a:spLocks noGrp="1"/>
+          </p:cNvSpPr>
+          <p:nvPr>
+            <p:ph type="dt" sz="half" idx="10"/>
+          </p:nvPr>
+        </p:nvSpPr>
+        <p:spPr/>
+        <p:txBody>
+          <a:bodyPr/>
+          <a:lstStyle/>
+          <a:p>
+            <a:fld id="{74411A3F-4DB3-47ED-809A-CD27B21BFB64}" type="datetimeFigureOut">
+              <a:rPr lang="en-US" smtClean="0"/>
+              <a:t>12/15/2025</a:t>
+            </a:fld>
+            <a:endParaRPr lang="en-US"/>
+          </a:p>
+        </p:txBody>
+      </p:sp>
+      <p:sp>
+        <p:nvSpPr>
+          <p:cNvPr id="6" name="Footer Placeholder 5"/>
+          <p:cNvSpPr>
+            <a:spLocks noGrp="1"/>
+          </p:cNvSpPr>
+          <p:nvPr>
+            <p:ph type="ftr" sz="quarter" idx="11"/>
+          </p:nvPr>
+        </p:nvSpPr>
+        <p:spPr/>
+        <p:txBody>
+          <a:bodyPr/>
+          <a:lstStyle/>
+          <a:p>
+            <a:endParaRPr lang="en-US"/>
+          </a:p>
+        </p:txBody>
+      </p:sp>
+      <p:sp>
+        <p:nvSpPr>
+          <p:cNvPr id="7" name="Slide Number Placeholder 6"/>
+          <p:cNvSpPr>
+            <a:spLocks noGrp="1"/>
+          </p:cNvSpPr>
+          <p:nvPr>
+            <p:ph type="sldNum" sz="quarter" idx="12"/>
+          </p:nvPr>
+        </p:nvSpPr>
+        <p:spPr/>
+        <p:txBody>
+          <a:bodyPr/>
+          <a:lstStyle/>
+          <a:p>
+            <a:fld id="{A7A68015-F89B-4405-814E-A1C890A81D04}" type="slidenum">
+              <a:rPr lang="en-US" smtClean="0"/>
+              <a:t>‹#›</a:t>
+            </a:fld>
+            <a:endParaRPr lang="en-US"/>
+          </a:p>
+        </p:txBody>
+      </p:sp>
+    </p:spTree>
+    <p:extLst>
+      <p:ext uri="{BB962C8B-B14F-4D97-AF65-F5344CB8AC3E}">
+        <p14:creationId xmlns:p14="http://schemas.microsoft.com/office/powerpoint/2010/main" val="2202762450"/>
+      </p:ext>
+    </p:extLst>
+  </p:cSld>
+  <p:clrMapOvr>
+    <a:masterClrMapping/>
+  </p:clrMapOvr>
+</p:sldLayout>
+</file>
+
+<file path=ppt/slideLayouts/slideLayout11.xml><?xml version="1.0" encoding="utf-8"?>
 <p:sldLayout xmlns:a="http://schemas.openxmlformats.org/drawingml/2006/main" xmlns:r="http://schemas.openxmlformats.org/officeDocument/2006/relationships" xmlns:p="http://schemas.openxmlformats.org/presentationml/2006/main" preserve="1">
   <p:cSld name="Title and Caption">
     <p:spTree>
@@ -3226,17 +3205,15 @@
         </p:nvSpPr>
         <p:spPr>
           <a:xfrm>
-            <a:off x="677335" y="609600"/>
-            <a:ext cx="8596668" cy="3403600"/>
+            <a:off x="913795" y="608437"/>
+            <a:ext cx="10353762" cy="3534344"/>
           </a:xfrm>
         </p:spPr>
         <p:txBody>
-          <a:bodyPr anchor="ctr">
-            <a:normAutofit/>
-          </a:bodyPr>
+          <a:bodyPr anchor="ctr"/>
           <a:lstStyle>
-            <a:lvl1pPr algn="l">
-              <a:defRPr sz="4400" b="0" cap="none"/>
+            <a:lvl1pPr>
+              <a:defRPr sz="3200"/>
             </a:lvl1pPr>
           </a:lstStyle>
           <a:p>
@@ -3244,120 +3221,64 @@
               <a:rPr lang="en-US"/>
               <a:t>Click to edit Master title style</a:t>
             </a:r>
-          </a:p>
-        </p:txBody>
-      </p:sp>
-      <p:sp>
-        <p:nvSpPr>
-          <p:cNvPr id="3" name="Text Placeholder 2"/>
-          <p:cNvSpPr>
-            <a:spLocks noGrp="1"/>
-          </p:cNvSpPr>
-          <p:nvPr>
-            <p:ph type="body" idx="1"/>
+            <a:endParaRPr lang="en-US" dirty="0"/>
+          </a:p>
+        </p:txBody>
+      </p:sp>
+      <p:sp>
+        <p:nvSpPr>
+          <p:cNvPr id="4" name="Text Placeholder 3"/>
+          <p:cNvSpPr>
+            <a:spLocks noGrp="1"/>
+          </p:cNvSpPr>
+          <p:nvPr>
+            <p:ph type="body" sz="half" idx="2"/>
           </p:nvPr>
         </p:nvSpPr>
         <p:spPr>
           <a:xfrm>
-            <a:off x="677335" y="4470400"/>
-            <a:ext cx="8596668" cy="1570962"/>
+            <a:off x="913794" y="4295180"/>
+            <a:ext cx="10353763" cy="1501826"/>
           </a:xfrm>
         </p:spPr>
         <p:txBody>
-          <a:bodyPr anchor="ctr">
-            <a:normAutofit/>
-          </a:bodyPr>
+          <a:bodyPr anchor="ctr"/>
           <a:lstStyle>
-            <a:lvl1pPr marL="0" indent="0" algn="l">
-              <a:buNone/>
-              <a:defRPr sz="1800">
-                <a:solidFill>
-                  <a:schemeClr val="tx1">
-                    <a:lumMod val="75000"/>
-                    <a:lumOff val="25000"/>
-                  </a:schemeClr>
-                </a:solidFill>
-              </a:defRPr>
+            <a:lvl1pPr marL="0" indent="0" algn="ctr">
+              <a:buNone/>
+              <a:defRPr sz="1600"/>
             </a:lvl1pPr>
             <a:lvl2pPr marL="457200" indent="0">
               <a:buNone/>
-              <a:defRPr sz="1800">
-                <a:solidFill>
-                  <a:schemeClr val="tx1">
-                    <a:tint val="75000"/>
-                  </a:schemeClr>
-                </a:solidFill>
-              </a:defRPr>
+              <a:defRPr sz="1400"/>
             </a:lvl2pPr>
             <a:lvl3pPr marL="914400" indent="0">
               <a:buNone/>
-              <a:defRPr sz="1600">
-                <a:solidFill>
-                  <a:schemeClr val="tx1">
-                    <a:tint val="75000"/>
-                  </a:schemeClr>
-                </a:solidFill>
-              </a:defRPr>
+              <a:defRPr sz="1200"/>
             </a:lvl3pPr>
             <a:lvl4pPr marL="1371600" indent="0">
               <a:buNone/>
-              <a:defRPr sz="1400">
-                <a:solidFill>
-                  <a:schemeClr val="tx1">
-                    <a:tint val="75000"/>
-                  </a:schemeClr>
-                </a:solidFill>
-              </a:defRPr>
+              <a:defRPr sz="1000"/>
             </a:lvl4pPr>
             <a:lvl5pPr marL="1828800" indent="0">
               <a:buNone/>
-              <a:defRPr sz="1400">
-                <a:solidFill>
-                  <a:schemeClr val="tx1">
-                    <a:tint val="75000"/>
-                  </a:schemeClr>
-                </a:solidFill>
-              </a:defRPr>
+              <a:defRPr sz="1000"/>
             </a:lvl5pPr>
             <a:lvl6pPr marL="2286000" indent="0">
               <a:buNone/>
-              <a:defRPr sz="1400">
-                <a:solidFill>
-                  <a:schemeClr val="tx1">
-                    <a:tint val="75000"/>
-                  </a:schemeClr>
-                </a:solidFill>
-              </a:defRPr>
+              <a:defRPr sz="1000"/>
             </a:lvl6pPr>
             <a:lvl7pPr marL="2743200" indent="0">
               <a:buNone/>
-              <a:defRPr sz="1400">
-                <a:solidFill>
-                  <a:schemeClr val="tx1">
-                    <a:tint val="75000"/>
-                  </a:schemeClr>
-                </a:solidFill>
-              </a:defRPr>
+              <a:defRPr sz="1000"/>
             </a:lvl7pPr>
             <a:lvl8pPr marL="3200400" indent="0">
               <a:buNone/>
-              <a:defRPr sz="1400">
-                <a:solidFill>
-                  <a:schemeClr val="tx1">
-                    <a:tint val="75000"/>
-                  </a:schemeClr>
-                </a:solidFill>
-              </a:defRPr>
+              <a:defRPr sz="1000"/>
             </a:lvl8pPr>
             <a:lvl9pPr marL="3657600" indent="0">
               <a:buNone/>
-              <a:defRPr sz="1400">
-                <a:solidFill>
-                  <a:schemeClr val="tx1">
-                    <a:tint val="75000"/>
-                  </a:schemeClr>
-                </a:solidFill>
-              </a:defRPr>
+              <a:defRPr sz="1000"/>
             </a:lvl9pPr>
           </a:lstStyle>
           <a:p>
@@ -3371,7 +3292,7 @@
       </p:sp>
       <p:sp>
         <p:nvSpPr>
-          <p:cNvPr id="4" name="Date Placeholder 3"/>
+          <p:cNvPr id="5" name="Date Placeholder 4"/>
           <p:cNvSpPr>
             <a:spLocks noGrp="1"/>
           </p:cNvSpPr>
@@ -3386,7 +3307,7 @@
           <a:p>
             <a:fld id="{74411A3F-4DB3-47ED-809A-CD27B21BFB64}" type="datetimeFigureOut">
               <a:rPr lang="en-US" smtClean="0"/>
-              <a:t>12/14/2025</a:t>
+              <a:t>12/15/2025</a:t>
             </a:fld>
             <a:endParaRPr lang="en-US"/>
           </a:p>
@@ -3394,7 +3315,7 @@
       </p:sp>
       <p:sp>
         <p:nvSpPr>
-          <p:cNvPr id="5" name="Footer Placeholder 4"/>
+          <p:cNvPr id="6" name="Footer Placeholder 5"/>
           <p:cNvSpPr>
             <a:spLocks noGrp="1"/>
           </p:cNvSpPr>
@@ -3413,7 +3334,7 @@
       </p:sp>
       <p:sp>
         <p:nvSpPr>
-          <p:cNvPr id="6" name="Slide Number Placeholder 5"/>
+          <p:cNvPr id="7" name="Slide Number Placeholder 6"/>
           <p:cNvSpPr>
             <a:spLocks noGrp="1"/>
           </p:cNvSpPr>
@@ -3437,7 +3358,7 @@
     </p:spTree>
     <p:extLst>
       <p:ext uri="{BB962C8B-B14F-4D97-AF65-F5344CB8AC3E}">
-        <p14:creationId xmlns:p14="http://schemas.microsoft.com/office/powerpoint/2010/main" val="1004933727"/>
+        <p14:creationId xmlns:p14="http://schemas.microsoft.com/office/powerpoint/2010/main" val="2534301756"/>
       </p:ext>
     </p:extLst>
   </p:cSld>
@@ -3447,7 +3368,7 @@
 </p:sldLayout>
 </file>
 
-<file path=ppt/slideLayouts/slideLayout11.xml><?xml version="1.0" encoding="utf-8"?>
+<file path=ppt/slideLayouts/slideLayout12.xml><?xml version="1.0" encoding="utf-8"?>
 <p:sldLayout xmlns:a="http://schemas.openxmlformats.org/drawingml/2006/main" xmlns:r="http://schemas.openxmlformats.org/officeDocument/2006/relationships" xmlns:p="http://schemas.openxmlformats.org/presentationml/2006/main" preserve="1">
   <p:cSld name="Quote with Caption">
     <p:spTree>
@@ -3476,8 +3397,107 @@
         </p:nvSpPr>
         <p:spPr>
           <a:xfrm>
-            <a:off x="931334" y="609600"/>
-            <a:ext cx="8094134" cy="3022600"/>
+            <a:off x="1446212" y="609600"/>
+            <a:ext cx="9302752" cy="2992904"/>
+          </a:xfrm>
+        </p:spPr>
+        <p:txBody>
+          <a:bodyPr anchor="ctr"/>
+          <a:lstStyle>
+            <a:lvl1pPr>
+              <a:defRPr sz="3200"/>
+            </a:lvl1pPr>
+          </a:lstStyle>
+          <a:p>
+            <a:r>
+              <a:rPr lang="en-US"/>
+              <a:t>Click to edit Master title style</a:t>
+            </a:r>
+            <a:endParaRPr lang="en-US" dirty="0"/>
+          </a:p>
+        </p:txBody>
+      </p:sp>
+      <p:sp>
+        <p:nvSpPr>
+          <p:cNvPr id="12" name="Text Placeholder 3"/>
+          <p:cNvSpPr>
+            <a:spLocks noGrp="1"/>
+          </p:cNvSpPr>
+          <p:nvPr>
+            <p:ph type="body" sz="half" idx="13"/>
+          </p:nvPr>
+        </p:nvSpPr>
+        <p:spPr>
+          <a:xfrm>
+            <a:off x="1720644" y="3610032"/>
+            <a:ext cx="8752299" cy="532749"/>
+          </a:xfrm>
+        </p:spPr>
+        <p:txBody>
+          <a:bodyPr anchor="t">
+            <a:normAutofit/>
+          </a:bodyPr>
+          <a:lstStyle>
+            <a:lvl1pPr marL="0" indent="0" algn="r">
+              <a:buNone/>
+              <a:defRPr sz="1400"/>
+            </a:lvl1pPr>
+            <a:lvl2pPr marL="457200" indent="0">
+              <a:buNone/>
+              <a:defRPr sz="1400"/>
+            </a:lvl2pPr>
+            <a:lvl3pPr marL="914400" indent="0">
+              <a:buNone/>
+              <a:defRPr sz="1200"/>
+            </a:lvl3pPr>
+            <a:lvl4pPr marL="1371600" indent="0">
+              <a:buNone/>
+              <a:defRPr sz="1000"/>
+            </a:lvl4pPr>
+            <a:lvl5pPr marL="1828800" indent="0">
+              <a:buNone/>
+              <a:defRPr sz="1000"/>
+            </a:lvl5pPr>
+            <a:lvl6pPr marL="2286000" indent="0">
+              <a:buNone/>
+              <a:defRPr sz="1000"/>
+            </a:lvl6pPr>
+            <a:lvl7pPr marL="2743200" indent="0">
+              <a:buNone/>
+              <a:defRPr sz="1000"/>
+            </a:lvl7pPr>
+            <a:lvl8pPr marL="3200400" indent="0">
+              <a:buNone/>
+              <a:defRPr sz="1000"/>
+            </a:lvl8pPr>
+            <a:lvl9pPr marL="3657600" indent="0">
+              <a:buNone/>
+              <a:defRPr sz="1000"/>
+            </a:lvl9pPr>
+          </a:lstStyle>
+          <a:p>
+            <a:pPr lvl="0"/>
+            <a:r>
+              <a:rPr lang="en-US"/>
+              <a:t>Click to edit Master text styles</a:t>
+            </a:r>
+          </a:p>
+        </p:txBody>
+      </p:sp>
+      <p:sp>
+        <p:nvSpPr>
+          <p:cNvPr id="4" name="Text Placeholder 3"/>
+          <p:cNvSpPr>
+            <a:spLocks noGrp="1"/>
+          </p:cNvSpPr>
+          <p:nvPr>
+            <p:ph type="body" sz="half" idx="2"/>
+          </p:nvPr>
+        </p:nvSpPr>
+        <p:spPr>
+          <a:xfrm>
+            <a:off x="913794" y="4304353"/>
+            <a:ext cx="10353763" cy="1489496"/>
           </a:xfrm>
         </p:spPr>
         <p:txBody>
@@ -3485,71 +3505,42 @@
             <a:normAutofit/>
           </a:bodyPr>
           <a:lstStyle>
-            <a:lvl1pPr algn="l">
-              <a:defRPr sz="4400" b="0" cap="none"/>
-            </a:lvl1pPr>
-          </a:lstStyle>
-          <a:p>
-            <a:r>
-              <a:rPr lang="en-US"/>
-              <a:t>Click to edit Master title style</a:t>
-            </a:r>
-          </a:p>
-        </p:txBody>
-      </p:sp>
-      <p:sp>
-        <p:nvSpPr>
-          <p:cNvPr id="23" name="Text Placeholder 9"/>
-          <p:cNvSpPr>
-            <a:spLocks noGrp="1"/>
-          </p:cNvSpPr>
-          <p:nvPr>
-            <p:ph type="body" sz="quarter" idx="13"/>
-          </p:nvPr>
-        </p:nvSpPr>
-        <p:spPr>
-          <a:xfrm>
-            <a:off x="1366139" y="3632200"/>
-            <a:ext cx="7224524" cy="381000"/>
-          </a:xfrm>
-        </p:spPr>
-        <p:txBody>
-          <a:bodyPr anchor="ctr">
-            <a:noAutofit/>
-          </a:bodyPr>
-          <a:lstStyle>
-            <a:lvl1pPr marL="0" indent="0">
-              <a:buFontTx/>
-              <a:buNone/>
-              <a:defRPr sz="1600">
-                <a:solidFill>
-                  <a:schemeClr val="tx1">
-                    <a:lumMod val="50000"/>
-                    <a:lumOff val="50000"/>
-                  </a:schemeClr>
-                </a:solidFill>
-              </a:defRPr>
+            <a:lvl1pPr marL="0" indent="0" algn="ctr">
+              <a:buNone/>
+              <a:defRPr sz="1600"/>
             </a:lvl1pPr>
             <a:lvl2pPr marL="457200" indent="0">
-              <a:buFontTx/>
-              <a:buNone/>
-              <a:defRPr/>
+              <a:buNone/>
+              <a:defRPr sz="1400"/>
             </a:lvl2pPr>
             <a:lvl3pPr marL="914400" indent="0">
-              <a:buFontTx/>
-              <a:buNone/>
-              <a:defRPr/>
+              <a:buNone/>
+              <a:defRPr sz="1200"/>
             </a:lvl3pPr>
             <a:lvl4pPr marL="1371600" indent="0">
-              <a:buFontTx/>
-              <a:buNone/>
-              <a:defRPr/>
+              <a:buNone/>
+              <a:defRPr sz="1000"/>
             </a:lvl4pPr>
             <a:lvl5pPr marL="1828800" indent="0">
-              <a:buFontTx/>
-              <a:buNone/>
-              <a:defRPr/>
+              <a:buNone/>
+              <a:defRPr sz="1000"/>
             </a:lvl5pPr>
+            <a:lvl6pPr marL="2286000" indent="0">
+              <a:buNone/>
+              <a:defRPr sz="1000"/>
+            </a:lvl6pPr>
+            <a:lvl7pPr marL="2743200" indent="0">
+              <a:buNone/>
+              <a:defRPr sz="1000"/>
+            </a:lvl7pPr>
+            <a:lvl8pPr marL="3200400" indent="0">
+              <a:buNone/>
+              <a:defRPr sz="1000"/>
+            </a:lvl8pPr>
+            <a:lvl9pPr marL="3657600" indent="0">
+              <a:buNone/>
+              <a:defRPr sz="1000"/>
+            </a:lvl9pPr>
           </a:lstStyle>
           <a:p>
             <a:pPr lvl="0"/>
@@ -3562,129 +3553,7 @@
       </p:sp>
       <p:sp>
         <p:nvSpPr>
-          <p:cNvPr id="3" name="Text Placeholder 2"/>
-          <p:cNvSpPr>
-            <a:spLocks noGrp="1"/>
-          </p:cNvSpPr>
-          <p:nvPr>
-            <p:ph type="body" idx="1"/>
-          </p:nvPr>
-        </p:nvSpPr>
-        <p:spPr>
-          <a:xfrm>
-            <a:off x="677335" y="4470400"/>
-            <a:ext cx="8596668" cy="1570962"/>
-          </a:xfrm>
-        </p:spPr>
-        <p:txBody>
-          <a:bodyPr anchor="ctr">
-            <a:normAutofit/>
-          </a:bodyPr>
-          <a:lstStyle>
-            <a:lvl1pPr marL="0" indent="0" algn="l">
-              <a:buNone/>
-              <a:defRPr sz="1800">
-                <a:solidFill>
-                  <a:schemeClr val="tx1">
-                    <a:lumMod val="75000"/>
-                    <a:lumOff val="25000"/>
-                  </a:schemeClr>
-                </a:solidFill>
-              </a:defRPr>
-            </a:lvl1pPr>
-            <a:lvl2pPr marL="457200" indent="0">
-              <a:buNone/>
-              <a:defRPr sz="1800">
-                <a:solidFill>
-                  <a:schemeClr val="tx1">
-                    <a:tint val="75000"/>
-                  </a:schemeClr>
-                </a:solidFill>
-              </a:defRPr>
-            </a:lvl2pPr>
-            <a:lvl3pPr marL="914400" indent="0">
-              <a:buNone/>
-              <a:defRPr sz="1600">
-                <a:solidFill>
-                  <a:schemeClr val="tx1">
-                    <a:tint val="75000"/>
-                  </a:schemeClr>
-                </a:solidFill>
-              </a:defRPr>
-            </a:lvl3pPr>
-            <a:lvl4pPr marL="1371600" indent="0">
-              <a:buNone/>
-              <a:defRPr sz="1400">
-                <a:solidFill>
-                  <a:schemeClr val="tx1">
-                    <a:tint val="75000"/>
-                  </a:schemeClr>
-                </a:solidFill>
-              </a:defRPr>
-            </a:lvl4pPr>
-            <a:lvl5pPr marL="1828800" indent="0">
-              <a:buNone/>
-              <a:defRPr sz="1400">
-                <a:solidFill>
-                  <a:schemeClr val="tx1">
-                    <a:tint val="75000"/>
-                  </a:schemeClr>
-                </a:solidFill>
-              </a:defRPr>
-            </a:lvl5pPr>
-            <a:lvl6pPr marL="2286000" indent="0">
-              <a:buNone/>
-              <a:defRPr sz="1400">
-                <a:solidFill>
-                  <a:schemeClr val="tx1">
-                    <a:tint val="75000"/>
-                  </a:schemeClr>
-                </a:solidFill>
-              </a:defRPr>
-            </a:lvl6pPr>
-            <a:lvl7pPr marL="2743200" indent="0">
-              <a:buNone/>
-              <a:defRPr sz="1400">
-                <a:solidFill>
-                  <a:schemeClr val="tx1">
-                    <a:tint val="75000"/>
-                  </a:schemeClr>
-                </a:solidFill>
-              </a:defRPr>
-            </a:lvl7pPr>
-            <a:lvl8pPr marL="3200400" indent="0">
-              <a:buNone/>
-              <a:defRPr sz="1400">
-                <a:solidFill>
-                  <a:schemeClr val="tx1">
-                    <a:tint val="75000"/>
-                  </a:schemeClr>
-                </a:solidFill>
-              </a:defRPr>
-            </a:lvl8pPr>
-            <a:lvl9pPr marL="3657600" indent="0">
-              <a:buNone/>
-              <a:defRPr sz="1400">
-                <a:solidFill>
-                  <a:schemeClr val="tx1">
-                    <a:tint val="75000"/>
-                  </a:schemeClr>
-                </a:solidFill>
-              </a:defRPr>
-            </a:lvl9pPr>
-          </a:lstStyle>
-          <a:p>
-            <a:pPr lvl="0"/>
-            <a:r>
-              <a:rPr lang="en-US"/>
-              <a:t>Click to edit Master text styles</a:t>
-            </a:r>
-          </a:p>
-        </p:txBody>
-      </p:sp>
-      <p:sp>
-        <p:nvSpPr>
-          <p:cNvPr id="4" name="Date Placeholder 3"/>
+          <p:cNvPr id="5" name="Date Placeholder 4"/>
           <p:cNvSpPr>
             <a:spLocks noGrp="1"/>
           </p:cNvSpPr>
@@ -3699,7 +3568,7 @@
           <a:p>
             <a:fld id="{74411A3F-4DB3-47ED-809A-CD27B21BFB64}" type="datetimeFigureOut">
               <a:rPr lang="en-US" smtClean="0"/>
-              <a:t>12/14/2025</a:t>
+              <a:t>12/15/2025</a:t>
             </a:fld>
             <a:endParaRPr lang="en-US"/>
           </a:p>
@@ -3707,7 +3576,7 @@
       </p:sp>
       <p:sp>
         <p:nvSpPr>
-          <p:cNvPr id="5" name="Footer Placeholder 4"/>
+          <p:cNvPr id="6" name="Footer Placeholder 5"/>
           <p:cNvSpPr>
             <a:spLocks noGrp="1"/>
           </p:cNvSpPr>
@@ -3726,7 +3595,7 @@
       </p:sp>
       <p:sp>
         <p:nvSpPr>
-          <p:cNvPr id="6" name="Slide Number Placeholder 5"/>
+          <p:cNvPr id="7" name="Slide Number Placeholder 6"/>
           <p:cNvSpPr>
             <a:spLocks noGrp="1"/>
           </p:cNvSpPr>
@@ -3749,13 +3618,13 @@
       </p:sp>
       <p:sp>
         <p:nvSpPr>
-          <p:cNvPr id="20" name="TextBox 19"/>
+          <p:cNvPr id="11" name="TextBox 10"/>
           <p:cNvSpPr txBox="1"/>
           <p:nvPr/>
         </p:nvSpPr>
         <p:spPr>
           <a:xfrm>
-            <a:off x="541870" y="790378"/>
+            <a:off x="990600" y="884796"/>
             <a:ext cx="609600" cy="584776"/>
           </a:xfrm>
           <a:prstGeom prst="rect">
@@ -3766,22 +3635,97 @@
           <a:bodyPr vert="horz" lIns="91440" tIns="45720" rIns="91440" bIns="45720" rtlCol="0" anchor="ctr">
             <a:noAutofit/>
           </a:bodyPr>
-          <a:lstStyle/>
-          <a:p>
-            <a:pPr lvl="0"/>
-            <a:r>
-              <a:rPr lang="en-US" sz="8000" baseline="0">
+          <a:lstStyle>
+            <a:lvl1pPr>
+              <a:spcBef>
+                <a:spcPct val="0"/>
+              </a:spcBef>
+              <a:buNone/>
+              <a:defRPr sz="3200" b="0" cap="all">
                 <a:ln w="3175" cmpd="sng">
                   <a:noFill/>
                 </a:ln>
+                <a:effectLst>
+                  <a:glow rad="38100">
+                    <a:schemeClr val="bg1">
+                      <a:lumMod val="65000"/>
+                      <a:lumOff val="35000"/>
+                      <a:alpha val="40000"/>
+                    </a:schemeClr>
+                  </a:glow>
+                  <a:outerShdw blurRad="28575" dist="38100" dir="14040000" algn="tl" rotWithShape="0">
+                    <a:srgbClr val="000000">
+                      <a:alpha val="25000"/>
+                    </a:srgbClr>
+                  </a:outerShdw>
+                </a:effectLst>
+              </a:defRPr>
+            </a:lvl1pPr>
+            <a:lvl2pPr>
+              <a:defRPr>
                 <a:solidFill>
-                  <a:schemeClr val="accent1">
-                    <a:lumMod val="60000"/>
-                    <a:lumOff val="40000"/>
-                  </a:schemeClr>
+                  <a:schemeClr val="tx2"/>
+                </a:solidFill>
+              </a:defRPr>
+            </a:lvl2pPr>
+            <a:lvl3pPr>
+              <a:defRPr>
+                <a:solidFill>
+                  <a:schemeClr val="tx2"/>
+                </a:solidFill>
+              </a:defRPr>
+            </a:lvl3pPr>
+            <a:lvl4pPr>
+              <a:defRPr>
+                <a:solidFill>
+                  <a:schemeClr val="tx2"/>
+                </a:solidFill>
+              </a:defRPr>
+            </a:lvl4pPr>
+            <a:lvl5pPr>
+              <a:defRPr>
+                <a:solidFill>
+                  <a:schemeClr val="tx2"/>
+                </a:solidFill>
+              </a:defRPr>
+            </a:lvl5pPr>
+            <a:lvl6pPr>
+              <a:defRPr>
+                <a:solidFill>
+                  <a:schemeClr val="tx2"/>
+                </a:solidFill>
+              </a:defRPr>
+            </a:lvl6pPr>
+            <a:lvl7pPr>
+              <a:defRPr>
+                <a:solidFill>
+                  <a:schemeClr val="tx2"/>
+                </a:solidFill>
+              </a:defRPr>
+            </a:lvl7pPr>
+            <a:lvl8pPr>
+              <a:defRPr>
+                <a:solidFill>
+                  <a:schemeClr val="tx2"/>
+                </a:solidFill>
+              </a:defRPr>
+            </a:lvl8pPr>
+            <a:lvl9pPr>
+              <a:defRPr>
+                <a:solidFill>
+                  <a:schemeClr val="tx2"/>
+                </a:solidFill>
+              </a:defRPr>
+            </a:lvl9pPr>
+          </a:lstStyle>
+          <a:p>
+            <a:pPr lvl="0"/>
+            <a:r>
+              <a:rPr lang="en-US" sz="8000" dirty="0">
+                <a:solidFill>
+                  <a:schemeClr val="tx1"/>
                 </a:solidFill>
                 <a:effectLst/>
-                <a:latin typeface="Arial"/>
               </a:rPr>
               <a:t>“</a:t>
             </a:r>
@@ -3790,13 +3734,13 @@
       </p:sp>
       <p:sp>
         <p:nvSpPr>
-          <p:cNvPr id="22" name="TextBox 21"/>
+          <p:cNvPr id="13" name="TextBox 12"/>
           <p:cNvSpPr txBox="1"/>
           <p:nvPr/>
         </p:nvSpPr>
         <p:spPr>
           <a:xfrm>
-            <a:off x="8893011" y="2886556"/>
+            <a:off x="10504716" y="2928258"/>
             <a:ext cx="609600" cy="584776"/>
           </a:xfrm>
           <a:prstGeom prst="rect">
@@ -3807,40 +3751,107 @@
           <a:bodyPr vert="horz" lIns="91440" tIns="45720" rIns="91440" bIns="45720" rtlCol="0" anchor="ctr">
             <a:noAutofit/>
           </a:bodyPr>
-          <a:lstStyle/>
-          <a:p>
-            <a:pPr lvl="0"/>
-            <a:r>
-              <a:rPr lang="en-US" sz="8000" baseline="0">
+          <a:lstStyle>
+            <a:lvl1pPr>
+              <a:spcBef>
+                <a:spcPct val="0"/>
+              </a:spcBef>
+              <a:buNone/>
+              <a:defRPr sz="3200" b="0" cap="all">
                 <a:ln w="3175" cmpd="sng">
                   <a:noFill/>
                 </a:ln>
+                <a:effectLst>
+                  <a:glow rad="38100">
+                    <a:schemeClr val="bg1">
+                      <a:lumMod val="65000"/>
+                      <a:lumOff val="35000"/>
+                      <a:alpha val="40000"/>
+                    </a:schemeClr>
+                  </a:glow>
+                  <a:outerShdw blurRad="28575" dist="38100" dir="14040000" algn="tl" rotWithShape="0">
+                    <a:srgbClr val="000000">
+                      <a:alpha val="25000"/>
+                    </a:srgbClr>
+                  </a:outerShdw>
+                </a:effectLst>
+              </a:defRPr>
+            </a:lvl1pPr>
+            <a:lvl2pPr>
+              <a:defRPr>
                 <a:solidFill>
-                  <a:schemeClr val="accent1">
-                    <a:lumMod val="60000"/>
-                    <a:lumOff val="40000"/>
-                  </a:schemeClr>
+                  <a:schemeClr val="tx2"/>
                 </a:solidFill>
-                <a:latin typeface="Arial"/>
+              </a:defRPr>
+            </a:lvl2pPr>
+            <a:lvl3pPr>
+              <a:defRPr>
+                <a:solidFill>
+                  <a:schemeClr val="tx2"/>
+                </a:solidFill>
+              </a:defRPr>
+            </a:lvl3pPr>
+            <a:lvl4pPr>
+              <a:defRPr>
+                <a:solidFill>
+                  <a:schemeClr val="tx2"/>
+                </a:solidFill>
+              </a:defRPr>
+            </a:lvl4pPr>
+            <a:lvl5pPr>
+              <a:defRPr>
+                <a:solidFill>
+                  <a:schemeClr val="tx2"/>
+                </a:solidFill>
+              </a:defRPr>
+            </a:lvl5pPr>
+            <a:lvl6pPr>
+              <a:defRPr>
+                <a:solidFill>
+                  <a:schemeClr val="tx2"/>
+                </a:solidFill>
+              </a:defRPr>
+            </a:lvl6pPr>
+            <a:lvl7pPr>
+              <a:defRPr>
+                <a:solidFill>
+                  <a:schemeClr val="tx2"/>
+                </a:solidFill>
+              </a:defRPr>
+            </a:lvl7pPr>
+            <a:lvl8pPr>
+              <a:defRPr>
+                <a:solidFill>
+                  <a:schemeClr val="tx2"/>
+                </a:solidFill>
+              </a:defRPr>
+            </a:lvl8pPr>
+            <a:lvl9pPr>
+              <a:defRPr>
+                <a:solidFill>
+                  <a:schemeClr val="tx2"/>
+                </a:solidFill>
+              </a:defRPr>
+            </a:lvl9pPr>
+          </a:lstStyle>
+          <a:p>
+            <a:pPr lvl="0" algn="r"/>
+            <a:r>
+              <a:rPr lang="en-US" sz="8000" dirty="0">
+                <a:solidFill>
+                  <a:schemeClr val="tx1"/>
+                </a:solidFill>
+                <a:effectLst/>
               </a:rPr>
               <a:t>”</a:t>
             </a:r>
-            <a:endParaRPr lang="en-US">
-              <a:solidFill>
-                <a:schemeClr val="accent1">
-                  <a:lumMod val="60000"/>
-                  <a:lumOff val="40000"/>
-                </a:schemeClr>
-              </a:solidFill>
-              <a:latin typeface="Arial"/>
-            </a:endParaRPr>
           </a:p>
         </p:txBody>
       </p:sp>
     </p:spTree>
     <p:extLst>
       <p:ext uri="{BB962C8B-B14F-4D97-AF65-F5344CB8AC3E}">
-        <p14:creationId xmlns:p14="http://schemas.microsoft.com/office/powerpoint/2010/main" val="192540480"/>
+        <p14:creationId xmlns:p14="http://schemas.microsoft.com/office/powerpoint/2010/main" val="2641254476"/>
       </p:ext>
     </p:extLst>
   </p:cSld>
@@ -3850,7 +3861,7 @@
 </p:sldLayout>
 </file>
 
-<file path=ppt/slideLayouts/slideLayout12.xml><?xml version="1.0" encoding="utf-8"?>
+<file path=ppt/slideLayouts/slideLayout13.xml><?xml version="1.0" encoding="utf-8"?>
 <p:sldLayout xmlns:a="http://schemas.openxmlformats.org/drawingml/2006/main" xmlns:r="http://schemas.openxmlformats.org/officeDocument/2006/relationships" xmlns:p="http://schemas.openxmlformats.org/presentationml/2006/main" preserve="1">
   <p:cSld name="Name Card">
     <p:spTree>
@@ -3879,17 +3890,15 @@
         </p:nvSpPr>
         <p:spPr>
           <a:xfrm>
-            <a:off x="677335" y="1931988"/>
-            <a:ext cx="8596668" cy="2595460"/>
+            <a:off x="913794" y="2126942"/>
+            <a:ext cx="10353763" cy="2511835"/>
           </a:xfrm>
         </p:spPr>
         <p:txBody>
-          <a:bodyPr anchor="b">
-            <a:normAutofit/>
-          </a:bodyPr>
+          <a:bodyPr anchor="b"/>
           <a:lstStyle>
-            <a:lvl1pPr algn="l">
-              <a:defRPr sz="4400" b="0" cap="none"/>
+            <a:lvl1pPr>
+              <a:defRPr sz="3200"/>
             </a:lvl1pPr>
           </a:lstStyle>
           <a:p>
@@ -3897,120 +3906,64 @@
               <a:rPr lang="en-US"/>
               <a:t>Click to edit Master title style</a:t>
             </a:r>
-          </a:p>
-        </p:txBody>
-      </p:sp>
-      <p:sp>
-        <p:nvSpPr>
-          <p:cNvPr id="3" name="Text Placeholder 2"/>
-          <p:cNvSpPr>
-            <a:spLocks noGrp="1"/>
-          </p:cNvSpPr>
-          <p:nvPr>
-            <p:ph type="body" idx="1"/>
+            <a:endParaRPr lang="en-US" dirty="0"/>
+          </a:p>
+        </p:txBody>
+      </p:sp>
+      <p:sp>
+        <p:nvSpPr>
+          <p:cNvPr id="4" name="Text Placeholder 3"/>
+          <p:cNvSpPr>
+            <a:spLocks noGrp="1"/>
+          </p:cNvSpPr>
+          <p:nvPr>
+            <p:ph type="body" sz="half" idx="2"/>
           </p:nvPr>
         </p:nvSpPr>
         <p:spPr>
           <a:xfrm>
-            <a:off x="677335" y="4527448"/>
-            <a:ext cx="8596668" cy="1513914"/>
+            <a:off x="913784" y="4650556"/>
+            <a:ext cx="10352199" cy="1140644"/>
           </a:xfrm>
         </p:spPr>
         <p:txBody>
-          <a:bodyPr anchor="t">
-            <a:normAutofit/>
-          </a:bodyPr>
+          <a:bodyPr anchor="t"/>
           <a:lstStyle>
-            <a:lvl1pPr marL="0" indent="0" algn="l">
-              <a:buNone/>
-              <a:defRPr sz="1800">
-                <a:solidFill>
-                  <a:schemeClr val="tx1">
-                    <a:lumMod val="75000"/>
-                    <a:lumOff val="25000"/>
-                  </a:schemeClr>
-                </a:solidFill>
-              </a:defRPr>
+            <a:lvl1pPr marL="0" indent="0" algn="ctr">
+              <a:buNone/>
+              <a:defRPr sz="1600"/>
             </a:lvl1pPr>
             <a:lvl2pPr marL="457200" indent="0">
               <a:buNone/>
-              <a:defRPr sz="1800">
-                <a:solidFill>
-                  <a:schemeClr val="tx1">
-                    <a:tint val="75000"/>
-                  </a:schemeClr>
-                </a:solidFill>
-              </a:defRPr>
+              <a:defRPr sz="1400"/>
             </a:lvl2pPr>
             <a:lvl3pPr marL="914400" indent="0">
               <a:buNone/>
-              <a:defRPr sz="1600">
-                <a:solidFill>
-                  <a:schemeClr val="tx1">
-                    <a:tint val="75000"/>
-                  </a:schemeClr>
-                </a:solidFill>
-              </a:defRPr>
+              <a:defRPr sz="1200"/>
             </a:lvl3pPr>
             <a:lvl4pPr marL="1371600" indent="0">
               <a:buNone/>
-              <a:defRPr sz="1400">
-                <a:solidFill>
-                  <a:schemeClr val="tx1">
-                    <a:tint val="75000"/>
-                  </a:schemeClr>
-                </a:solidFill>
-              </a:defRPr>
+              <a:defRPr sz="1000"/>
             </a:lvl4pPr>
             <a:lvl5pPr marL="1828800" indent="0">
               <a:buNone/>
-              <a:defRPr sz="1400">
-                <a:solidFill>
-                  <a:schemeClr val="tx1">
-                    <a:tint val="75000"/>
-                  </a:schemeClr>
-                </a:solidFill>
-              </a:defRPr>
+              <a:defRPr sz="1000"/>
             </a:lvl5pPr>
             <a:lvl6pPr marL="2286000" indent="0">
               <a:buNone/>
-              <a:defRPr sz="1400">
-                <a:solidFill>
-                  <a:schemeClr val="tx1">
-                    <a:tint val="75000"/>
-                  </a:schemeClr>
-                </a:solidFill>
-              </a:defRPr>
+              <a:defRPr sz="1000"/>
             </a:lvl6pPr>
             <a:lvl7pPr marL="2743200" indent="0">
               <a:buNone/>
-              <a:defRPr sz="1400">
-                <a:solidFill>
-                  <a:schemeClr val="tx1">
-                    <a:tint val="75000"/>
-                  </a:schemeClr>
-                </a:solidFill>
-              </a:defRPr>
+              <a:defRPr sz="1000"/>
             </a:lvl7pPr>
             <a:lvl8pPr marL="3200400" indent="0">
               <a:buNone/>
-              <a:defRPr sz="1400">
-                <a:solidFill>
-                  <a:schemeClr val="tx1">
-                    <a:tint val="75000"/>
-                  </a:schemeClr>
-                </a:solidFill>
-              </a:defRPr>
+              <a:defRPr sz="1000"/>
             </a:lvl8pPr>
             <a:lvl9pPr marL="3657600" indent="0">
               <a:buNone/>
-              <a:defRPr sz="1400">
-                <a:solidFill>
-                  <a:schemeClr val="tx1">
-                    <a:tint val="75000"/>
-                  </a:schemeClr>
-                </a:solidFill>
-              </a:defRPr>
+              <a:defRPr sz="1000"/>
             </a:lvl9pPr>
           </a:lstStyle>
           <a:p>
@@ -4024,7 +3977,7 @@
       </p:sp>
       <p:sp>
         <p:nvSpPr>
-          <p:cNvPr id="4" name="Date Placeholder 3"/>
+          <p:cNvPr id="5" name="Date Placeholder 4"/>
           <p:cNvSpPr>
             <a:spLocks noGrp="1"/>
           </p:cNvSpPr>
@@ -4039,7 +3992,7 @@
           <a:p>
             <a:fld id="{74411A3F-4DB3-47ED-809A-CD27B21BFB64}" type="datetimeFigureOut">
               <a:rPr lang="en-US" smtClean="0"/>
-              <a:t>12/14/2025</a:t>
+              <a:t>12/15/2025</a:t>
             </a:fld>
             <a:endParaRPr lang="en-US"/>
           </a:p>
@@ -4047,7 +4000,7 @@
       </p:sp>
       <p:sp>
         <p:nvSpPr>
-          <p:cNvPr id="5" name="Footer Placeholder 4"/>
+          <p:cNvPr id="6" name="Footer Placeholder 5"/>
           <p:cNvSpPr>
             <a:spLocks noGrp="1"/>
           </p:cNvSpPr>
@@ -4066,7 +4019,7 @@
       </p:sp>
       <p:sp>
         <p:nvSpPr>
-          <p:cNvPr id="6" name="Slide Number Placeholder 5"/>
+          <p:cNvPr id="7" name="Slide Number Placeholder 6"/>
           <p:cNvSpPr>
             <a:spLocks noGrp="1"/>
           </p:cNvSpPr>
@@ -4090,7 +4043,7 @@
     </p:spTree>
     <p:extLst>
       <p:ext uri="{BB962C8B-B14F-4D97-AF65-F5344CB8AC3E}">
-        <p14:creationId xmlns:p14="http://schemas.microsoft.com/office/powerpoint/2010/main" val="145364383"/>
+        <p14:creationId xmlns:p14="http://schemas.microsoft.com/office/powerpoint/2010/main" val="3999674031"/>
       </p:ext>
     </p:extLst>
   </p:cSld>
@@ -4100,9 +4053,9 @@
 </p:sldLayout>
 </file>
 
-<file path=ppt/slideLayouts/slideLayout13.xml><?xml version="1.0" encoding="utf-8"?>
+<file path=ppt/slideLayouts/slideLayout14.xml><?xml version="1.0" encoding="utf-8"?>
 <p:sldLayout xmlns:a="http://schemas.openxmlformats.org/drawingml/2006/main" xmlns:r="http://schemas.openxmlformats.org/officeDocument/2006/relationships" xmlns:p="http://schemas.openxmlformats.org/presentationml/2006/main" preserve="1">
-  <p:cSld name="Quote Name Card">
+  <p:cSld name="3 Column">
     <p:spTree>
       <p:nvGrpSpPr>
         <p:cNvPr id="1" name=""/>
@@ -4119,7 +4072,7 @@
       </p:grpSpPr>
       <p:sp>
         <p:nvSpPr>
-          <p:cNvPr id="2" name="Title 1"/>
+          <p:cNvPr id="15" name="Title 1"/>
           <p:cNvSpPr>
             <a:spLocks noGrp="1"/>
           </p:cNvSpPr>
@@ -4129,41 +4082,36 @@
         </p:nvSpPr>
         <p:spPr>
           <a:xfrm>
-            <a:off x="931334" y="609600"/>
-            <a:ext cx="8094134" cy="3022600"/>
+            <a:off x="913795" y="609600"/>
+            <a:ext cx="10353762" cy="970450"/>
           </a:xfrm>
         </p:spPr>
         <p:txBody>
-          <a:bodyPr anchor="ctr">
-            <a:normAutofit/>
-          </a:bodyPr>
-          <a:lstStyle>
-            <a:lvl1pPr algn="l">
-              <a:defRPr sz="4400" b="0" cap="none"/>
-            </a:lvl1pPr>
-          </a:lstStyle>
+          <a:bodyPr/>
+          <a:lstStyle/>
           <a:p>
             <a:r>
               <a:rPr lang="en-US"/>
               <a:t>Click to edit Master title style</a:t>
             </a:r>
-          </a:p>
-        </p:txBody>
-      </p:sp>
-      <p:sp>
-        <p:nvSpPr>
-          <p:cNvPr id="23" name="Text Placeholder 9"/>
-          <p:cNvSpPr>
-            <a:spLocks noGrp="1"/>
-          </p:cNvSpPr>
-          <p:nvPr>
-            <p:ph type="body" sz="quarter" idx="13"/>
+            <a:endParaRPr lang="en-US" dirty="0"/>
+          </a:p>
+        </p:txBody>
+      </p:sp>
+      <p:sp>
+        <p:nvSpPr>
+          <p:cNvPr id="7" name="Text Placeholder 2"/>
+          <p:cNvSpPr>
+            <a:spLocks noGrp="1"/>
+          </p:cNvSpPr>
+          <p:nvPr>
+            <p:ph type="body" idx="1"/>
           </p:nvPr>
         </p:nvSpPr>
         <p:spPr>
           <a:xfrm>
-            <a:off x="677332" y="4013200"/>
-            <a:ext cx="8596669" cy="514248"/>
+            <a:off x="913795" y="1885950"/>
+            <a:ext cx="3300984" cy="576262"/>
           </a:xfrm>
         </p:spPr>
         <p:txBody>
@@ -4171,38 +4119,46 @@
             <a:noAutofit/>
           </a:bodyPr>
           <a:lstStyle>
-            <a:lvl1pPr marL="0" indent="0">
-              <a:buFontTx/>
-              <a:buNone/>
-              <a:defRPr sz="2400">
+            <a:lvl1pPr marL="0" indent="0" algn="ctr">
+              <a:buNone/>
+              <a:defRPr sz="2400" b="0">
                 <a:solidFill>
-                  <a:schemeClr val="tx1">
-                    <a:lumMod val="75000"/>
-                    <a:lumOff val="25000"/>
-                  </a:schemeClr>
+                  <a:schemeClr val="tx1"/>
                 </a:solidFill>
               </a:defRPr>
             </a:lvl1pPr>
             <a:lvl2pPr marL="457200" indent="0">
-              <a:buFontTx/>
-              <a:buNone/>
-              <a:defRPr/>
+              <a:buNone/>
+              <a:defRPr sz="2000" b="1"/>
             </a:lvl2pPr>
             <a:lvl3pPr marL="914400" indent="0">
-              <a:buFontTx/>
-              <a:buNone/>
-              <a:defRPr/>
+              <a:buNone/>
+              <a:defRPr sz="1800" b="1"/>
             </a:lvl3pPr>
             <a:lvl4pPr marL="1371600" indent="0">
-              <a:buFontTx/>
-              <a:buNone/>
-              <a:defRPr/>
+              <a:buNone/>
+              <a:defRPr sz="1600" b="1"/>
             </a:lvl4pPr>
             <a:lvl5pPr marL="1828800" indent="0">
-              <a:buFontTx/>
-              <a:buNone/>
-              <a:defRPr/>
+              <a:buNone/>
+              <a:defRPr sz="1600" b="1"/>
             </a:lvl5pPr>
+            <a:lvl6pPr marL="2286000" indent="0">
+              <a:buNone/>
+              <a:defRPr sz="1600" b="1"/>
+            </a:lvl6pPr>
+            <a:lvl7pPr marL="2743200" indent="0">
+              <a:buNone/>
+              <a:defRPr sz="1600" b="1"/>
+            </a:lvl7pPr>
+            <a:lvl8pPr marL="3200400" indent="0">
+              <a:buNone/>
+              <a:defRPr sz="1600" b="1"/>
+            </a:lvl8pPr>
+            <a:lvl9pPr marL="3657600" indent="0">
+              <a:buNone/>
+              <a:defRPr sz="1600" b="1"/>
+            </a:lvl9pPr>
           </a:lstStyle>
           <a:p>
             <a:pPr lvl="0"/>
@@ -4215,18 +4171,18 @@
       </p:sp>
       <p:sp>
         <p:nvSpPr>
-          <p:cNvPr id="3" name="Text Placeholder 2"/>
-          <p:cNvSpPr>
-            <a:spLocks noGrp="1"/>
-          </p:cNvSpPr>
-          <p:nvPr>
-            <p:ph type="body" idx="1"/>
+          <p:cNvPr id="8" name="Text Placeholder 3"/>
+          <p:cNvSpPr>
+            <a:spLocks noGrp="1"/>
+          </p:cNvSpPr>
+          <p:nvPr>
+            <p:ph type="body" sz="half" idx="15"/>
           </p:nvPr>
         </p:nvSpPr>
         <p:spPr>
           <a:xfrm>
-            <a:off x="677335" y="4527448"/>
-            <a:ext cx="8596668" cy="1513914"/>
+            <a:off x="913795" y="2571750"/>
+            <a:ext cx="3300984" cy="3219450"/>
           </a:xfrm>
         </p:spPr>
         <p:txBody>
@@ -4234,96 +4190,250 @@
             <a:normAutofit/>
           </a:bodyPr>
           <a:lstStyle>
-            <a:lvl1pPr marL="0" indent="0" algn="l">
-              <a:buNone/>
-              <a:defRPr sz="1800">
+            <a:lvl1pPr marL="0" indent="0" algn="ctr">
+              <a:buNone/>
+              <a:defRPr sz="1400"/>
+            </a:lvl1pPr>
+            <a:lvl2pPr marL="457200" indent="0">
+              <a:buNone/>
+              <a:defRPr sz="1200"/>
+            </a:lvl2pPr>
+            <a:lvl3pPr marL="914400" indent="0">
+              <a:buNone/>
+              <a:defRPr sz="1000"/>
+            </a:lvl3pPr>
+            <a:lvl4pPr marL="1371600" indent="0">
+              <a:buNone/>
+              <a:defRPr sz="900"/>
+            </a:lvl4pPr>
+            <a:lvl5pPr marL="1828800" indent="0">
+              <a:buNone/>
+              <a:defRPr sz="900"/>
+            </a:lvl5pPr>
+            <a:lvl6pPr marL="2286000" indent="0">
+              <a:buNone/>
+              <a:defRPr sz="900"/>
+            </a:lvl6pPr>
+            <a:lvl7pPr marL="2743200" indent="0">
+              <a:buNone/>
+              <a:defRPr sz="900"/>
+            </a:lvl7pPr>
+            <a:lvl8pPr marL="3200400" indent="0">
+              <a:buNone/>
+              <a:defRPr sz="900"/>
+            </a:lvl8pPr>
+            <a:lvl9pPr marL="3657600" indent="0">
+              <a:buNone/>
+              <a:defRPr sz="900"/>
+            </a:lvl9pPr>
+          </a:lstStyle>
+          <a:p>
+            <a:pPr lvl="0"/>
+            <a:r>
+              <a:rPr lang="en-US"/>
+              <a:t>Click to edit Master text styles</a:t>
+            </a:r>
+          </a:p>
+        </p:txBody>
+      </p:sp>
+      <p:sp>
+        <p:nvSpPr>
+          <p:cNvPr id="9" name="Text Placeholder 4"/>
+          <p:cNvSpPr>
+            <a:spLocks noGrp="1"/>
+          </p:cNvSpPr>
+          <p:nvPr>
+            <p:ph type="body" sz="quarter" idx="3"/>
+          </p:nvPr>
+        </p:nvSpPr>
+        <p:spPr>
+          <a:xfrm>
+            <a:off x="4446711" y="1885950"/>
+            <a:ext cx="3300984" cy="576262"/>
+          </a:xfrm>
+        </p:spPr>
+        <p:txBody>
+          <a:bodyPr anchor="b">
+            <a:noAutofit/>
+          </a:bodyPr>
+          <a:lstStyle>
+            <a:lvl1pPr marL="0" indent="0" algn="ctr">
+              <a:buNone/>
+              <a:defRPr sz="2400" b="0">
                 <a:solidFill>
-                  <a:schemeClr val="tx1">
-                    <a:lumMod val="50000"/>
-                    <a:lumOff val="50000"/>
-                  </a:schemeClr>
+                  <a:schemeClr val="tx1"/>
                 </a:solidFill>
               </a:defRPr>
             </a:lvl1pPr>
             <a:lvl2pPr marL="457200" indent="0">
               <a:buNone/>
-              <a:defRPr sz="1800">
+              <a:defRPr sz="2000" b="1"/>
+            </a:lvl2pPr>
+            <a:lvl3pPr marL="914400" indent="0">
+              <a:buNone/>
+              <a:defRPr sz="1800" b="1"/>
+            </a:lvl3pPr>
+            <a:lvl4pPr marL="1371600" indent="0">
+              <a:buNone/>
+              <a:defRPr sz="1600" b="1"/>
+            </a:lvl4pPr>
+            <a:lvl5pPr marL="1828800" indent="0">
+              <a:buNone/>
+              <a:defRPr sz="1600" b="1"/>
+            </a:lvl5pPr>
+            <a:lvl6pPr marL="2286000" indent="0">
+              <a:buNone/>
+              <a:defRPr sz="1600" b="1"/>
+            </a:lvl6pPr>
+            <a:lvl7pPr marL="2743200" indent="0">
+              <a:buNone/>
+              <a:defRPr sz="1600" b="1"/>
+            </a:lvl7pPr>
+            <a:lvl8pPr marL="3200400" indent="0">
+              <a:buNone/>
+              <a:defRPr sz="1600" b="1"/>
+            </a:lvl8pPr>
+            <a:lvl9pPr marL="3657600" indent="0">
+              <a:buNone/>
+              <a:defRPr sz="1600" b="1"/>
+            </a:lvl9pPr>
+          </a:lstStyle>
+          <a:p>
+            <a:pPr lvl="0"/>
+            <a:r>
+              <a:rPr lang="en-US"/>
+              <a:t>Click to edit Master text styles</a:t>
+            </a:r>
+          </a:p>
+        </p:txBody>
+      </p:sp>
+      <p:sp>
+        <p:nvSpPr>
+          <p:cNvPr id="10" name="Text Placeholder 3"/>
+          <p:cNvSpPr>
+            <a:spLocks noGrp="1"/>
+          </p:cNvSpPr>
+          <p:nvPr>
+            <p:ph type="body" sz="half" idx="16"/>
+          </p:nvPr>
+        </p:nvSpPr>
+        <p:spPr>
+          <a:xfrm>
+            <a:off x="4441435" y="2571750"/>
+            <a:ext cx="3300984" cy="3219450"/>
+          </a:xfrm>
+        </p:spPr>
+        <p:txBody>
+          <a:bodyPr anchor="t">
+            <a:normAutofit/>
+          </a:bodyPr>
+          <a:lstStyle>
+            <a:lvl1pPr marL="0" indent="0" algn="ctr">
+              <a:buNone/>
+              <a:defRPr sz="1400"/>
+            </a:lvl1pPr>
+            <a:lvl2pPr marL="457200" indent="0">
+              <a:buNone/>
+              <a:defRPr sz="1200"/>
+            </a:lvl2pPr>
+            <a:lvl3pPr marL="914400" indent="0">
+              <a:buNone/>
+              <a:defRPr sz="1000"/>
+            </a:lvl3pPr>
+            <a:lvl4pPr marL="1371600" indent="0">
+              <a:buNone/>
+              <a:defRPr sz="900"/>
+            </a:lvl4pPr>
+            <a:lvl5pPr marL="1828800" indent="0">
+              <a:buNone/>
+              <a:defRPr sz="900"/>
+            </a:lvl5pPr>
+            <a:lvl6pPr marL="2286000" indent="0">
+              <a:buNone/>
+              <a:defRPr sz="900"/>
+            </a:lvl6pPr>
+            <a:lvl7pPr marL="2743200" indent="0">
+              <a:buNone/>
+              <a:defRPr sz="900"/>
+            </a:lvl7pPr>
+            <a:lvl8pPr marL="3200400" indent="0">
+              <a:buNone/>
+              <a:defRPr sz="900"/>
+            </a:lvl8pPr>
+            <a:lvl9pPr marL="3657600" indent="0">
+              <a:buNone/>
+              <a:defRPr sz="900"/>
+            </a:lvl9pPr>
+          </a:lstStyle>
+          <a:p>
+            <a:pPr lvl="0"/>
+            <a:r>
+              <a:rPr lang="en-US"/>
+              <a:t>Click to edit Master text styles</a:t>
+            </a:r>
+          </a:p>
+        </p:txBody>
+      </p:sp>
+      <p:sp>
+        <p:nvSpPr>
+          <p:cNvPr id="11" name="Text Placeholder 4"/>
+          <p:cNvSpPr>
+            <a:spLocks noGrp="1"/>
+          </p:cNvSpPr>
+          <p:nvPr>
+            <p:ph type="body" sz="quarter" idx="13"/>
+          </p:nvPr>
+        </p:nvSpPr>
+        <p:spPr>
+          <a:xfrm>
+            <a:off x="7966572" y="1885950"/>
+            <a:ext cx="3300984" cy="576262"/>
+          </a:xfrm>
+        </p:spPr>
+        <p:txBody>
+          <a:bodyPr anchor="b">
+            <a:noAutofit/>
+          </a:bodyPr>
+          <a:lstStyle>
+            <a:lvl1pPr marL="0" indent="0" algn="ctr">
+              <a:buNone/>
+              <a:defRPr sz="2400" b="0">
                 <a:solidFill>
-                  <a:schemeClr val="tx1">
-                    <a:tint val="75000"/>
-                  </a:schemeClr>
+                  <a:schemeClr val="tx1"/>
                 </a:solidFill>
               </a:defRPr>
+            </a:lvl1pPr>
+            <a:lvl2pPr marL="457200" indent="0">
+              <a:buNone/>
+              <a:defRPr sz="2000" b="1"/>
             </a:lvl2pPr>
             <a:lvl3pPr marL="914400" indent="0">
               <a:buNone/>
-              <a:defRPr sz="1600">
-                <a:solidFill>
-                  <a:schemeClr val="tx1">
-                    <a:tint val="75000"/>
-                  </a:schemeClr>
-                </a:solidFill>
-              </a:defRPr>
+              <a:defRPr sz="1800" b="1"/>
             </a:lvl3pPr>
             <a:lvl4pPr marL="1371600" indent="0">
               <a:buNone/>
-              <a:defRPr sz="1400">
-                <a:solidFill>
-                  <a:schemeClr val="tx1">
-                    <a:tint val="75000"/>
-                  </a:schemeClr>
-                </a:solidFill>
-              </a:defRPr>
+              <a:defRPr sz="1600" b="1"/>
             </a:lvl4pPr>
             <a:lvl5pPr marL="1828800" indent="0">
               <a:buNone/>
-              <a:defRPr sz="1400">
-                <a:solidFill>
-                  <a:schemeClr val="tx1">
-                    <a:tint val="75000"/>
-                  </a:schemeClr>
-                </a:solidFill>
-              </a:defRPr>
+              <a:defRPr sz="1600" b="1"/>
             </a:lvl5pPr>
             <a:lvl6pPr marL="2286000" indent="0">
               <a:buNone/>
-              <a:defRPr sz="1400">
-                <a:solidFill>
-                  <a:schemeClr val="tx1">
-                    <a:tint val="75000"/>
-                  </a:schemeClr>
-                </a:solidFill>
-              </a:defRPr>
+              <a:defRPr sz="1600" b="1"/>
             </a:lvl6pPr>
             <a:lvl7pPr marL="2743200" indent="0">
               <a:buNone/>
-              <a:defRPr sz="1400">
-                <a:solidFill>
-                  <a:schemeClr val="tx1">
-                    <a:tint val="75000"/>
-                  </a:schemeClr>
-                </a:solidFill>
-              </a:defRPr>
+              <a:defRPr sz="1600" b="1"/>
             </a:lvl7pPr>
             <a:lvl8pPr marL="3200400" indent="0">
               <a:buNone/>
-              <a:defRPr sz="1400">
-                <a:solidFill>
-                  <a:schemeClr val="tx1">
-                    <a:tint val="75000"/>
-                  </a:schemeClr>
-                </a:solidFill>
-              </a:defRPr>
+              <a:defRPr sz="1600" b="1"/>
             </a:lvl8pPr>
             <a:lvl9pPr marL="3657600" indent="0">
               <a:buNone/>
-              <a:defRPr sz="1400">
-                <a:solidFill>
-                  <a:schemeClr val="tx1">
-                    <a:tint val="75000"/>
-                  </a:schemeClr>
-                </a:solidFill>
-              </a:defRPr>
+              <a:defRPr sz="1600" b="1"/>
             </a:lvl9pPr>
           </a:lstStyle>
           <a:p>
@@ -4337,7 +4447,74 @@
       </p:sp>
       <p:sp>
         <p:nvSpPr>
-          <p:cNvPr id="4" name="Date Placeholder 3"/>
+          <p:cNvPr id="12" name="Text Placeholder 3"/>
+          <p:cNvSpPr>
+            <a:spLocks noGrp="1"/>
+          </p:cNvSpPr>
+          <p:nvPr>
+            <p:ph type="body" sz="half" idx="17"/>
+          </p:nvPr>
+        </p:nvSpPr>
+        <p:spPr>
+          <a:xfrm>
+            <a:off x="7966572" y="2571750"/>
+            <a:ext cx="3300984" cy="3219450"/>
+          </a:xfrm>
+        </p:spPr>
+        <p:txBody>
+          <a:bodyPr anchor="t">
+            <a:normAutofit/>
+          </a:bodyPr>
+          <a:lstStyle>
+            <a:lvl1pPr marL="0" indent="0" algn="ctr">
+              <a:buNone/>
+              <a:defRPr sz="1400"/>
+            </a:lvl1pPr>
+            <a:lvl2pPr marL="457200" indent="0">
+              <a:buNone/>
+              <a:defRPr sz="1200"/>
+            </a:lvl2pPr>
+            <a:lvl3pPr marL="914400" indent="0">
+              <a:buNone/>
+              <a:defRPr sz="1000"/>
+            </a:lvl3pPr>
+            <a:lvl4pPr marL="1371600" indent="0">
+              <a:buNone/>
+              <a:defRPr sz="900"/>
+            </a:lvl4pPr>
+            <a:lvl5pPr marL="1828800" indent="0">
+              <a:buNone/>
+              <a:defRPr sz="900"/>
+            </a:lvl5pPr>
+            <a:lvl6pPr marL="2286000" indent="0">
+              <a:buNone/>
+              <a:defRPr sz="900"/>
+            </a:lvl6pPr>
+            <a:lvl7pPr marL="2743200" indent="0">
+              <a:buNone/>
+              <a:defRPr sz="900"/>
+            </a:lvl7pPr>
+            <a:lvl8pPr marL="3200400" indent="0">
+              <a:buNone/>
+              <a:defRPr sz="900"/>
+            </a:lvl8pPr>
+            <a:lvl9pPr marL="3657600" indent="0">
+              <a:buNone/>
+              <a:defRPr sz="900"/>
+            </a:lvl9pPr>
+          </a:lstStyle>
+          <a:p>
+            <a:pPr lvl="0"/>
+            <a:r>
+              <a:rPr lang="en-US"/>
+              <a:t>Click to edit Master text styles</a:t>
+            </a:r>
+          </a:p>
+        </p:txBody>
+      </p:sp>
+      <p:sp>
+        <p:nvSpPr>
+          <p:cNvPr id="3" name="Date Placeholder 2"/>
           <p:cNvSpPr>
             <a:spLocks noGrp="1"/>
           </p:cNvSpPr>
@@ -4352,7 +4529,7 @@
           <a:p>
             <a:fld id="{74411A3F-4DB3-47ED-809A-CD27B21BFB64}" type="datetimeFigureOut">
               <a:rPr lang="en-US" smtClean="0"/>
-              <a:t>12/14/2025</a:t>
+              <a:t>12/15/2025</a:t>
             </a:fld>
             <a:endParaRPr lang="en-US"/>
           </a:p>
@@ -4360,7 +4537,7 @@
       </p:sp>
       <p:sp>
         <p:nvSpPr>
-          <p:cNvPr id="5" name="Footer Placeholder 4"/>
+          <p:cNvPr id="4" name="Footer Placeholder 3"/>
           <p:cNvSpPr>
             <a:spLocks noGrp="1"/>
           </p:cNvSpPr>
@@ -4379,7 +4556,7 @@
       </p:sp>
       <p:sp>
         <p:nvSpPr>
-          <p:cNvPr id="6" name="Slide Number Placeholder 5"/>
+          <p:cNvPr id="5" name="Slide Number Placeholder 4"/>
           <p:cNvSpPr>
             <a:spLocks noGrp="1"/>
           </p:cNvSpPr>
@@ -4400,92 +4577,10 @@
           </a:p>
         </p:txBody>
       </p:sp>
-      <p:sp>
-        <p:nvSpPr>
-          <p:cNvPr id="24" name="TextBox 23"/>
-          <p:cNvSpPr txBox="1"/>
-          <p:nvPr/>
-        </p:nvSpPr>
-        <p:spPr>
-          <a:xfrm>
-            <a:off x="541870" y="790378"/>
-            <a:ext cx="609600" cy="584776"/>
-          </a:xfrm>
-          <a:prstGeom prst="rect">
-            <a:avLst/>
-          </a:prstGeom>
-        </p:spPr>
-        <p:txBody>
-          <a:bodyPr vert="horz" lIns="91440" tIns="45720" rIns="91440" bIns="45720" rtlCol="0" anchor="ctr">
-            <a:noAutofit/>
-          </a:bodyPr>
-          <a:lstStyle/>
-          <a:p>
-            <a:pPr lvl="0"/>
-            <a:r>
-              <a:rPr lang="en-US" sz="8000" baseline="0">
-                <a:ln w="3175" cmpd="sng">
-                  <a:noFill/>
-                </a:ln>
-                <a:solidFill>
-                  <a:schemeClr val="accent1">
-                    <a:lumMod val="60000"/>
-                    <a:lumOff val="40000"/>
-                  </a:schemeClr>
-                </a:solidFill>
-                <a:effectLst/>
-                <a:latin typeface="Arial"/>
-              </a:rPr>
-              <a:t>“</a:t>
-            </a:r>
-          </a:p>
-        </p:txBody>
-      </p:sp>
-      <p:sp>
-        <p:nvSpPr>
-          <p:cNvPr id="25" name="TextBox 24"/>
-          <p:cNvSpPr txBox="1"/>
-          <p:nvPr/>
-        </p:nvSpPr>
-        <p:spPr>
-          <a:xfrm>
-            <a:off x="8893011" y="2886556"/>
-            <a:ext cx="609600" cy="584776"/>
-          </a:xfrm>
-          <a:prstGeom prst="rect">
-            <a:avLst/>
-          </a:prstGeom>
-        </p:spPr>
-        <p:txBody>
-          <a:bodyPr vert="horz" lIns="91440" tIns="45720" rIns="91440" bIns="45720" rtlCol="0" anchor="ctr">
-            <a:noAutofit/>
-          </a:bodyPr>
-          <a:lstStyle/>
-          <a:p>
-            <a:pPr lvl="0"/>
-            <a:r>
-              <a:rPr lang="en-US" sz="8000" baseline="0">
-                <a:ln w="3175" cmpd="sng">
-                  <a:noFill/>
-                </a:ln>
-                <a:solidFill>
-                  <a:schemeClr val="accent1">
-                    <a:lumMod val="60000"/>
-                    <a:lumOff val="40000"/>
-                  </a:schemeClr>
-                </a:solidFill>
-                <a:effectLst/>
-                <a:latin typeface="Arial"/>
-              </a:rPr>
-              <a:t>”</a:t>
-            </a:r>
-          </a:p>
-        </p:txBody>
-      </p:sp>
     </p:spTree>
     <p:extLst>
       <p:ext uri="{BB962C8B-B14F-4D97-AF65-F5344CB8AC3E}">
-        <p14:creationId xmlns:p14="http://schemas.microsoft.com/office/powerpoint/2010/main" val="3968696237"/>
+        <p14:creationId xmlns:p14="http://schemas.microsoft.com/office/powerpoint/2010/main" val="1403109511"/>
       </p:ext>
     </p:extLst>
   </p:cSld>
@@ -4495,9 +4590,9 @@
 </p:sldLayout>
 </file>
 
-<file path=ppt/slideLayouts/slideLayout14.xml><?xml version="1.0" encoding="utf-8"?>
+<file path=ppt/slideLayouts/slideLayout15.xml><?xml version="1.0" encoding="utf-8"?>
 <p:sldLayout xmlns:a="http://schemas.openxmlformats.org/drawingml/2006/main" xmlns:r="http://schemas.openxmlformats.org/officeDocument/2006/relationships" xmlns:p="http://schemas.openxmlformats.org/presentationml/2006/main" preserve="1">
-  <p:cSld name="True or False">
+  <p:cSld name="3 Picture Column">
     <p:spTree>
       <p:nvGrpSpPr>
         <p:cNvPr id="1" name=""/>
@@ -4512,53 +4607,138 @@
           <a:chExt cx="0" cy="0"/>
         </a:xfrm>
       </p:grpSpPr>
-      <p:sp>
-        <p:nvSpPr>
-          <p:cNvPr id="2" name="Title 1"/>
-          <p:cNvSpPr>
-            <a:spLocks noGrp="1"/>
-          </p:cNvSpPr>
-          <p:nvPr>
-            <p:ph type="title"/>
-          </p:nvPr>
-        </p:nvSpPr>
+      <p:pic>
+        <p:nvPicPr>
+          <p:cNvPr id="2" name="Picture 1" descr="Slate-V2-HD-3colPhotoInset.png"/>
+          <p:cNvPicPr>
+            <a:picLocks noChangeAspect="1"/>
+          </p:cNvPicPr>
+          <p:nvPr/>
+        </p:nvPicPr>
+        <p:blipFill>
+          <a:blip r:embed="rId2">
+            <a:extLst>
+              <a:ext uri="{28A0092B-C50C-407E-A947-70E740481C1C}">
+                <a14:useLocalDpi xmlns:a14="http://schemas.microsoft.com/office/drawing/2010/main" val="0"/>
+              </a:ext>
+            </a:extLst>
+          </a:blip>
+          <a:stretch>
+            <a:fillRect/>
+          </a:stretch>
+        </p:blipFill>
         <p:spPr>
           <a:xfrm>
-            <a:off x="685799" y="609600"/>
-            <a:ext cx="8588203" cy="3022600"/>
+            <a:off x="897962" y="1818214"/>
+            <a:ext cx="3339972" cy="1847851"/>
+          </a:xfrm>
+          <a:prstGeom prst="rect">
+            <a:avLst/>
+          </a:prstGeom>
+        </p:spPr>
+      </p:pic>
+      <p:pic>
+        <p:nvPicPr>
+          <p:cNvPr id="36" name="Picture 35" descr="Slate-V2-HD-3colPhotoInset.png"/>
+          <p:cNvPicPr>
+            <a:picLocks noChangeAspect="1"/>
+          </p:cNvPicPr>
+          <p:nvPr/>
+        </p:nvPicPr>
+        <p:blipFill>
+          <a:blip r:embed="rId2">
+            <a:extLst>
+              <a:ext uri="{28A0092B-C50C-407E-A947-70E740481C1C}">
+                <a14:useLocalDpi xmlns:a14="http://schemas.microsoft.com/office/drawing/2010/main" val="0"/>
+              </a:ext>
+            </a:extLst>
+          </a:blip>
+          <a:stretch>
+            <a:fillRect/>
+          </a:stretch>
+        </p:blipFill>
+        <p:spPr>
+          <a:xfrm>
+            <a:off x="4403800" y="1818214"/>
+            <a:ext cx="3339972" cy="1847851"/>
+          </a:xfrm>
+          <a:prstGeom prst="rect">
+            <a:avLst/>
+          </a:prstGeom>
+        </p:spPr>
+      </p:pic>
+      <p:pic>
+        <p:nvPicPr>
+          <p:cNvPr id="37" name="Picture 36" descr="Slate-V2-HD-3colPhotoInset.png"/>
+          <p:cNvPicPr>
+            <a:picLocks noChangeAspect="1"/>
+          </p:cNvPicPr>
+          <p:nvPr/>
+        </p:nvPicPr>
+        <p:blipFill>
+          <a:blip r:embed="rId2">
+            <a:extLst>
+              <a:ext uri="{28A0092B-C50C-407E-A947-70E740481C1C}">
+                <a14:useLocalDpi xmlns:a14="http://schemas.microsoft.com/office/drawing/2010/main" val="0"/>
+              </a:ext>
+            </a:extLst>
+          </a:blip>
+          <a:stretch>
+            <a:fillRect/>
+          </a:stretch>
+        </p:blipFill>
+        <p:spPr>
+          <a:xfrm>
+            <a:off x="7936051" y="1818214"/>
+            <a:ext cx="3339972" cy="1847851"/>
+          </a:xfrm>
+          <a:prstGeom prst="rect">
+            <a:avLst/>
+          </a:prstGeom>
+        </p:spPr>
+      </p:pic>
+      <p:sp>
+        <p:nvSpPr>
+          <p:cNvPr id="30" name="Title 1"/>
+          <p:cNvSpPr>
+            <a:spLocks noGrp="1"/>
+          </p:cNvSpPr>
+          <p:nvPr>
+            <p:ph type="title"/>
+          </p:nvPr>
+        </p:nvSpPr>
+        <p:spPr>
+          <a:xfrm>
+            <a:off x="913794" y="609600"/>
+            <a:ext cx="10353763" cy="970450"/>
           </a:xfrm>
         </p:spPr>
         <p:txBody>
-          <a:bodyPr anchor="ctr">
-            <a:normAutofit/>
-          </a:bodyPr>
-          <a:lstStyle>
-            <a:lvl1pPr algn="l">
-              <a:defRPr sz="4400" b="0" cap="none"/>
-            </a:lvl1pPr>
-          </a:lstStyle>
+          <a:bodyPr/>
+          <a:lstStyle/>
           <a:p>
             <a:r>
               <a:rPr lang="en-US"/>
               <a:t>Click to edit Master title style</a:t>
             </a:r>
-          </a:p>
-        </p:txBody>
-      </p:sp>
-      <p:sp>
-        <p:nvSpPr>
-          <p:cNvPr id="23" name="Text Placeholder 9"/>
-          <p:cNvSpPr>
-            <a:spLocks noGrp="1"/>
-          </p:cNvSpPr>
-          <p:nvPr>
-            <p:ph type="body" sz="quarter" idx="13"/>
+            <a:endParaRPr lang="en-US" dirty="0"/>
+          </a:p>
+        </p:txBody>
+      </p:sp>
+      <p:sp>
+        <p:nvSpPr>
+          <p:cNvPr id="19" name="Text Placeholder 2"/>
+          <p:cNvSpPr>
+            <a:spLocks noGrp="1"/>
+          </p:cNvSpPr>
+          <p:nvPr>
+            <p:ph type="body" idx="1"/>
           </p:nvPr>
         </p:nvSpPr>
         <p:spPr>
           <a:xfrm>
-            <a:off x="677332" y="4013200"/>
-            <a:ext cx="8596669" cy="514248"/>
+            <a:off x="913795" y="3904106"/>
+            <a:ext cx="3300984" cy="576262"/>
           </a:xfrm>
         </p:spPr>
         <p:txBody>
@@ -4566,35 +4746,46 @@
             <a:noAutofit/>
           </a:bodyPr>
           <a:lstStyle>
-            <a:lvl1pPr marL="0" indent="0">
-              <a:buFontTx/>
-              <a:buNone/>
-              <a:defRPr sz="2400">
+            <a:lvl1pPr marL="0" indent="0" algn="ctr">
+              <a:buNone/>
+              <a:defRPr sz="2000" b="0">
                 <a:solidFill>
-                  <a:schemeClr val="accent1"/>
+                  <a:schemeClr val="tx1"/>
                 </a:solidFill>
               </a:defRPr>
             </a:lvl1pPr>
             <a:lvl2pPr marL="457200" indent="0">
-              <a:buFontTx/>
-              <a:buNone/>
-              <a:defRPr/>
+              <a:buNone/>
+              <a:defRPr sz="2000" b="1"/>
             </a:lvl2pPr>
             <a:lvl3pPr marL="914400" indent="0">
-              <a:buFontTx/>
-              <a:buNone/>
-              <a:defRPr/>
+              <a:buNone/>
+              <a:defRPr sz="1800" b="1"/>
             </a:lvl3pPr>
             <a:lvl4pPr marL="1371600" indent="0">
-              <a:buFontTx/>
-              <a:buNone/>
-              <a:defRPr/>
+              <a:buNone/>
+              <a:defRPr sz="1600" b="1"/>
             </a:lvl4pPr>
             <a:lvl5pPr marL="1828800" indent="0">
-              <a:buFontTx/>
-              <a:buNone/>
-              <a:defRPr/>
+              <a:buNone/>
+              <a:defRPr sz="1600" b="1"/>
             </a:lvl5pPr>
+            <a:lvl6pPr marL="2286000" indent="0">
+              <a:buNone/>
+              <a:defRPr sz="1600" b="1"/>
+            </a:lvl6pPr>
+            <a:lvl7pPr marL="2743200" indent="0">
+              <a:buNone/>
+              <a:defRPr sz="1600" b="1"/>
+            </a:lvl7pPr>
+            <a:lvl8pPr marL="3200400" indent="0">
+              <a:buNone/>
+              <a:defRPr sz="1600" b="1"/>
+            </a:lvl8pPr>
+            <a:lvl9pPr marL="3657600" indent="0">
+              <a:buNone/>
+              <a:defRPr sz="1600" b="1"/>
+            </a:lvl9pPr>
           </a:lstStyle>
           <a:p>
             <a:pPr lvl="0"/>
@@ -4607,115 +4798,427 @@
       </p:sp>
       <p:sp>
         <p:nvSpPr>
-          <p:cNvPr id="3" name="Text Placeholder 2"/>
-          <p:cNvSpPr>
-            <a:spLocks noGrp="1"/>
-          </p:cNvSpPr>
-          <p:nvPr>
-            <p:ph type="body" idx="1"/>
+          <p:cNvPr id="20" name="Picture Placeholder 2"/>
+          <p:cNvSpPr>
+            <a:spLocks noGrp="1" noChangeAspect="1"/>
+          </p:cNvSpPr>
+          <p:nvPr>
+            <p:ph type="pic" idx="15"/>
           </p:nvPr>
         </p:nvSpPr>
         <p:spPr>
           <a:xfrm>
-            <a:off x="677335" y="4527448"/>
-            <a:ext cx="8596668" cy="1513914"/>
+            <a:off x="1018102" y="1938918"/>
+            <a:ext cx="3092368" cy="1602954"/>
           </a:xfrm>
+          <a:prstGeom prst="roundRect">
+            <a:avLst>
+              <a:gd name="adj" fmla="val 1858"/>
+            </a:avLst>
+          </a:prstGeom>
+          <a:effectLst>
+            <a:outerShdw blurRad="38100" dist="25400" dir="4440000">
+              <a:srgbClr val="000000">
+                <a:alpha val="36000"/>
+              </a:srgbClr>
+            </a:outerShdw>
+          </a:effectLst>
         </p:spPr>
         <p:txBody>
           <a:bodyPr anchor="t">
             <a:normAutofit/>
           </a:bodyPr>
           <a:lstStyle>
-            <a:lvl1pPr marL="0" indent="0" algn="l">
-              <a:buNone/>
-              <a:defRPr sz="1800">
+            <a:lvl1pPr marL="0" indent="0" algn="ctr">
+              <a:buNone/>
+              <a:defRPr sz="1600"/>
+            </a:lvl1pPr>
+            <a:lvl2pPr marL="457200" indent="0">
+              <a:buNone/>
+              <a:defRPr sz="1600"/>
+            </a:lvl2pPr>
+            <a:lvl3pPr marL="914400" indent="0">
+              <a:buNone/>
+              <a:defRPr sz="1600"/>
+            </a:lvl3pPr>
+            <a:lvl4pPr marL="1371600" indent="0">
+              <a:buNone/>
+              <a:defRPr sz="1600"/>
+            </a:lvl4pPr>
+            <a:lvl5pPr marL="1828800" indent="0">
+              <a:buNone/>
+              <a:defRPr sz="1600"/>
+            </a:lvl5pPr>
+            <a:lvl6pPr marL="2286000" indent="0">
+              <a:buNone/>
+              <a:defRPr sz="1600"/>
+            </a:lvl6pPr>
+            <a:lvl7pPr marL="2743200" indent="0">
+              <a:buNone/>
+              <a:defRPr sz="1600"/>
+            </a:lvl7pPr>
+            <a:lvl8pPr marL="3200400" indent="0">
+              <a:buNone/>
+              <a:defRPr sz="1600"/>
+            </a:lvl8pPr>
+            <a:lvl9pPr marL="3657600" indent="0">
+              <a:buNone/>
+              <a:defRPr sz="1600"/>
+            </a:lvl9pPr>
+          </a:lstStyle>
+          <a:p>
+            <a:r>
+              <a:rPr lang="en-US"/>
+              <a:t>Click icon to add picture</a:t>
+            </a:r>
+            <a:endParaRPr lang="en-US" dirty="0"/>
+          </a:p>
+        </p:txBody>
+      </p:sp>
+      <p:sp>
+        <p:nvSpPr>
+          <p:cNvPr id="21" name="Text Placeholder 3"/>
+          <p:cNvSpPr>
+            <a:spLocks noGrp="1"/>
+          </p:cNvSpPr>
+          <p:nvPr>
+            <p:ph type="body" sz="half" idx="18"/>
+          </p:nvPr>
+        </p:nvSpPr>
+        <p:spPr>
+          <a:xfrm>
+            <a:off x="913795" y="4480368"/>
+            <a:ext cx="3300984" cy="1310833"/>
+          </a:xfrm>
+        </p:spPr>
+        <p:txBody>
+          <a:bodyPr anchor="t">
+            <a:normAutofit/>
+          </a:bodyPr>
+          <a:lstStyle>
+            <a:lvl1pPr marL="0" indent="0" algn="ctr">
+              <a:buNone/>
+              <a:defRPr sz="1400"/>
+            </a:lvl1pPr>
+            <a:lvl2pPr marL="457200" indent="0">
+              <a:buNone/>
+              <a:defRPr sz="1200"/>
+            </a:lvl2pPr>
+            <a:lvl3pPr marL="914400" indent="0">
+              <a:buNone/>
+              <a:defRPr sz="1000"/>
+            </a:lvl3pPr>
+            <a:lvl4pPr marL="1371600" indent="0">
+              <a:buNone/>
+              <a:defRPr sz="900"/>
+            </a:lvl4pPr>
+            <a:lvl5pPr marL="1828800" indent="0">
+              <a:buNone/>
+              <a:defRPr sz="900"/>
+            </a:lvl5pPr>
+            <a:lvl6pPr marL="2286000" indent="0">
+              <a:buNone/>
+              <a:defRPr sz="900"/>
+            </a:lvl6pPr>
+            <a:lvl7pPr marL="2743200" indent="0">
+              <a:buNone/>
+              <a:defRPr sz="900"/>
+            </a:lvl7pPr>
+            <a:lvl8pPr marL="3200400" indent="0">
+              <a:buNone/>
+              <a:defRPr sz="900"/>
+            </a:lvl8pPr>
+            <a:lvl9pPr marL="3657600" indent="0">
+              <a:buNone/>
+              <a:defRPr sz="900"/>
+            </a:lvl9pPr>
+          </a:lstStyle>
+          <a:p>
+            <a:pPr lvl="0"/>
+            <a:r>
+              <a:rPr lang="en-US"/>
+              <a:t>Click to edit Master text styles</a:t>
+            </a:r>
+          </a:p>
+        </p:txBody>
+      </p:sp>
+      <p:sp>
+        <p:nvSpPr>
+          <p:cNvPr id="22" name="Text Placeholder 4"/>
+          <p:cNvSpPr>
+            <a:spLocks noGrp="1"/>
+          </p:cNvSpPr>
+          <p:nvPr>
+            <p:ph type="body" sz="quarter" idx="3"/>
+          </p:nvPr>
+        </p:nvSpPr>
+        <p:spPr>
+          <a:xfrm>
+            <a:off x="4442788" y="3904106"/>
+            <a:ext cx="3300984" cy="576262"/>
+          </a:xfrm>
+        </p:spPr>
+        <p:txBody>
+          <a:bodyPr anchor="b">
+            <a:noAutofit/>
+          </a:bodyPr>
+          <a:lstStyle>
+            <a:lvl1pPr marL="0" indent="0" algn="ctr">
+              <a:buNone/>
+              <a:defRPr sz="2000" b="0">
                 <a:solidFill>
-                  <a:schemeClr val="tx1">
-                    <a:lumMod val="50000"/>
-                    <a:lumOff val="50000"/>
-                  </a:schemeClr>
+                  <a:schemeClr val="tx1"/>
                 </a:solidFill>
               </a:defRPr>
             </a:lvl1pPr>
             <a:lvl2pPr marL="457200" indent="0">
               <a:buNone/>
-              <a:defRPr sz="1800">
+              <a:defRPr sz="2000" b="1"/>
+            </a:lvl2pPr>
+            <a:lvl3pPr marL="914400" indent="0">
+              <a:buNone/>
+              <a:defRPr sz="1800" b="1"/>
+            </a:lvl3pPr>
+            <a:lvl4pPr marL="1371600" indent="0">
+              <a:buNone/>
+              <a:defRPr sz="1600" b="1"/>
+            </a:lvl4pPr>
+            <a:lvl5pPr marL="1828800" indent="0">
+              <a:buNone/>
+              <a:defRPr sz="1600" b="1"/>
+            </a:lvl5pPr>
+            <a:lvl6pPr marL="2286000" indent="0">
+              <a:buNone/>
+              <a:defRPr sz="1600" b="1"/>
+            </a:lvl6pPr>
+            <a:lvl7pPr marL="2743200" indent="0">
+              <a:buNone/>
+              <a:defRPr sz="1600" b="1"/>
+            </a:lvl7pPr>
+            <a:lvl8pPr marL="3200400" indent="0">
+              <a:buNone/>
+              <a:defRPr sz="1600" b="1"/>
+            </a:lvl8pPr>
+            <a:lvl9pPr marL="3657600" indent="0">
+              <a:buNone/>
+              <a:defRPr sz="1600" b="1"/>
+            </a:lvl9pPr>
+          </a:lstStyle>
+          <a:p>
+            <a:pPr lvl="0"/>
+            <a:r>
+              <a:rPr lang="en-US"/>
+              <a:t>Click to edit Master text styles</a:t>
+            </a:r>
+          </a:p>
+        </p:txBody>
+      </p:sp>
+      <p:sp>
+        <p:nvSpPr>
+          <p:cNvPr id="23" name="Picture Placeholder 2"/>
+          <p:cNvSpPr>
+            <a:spLocks noGrp="1" noChangeAspect="1"/>
+          </p:cNvSpPr>
+          <p:nvPr>
+            <p:ph type="pic" idx="21"/>
+          </p:nvPr>
+        </p:nvSpPr>
+        <p:spPr>
+          <a:xfrm>
+            <a:off x="4545743" y="1939094"/>
+            <a:ext cx="3092368" cy="1608164"/>
+          </a:xfrm>
+          <a:prstGeom prst="roundRect">
+            <a:avLst>
+              <a:gd name="adj" fmla="val 1858"/>
+            </a:avLst>
+          </a:prstGeom>
+          <a:effectLst>
+            <a:outerShdw blurRad="38100" dist="25400" dir="4440000">
+              <a:srgbClr val="000000">
+                <a:alpha val="36000"/>
+              </a:srgbClr>
+            </a:outerShdw>
+          </a:effectLst>
+        </p:spPr>
+        <p:txBody>
+          <a:bodyPr anchor="t">
+            <a:normAutofit/>
+          </a:bodyPr>
+          <a:lstStyle>
+            <a:lvl1pPr marL="0" indent="0" algn="ctr">
+              <a:buNone/>
+              <a:defRPr sz="1600"/>
+            </a:lvl1pPr>
+            <a:lvl2pPr marL="457200" indent="0">
+              <a:buNone/>
+              <a:defRPr sz="1600"/>
+            </a:lvl2pPr>
+            <a:lvl3pPr marL="914400" indent="0">
+              <a:buNone/>
+              <a:defRPr sz="1600"/>
+            </a:lvl3pPr>
+            <a:lvl4pPr marL="1371600" indent="0">
+              <a:buNone/>
+              <a:defRPr sz="1600"/>
+            </a:lvl4pPr>
+            <a:lvl5pPr marL="1828800" indent="0">
+              <a:buNone/>
+              <a:defRPr sz="1600"/>
+            </a:lvl5pPr>
+            <a:lvl6pPr marL="2286000" indent="0">
+              <a:buNone/>
+              <a:defRPr sz="1600"/>
+            </a:lvl6pPr>
+            <a:lvl7pPr marL="2743200" indent="0">
+              <a:buNone/>
+              <a:defRPr sz="1600"/>
+            </a:lvl7pPr>
+            <a:lvl8pPr marL="3200400" indent="0">
+              <a:buNone/>
+              <a:defRPr sz="1600"/>
+            </a:lvl8pPr>
+            <a:lvl9pPr marL="3657600" indent="0">
+              <a:buNone/>
+              <a:defRPr sz="1600"/>
+            </a:lvl9pPr>
+          </a:lstStyle>
+          <a:p>
+            <a:r>
+              <a:rPr lang="en-US"/>
+              <a:t>Click icon to add picture</a:t>
+            </a:r>
+            <a:endParaRPr lang="en-US" dirty="0"/>
+          </a:p>
+        </p:txBody>
+      </p:sp>
+      <p:sp>
+        <p:nvSpPr>
+          <p:cNvPr id="24" name="Text Placeholder 3"/>
+          <p:cNvSpPr>
+            <a:spLocks noGrp="1"/>
+          </p:cNvSpPr>
+          <p:nvPr>
+            <p:ph type="body" sz="half" idx="19"/>
+          </p:nvPr>
+        </p:nvSpPr>
+        <p:spPr>
+          <a:xfrm>
+            <a:off x="4441435" y="4480367"/>
+            <a:ext cx="3300984" cy="1310833"/>
+          </a:xfrm>
+        </p:spPr>
+        <p:txBody>
+          <a:bodyPr anchor="t">
+            <a:normAutofit/>
+          </a:bodyPr>
+          <a:lstStyle>
+            <a:lvl1pPr marL="0" indent="0" algn="ctr">
+              <a:buNone/>
+              <a:defRPr sz="1400"/>
+            </a:lvl1pPr>
+            <a:lvl2pPr marL="457200" indent="0">
+              <a:buNone/>
+              <a:defRPr sz="1200"/>
+            </a:lvl2pPr>
+            <a:lvl3pPr marL="914400" indent="0">
+              <a:buNone/>
+              <a:defRPr sz="1000"/>
+            </a:lvl3pPr>
+            <a:lvl4pPr marL="1371600" indent="0">
+              <a:buNone/>
+              <a:defRPr sz="900"/>
+            </a:lvl4pPr>
+            <a:lvl5pPr marL="1828800" indent="0">
+              <a:buNone/>
+              <a:defRPr sz="900"/>
+            </a:lvl5pPr>
+            <a:lvl6pPr marL="2286000" indent="0">
+              <a:buNone/>
+              <a:defRPr sz="900"/>
+            </a:lvl6pPr>
+            <a:lvl7pPr marL="2743200" indent="0">
+              <a:buNone/>
+              <a:defRPr sz="900"/>
+            </a:lvl7pPr>
+            <a:lvl8pPr marL="3200400" indent="0">
+              <a:buNone/>
+              <a:defRPr sz="900"/>
+            </a:lvl8pPr>
+            <a:lvl9pPr marL="3657600" indent="0">
+              <a:buNone/>
+              <a:defRPr sz="900"/>
+            </a:lvl9pPr>
+          </a:lstStyle>
+          <a:p>
+            <a:pPr lvl="0"/>
+            <a:r>
+              <a:rPr lang="en-US"/>
+              <a:t>Click to edit Master text styles</a:t>
+            </a:r>
+          </a:p>
+        </p:txBody>
+      </p:sp>
+      <p:sp>
+        <p:nvSpPr>
+          <p:cNvPr id="25" name="Text Placeholder 4"/>
+          <p:cNvSpPr>
+            <a:spLocks noGrp="1"/>
+          </p:cNvSpPr>
+          <p:nvPr>
+            <p:ph type="body" sz="quarter" idx="13"/>
+          </p:nvPr>
+        </p:nvSpPr>
+        <p:spPr>
+          <a:xfrm>
+            <a:off x="7966697" y="3904106"/>
+            <a:ext cx="3300984" cy="576262"/>
+          </a:xfrm>
+        </p:spPr>
+        <p:txBody>
+          <a:bodyPr anchor="b">
+            <a:noAutofit/>
+          </a:bodyPr>
+          <a:lstStyle>
+            <a:lvl1pPr marL="0" indent="0" algn="ctr">
+              <a:buNone/>
+              <a:defRPr sz="2000" b="0">
                 <a:solidFill>
-                  <a:schemeClr val="tx1">
-                    <a:tint val="75000"/>
-                  </a:schemeClr>
+                  <a:schemeClr val="tx1"/>
                 </a:solidFill>
               </a:defRPr>
+            </a:lvl1pPr>
+            <a:lvl2pPr marL="457200" indent="0">
+              <a:buNone/>
+              <a:defRPr sz="2000" b="1"/>
             </a:lvl2pPr>
             <a:lvl3pPr marL="914400" indent="0">
               <a:buNone/>
-              <a:defRPr sz="1600">
-                <a:solidFill>
-                  <a:schemeClr val="tx1">
-                    <a:tint val="75000"/>
-                  </a:schemeClr>
-                </a:solidFill>
-              </a:defRPr>
+              <a:defRPr sz="1800" b="1"/>
             </a:lvl3pPr>
             <a:lvl4pPr marL="1371600" indent="0">
               <a:buNone/>
-              <a:defRPr sz="1400">
-                <a:solidFill>
-                  <a:schemeClr val="tx1">
-                    <a:tint val="75000"/>
-                  </a:schemeClr>
-                </a:solidFill>
-              </a:defRPr>
+              <a:defRPr sz="1600" b="1"/>
             </a:lvl4pPr>
             <a:lvl5pPr marL="1828800" indent="0">
               <a:buNone/>
-              <a:defRPr sz="1400">
-                <a:solidFill>
-                  <a:schemeClr val="tx1">
-                    <a:tint val="75000"/>
-                  </a:schemeClr>
-                </a:solidFill>
-              </a:defRPr>
+              <a:defRPr sz="1600" b="1"/>
             </a:lvl5pPr>
             <a:lvl6pPr marL="2286000" indent="0">
               <a:buNone/>
-              <a:defRPr sz="1400">
-                <a:solidFill>
-                  <a:schemeClr val="tx1">
-                    <a:tint val="75000"/>
-                  </a:schemeClr>
-                </a:solidFill>
-              </a:defRPr>
+              <a:defRPr sz="1600" b="1"/>
             </a:lvl6pPr>
             <a:lvl7pPr marL="2743200" indent="0">
               <a:buNone/>
-              <a:defRPr sz="1400">
-                <a:solidFill>
-                  <a:schemeClr val="tx1">
-                    <a:tint val="75000"/>
-                  </a:schemeClr>
-                </a:solidFill>
-              </a:defRPr>
+              <a:defRPr sz="1600" b="1"/>
             </a:lvl7pPr>
             <a:lvl8pPr marL="3200400" indent="0">
               <a:buNone/>
-              <a:defRPr sz="1400">
-                <a:solidFill>
-                  <a:schemeClr val="tx1">
-                    <a:tint val="75000"/>
-                  </a:schemeClr>
-                </a:solidFill>
-              </a:defRPr>
+              <a:defRPr sz="1600" b="1"/>
             </a:lvl8pPr>
             <a:lvl9pPr marL="3657600" indent="0">
               <a:buNone/>
-              <a:defRPr sz="1400">
-                <a:solidFill>
-                  <a:schemeClr val="tx1">
-                    <a:tint val="75000"/>
-                  </a:schemeClr>
-                </a:solidFill>
-              </a:defRPr>
+              <a:defRPr sz="1600" b="1"/>
             </a:lvl9pPr>
           </a:lstStyle>
           <a:p>
@@ -4729,7 +5232,153 @@
       </p:sp>
       <p:sp>
         <p:nvSpPr>
-          <p:cNvPr id="4" name="Date Placeholder 3"/>
+          <p:cNvPr id="26" name="Picture Placeholder 2"/>
+          <p:cNvSpPr>
+            <a:spLocks noGrp="1" noChangeAspect="1"/>
+          </p:cNvSpPr>
+          <p:nvPr>
+            <p:ph type="pic" idx="22"/>
+          </p:nvPr>
+        </p:nvSpPr>
+        <p:spPr>
+          <a:xfrm>
+            <a:off x="8075698" y="1934432"/>
+            <a:ext cx="3092368" cy="1607294"/>
+          </a:xfrm>
+          <a:prstGeom prst="roundRect">
+            <a:avLst>
+              <a:gd name="adj" fmla="val 1858"/>
+            </a:avLst>
+          </a:prstGeom>
+          <a:effectLst>
+            <a:outerShdw blurRad="38100" dist="25400" dir="4440000">
+              <a:srgbClr val="000000">
+                <a:alpha val="36000"/>
+              </a:srgbClr>
+            </a:outerShdw>
+          </a:effectLst>
+        </p:spPr>
+        <p:txBody>
+          <a:bodyPr anchor="t">
+            <a:normAutofit/>
+          </a:bodyPr>
+          <a:lstStyle>
+            <a:lvl1pPr marL="0" indent="0" algn="ctr">
+              <a:buNone/>
+              <a:defRPr sz="1600"/>
+            </a:lvl1pPr>
+            <a:lvl2pPr marL="457200" indent="0">
+              <a:buNone/>
+              <a:defRPr sz="1600"/>
+            </a:lvl2pPr>
+            <a:lvl3pPr marL="914400" indent="0">
+              <a:buNone/>
+              <a:defRPr sz="1600"/>
+            </a:lvl3pPr>
+            <a:lvl4pPr marL="1371600" indent="0">
+              <a:buNone/>
+              <a:defRPr sz="1600"/>
+            </a:lvl4pPr>
+            <a:lvl5pPr marL="1828800" indent="0">
+              <a:buNone/>
+              <a:defRPr sz="1600"/>
+            </a:lvl5pPr>
+            <a:lvl6pPr marL="2286000" indent="0">
+              <a:buNone/>
+              <a:defRPr sz="1600"/>
+            </a:lvl6pPr>
+            <a:lvl7pPr marL="2743200" indent="0">
+              <a:buNone/>
+              <a:defRPr sz="1600"/>
+            </a:lvl7pPr>
+            <a:lvl8pPr marL="3200400" indent="0">
+              <a:buNone/>
+              <a:defRPr sz="1600"/>
+            </a:lvl8pPr>
+            <a:lvl9pPr marL="3657600" indent="0">
+              <a:buNone/>
+              <a:defRPr sz="1600"/>
+            </a:lvl9pPr>
+          </a:lstStyle>
+          <a:p>
+            <a:r>
+              <a:rPr lang="en-US"/>
+              <a:t>Click icon to add picture</a:t>
+            </a:r>
+            <a:endParaRPr lang="en-US" dirty="0"/>
+          </a:p>
+        </p:txBody>
+      </p:sp>
+      <p:sp>
+        <p:nvSpPr>
+          <p:cNvPr id="27" name="Text Placeholder 3"/>
+          <p:cNvSpPr>
+            <a:spLocks noGrp="1"/>
+          </p:cNvSpPr>
+          <p:nvPr>
+            <p:ph type="body" sz="half" idx="20"/>
+          </p:nvPr>
+        </p:nvSpPr>
+        <p:spPr>
+          <a:xfrm>
+            <a:off x="7966572" y="4480365"/>
+            <a:ext cx="3300984" cy="1310835"/>
+          </a:xfrm>
+        </p:spPr>
+        <p:txBody>
+          <a:bodyPr anchor="t">
+            <a:normAutofit/>
+          </a:bodyPr>
+          <a:lstStyle>
+            <a:lvl1pPr marL="0" indent="0" algn="ctr">
+              <a:buNone/>
+              <a:defRPr sz="1400"/>
+            </a:lvl1pPr>
+            <a:lvl2pPr marL="457200" indent="0">
+              <a:buNone/>
+              <a:defRPr sz="1200"/>
+            </a:lvl2pPr>
+            <a:lvl3pPr marL="914400" indent="0">
+              <a:buNone/>
+              <a:defRPr sz="1000"/>
+            </a:lvl3pPr>
+            <a:lvl4pPr marL="1371600" indent="0">
+              <a:buNone/>
+              <a:defRPr sz="900"/>
+            </a:lvl4pPr>
+            <a:lvl5pPr marL="1828800" indent="0">
+              <a:buNone/>
+              <a:defRPr sz="900"/>
+            </a:lvl5pPr>
+            <a:lvl6pPr marL="2286000" indent="0">
+              <a:buNone/>
+              <a:defRPr sz="900"/>
+            </a:lvl6pPr>
+            <a:lvl7pPr marL="2743200" indent="0">
+              <a:buNone/>
+              <a:defRPr sz="900"/>
+            </a:lvl7pPr>
+            <a:lvl8pPr marL="3200400" indent="0">
+              <a:buNone/>
+              <a:defRPr sz="900"/>
+            </a:lvl8pPr>
+            <a:lvl9pPr marL="3657600" indent="0">
+              <a:buNone/>
+              <a:defRPr sz="900"/>
+            </a:lvl9pPr>
+          </a:lstStyle>
+          <a:p>
+            <a:pPr lvl="0"/>
+            <a:r>
+              <a:rPr lang="en-US"/>
+              <a:t>Click to edit Master text styles</a:t>
+            </a:r>
+          </a:p>
+        </p:txBody>
+      </p:sp>
+      <p:sp>
+        <p:nvSpPr>
+          <p:cNvPr id="3" name="Date Placeholder 2"/>
           <p:cNvSpPr>
             <a:spLocks noGrp="1"/>
           </p:cNvSpPr>
@@ -4744,7 +5393,7 @@
           <a:p>
             <a:fld id="{74411A3F-4DB3-47ED-809A-CD27B21BFB64}" type="datetimeFigureOut">
               <a:rPr lang="en-US" smtClean="0"/>
-              <a:t>12/14/2025</a:t>
+              <a:t>12/15/2025</a:t>
             </a:fld>
             <a:endParaRPr lang="en-US"/>
           </a:p>
@@ -4752,7 +5401,7 @@
       </p:sp>
       <p:sp>
         <p:nvSpPr>
-          <p:cNvPr id="5" name="Footer Placeholder 4"/>
+          <p:cNvPr id="4" name="Footer Placeholder 3"/>
           <p:cNvSpPr>
             <a:spLocks noGrp="1"/>
           </p:cNvSpPr>
@@ -4771,7 +5420,7 @@
       </p:sp>
       <p:sp>
         <p:nvSpPr>
-          <p:cNvPr id="6" name="Slide Number Placeholder 5"/>
+          <p:cNvPr id="5" name="Slide Number Placeholder 4"/>
           <p:cNvSpPr>
             <a:spLocks noGrp="1"/>
           </p:cNvSpPr>
@@ -4795,7 +5444,7 @@
     </p:spTree>
     <p:extLst>
       <p:ext uri="{BB962C8B-B14F-4D97-AF65-F5344CB8AC3E}">
-        <p14:creationId xmlns:p14="http://schemas.microsoft.com/office/powerpoint/2010/main" val="4260336243"/>
+        <p14:creationId xmlns:p14="http://schemas.microsoft.com/office/powerpoint/2010/main" val="3102098123"/>
       </p:ext>
     </p:extLst>
   </p:cSld>
@@ -4805,7 +5454,7 @@
 </p:sldLayout>
 </file>
 
-<file path=ppt/slideLayouts/slideLayout15.xml><?xml version="1.0" encoding="utf-8"?>
+<file path=ppt/slideLayouts/slideLayout16.xml><?xml version="1.0" encoding="utf-8"?>
 <p:sldLayout xmlns:a="http://schemas.openxmlformats.org/drawingml/2006/main" xmlns:r="http://schemas.openxmlformats.org/officeDocument/2006/relationships" xmlns:p="http://schemas.openxmlformats.org/presentationml/2006/main" type="vertTx" preserve="1">
   <p:cSld name="Title and Vertical Text">
     <p:spTree>
@@ -4841,6 +5490,7 @@
               <a:rPr lang="en-US"/>
               <a:t>Click to edit Master title style</a:t>
             </a:r>
+            <a:endParaRPr lang="en-US" dirty="0"/>
           </a:p>
         </p:txBody>
       </p:sp>
@@ -4856,7 +5506,7 @@
         </p:nvSpPr>
         <p:spPr/>
         <p:txBody>
-          <a:bodyPr vert="eaVert"/>
+          <a:bodyPr vert="eaVert" anchor="t"/>
           <a:lstStyle/>
           <a:p>
             <a:pPr lvl="0"/>
@@ -4892,6 +5542,7 @@
               <a:rPr lang="en-US"/>
               <a:t>Fifth level</a:t>
             </a:r>
+            <a:endParaRPr lang="en-US" dirty="0"/>
           </a:p>
         </p:txBody>
       </p:sp>
@@ -4912,7 +5563,7 @@
           <a:p>
             <a:fld id="{74411A3F-4DB3-47ED-809A-CD27B21BFB64}" type="datetimeFigureOut">
               <a:rPr lang="en-US" smtClean="0"/>
-              <a:t>12/14/2025</a:t>
+              <a:t>12/15/2025</a:t>
             </a:fld>
             <a:endParaRPr lang="en-US"/>
           </a:p>
@@ -4963,7 +5614,7 @@
     </p:spTree>
     <p:extLst>
       <p:ext uri="{BB962C8B-B14F-4D97-AF65-F5344CB8AC3E}">
-        <p14:creationId xmlns:p14="http://schemas.microsoft.com/office/powerpoint/2010/main" val="1685940831"/>
+        <p14:creationId xmlns:p14="http://schemas.microsoft.com/office/powerpoint/2010/main" val="3271252111"/>
       </p:ext>
     </p:extLst>
   </p:cSld>
@@ -4973,7 +5624,7 @@
 </p:sldLayout>
 </file>
 
-<file path=ppt/slideLayouts/slideLayout16.xml><?xml version="1.0" encoding="utf-8"?>
+<file path=ppt/slideLayouts/slideLayout17.xml><?xml version="1.0" encoding="utf-8"?>
 <p:sldLayout xmlns:a="http://schemas.openxmlformats.org/drawingml/2006/main" xmlns:r="http://schemas.openxmlformats.org/officeDocument/2006/relationships" xmlns:p="http://schemas.openxmlformats.org/presentationml/2006/main" type="vertTitleAndTx" preserve="1">
   <p:cSld name="Vertical Title and Text">
     <p:spTree>
@@ -5002,18 +5653,23 @@
         </p:nvSpPr>
         <p:spPr>
           <a:xfrm>
-            <a:off x="7967673" y="609599"/>
-            <a:ext cx="1304743" cy="5251451"/>
+            <a:off x="8983068" y="609599"/>
+            <a:ext cx="2284487" cy="5181601"/>
           </a:xfrm>
         </p:spPr>
         <p:txBody>
-          <a:bodyPr vert="eaVert" anchor="ctr"/>
-          <a:lstStyle/>
+          <a:bodyPr vert="eaVert"/>
+          <a:lstStyle>
+            <a:lvl1pPr algn="l">
+              <a:defRPr/>
+            </a:lvl1pPr>
+          </a:lstStyle>
           <a:p>
             <a:r>
               <a:rPr lang="en-US"/>
               <a:t>Click to edit Master title style</a:t>
             </a:r>
+            <a:endParaRPr lang="en-US" dirty="0"/>
           </a:p>
         </p:txBody>
       </p:sp>
@@ -5029,12 +5685,12 @@
         </p:nvSpPr>
         <p:spPr>
           <a:xfrm>
-            <a:off x="677335" y="609600"/>
-            <a:ext cx="7060150" cy="5251450"/>
+            <a:off x="913796" y="609599"/>
+            <a:ext cx="7916872" cy="5181601"/>
           </a:xfrm>
         </p:spPr>
         <p:txBody>
-          <a:bodyPr vert="eaVert"/>
+          <a:bodyPr vert="eaVert" anchor="t"/>
           <a:lstStyle/>
           <a:p>
             <a:pPr lvl="0"/>
@@ -5070,6 +5726,7 @@
               <a:rPr lang="en-US"/>
               <a:t>Fifth level</a:t>
             </a:r>
+            <a:endParaRPr lang="en-US" dirty="0"/>
           </a:p>
         </p:txBody>
       </p:sp>
@@ -5090,7 +5747,7 @@
           <a:p>
             <a:fld id="{74411A3F-4DB3-47ED-809A-CD27B21BFB64}" type="datetimeFigureOut">
               <a:rPr lang="en-US" smtClean="0"/>
-              <a:t>12/14/2025</a:t>
+              <a:t>12/15/2025</a:t>
             </a:fld>
             <a:endParaRPr lang="en-US"/>
           </a:p>
@@ -5141,7 +5798,7 @@
     </p:spTree>
     <p:extLst>
       <p:ext uri="{BB962C8B-B14F-4D97-AF65-F5344CB8AC3E}">
-        <p14:creationId xmlns:p14="http://schemas.microsoft.com/office/powerpoint/2010/main" val="4169888476"/>
+        <p14:creationId xmlns:p14="http://schemas.microsoft.com/office/powerpoint/2010/main" val="834426301"/>
       </p:ext>
     </p:extLst>
   </p:cSld>
@@ -5180,19 +5837,14 @@
         </p:nvSpPr>
         <p:spPr/>
         <p:txBody>
-          <a:bodyPr>
-            <a:normAutofit/>
-          </a:bodyPr>
-          <a:lstStyle>
-            <a:lvl1pPr>
-              <a:defRPr sz="3600"/>
-            </a:lvl1pPr>
-          </a:lstStyle>
+          <a:bodyPr/>
+          <a:lstStyle/>
           <a:p>
             <a:r>
               <a:rPr lang="en-US"/>
               <a:t>Click to edit Master title style</a:t>
             </a:r>
+            <a:endParaRPr lang="en-US" dirty="0"/>
           </a:p>
         </p:txBody>
       </p:sp>
@@ -5244,6 +5896,7 @@
               <a:rPr lang="en-US"/>
               <a:t>Fifth level</a:t>
             </a:r>
+            <a:endParaRPr lang="en-US" dirty="0"/>
           </a:p>
         </p:txBody>
       </p:sp>
@@ -5264,7 +5917,7 @@
           <a:p>
             <a:fld id="{74411A3F-4DB3-47ED-809A-CD27B21BFB64}" type="datetimeFigureOut">
               <a:rPr lang="en-US" smtClean="0"/>
-              <a:t>12/14/2025</a:t>
+              <a:t>12/15/2025</a:t>
             </a:fld>
             <a:endParaRPr lang="en-US"/>
           </a:p>
@@ -5315,7 +5968,7 @@
     </p:spTree>
     <p:extLst>
       <p:ext uri="{BB962C8B-B14F-4D97-AF65-F5344CB8AC3E}">
-        <p14:creationId xmlns:p14="http://schemas.microsoft.com/office/powerpoint/2010/main" val="2277681318"/>
+        <p14:creationId xmlns:p14="http://schemas.microsoft.com/office/powerpoint/2010/main" val="1513198097"/>
       </p:ext>
     </p:extLst>
   </p:cSld>
@@ -5354,14 +6007,14 @@
         </p:nvSpPr>
         <p:spPr>
           <a:xfrm>
-            <a:off x="677335" y="2700867"/>
-            <a:ext cx="8596668" cy="1826581"/>
+            <a:off x="1295401" y="1761067"/>
+            <a:ext cx="9590550" cy="1828813"/>
           </a:xfrm>
         </p:spPr>
         <p:txBody>
           <a:bodyPr anchor="b"/>
           <a:lstStyle>
-            <a:lvl1pPr algn="l">
+            <a:lvl1pPr algn="ctr">
               <a:defRPr sz="4000" b="0" cap="none"/>
             </a:lvl1pPr>
           </a:lstStyle>
@@ -5370,6 +6023,7 @@
               <a:rPr lang="en-US"/>
               <a:t>Click to edit Master title style</a:t>
             </a:r>
+            <a:endParaRPr lang="en-US" dirty="0"/>
           </a:p>
         </p:txBody>
       </p:sp>
@@ -5385,21 +6039,18 @@
         </p:nvSpPr>
         <p:spPr>
           <a:xfrm>
-            <a:off x="677335" y="4527448"/>
-            <a:ext cx="8596668" cy="860400"/>
+            <a:off x="1295401" y="3589879"/>
+            <a:ext cx="9590550" cy="1507054"/>
           </a:xfrm>
         </p:spPr>
         <p:txBody>
           <a:bodyPr anchor="t"/>
           <a:lstStyle>
-            <a:lvl1pPr marL="0" indent="0" algn="l">
+            <a:lvl1pPr marL="0" indent="0" algn="ctr">
               <a:buNone/>
               <a:defRPr sz="2000">
                 <a:solidFill>
-                  <a:schemeClr val="tx1">
-                    <a:lumMod val="50000"/>
-                    <a:lumOff val="50000"/>
-                  </a:schemeClr>
+                  <a:schemeClr val="tx1"/>
                 </a:solidFill>
               </a:defRPr>
             </a:lvl1pPr>
@@ -5510,7 +6161,7 @@
           <a:p>
             <a:fld id="{74411A3F-4DB3-47ED-809A-CD27B21BFB64}" type="datetimeFigureOut">
               <a:rPr lang="en-US" smtClean="0"/>
-              <a:t>12/14/2025</a:t>
+              <a:t>12/15/2025</a:t>
             </a:fld>
             <a:endParaRPr lang="en-US"/>
           </a:p>
@@ -5561,7 +6212,7 @@
     </p:spTree>
     <p:extLst>
       <p:ext uri="{BB962C8B-B14F-4D97-AF65-F5344CB8AC3E}">
-        <p14:creationId xmlns:p14="http://schemas.microsoft.com/office/powerpoint/2010/main" val="604582313"/>
+        <p14:creationId xmlns:p14="http://schemas.microsoft.com/office/powerpoint/2010/main" val="1066078103"/>
       </p:ext>
     </p:extLst>
   </p:cSld>
@@ -5607,6 +6258,7 @@
               <a:rPr lang="en-US"/>
               <a:t>Click to edit Master title style</a:t>
             </a:r>
+            <a:endParaRPr lang="en-US" dirty="0"/>
           </a:p>
         </p:txBody>
       </p:sp>
@@ -5622,124 +6274,130 @@
         </p:nvSpPr>
         <p:spPr>
           <a:xfrm>
-            <a:off x="677334" y="2160589"/>
-            <a:ext cx="4184035" cy="3880772"/>
+            <a:off x="913795" y="1732449"/>
+            <a:ext cx="5060497" cy="4058750"/>
           </a:xfrm>
         </p:spPr>
         <p:txBody>
+          <a:bodyPr anchor="t">
+            <a:normAutofit/>
+          </a:bodyPr>
+          <a:lstStyle/>
+          <a:p>
+            <a:pPr lvl="0"/>
+            <a:r>
+              <a:rPr lang="en-US"/>
+              <a:t>Click to edit Master text styles</a:t>
+            </a:r>
+          </a:p>
+          <a:p>
+            <a:pPr lvl="1"/>
+            <a:r>
+              <a:rPr lang="en-US"/>
+              <a:t>Second level</a:t>
+            </a:r>
+          </a:p>
+          <a:p>
+            <a:pPr lvl="2"/>
+            <a:r>
+              <a:rPr lang="en-US"/>
+              <a:t>Third level</a:t>
+            </a:r>
+          </a:p>
+          <a:p>
+            <a:pPr lvl="3"/>
+            <a:r>
+              <a:rPr lang="en-US"/>
+              <a:t>Fourth level</a:t>
+            </a:r>
+          </a:p>
+          <a:p>
+            <a:pPr lvl="4"/>
+            <a:r>
+              <a:rPr lang="en-US"/>
+              <a:t>Fifth level</a:t>
+            </a:r>
+            <a:endParaRPr lang="en-US" dirty="0"/>
+          </a:p>
+        </p:txBody>
+      </p:sp>
+      <p:sp>
+        <p:nvSpPr>
+          <p:cNvPr id="4" name="Content Placeholder 3"/>
+          <p:cNvSpPr>
+            <a:spLocks noGrp="1"/>
+          </p:cNvSpPr>
+          <p:nvPr>
+            <p:ph sz="half" idx="2"/>
+          </p:nvPr>
+        </p:nvSpPr>
+        <p:spPr>
+          <a:xfrm>
+            <a:off x="6202892" y="1732449"/>
+            <a:ext cx="5064665" cy="4058751"/>
+          </a:xfrm>
+        </p:spPr>
+        <p:txBody>
+          <a:bodyPr anchor="t">
+            <a:normAutofit/>
+          </a:bodyPr>
+          <a:lstStyle/>
+          <a:p>
+            <a:pPr lvl="0"/>
+            <a:r>
+              <a:rPr lang="en-US"/>
+              <a:t>Click to edit Master text styles</a:t>
+            </a:r>
+          </a:p>
+          <a:p>
+            <a:pPr lvl="1"/>
+            <a:r>
+              <a:rPr lang="en-US"/>
+              <a:t>Second level</a:t>
+            </a:r>
+          </a:p>
+          <a:p>
+            <a:pPr lvl="2"/>
+            <a:r>
+              <a:rPr lang="en-US"/>
+              <a:t>Third level</a:t>
+            </a:r>
+          </a:p>
+          <a:p>
+            <a:pPr lvl="3"/>
+            <a:r>
+              <a:rPr lang="en-US"/>
+              <a:t>Fourth level</a:t>
+            </a:r>
+          </a:p>
+          <a:p>
+            <a:pPr lvl="4"/>
+            <a:r>
+              <a:rPr lang="en-US"/>
+              <a:t>Fifth level</a:t>
+            </a:r>
+            <a:endParaRPr lang="en-US" dirty="0"/>
+          </a:p>
+        </p:txBody>
+      </p:sp>
+      <p:sp>
+        <p:nvSpPr>
+          <p:cNvPr id="5" name="Date Placeholder 4"/>
+          <p:cNvSpPr>
+            <a:spLocks noGrp="1"/>
+          </p:cNvSpPr>
+          <p:nvPr>
+            <p:ph type="dt" sz="half" idx="10"/>
+          </p:nvPr>
+        </p:nvSpPr>
+        <p:spPr/>
+        <p:txBody>
           <a:bodyPr/>
           <a:lstStyle/>
           <a:p>
-            <a:pPr lvl="0"/>
-            <a:r>
-              <a:rPr lang="en-US"/>
-              <a:t>Click to edit Master text styles</a:t>
-            </a:r>
-          </a:p>
-          <a:p>
-            <a:pPr lvl="1"/>
-            <a:r>
-              <a:rPr lang="en-US"/>
-              <a:t>Second level</a:t>
-            </a:r>
-          </a:p>
-          <a:p>
-            <a:pPr lvl="2"/>
-            <a:r>
-              <a:rPr lang="en-US"/>
-              <a:t>Third level</a:t>
-            </a:r>
-          </a:p>
-          <a:p>
-            <a:pPr lvl="3"/>
-            <a:r>
-              <a:rPr lang="en-US"/>
-              <a:t>Fourth level</a:t>
-            </a:r>
-          </a:p>
-          <a:p>
-            <a:pPr lvl="4"/>
-            <a:r>
-              <a:rPr lang="en-US"/>
-              <a:t>Fifth level</a:t>
-            </a:r>
-          </a:p>
-        </p:txBody>
-      </p:sp>
-      <p:sp>
-        <p:nvSpPr>
-          <p:cNvPr id="4" name="Content Placeholder 3"/>
-          <p:cNvSpPr>
-            <a:spLocks noGrp="1"/>
-          </p:cNvSpPr>
-          <p:nvPr>
-            <p:ph sz="half" idx="2"/>
-          </p:nvPr>
-        </p:nvSpPr>
-        <p:spPr>
-          <a:xfrm>
-            <a:off x="5089970" y="2160589"/>
-            <a:ext cx="4184034" cy="3880773"/>
-          </a:xfrm>
-        </p:spPr>
-        <p:txBody>
-          <a:bodyPr/>
-          <a:lstStyle/>
-          <a:p>
-            <a:pPr lvl="0"/>
-            <a:r>
-              <a:rPr lang="en-US"/>
-              <a:t>Click to edit Master text styles</a:t>
-            </a:r>
-          </a:p>
-          <a:p>
-            <a:pPr lvl="1"/>
-            <a:r>
-              <a:rPr lang="en-US"/>
-              <a:t>Second level</a:t>
-            </a:r>
-          </a:p>
-          <a:p>
-            <a:pPr lvl="2"/>
-            <a:r>
-              <a:rPr lang="en-US"/>
-              <a:t>Third level</a:t>
-            </a:r>
-          </a:p>
-          <a:p>
-            <a:pPr lvl="3"/>
-            <a:r>
-              <a:rPr lang="en-US"/>
-              <a:t>Fourth level</a:t>
-            </a:r>
-          </a:p>
-          <a:p>
-            <a:pPr lvl="4"/>
-            <a:r>
-              <a:rPr lang="en-US"/>
-              <a:t>Fifth level</a:t>
-            </a:r>
-          </a:p>
-        </p:txBody>
-      </p:sp>
-      <p:sp>
-        <p:nvSpPr>
-          <p:cNvPr id="5" name="Date Placeholder 4"/>
-          <p:cNvSpPr>
-            <a:spLocks noGrp="1"/>
-          </p:cNvSpPr>
-          <p:nvPr>
-            <p:ph type="dt" sz="half" idx="10"/>
-          </p:nvPr>
-        </p:nvSpPr>
-        <p:spPr/>
-        <p:txBody>
-          <a:bodyPr/>
-          <a:lstStyle/>
-          <a:p>
             <a:fld id="{74411A3F-4DB3-47ED-809A-CD27B21BFB64}" type="datetimeFigureOut">
               <a:rPr lang="en-US" smtClean="0"/>
-              <a:t>12/14/2025</a:t>
+              <a:t>12/15/2025</a:t>
             </a:fld>
             <a:endParaRPr lang="en-US"/>
           </a:p>
@@ -5790,7 +6448,7 @@
     </p:spTree>
     <p:extLst>
       <p:ext uri="{BB962C8B-B14F-4D97-AF65-F5344CB8AC3E}">
-        <p14:creationId xmlns:p14="http://schemas.microsoft.com/office/powerpoint/2010/main" val="2460118402"/>
+        <p14:creationId xmlns:p14="http://schemas.microsoft.com/office/powerpoint/2010/main" val="3736538029"/>
       </p:ext>
     </p:extLst>
   </p:cSld>
@@ -5817,6 +6475,66 @@
           <a:chExt cx="0" cy="0"/>
         </a:xfrm>
       </p:grpSpPr>
+      <p:pic>
+        <p:nvPicPr>
+          <p:cNvPr id="20" name="Picture 19" descr="Slate-V2-HD-compPhotoInset.png"/>
+          <p:cNvPicPr>
+            <a:picLocks noChangeAspect="1"/>
+          </p:cNvPicPr>
+          <p:nvPr/>
+        </p:nvPicPr>
+        <p:blipFill>
+          <a:blip r:embed="rId2">
+            <a:extLst>
+              <a:ext uri="{28A0092B-C50C-407E-A947-70E740481C1C}">
+                <a14:useLocalDpi xmlns:a14="http://schemas.microsoft.com/office/drawing/2010/main" val="0"/>
+              </a:ext>
+            </a:extLst>
+          </a:blip>
+          <a:stretch>
+            <a:fillRect/>
+          </a:stretch>
+        </p:blipFill>
+        <p:spPr>
+          <a:xfrm>
+            <a:off x="913795" y="1734506"/>
+            <a:ext cx="5089072" cy="4148769"/>
+          </a:xfrm>
+          <a:prstGeom prst="rect">
+            <a:avLst/>
+          </a:prstGeom>
+        </p:spPr>
+      </p:pic>
+      <p:pic>
+        <p:nvPicPr>
+          <p:cNvPr id="21" name="Picture 20" descr="Slate-V2-HD-compPhotoInset.png"/>
+          <p:cNvPicPr>
+            <a:picLocks noChangeAspect="1"/>
+          </p:cNvPicPr>
+          <p:nvPr/>
+        </p:nvPicPr>
+        <p:blipFill>
+          <a:blip r:embed="rId2">
+            <a:extLst>
+              <a:ext uri="{28A0092B-C50C-407E-A947-70E740481C1C}">
+                <a14:useLocalDpi xmlns:a14="http://schemas.microsoft.com/office/drawing/2010/main" val="0"/>
+              </a:ext>
+            </a:extLst>
+          </a:blip>
+          <a:stretch>
+            <a:fillRect/>
+          </a:stretch>
+        </p:blipFill>
+        <p:spPr>
+          <a:xfrm>
+            <a:off x="6178485" y="1734506"/>
+            <a:ext cx="5089072" cy="4148769"/>
+          </a:xfrm>
+          <a:prstGeom prst="rect">
+            <a:avLst/>
+          </a:prstGeom>
+        </p:spPr>
+      </p:pic>
       <p:sp>
         <p:nvSpPr>
           <p:cNvPr id="2" name="Title 1"/>
@@ -5840,6 +6558,7 @@
               <a:rPr lang="en-US"/>
               <a:t>Click to edit Master title style</a:t>
             </a:r>
+            <a:endParaRPr lang="en-US" dirty="0"/>
           </a:p>
         </p:txBody>
       </p:sp>
@@ -5855,8 +6574,8 @@
         </p:nvSpPr>
         <p:spPr>
           <a:xfrm>
-            <a:off x="675745" y="2160983"/>
-            <a:ext cx="4185623" cy="576262"/>
+            <a:off x="1005872" y="1835254"/>
+            <a:ext cx="4876344" cy="544884"/>
           </a:xfrm>
         </p:spPr>
         <p:txBody>
@@ -5864,7 +6583,7 @@
             <a:noAutofit/>
           </a:bodyPr>
           <a:lstStyle>
-            <a:lvl1pPr marL="0" indent="0">
+            <a:lvl1pPr marL="0" indent="0" algn="ctr">
               <a:buNone/>
               <a:defRPr sz="2400" b="0"/>
             </a:lvl1pPr>
@@ -5922,15 +6641,31 @@
         </p:nvSpPr>
         <p:spPr>
           <a:xfrm>
-            <a:off x="675745" y="2737245"/>
-            <a:ext cx="4185623" cy="3304117"/>
+            <a:off x="1005872" y="2380137"/>
+            <a:ext cx="4876344" cy="3411063"/>
           </a:xfrm>
         </p:spPr>
         <p:txBody>
-          <a:bodyPr>
+          <a:bodyPr anchor="t">
             <a:normAutofit/>
           </a:bodyPr>
-          <a:lstStyle/>
+          <a:lstStyle>
+            <a:lvl1pPr>
+              <a:defRPr sz="1800"/>
+            </a:lvl1pPr>
+            <a:lvl2pPr>
+              <a:defRPr sz="1600"/>
+            </a:lvl2pPr>
+            <a:lvl3pPr>
+              <a:defRPr sz="1400"/>
+            </a:lvl3pPr>
+            <a:lvl4pPr>
+              <a:defRPr sz="1200"/>
+            </a:lvl4pPr>
+            <a:lvl5pPr>
+              <a:defRPr sz="1200"/>
+            </a:lvl5pPr>
+          </a:lstStyle>
           <a:p>
             <a:pPr lvl="0"/>
             <a:r>
@@ -5965,6 +6700,7 @@
               <a:rPr lang="en-US"/>
               <a:t>Fifth level</a:t>
             </a:r>
+            <a:endParaRPr lang="en-US" dirty="0"/>
           </a:p>
         </p:txBody>
       </p:sp>
@@ -5980,8 +6716,8 @@
         </p:nvSpPr>
         <p:spPr>
           <a:xfrm>
-            <a:off x="5088383" y="2160983"/>
-            <a:ext cx="4185618" cy="576262"/>
+            <a:off x="6294967" y="1835254"/>
+            <a:ext cx="4895330" cy="544883"/>
           </a:xfrm>
         </p:spPr>
         <p:txBody>
@@ -5989,7 +6725,7 @@
             <a:noAutofit/>
           </a:bodyPr>
           <a:lstStyle>
-            <a:lvl1pPr marL="0" indent="0">
+            <a:lvl1pPr marL="0" indent="0" algn="ctr">
               <a:buNone/>
               <a:defRPr sz="2400" b="0"/>
             </a:lvl1pPr>
@@ -6047,15 +6783,31 @@
         </p:nvSpPr>
         <p:spPr>
           <a:xfrm>
-            <a:off x="5088384" y="2737245"/>
-            <a:ext cx="4185617" cy="3304117"/>
+            <a:off x="6294967" y="2380137"/>
+            <a:ext cx="4895330" cy="3411063"/>
           </a:xfrm>
         </p:spPr>
         <p:txBody>
-          <a:bodyPr>
+          <a:bodyPr anchor="t">
             <a:normAutofit/>
           </a:bodyPr>
-          <a:lstStyle/>
+          <a:lstStyle>
+            <a:lvl1pPr>
+              <a:defRPr sz="1800"/>
+            </a:lvl1pPr>
+            <a:lvl2pPr>
+              <a:defRPr sz="1600"/>
+            </a:lvl2pPr>
+            <a:lvl3pPr>
+              <a:defRPr sz="1400"/>
+            </a:lvl3pPr>
+            <a:lvl4pPr>
+              <a:defRPr sz="1200"/>
+            </a:lvl4pPr>
+            <a:lvl5pPr>
+              <a:defRPr sz="1200"/>
+            </a:lvl5pPr>
+          </a:lstStyle>
           <a:p>
             <a:pPr lvl="0"/>
             <a:r>
@@ -6090,6 +6842,7 @@
               <a:rPr lang="en-US"/>
               <a:t>Fifth level</a:t>
             </a:r>
+            <a:endParaRPr lang="en-US" dirty="0"/>
           </a:p>
         </p:txBody>
       </p:sp>
@@ -6110,7 +6863,7 @@
           <a:p>
             <a:fld id="{74411A3F-4DB3-47ED-809A-CD27B21BFB64}" type="datetimeFigureOut">
               <a:rPr lang="en-US" smtClean="0"/>
-              <a:t>12/14/2025</a:t>
+              <a:t>12/15/2025</a:t>
             </a:fld>
             <a:endParaRPr lang="en-US"/>
           </a:p>
@@ -6161,7 +6914,7 @@
     </p:spTree>
     <p:extLst>
       <p:ext uri="{BB962C8B-B14F-4D97-AF65-F5344CB8AC3E}">
-        <p14:creationId xmlns:p14="http://schemas.microsoft.com/office/powerpoint/2010/main" val="2477264895"/>
+        <p14:creationId xmlns:p14="http://schemas.microsoft.com/office/powerpoint/2010/main" val="3590478048"/>
       </p:ext>
     </p:extLst>
   </p:cSld>
@@ -6198,12 +6951,7 @@
             <p:ph type="title"/>
           </p:nvPr>
         </p:nvSpPr>
-        <p:spPr>
-          <a:xfrm>
-            <a:off x="677334" y="609600"/>
-            <a:ext cx="8596668" cy="1320800"/>
-          </a:xfrm>
-        </p:spPr>
+        <p:spPr/>
         <p:txBody>
           <a:bodyPr/>
           <a:lstStyle/>
@@ -6212,6 +6960,7 @@
               <a:rPr lang="en-US"/>
               <a:t>Click to edit Master title style</a:t>
             </a:r>
+            <a:endParaRPr lang="en-US" dirty="0"/>
           </a:p>
         </p:txBody>
       </p:sp>
@@ -6232,7 +6981,7 @@
           <a:p>
             <a:fld id="{74411A3F-4DB3-47ED-809A-CD27B21BFB64}" type="datetimeFigureOut">
               <a:rPr lang="en-US" smtClean="0"/>
-              <a:t>12/14/2025</a:t>
+              <a:t>12/15/2025</a:t>
             </a:fld>
             <a:endParaRPr lang="en-US"/>
           </a:p>
@@ -6283,7 +7032,7 @@
     </p:spTree>
     <p:extLst>
       <p:ext uri="{BB962C8B-B14F-4D97-AF65-F5344CB8AC3E}">
-        <p14:creationId xmlns:p14="http://schemas.microsoft.com/office/powerpoint/2010/main" val="565972233"/>
+        <p14:creationId xmlns:p14="http://schemas.microsoft.com/office/powerpoint/2010/main" val="2724155262"/>
       </p:ext>
     </p:extLst>
   </p:cSld>
@@ -6327,7 +7076,7 @@
           <a:p>
             <a:fld id="{74411A3F-4DB3-47ED-809A-CD27B21BFB64}" type="datetimeFigureOut">
               <a:rPr lang="en-US" smtClean="0"/>
-              <a:t>12/14/2025</a:t>
+              <a:t>12/15/2025</a:t>
             </a:fld>
             <a:endParaRPr lang="en-US"/>
           </a:p>
@@ -6378,7 +7127,7 @@
     </p:spTree>
     <p:extLst>
       <p:ext uri="{BB962C8B-B14F-4D97-AF65-F5344CB8AC3E}">
-        <p14:creationId xmlns:p14="http://schemas.microsoft.com/office/powerpoint/2010/main" val="1870085502"/>
+        <p14:creationId xmlns:p14="http://schemas.microsoft.com/office/powerpoint/2010/main" val="208337544"/>
       </p:ext>
     </p:extLst>
   </p:cSld>
@@ -6417,8 +7166,8 @@
         </p:nvSpPr>
         <p:spPr>
           <a:xfrm>
-            <a:off x="677334" y="1498604"/>
-            <a:ext cx="3854528" cy="1278466"/>
+            <a:off x="913795" y="609600"/>
+            <a:ext cx="3706889" cy="1821918"/>
           </a:xfrm>
         </p:spPr>
         <p:txBody>
@@ -6426,8 +7175,8 @@
             <a:normAutofit/>
           </a:bodyPr>
           <a:lstStyle>
-            <a:lvl1pPr>
-              <a:defRPr sz="2000"/>
+            <a:lvl1pPr algn="ctr">
+              <a:defRPr sz="2400" b="0"/>
             </a:lvl1pPr>
           </a:lstStyle>
           <a:p>
@@ -6435,6 +7184,7 @@
               <a:rPr lang="en-US"/>
               <a:t>Click to edit Master title style</a:t>
             </a:r>
+            <a:endParaRPr lang="en-US" dirty="0"/>
           </a:p>
         </p:txBody>
       </p:sp>
@@ -6450,8 +7200,8 @@
         </p:nvSpPr>
         <p:spPr>
           <a:xfrm>
-            <a:off x="4760461" y="514924"/>
-            <a:ext cx="4513541" cy="5526437"/>
+            <a:off x="4855633" y="609600"/>
+            <a:ext cx="6411924" cy="5181600"/>
           </a:xfrm>
         </p:spPr>
         <p:txBody>
@@ -6493,6 +7243,7 @@
               <a:rPr lang="en-US"/>
               <a:t>Fifth level</a:t>
             </a:r>
+            <a:endParaRPr lang="en-US" dirty="0"/>
           </a:p>
         </p:txBody>
       </p:sp>
@@ -6508,50 +7259,50 @@
         </p:nvSpPr>
         <p:spPr>
           <a:xfrm>
-            <a:off x="677334" y="2777069"/>
-            <a:ext cx="3854528" cy="2584449"/>
+            <a:off x="913795" y="2431518"/>
+            <a:ext cx="3706889" cy="3359681"/>
           </a:xfrm>
         </p:spPr>
         <p:txBody>
-          <a:bodyPr>
+          <a:bodyPr anchor="t">
             <a:normAutofit/>
           </a:bodyPr>
           <a:lstStyle>
-            <a:lvl1pPr marL="0" indent="0">
-              <a:buNone/>
-              <a:defRPr sz="1400"/>
+            <a:lvl1pPr marL="0" indent="0" algn="ctr">
+              <a:buNone/>
+              <a:defRPr sz="1600"/>
             </a:lvl1pPr>
-            <a:lvl2pPr marL="457063" indent="0">
-              <a:buNone/>
-              <a:defRPr sz="1400"/>
+            <a:lvl2pPr marL="457200" indent="0">
+              <a:buNone/>
+              <a:defRPr sz="1200"/>
             </a:lvl2pPr>
-            <a:lvl3pPr marL="914126" indent="0">
-              <a:buNone/>
-              <a:defRPr sz="1200"/>
+            <a:lvl3pPr marL="914400" indent="0">
+              <a:buNone/>
+              <a:defRPr sz="1000"/>
             </a:lvl3pPr>
-            <a:lvl4pPr marL="1371189" indent="0">
-              <a:buNone/>
-              <a:defRPr sz="1000"/>
+            <a:lvl4pPr marL="1371600" indent="0">
+              <a:buNone/>
+              <a:defRPr sz="900"/>
             </a:lvl4pPr>
-            <a:lvl5pPr marL="1828251" indent="0">
-              <a:buNone/>
-              <a:defRPr sz="1000"/>
+            <a:lvl5pPr marL="1828800" indent="0">
+              <a:buNone/>
+              <a:defRPr sz="900"/>
             </a:lvl5pPr>
-            <a:lvl6pPr marL="2285314" indent="0">
-              <a:buNone/>
-              <a:defRPr sz="1000"/>
+            <a:lvl6pPr marL="2286000" indent="0">
+              <a:buNone/>
+              <a:defRPr sz="900"/>
             </a:lvl6pPr>
-            <a:lvl7pPr marL="2742377" indent="0">
-              <a:buNone/>
-              <a:defRPr sz="1000"/>
+            <a:lvl7pPr marL="2743200" indent="0">
+              <a:buNone/>
+              <a:defRPr sz="900"/>
             </a:lvl7pPr>
-            <a:lvl8pPr marL="3199440" indent="0">
-              <a:buNone/>
-              <a:defRPr sz="1000"/>
+            <a:lvl8pPr marL="3200400" indent="0">
+              <a:buNone/>
+              <a:defRPr sz="900"/>
             </a:lvl8pPr>
-            <a:lvl9pPr marL="3656503" indent="0">
-              <a:buNone/>
-              <a:defRPr sz="1000"/>
+            <a:lvl9pPr marL="3657600" indent="0">
+              <a:buNone/>
+              <a:defRPr sz="900"/>
             </a:lvl9pPr>
           </a:lstStyle>
           <a:p>
@@ -6580,7 +7331,7 @@
           <a:p>
             <a:fld id="{74411A3F-4DB3-47ED-809A-CD27B21BFB64}" type="datetimeFigureOut">
               <a:rPr lang="en-US" smtClean="0"/>
-              <a:t>12/14/2025</a:t>
+              <a:t>12/15/2025</a:t>
             </a:fld>
             <a:endParaRPr lang="en-US"/>
           </a:p>
@@ -6631,7 +7382,7 @@
     </p:spTree>
     <p:extLst>
       <p:ext uri="{BB962C8B-B14F-4D97-AF65-F5344CB8AC3E}">
-        <p14:creationId xmlns:p14="http://schemas.microsoft.com/office/powerpoint/2010/main" val="3936064289"/>
+        <p14:creationId xmlns:p14="http://schemas.microsoft.com/office/powerpoint/2010/main" val="2115501479"/>
       </p:ext>
     </p:extLst>
   </p:cSld>
@@ -6658,29 +7409,59 @@
           <a:chExt cx="0" cy="0"/>
         </a:xfrm>
       </p:grpSpPr>
-      <p:sp>
-        <p:nvSpPr>
-          <p:cNvPr id="2" name="Title 1"/>
-          <p:cNvSpPr>
-            <a:spLocks noGrp="1"/>
-          </p:cNvSpPr>
-          <p:nvPr>
-            <p:ph type="title"/>
-          </p:nvPr>
-        </p:nvSpPr>
+      <p:pic>
+        <p:nvPicPr>
+          <p:cNvPr id="22" name="Picture 21" descr="Slate-V2-HD-vertPhotoInset.png"/>
+          <p:cNvPicPr>
+            <a:picLocks noChangeAspect="1"/>
+          </p:cNvPicPr>
+          <p:nvPr/>
+        </p:nvPicPr>
+        <p:blipFill>
+          <a:blip r:embed="rId2">
+            <a:extLst>
+              <a:ext uri="{28A0092B-C50C-407E-A947-70E740481C1C}">
+                <a14:useLocalDpi xmlns:a14="http://schemas.microsoft.com/office/drawing/2010/main" val="0"/>
+              </a:ext>
+            </a:extLst>
+          </a:blip>
+          <a:stretch>
+            <a:fillRect/>
+          </a:stretch>
+        </p:blipFill>
         <p:spPr>
           <a:xfrm>
-            <a:off x="677334" y="4800600"/>
-            <a:ext cx="8596667" cy="566738"/>
+            <a:off x="7293665" y="609600"/>
+            <a:ext cx="3584166" cy="5204832"/>
+          </a:xfrm>
+          <a:prstGeom prst="rect">
+            <a:avLst/>
+          </a:prstGeom>
+        </p:spPr>
+      </p:pic>
+      <p:sp>
+        <p:nvSpPr>
+          <p:cNvPr id="2" name="Title 1"/>
+          <p:cNvSpPr>
+            <a:spLocks noGrp="1"/>
+          </p:cNvSpPr>
+          <p:nvPr>
+            <p:ph type="title"/>
+          </p:nvPr>
+        </p:nvSpPr>
+        <p:spPr>
+          <a:xfrm>
+            <a:off x="913795" y="609923"/>
+            <a:ext cx="5934949" cy="1829338"/>
           </a:xfrm>
         </p:spPr>
         <p:txBody>
           <a:bodyPr anchor="b">
-            <a:normAutofit/>
+            <a:noAutofit/>
           </a:bodyPr>
           <a:lstStyle>
-            <a:lvl1pPr algn="l">
-              <a:defRPr sz="2400" b="0"/>
+            <a:lvl1pPr algn="ctr">
+              <a:defRPr sz="3200" b="0"/>
             </a:lvl1pPr>
           </a:lstStyle>
           <a:p>
@@ -6688,6 +7469,7 @@
               <a:rPr lang="en-US"/>
               <a:t>Click to edit Master title style</a:t>
             </a:r>
+            <a:endParaRPr lang="en-US" dirty="0"/>
           </a:p>
         </p:txBody>
       </p:sp>
@@ -6703,9 +7485,16 @@
         </p:nvSpPr>
         <p:spPr>
           <a:xfrm>
-            <a:off x="677334" y="609600"/>
-            <a:ext cx="8596668" cy="3845718"/>
+            <a:off x="7442551" y="763702"/>
+            <a:ext cx="3275751" cy="4912822"/>
           </a:xfrm>
+          <a:effectLst>
+            <a:outerShdw blurRad="38100" dist="25400" dir="4440000">
+              <a:srgbClr val="000000">
+                <a:alpha val="36000"/>
+              </a:srgbClr>
+            </a:outerShdw>
+          </a:effectLst>
         </p:spPr>
         <p:txBody>
           <a:bodyPr anchor="t">
@@ -6754,6 +7543,7 @@
               <a:rPr lang="en-US"/>
               <a:t>Click icon to add picture</a:t>
             </a:r>
+            <a:endParaRPr lang="en-US" dirty="0"/>
           </a:p>
         </p:txBody>
       </p:sp>
@@ -6769,18 +7559,18 @@
         </p:nvSpPr>
         <p:spPr>
           <a:xfrm>
-            <a:off x="677334" y="5367338"/>
-            <a:ext cx="8596667" cy="674024"/>
+            <a:off x="913795" y="2439261"/>
+            <a:ext cx="5934949" cy="3376134"/>
           </a:xfrm>
         </p:spPr>
         <p:txBody>
-          <a:bodyPr>
+          <a:bodyPr anchor="t">
             <a:normAutofit/>
           </a:bodyPr>
           <a:lstStyle>
-            <a:lvl1pPr marL="0" indent="0">
-              <a:buNone/>
-              <a:defRPr sz="1200"/>
+            <a:lvl1pPr marL="0" indent="0" algn="ctr">
+              <a:buNone/>
+              <a:defRPr sz="1600"/>
             </a:lvl1pPr>
             <a:lvl2pPr marL="457200" indent="0">
               <a:buNone/>
@@ -6841,7 +7631,7 @@
           <a:p>
             <a:fld id="{74411A3F-4DB3-47ED-809A-CD27B21BFB64}" type="datetimeFigureOut">
               <a:rPr lang="en-US" smtClean="0"/>
-              <a:t>12/14/2025</a:t>
+              <a:t>12/15/2025</a:t>
             </a:fld>
             <a:endParaRPr lang="en-US"/>
           </a:p>
@@ -6892,7 +7682,7 @@
     </p:spTree>
     <p:extLst>
       <p:ext uri="{BB962C8B-B14F-4D97-AF65-F5344CB8AC3E}">
-        <p14:creationId xmlns:p14="http://schemas.microsoft.com/office/powerpoint/2010/main" val="1946788758"/>
+        <p14:creationId xmlns:p14="http://schemas.microsoft.com/office/powerpoint/2010/main" val="1520790684"/>
       </p:ext>
     </p:extLst>
   </p:cSld>
@@ -6906,8 +7696,8 @@
 <p:sldMaster xmlns:a="http://schemas.openxmlformats.org/drawingml/2006/main" xmlns:r="http://schemas.openxmlformats.org/officeDocument/2006/relationships" xmlns:p="http://schemas.openxmlformats.org/presentationml/2006/main">
   <p:cSld>
     <p:bg>
-      <p:bgRef idx="1001">
-        <a:schemeClr val="bg1"/>
+      <p:bgRef idx="1003">
+        <a:schemeClr val="bg2"/>
       </p:bgRef>
     </p:bg>
     <p:spTree>
@@ -6924,592 +7714,6 @@
           <a:chExt cx="0" cy="0"/>
         </a:xfrm>
       </p:grpSpPr>
-      <p:grpSp>
-        <p:nvGrpSpPr>
-          <p:cNvPr id="7" name="Group 6"/>
-          <p:cNvGrpSpPr/>
-          <p:nvPr/>
-        </p:nvGrpSpPr>
-        <p:grpSpPr>
-          <a:xfrm>
-            <a:off x="0" y="-8467"/>
-            <a:ext cx="12192000" cy="6866467"/>
-            <a:chOff x="0" y="-8467"/>
-            <a:chExt cx="12192000" cy="6866467"/>
-          </a:xfrm>
-        </p:grpSpPr>
-        <p:cxnSp>
-          <p:nvCxnSpPr>
-            <p:cNvPr id="20" name="Straight Connector 19"/>
-            <p:cNvCxnSpPr/>
-            <p:nvPr/>
-          </p:nvCxnSpPr>
-          <p:spPr>
-            <a:xfrm>
-              <a:off x="9371012" y="0"/>
-              <a:ext cx="1219200" cy="6858000"/>
-            </a:xfrm>
-            <a:prstGeom prst="line">
-              <a:avLst/>
-            </a:prstGeom>
-            <a:ln w="9525">
-              <a:solidFill>
-                <a:schemeClr val="bg1">
-                  <a:lumMod val="75000"/>
-                </a:schemeClr>
-              </a:solidFill>
-            </a:ln>
-          </p:spPr>
-          <p:style>
-            <a:lnRef idx="2">
-              <a:schemeClr val="accent1"/>
-            </a:lnRef>
-            <a:fillRef idx="0">
-              <a:schemeClr val="accent1"/>
-            </a:fillRef>
-            <a:effectRef idx="1">
-              <a:schemeClr val="accent1"/>
-            </a:effectRef>
-            <a:fontRef idx="minor">
-              <a:schemeClr val="tx1"/>
-            </a:fontRef>
-          </p:style>
-        </p:cxnSp>
-        <p:cxnSp>
-          <p:nvCxnSpPr>
-            <p:cNvPr id="21" name="Straight Connector 20"/>
-            <p:cNvCxnSpPr/>
-            <p:nvPr/>
-          </p:nvCxnSpPr>
-          <p:spPr>
-            <a:xfrm flipH="1">
-              <a:off x="7425267" y="3681413"/>
-              <a:ext cx="4763558" cy="3176587"/>
-            </a:xfrm>
-            <a:prstGeom prst="line">
-              <a:avLst/>
-            </a:prstGeom>
-            <a:ln w="9525">
-              <a:solidFill>
-                <a:schemeClr val="bg1">
-                  <a:lumMod val="85000"/>
-                </a:schemeClr>
-              </a:solidFill>
-            </a:ln>
-          </p:spPr>
-          <p:style>
-            <a:lnRef idx="2">
-              <a:schemeClr val="accent1"/>
-            </a:lnRef>
-            <a:fillRef idx="0">
-              <a:schemeClr val="accent1"/>
-            </a:fillRef>
-            <a:effectRef idx="1">
-              <a:schemeClr val="accent1"/>
-            </a:effectRef>
-            <a:fontRef idx="minor">
-              <a:schemeClr val="tx1"/>
-            </a:fontRef>
-          </p:style>
-        </p:cxnSp>
-        <p:sp>
-          <p:nvSpPr>
-            <p:cNvPr id="22" name="Rectangle 23"/>
-            <p:cNvSpPr/>
-            <p:nvPr/>
-          </p:nvSpPr>
-          <p:spPr>
-            <a:xfrm>
-              <a:off x="9181476" y="-8467"/>
-              <a:ext cx="3007349" cy="6866467"/>
-            </a:xfrm>
-            <a:custGeom>
-              <a:avLst/>
-              <a:gdLst/>
-              <a:ahLst/>
-              <a:cxnLst/>
-              <a:rect l="l" t="t" r="r" b="b"/>
-              <a:pathLst>
-                <a:path w="3007349" h="6866467">
-                  <a:moveTo>
-                    <a:pt x="2045532" y="0"/>
-                  </a:moveTo>
-                  <a:lnTo>
-                    <a:pt x="3007349" y="0"/>
-                  </a:lnTo>
-                  <a:lnTo>
-                    <a:pt x="3007349" y="6866467"/>
-                  </a:lnTo>
-                  <a:lnTo>
-                    <a:pt x="0" y="6866467"/>
-                  </a:lnTo>
-                  <a:lnTo>
-                    <a:pt x="2045532" y="0"/>
-                  </a:lnTo>
-                  <a:close/>
-                </a:path>
-              </a:pathLst>
-            </a:custGeom>
-            <a:solidFill>
-              <a:schemeClr val="accent1">
-                <a:alpha val="30000"/>
-              </a:schemeClr>
-            </a:solidFill>
-            <a:ln>
-              <a:noFill/>
-            </a:ln>
-            <a:effectLst/>
-          </p:spPr>
-          <p:style>
-            <a:lnRef idx="1">
-              <a:schemeClr val="accent1"/>
-            </a:lnRef>
-            <a:fillRef idx="3">
-              <a:schemeClr val="accent1"/>
-            </a:fillRef>
-            <a:effectRef idx="2">
-              <a:schemeClr val="accent1"/>
-            </a:effectRef>
-            <a:fontRef idx="minor">
-              <a:schemeClr val="lt1"/>
-            </a:fontRef>
-          </p:style>
-          <p:txBody>
-            <a:bodyPr/>
-            <a:lstStyle/>
-            <a:p>
-              <a:endParaRPr lang="en-US"/>
-            </a:p>
-          </p:txBody>
-        </p:sp>
-        <p:sp>
-          <p:nvSpPr>
-            <p:cNvPr id="23" name="Rectangle 25"/>
-            <p:cNvSpPr/>
-            <p:nvPr/>
-          </p:nvSpPr>
-          <p:spPr>
-            <a:xfrm>
-              <a:off x="9603442" y="-8467"/>
-              <a:ext cx="2588558" cy="6866467"/>
-            </a:xfrm>
-            <a:custGeom>
-              <a:avLst/>
-              <a:gdLst/>
-              <a:ahLst/>
-              <a:cxnLst/>
-              <a:rect l="l" t="t" r="r" b="b"/>
-              <a:pathLst>
-                <a:path w="2573311" h="6866467">
-                  <a:moveTo>
-                    <a:pt x="0" y="0"/>
-                  </a:moveTo>
-                  <a:lnTo>
-                    <a:pt x="2573311" y="0"/>
-                  </a:lnTo>
-                  <a:lnTo>
-                    <a:pt x="2573311" y="6866467"/>
-                  </a:lnTo>
-                  <a:lnTo>
-                    <a:pt x="1202336" y="6866467"/>
-                  </a:lnTo>
-                  <a:lnTo>
-                    <a:pt x="0" y="0"/>
-                  </a:lnTo>
-                  <a:close/>
-                </a:path>
-              </a:pathLst>
-            </a:custGeom>
-            <a:solidFill>
-              <a:schemeClr val="accent1">
-                <a:alpha val="20000"/>
-              </a:schemeClr>
-            </a:solidFill>
-            <a:ln>
-              <a:noFill/>
-            </a:ln>
-            <a:effectLst/>
-          </p:spPr>
-          <p:style>
-            <a:lnRef idx="1">
-              <a:schemeClr val="accent1"/>
-            </a:lnRef>
-            <a:fillRef idx="3">
-              <a:schemeClr val="accent1"/>
-            </a:fillRef>
-            <a:effectRef idx="2">
-              <a:schemeClr val="accent1"/>
-            </a:effectRef>
-            <a:fontRef idx="minor">
-              <a:schemeClr val="lt1"/>
-            </a:fontRef>
-          </p:style>
-          <p:txBody>
-            <a:bodyPr/>
-            <a:lstStyle/>
-            <a:p>
-              <a:endParaRPr lang="en-US"/>
-            </a:p>
-          </p:txBody>
-        </p:sp>
-        <p:sp>
-          <p:nvSpPr>
-            <p:cNvPr id="24" name="Isosceles Triangle 23"/>
-            <p:cNvSpPr/>
-            <p:nvPr/>
-          </p:nvSpPr>
-          <p:spPr>
-            <a:xfrm>
-              <a:off x="8932333" y="3048000"/>
-              <a:ext cx="3259667" cy="3810000"/>
-            </a:xfrm>
-            <a:prstGeom prst="triangle">
-              <a:avLst>
-                <a:gd name="adj" fmla="val 100000"/>
-              </a:avLst>
-            </a:prstGeom>
-            <a:solidFill>
-              <a:schemeClr val="accent2">
-                <a:alpha val="72000"/>
-              </a:schemeClr>
-            </a:solidFill>
-            <a:ln>
-              <a:noFill/>
-            </a:ln>
-            <a:effectLst/>
-          </p:spPr>
-          <p:style>
-            <a:lnRef idx="1">
-              <a:schemeClr val="accent1"/>
-            </a:lnRef>
-            <a:fillRef idx="3">
-              <a:schemeClr val="accent1"/>
-            </a:fillRef>
-            <a:effectRef idx="2">
-              <a:schemeClr val="accent1"/>
-            </a:effectRef>
-            <a:fontRef idx="minor">
-              <a:schemeClr val="lt1"/>
-            </a:fontRef>
-          </p:style>
-          <p:txBody>
-            <a:bodyPr/>
-            <a:lstStyle/>
-            <a:p>
-              <a:endParaRPr lang="en-US"/>
-            </a:p>
-          </p:txBody>
-        </p:sp>
-        <p:sp>
-          <p:nvSpPr>
-            <p:cNvPr id="25" name="Rectangle 27"/>
-            <p:cNvSpPr/>
-            <p:nvPr/>
-          </p:nvSpPr>
-          <p:spPr>
-            <a:xfrm>
-              <a:off x="9334500" y="-8467"/>
-              <a:ext cx="2854326" cy="6866467"/>
-            </a:xfrm>
-            <a:custGeom>
-              <a:avLst/>
-              <a:gdLst/>
-              <a:ahLst/>
-              <a:cxnLst/>
-              <a:rect l="l" t="t" r="r" b="b"/>
-              <a:pathLst>
-                <a:path w="2858013" h="6866467">
-                  <a:moveTo>
-                    <a:pt x="0" y="0"/>
-                  </a:moveTo>
-                  <a:lnTo>
-                    <a:pt x="2858013" y="0"/>
-                  </a:lnTo>
-                  <a:lnTo>
-                    <a:pt x="2858013" y="6866467"/>
-                  </a:lnTo>
-                  <a:lnTo>
-                    <a:pt x="2473942" y="6866467"/>
-                  </a:lnTo>
-                  <a:lnTo>
-                    <a:pt x="0" y="0"/>
-                  </a:lnTo>
-                  <a:close/>
-                </a:path>
-              </a:pathLst>
-            </a:custGeom>
-            <a:solidFill>
-              <a:schemeClr val="accent2">
-                <a:lumMod val="75000"/>
-                <a:alpha val="70000"/>
-              </a:schemeClr>
-            </a:solidFill>
-            <a:ln>
-              <a:noFill/>
-            </a:ln>
-            <a:effectLst/>
-          </p:spPr>
-          <p:style>
-            <a:lnRef idx="1">
-              <a:schemeClr val="accent1"/>
-            </a:lnRef>
-            <a:fillRef idx="3">
-              <a:schemeClr val="accent1"/>
-            </a:fillRef>
-            <a:effectRef idx="2">
-              <a:schemeClr val="accent1"/>
-            </a:effectRef>
-            <a:fontRef idx="minor">
-              <a:schemeClr val="lt1"/>
-            </a:fontRef>
-          </p:style>
-          <p:txBody>
-            <a:bodyPr/>
-            <a:lstStyle/>
-            <a:p>
-              <a:endParaRPr lang="en-US"/>
-            </a:p>
-          </p:txBody>
-        </p:sp>
-        <p:sp>
-          <p:nvSpPr>
-            <p:cNvPr id="26" name="Rectangle 28"/>
-            <p:cNvSpPr/>
-            <p:nvPr/>
-          </p:nvSpPr>
-          <p:spPr>
-            <a:xfrm>
-              <a:off x="10898730" y="-8467"/>
-              <a:ext cx="1290094" cy="6866467"/>
-            </a:xfrm>
-            <a:custGeom>
-              <a:avLst/>
-              <a:gdLst/>
-              <a:ahLst/>
-              <a:cxnLst/>
-              <a:rect l="l" t="t" r="r" b="b"/>
-              <a:pathLst>
-                <a:path w="1290094" h="6858000">
-                  <a:moveTo>
-                    <a:pt x="1019735" y="0"/>
-                  </a:moveTo>
-                  <a:lnTo>
-                    <a:pt x="1290094" y="0"/>
-                  </a:lnTo>
-                  <a:lnTo>
-                    <a:pt x="1290094" y="6858000"/>
-                  </a:lnTo>
-                  <a:lnTo>
-                    <a:pt x="0" y="6858000"/>
-                  </a:lnTo>
-                  <a:lnTo>
-                    <a:pt x="1019735" y="0"/>
-                  </a:lnTo>
-                  <a:close/>
-                </a:path>
-              </a:pathLst>
-            </a:custGeom>
-            <a:solidFill>
-              <a:schemeClr val="accent1">
-                <a:lumMod val="60000"/>
-                <a:lumOff val="40000"/>
-                <a:alpha val="70000"/>
-              </a:schemeClr>
-            </a:solidFill>
-            <a:ln>
-              <a:noFill/>
-            </a:ln>
-            <a:effectLst/>
-          </p:spPr>
-          <p:style>
-            <a:lnRef idx="1">
-              <a:schemeClr val="accent1"/>
-            </a:lnRef>
-            <a:fillRef idx="3">
-              <a:schemeClr val="accent1"/>
-            </a:fillRef>
-            <a:effectRef idx="2">
-              <a:schemeClr val="accent1"/>
-            </a:effectRef>
-            <a:fontRef idx="minor">
-              <a:schemeClr val="lt1"/>
-            </a:fontRef>
-          </p:style>
-          <p:txBody>
-            <a:bodyPr/>
-            <a:lstStyle/>
-            <a:p>
-              <a:endParaRPr lang="en-US"/>
-            </a:p>
-          </p:txBody>
-        </p:sp>
-        <p:sp>
-          <p:nvSpPr>
-            <p:cNvPr id="27" name="Rectangle 29"/>
-            <p:cNvSpPr/>
-            <p:nvPr/>
-          </p:nvSpPr>
-          <p:spPr>
-            <a:xfrm>
-              <a:off x="10938999" y="-8467"/>
-              <a:ext cx="1249825" cy="6866467"/>
-            </a:xfrm>
-            <a:custGeom>
-              <a:avLst/>
-              <a:gdLst/>
-              <a:ahLst/>
-              <a:cxnLst/>
-              <a:rect l="l" t="t" r="r" b="b"/>
-              <a:pathLst>
-                <a:path w="1249825" h="6858000">
-                  <a:moveTo>
-                    <a:pt x="0" y="0"/>
-                  </a:moveTo>
-                  <a:lnTo>
-                    <a:pt x="1249825" y="0"/>
-                  </a:lnTo>
-                  <a:lnTo>
-                    <a:pt x="1249825" y="6858000"/>
-                  </a:lnTo>
-                  <a:lnTo>
-                    <a:pt x="1109382" y="6858000"/>
-                  </a:lnTo>
-                  <a:lnTo>
-                    <a:pt x="0" y="0"/>
-                  </a:lnTo>
-                  <a:close/>
-                </a:path>
-              </a:pathLst>
-            </a:custGeom>
-            <a:solidFill>
-              <a:schemeClr val="accent1">
-                <a:alpha val="65000"/>
-              </a:schemeClr>
-            </a:solidFill>
-            <a:ln>
-              <a:noFill/>
-            </a:ln>
-            <a:effectLst/>
-          </p:spPr>
-          <p:style>
-            <a:lnRef idx="1">
-              <a:schemeClr val="accent1"/>
-            </a:lnRef>
-            <a:fillRef idx="3">
-              <a:schemeClr val="accent1"/>
-            </a:fillRef>
-            <a:effectRef idx="2">
-              <a:schemeClr val="accent1"/>
-            </a:effectRef>
-            <a:fontRef idx="minor">
-              <a:schemeClr val="lt1"/>
-            </a:fontRef>
-          </p:style>
-          <p:txBody>
-            <a:bodyPr/>
-            <a:lstStyle/>
-            <a:p>
-              <a:endParaRPr lang="en-US"/>
-            </a:p>
-          </p:txBody>
-        </p:sp>
-        <p:sp>
-          <p:nvSpPr>
-            <p:cNvPr id="28" name="Isosceles Triangle 27"/>
-            <p:cNvSpPr/>
-            <p:nvPr/>
-          </p:nvSpPr>
-          <p:spPr>
-            <a:xfrm>
-              <a:off x="10371666" y="3589867"/>
-              <a:ext cx="1817159" cy="3268133"/>
-            </a:xfrm>
-            <a:prstGeom prst="triangle">
-              <a:avLst>
-                <a:gd name="adj" fmla="val 100000"/>
-              </a:avLst>
-            </a:prstGeom>
-            <a:solidFill>
-              <a:schemeClr val="accent1">
-                <a:alpha val="80000"/>
-              </a:schemeClr>
-            </a:solidFill>
-            <a:ln>
-              <a:noFill/>
-            </a:ln>
-            <a:effectLst/>
-          </p:spPr>
-          <p:style>
-            <a:lnRef idx="1">
-              <a:schemeClr val="accent1"/>
-            </a:lnRef>
-            <a:fillRef idx="3">
-              <a:schemeClr val="accent1"/>
-            </a:fillRef>
-            <a:effectRef idx="2">
-              <a:schemeClr val="accent1"/>
-            </a:effectRef>
-            <a:fontRef idx="minor">
-              <a:schemeClr val="lt1"/>
-            </a:fontRef>
-          </p:style>
-          <p:txBody>
-            <a:bodyPr/>
-            <a:lstStyle/>
-            <a:p>
-              <a:endParaRPr lang="en-US"/>
-            </a:p>
-          </p:txBody>
-        </p:sp>
-        <p:sp>
-          <p:nvSpPr>
-            <p:cNvPr id="29" name="Isosceles Triangle 28"/>
-            <p:cNvSpPr/>
-            <p:nvPr/>
-          </p:nvSpPr>
-          <p:spPr>
-            <a:xfrm>
-              <a:off x="0" y="4013200"/>
-              <a:ext cx="448733" cy="2844800"/>
-            </a:xfrm>
-            <a:prstGeom prst="triangle">
-              <a:avLst>
-                <a:gd name="adj" fmla="val 0"/>
-              </a:avLst>
-            </a:prstGeom>
-            <a:solidFill>
-              <a:schemeClr val="accent1">
-                <a:alpha val="85000"/>
-              </a:schemeClr>
-            </a:solidFill>
-            <a:ln>
-              <a:noFill/>
-            </a:ln>
-            <a:effectLst/>
-          </p:spPr>
-          <p:style>
-            <a:lnRef idx="1">
-              <a:schemeClr val="accent1"/>
-            </a:lnRef>
-            <a:fillRef idx="3">
-              <a:schemeClr val="accent1"/>
-            </a:fillRef>
-            <a:effectRef idx="2">
-              <a:schemeClr val="accent1"/>
-            </a:effectRef>
-            <a:fontRef idx="minor">
-              <a:schemeClr val="lt1"/>
-            </a:fontRef>
-          </p:style>
-          <p:txBody>
-            <a:bodyPr/>
-            <a:lstStyle/>
-            <a:p>
-              <a:endParaRPr lang="en-US"/>
-            </a:p>
-          </p:txBody>
-        </p:sp>
-      </p:grpSp>
       <p:sp>
         <p:nvSpPr>
           <p:cNvPr id="2" name="Title Placeholder 1"/>
@@ -7522,101 +7726,209 @@
         </p:nvSpPr>
         <p:spPr>
           <a:xfrm>
-            <a:off x="677334" y="609600"/>
-            <a:ext cx="8596668" cy="1320800"/>
+            <a:off x="913795" y="609600"/>
+            <a:ext cx="10353762" cy="970450"/>
+          </a:xfrm>
+          <a:prstGeom prst="rect">
+            <a:avLst/>
+          </a:prstGeom>
+          <a:effectLst>
+            <a:outerShdw blurRad="25400" dir="17880000">
+              <a:srgbClr val="000000">
+                <a:alpha val="46000"/>
+              </a:srgbClr>
+            </a:outerShdw>
+          </a:effectLst>
+        </p:spPr>
+        <p:txBody>
+          <a:bodyPr vert="horz" lIns="91440" tIns="45720" rIns="91440" bIns="45720" rtlCol="0" anchor="ctr">
+            <a:normAutofit/>
+          </a:bodyPr>
+          <a:lstStyle/>
+          <a:p>
+            <a:r>
+              <a:rPr lang="en-US"/>
+              <a:t>Click to edit Master title style</a:t>
+            </a:r>
+            <a:endParaRPr lang="en-US" dirty="0"/>
+          </a:p>
+        </p:txBody>
+      </p:sp>
+      <p:sp>
+        <p:nvSpPr>
+          <p:cNvPr id="3" name="Text Placeholder 2"/>
+          <p:cNvSpPr>
+            <a:spLocks noGrp="1"/>
+          </p:cNvSpPr>
+          <p:nvPr>
+            <p:ph type="body" idx="1"/>
+          </p:nvPr>
+        </p:nvSpPr>
+        <p:spPr>
+          <a:xfrm>
+            <a:off x="913795" y="1732449"/>
+            <a:ext cx="10353762" cy="4058751"/>
+          </a:xfrm>
+          <a:prstGeom prst="rect">
+            <a:avLst/>
+          </a:prstGeom>
+          <a:effectLst>
+            <a:outerShdw blurRad="25400" dir="17880000">
+              <a:srgbClr val="000000">
+                <a:alpha val="46000"/>
+              </a:srgbClr>
+            </a:outerShdw>
+          </a:effectLst>
+        </p:spPr>
+        <p:txBody>
+          <a:bodyPr vert="horz" lIns="91440" tIns="45720" rIns="91440" bIns="45720" rtlCol="0" anchor="t">
+            <a:normAutofit/>
+          </a:bodyPr>
+          <a:lstStyle/>
+          <a:p>
+            <a:pPr lvl="0"/>
+            <a:r>
+              <a:rPr lang="en-US"/>
+              <a:t>Click to edit Master text styles</a:t>
+            </a:r>
+          </a:p>
+          <a:p>
+            <a:pPr lvl="1"/>
+            <a:r>
+              <a:rPr lang="en-US"/>
+              <a:t>Second level</a:t>
+            </a:r>
+          </a:p>
+          <a:p>
+            <a:pPr lvl="2"/>
+            <a:r>
+              <a:rPr lang="en-US"/>
+              <a:t>Third level</a:t>
+            </a:r>
+          </a:p>
+          <a:p>
+            <a:pPr lvl="3"/>
+            <a:r>
+              <a:rPr lang="en-US"/>
+              <a:t>Fourth level</a:t>
+            </a:r>
+          </a:p>
+          <a:p>
+            <a:pPr lvl="4"/>
+            <a:r>
+              <a:rPr lang="en-US"/>
+              <a:t>Fifth level</a:t>
+            </a:r>
+            <a:endParaRPr lang="en-US" dirty="0"/>
+          </a:p>
+        </p:txBody>
+      </p:sp>
+      <p:sp>
+        <p:nvSpPr>
+          <p:cNvPr id="4" name="Date Placeholder 3"/>
+          <p:cNvSpPr>
+            <a:spLocks noGrp="1"/>
+          </p:cNvSpPr>
+          <p:nvPr>
+            <p:ph type="dt" sz="half" idx="2"/>
+          </p:nvPr>
+        </p:nvSpPr>
+        <p:spPr>
+          <a:xfrm>
+            <a:off x="7678736" y="5883275"/>
+            <a:ext cx="2743200" cy="365125"/>
           </a:xfrm>
           <a:prstGeom prst="rect">
             <a:avLst/>
           </a:prstGeom>
         </p:spPr>
         <p:txBody>
-          <a:bodyPr vert="horz" lIns="91440" tIns="45720" rIns="91440" bIns="45720" rtlCol="0" anchor="t">
-            <a:normAutofit/>
-          </a:bodyPr>
-          <a:lstStyle/>
-          <a:p>
-            <a:r>
-              <a:rPr lang="en-US"/>
-              <a:t>Click to edit Master title style</a:t>
-            </a:r>
-          </a:p>
-        </p:txBody>
-      </p:sp>
-      <p:sp>
-        <p:nvSpPr>
-          <p:cNvPr id="3" name="Text Placeholder 2"/>
-          <p:cNvSpPr>
-            <a:spLocks noGrp="1"/>
-          </p:cNvSpPr>
-          <p:nvPr>
-            <p:ph type="body" idx="1"/>
+          <a:bodyPr vert="horz" lIns="91440" tIns="45720" rIns="91440" bIns="45720" rtlCol="0" anchor="ctr"/>
+          <a:lstStyle>
+            <a:lvl1pPr algn="r">
+              <a:defRPr sz="1000">
+                <a:solidFill>
+                  <a:schemeClr val="tx1">
+                    <a:lumMod val="95000"/>
+                  </a:schemeClr>
+                </a:solidFill>
+                <a:effectLst>
+                  <a:outerShdw blurRad="50800" dist="38100" dir="2700000" algn="tl" rotWithShape="0">
+                    <a:schemeClr val="bg1">
+                      <a:alpha val="43000"/>
+                    </a:schemeClr>
+                  </a:outerShdw>
+                </a:effectLst>
+              </a:defRPr>
+            </a:lvl1pPr>
+          </a:lstStyle>
+          <a:p>
+            <a:fld id="{74411A3F-4DB3-47ED-809A-CD27B21BFB64}" type="datetimeFigureOut">
+              <a:rPr lang="en-US" smtClean="0"/>
+              <a:t>12/15/2025</a:t>
+            </a:fld>
+            <a:endParaRPr lang="en-US"/>
+          </a:p>
+        </p:txBody>
+      </p:sp>
+      <p:sp>
+        <p:nvSpPr>
+          <p:cNvPr id="5" name="Footer Placeholder 4"/>
+          <p:cNvSpPr>
+            <a:spLocks noGrp="1"/>
+          </p:cNvSpPr>
+          <p:nvPr>
+            <p:ph type="ftr" sz="quarter" idx="3"/>
           </p:nvPr>
         </p:nvSpPr>
         <p:spPr>
           <a:xfrm>
-            <a:off x="677334" y="2160589"/>
-            <a:ext cx="8596668" cy="3880773"/>
+            <a:off x="913795" y="5883275"/>
+            <a:ext cx="6672865" cy="365125"/>
           </a:xfrm>
           <a:prstGeom prst="rect">
             <a:avLst/>
           </a:prstGeom>
         </p:spPr>
         <p:txBody>
-          <a:bodyPr vert="horz" lIns="91440" tIns="45720" rIns="91440" bIns="45720" rtlCol="0">
-            <a:normAutofit/>
-          </a:bodyPr>
-          <a:lstStyle/>
-          <a:p>
-            <a:pPr lvl="0"/>
-            <a:r>
-              <a:rPr lang="en-US"/>
-              <a:t>Click to edit Master text styles</a:t>
-            </a:r>
-          </a:p>
-          <a:p>
-            <a:pPr lvl="1"/>
-            <a:r>
-              <a:rPr lang="en-US"/>
-              <a:t>Second level</a:t>
-            </a:r>
-          </a:p>
-          <a:p>
-            <a:pPr lvl="2"/>
-            <a:r>
-              <a:rPr lang="en-US"/>
-              <a:t>Third level</a:t>
-            </a:r>
-          </a:p>
-          <a:p>
-            <a:pPr lvl="3"/>
-            <a:r>
-              <a:rPr lang="en-US"/>
-              <a:t>Fourth level</a:t>
-            </a:r>
-          </a:p>
-          <a:p>
-            <a:pPr lvl="4"/>
-            <a:r>
-              <a:rPr lang="en-US"/>
-              <a:t>Fifth level</a:t>
-            </a:r>
-          </a:p>
-        </p:txBody>
-      </p:sp>
-      <p:sp>
-        <p:nvSpPr>
-          <p:cNvPr id="4" name="Date Placeholder 3"/>
-          <p:cNvSpPr>
-            <a:spLocks noGrp="1"/>
-          </p:cNvSpPr>
-          <p:nvPr>
-            <p:ph type="dt" sz="half" idx="2"/>
+          <a:bodyPr vert="horz" lIns="91440" tIns="45720" rIns="91440" bIns="45720" rtlCol="0" anchor="ctr"/>
+          <a:lstStyle>
+            <a:lvl1pPr algn="l">
+              <a:defRPr sz="1000">
+                <a:solidFill>
+                  <a:schemeClr val="tx1">
+                    <a:lumMod val="95000"/>
+                  </a:schemeClr>
+                </a:solidFill>
+                <a:effectLst>
+                  <a:outerShdw blurRad="50800" dist="38100" dir="2700000" algn="tl" rotWithShape="0">
+                    <a:schemeClr val="bg1">
+                      <a:alpha val="43000"/>
+                    </a:schemeClr>
+                  </a:outerShdw>
+                </a:effectLst>
+              </a:defRPr>
+            </a:lvl1pPr>
+          </a:lstStyle>
+          <a:p>
+            <a:endParaRPr lang="en-US"/>
+          </a:p>
+        </p:txBody>
+      </p:sp>
+      <p:sp>
+        <p:nvSpPr>
+          <p:cNvPr id="6" name="Slide Number Placeholder 5"/>
+          <p:cNvSpPr>
+            <a:spLocks noGrp="1"/>
+          </p:cNvSpPr>
+          <p:nvPr>
+            <p:ph type="sldNum" sz="quarter" idx="4"/>
           </p:nvPr>
         </p:nvSpPr>
         <p:spPr>
           <a:xfrm>
-            <a:off x="7205133" y="6041362"/>
-            <a:ext cx="911939" cy="365125"/>
+            <a:off x="10514011" y="5883275"/>
+            <a:ext cx="753545" cy="365125"/>
           </a:xfrm>
           <a:prstGeom prst="rect">
             <a:avLst/>
@@ -7626,88 +7938,19 @@
           <a:bodyPr vert="horz" lIns="91440" tIns="45720" rIns="91440" bIns="45720" rtlCol="0" anchor="ctr"/>
           <a:lstStyle>
             <a:lvl1pPr algn="r">
-              <a:defRPr sz="900">
+              <a:defRPr sz="1000">
                 <a:solidFill>
                   <a:schemeClr val="tx1">
-                    <a:tint val="75000"/>
+                    <a:lumMod val="95000"/>
                   </a:schemeClr>
                 </a:solidFill>
-              </a:defRPr>
-            </a:lvl1pPr>
-          </a:lstStyle>
-          <a:p>
-            <a:fld id="{74411A3F-4DB3-47ED-809A-CD27B21BFB64}" type="datetimeFigureOut">
-              <a:rPr lang="en-US" smtClean="0"/>
-              <a:t>12/14/2025</a:t>
-            </a:fld>
-            <a:endParaRPr lang="en-US"/>
-          </a:p>
-        </p:txBody>
-      </p:sp>
-      <p:sp>
-        <p:nvSpPr>
-          <p:cNvPr id="5" name="Footer Placeholder 4"/>
-          <p:cNvSpPr>
-            <a:spLocks noGrp="1"/>
-          </p:cNvSpPr>
-          <p:nvPr>
-            <p:ph type="ftr" sz="quarter" idx="3"/>
-          </p:nvPr>
-        </p:nvSpPr>
-        <p:spPr>
-          <a:xfrm>
-            <a:off x="677334" y="6041362"/>
-            <a:ext cx="6297612" cy="365125"/>
-          </a:xfrm>
-          <a:prstGeom prst="rect">
-            <a:avLst/>
-          </a:prstGeom>
-        </p:spPr>
-        <p:txBody>
-          <a:bodyPr vert="horz" lIns="91440" tIns="45720" rIns="91440" bIns="45720" rtlCol="0" anchor="ctr"/>
-          <a:lstStyle>
-            <a:lvl1pPr algn="l">
-              <a:defRPr sz="900">
-                <a:solidFill>
-                  <a:schemeClr val="tx1">
-                    <a:tint val="75000"/>
-                  </a:schemeClr>
-                </a:solidFill>
-              </a:defRPr>
-            </a:lvl1pPr>
-          </a:lstStyle>
-          <a:p>
-            <a:endParaRPr lang="en-US"/>
-          </a:p>
-        </p:txBody>
-      </p:sp>
-      <p:sp>
-        <p:nvSpPr>
-          <p:cNvPr id="6" name="Slide Number Placeholder 5"/>
-          <p:cNvSpPr>
-            <a:spLocks noGrp="1"/>
-          </p:cNvSpPr>
-          <p:nvPr>
-            <p:ph type="sldNum" sz="quarter" idx="4"/>
-          </p:nvPr>
-        </p:nvSpPr>
-        <p:spPr>
-          <a:xfrm>
-            <a:off x="8590663" y="6041362"/>
-            <a:ext cx="683339" cy="365125"/>
-          </a:xfrm>
-          <a:prstGeom prst="rect">
-            <a:avLst/>
-          </a:prstGeom>
-        </p:spPr>
-        <p:txBody>
-          <a:bodyPr vert="horz" lIns="91440" tIns="45720" rIns="91440" bIns="45720" rtlCol="0" anchor="ctr"/>
-          <a:lstStyle>
-            <a:lvl1pPr algn="r">
-              <a:defRPr sz="900">
-                <a:solidFill>
-                  <a:schemeClr val="accent1"/>
-                </a:solidFill>
+                <a:effectLst>
+                  <a:outerShdw blurRad="50800" dist="38100" dir="2700000" algn="tl" rotWithShape="0">
+                    <a:schemeClr val="bg1">
+                      <a:alpha val="43000"/>
+                    </a:schemeClr>
+                  </a:outerShdw>
+                </a:effectLst>
               </a:defRPr>
             </a:lvl1pPr>
           </a:lstStyle>
@@ -7723,43 +7966,60 @@
     </p:spTree>
     <p:extLst>
       <p:ext uri="{BB962C8B-B14F-4D97-AF65-F5344CB8AC3E}">
-        <p14:creationId xmlns:p14="http://schemas.microsoft.com/office/powerpoint/2010/main" val="2369051009"/>
+        <p14:creationId xmlns:p14="http://schemas.microsoft.com/office/powerpoint/2010/main" val="774656508"/>
       </p:ext>
     </p:extLst>
   </p:cSld>
-  <p:clrMap bg1="lt1" tx1="dk1" bg2="lt2" tx2="dk2" accent1="accent1" accent2="accent2" accent3="accent3" accent4="accent4" accent5="accent5" accent6="accent6" hlink="hlink" folHlink="folHlink"/>
+  <p:clrMap bg1="dk1" tx1="lt1" bg2="dk2" tx2="lt2" accent1="accent1" accent2="accent2" accent3="accent3" accent4="accent4" accent5="accent5" accent6="accent6" hlink="hlink" folHlink="folHlink"/>
   <p:sldLayoutIdLst>
-    <p:sldLayoutId id="2147483661" r:id="rId1"/>
-    <p:sldLayoutId id="2147483662" r:id="rId2"/>
-    <p:sldLayoutId id="2147483663" r:id="rId3"/>
-    <p:sldLayoutId id="2147483664" r:id="rId4"/>
-    <p:sldLayoutId id="2147483665" r:id="rId5"/>
-    <p:sldLayoutId id="2147483666" r:id="rId6"/>
-    <p:sldLayoutId id="2147483667" r:id="rId7"/>
-    <p:sldLayoutId id="2147483668" r:id="rId8"/>
-    <p:sldLayoutId id="2147483669" r:id="rId9"/>
-    <p:sldLayoutId id="2147483670" r:id="rId10"/>
-    <p:sldLayoutId id="2147483671" r:id="rId11"/>
-    <p:sldLayoutId id="2147483672" r:id="rId12"/>
-    <p:sldLayoutId id="2147483673" r:id="rId13"/>
-    <p:sldLayoutId id="2147483674" r:id="rId14"/>
-    <p:sldLayoutId id="2147483675" r:id="rId15"/>
-    <p:sldLayoutId id="2147483676" r:id="rId16"/>
+    <p:sldLayoutId id="2147483744" r:id="rId1"/>
+    <p:sldLayoutId id="2147483745" r:id="rId2"/>
+    <p:sldLayoutId id="2147483746" r:id="rId3"/>
+    <p:sldLayoutId id="2147483747" r:id="rId4"/>
+    <p:sldLayoutId id="2147483748" r:id="rId5"/>
+    <p:sldLayoutId id="2147483749" r:id="rId6"/>
+    <p:sldLayoutId id="2147483750" r:id="rId7"/>
+    <p:sldLayoutId id="2147483751" r:id="rId8"/>
+    <p:sldLayoutId id="2147483752" r:id="rId9"/>
+    <p:sldLayoutId id="2147483753" r:id="rId10"/>
+    <p:sldLayoutId id="2147483754" r:id="rId11"/>
+    <p:sldLayoutId id="2147483755" r:id="rId12"/>
+    <p:sldLayoutId id="2147483756" r:id="rId13"/>
+    <p:sldLayoutId id="2147483757" r:id="rId14"/>
+    <p:sldLayoutId id="2147483758" r:id="rId15"/>
+    <p:sldLayoutId id="2147483759" r:id="rId16"/>
+    <p:sldLayoutId id="2147483760" r:id="rId17"/>
   </p:sldLayoutIdLst>
   <p:txStyles>
     <p:titleStyle>
-      <a:lvl1pPr algn="l" defTabSz="457200" rtl="0" eaLnBrk="1" latinLnBrk="0" hangingPunct="1">
+      <a:lvl1pPr algn="ctr" defTabSz="457200" rtl="0" eaLnBrk="1" latinLnBrk="0" hangingPunct="1">
         <a:spcBef>
           <a:spcPct val="0"/>
         </a:spcBef>
         <a:buNone/>
-        <a:defRPr sz="3600" kern="1200">
+        <a:defRPr sz="4000" kern="1200">
+          <a:ln>
+            <a:solidFill>
+              <a:schemeClr val="bg1">
+                <a:lumMod val="75000"/>
+                <a:lumOff val="25000"/>
+                <a:alpha val="10000"/>
+              </a:schemeClr>
+            </a:solidFill>
+          </a:ln>
           <a:solidFill>
-            <a:schemeClr val="accent1"/>
+            <a:schemeClr val="tx2"/>
           </a:solidFill>
+          <a:effectLst>
+            <a:outerShdw blurRad="9525" dist="25400" dir="14640000" algn="tl" rotWithShape="0">
+              <a:schemeClr val="bg1">
+                <a:alpha val="30000"/>
+              </a:schemeClr>
+            </a:outerShdw>
+          </a:effectLst>
           <a:latin typeface="+mj-lt"/>
           <a:ea typeface="+mj-ea"/>
-          <a:cs typeface="+mj-cs"/>
+          <a:cs typeface="Trebuchet MS"/>
         </a:defRPr>
       </a:lvl1pPr>
       <a:lvl2pPr eaLnBrk="1" hangingPunct="1">
@@ -7820,226 +8080,343 @@
       </a:lvl9pPr>
     </p:titleStyle>
     <p:bodyStyle>
-      <a:lvl1pPr marL="342900" indent="-342900" algn="l" defTabSz="457200" rtl="0" eaLnBrk="1" latinLnBrk="0" hangingPunct="1">
+      <a:lvl1pPr marL="342900" indent="-306000" algn="l" defTabSz="457200" rtl="0" eaLnBrk="1" latinLnBrk="0" hangingPunct="1">
         <a:spcBef>
-          <a:spcPts val="1000"/>
+          <a:spcPct val="20000"/>
         </a:spcBef>
         <a:spcAft>
-          <a:spcPts val="0"/>
+          <a:spcPts val="600"/>
         </a:spcAft>
         <a:buClr>
-          <a:schemeClr val="accent1"/>
+          <a:schemeClr val="tx2"/>
         </a:buClr>
-        <a:buSzPct val="80000"/>
-        <a:buFont typeface="Wingdings 3" charset="2"/>
-        <a:buChar char=""/>
-        <a:defRPr sz="1800" kern="1200">
+        <a:buSzPct val="70000"/>
+        <a:buFont typeface="Wingdings 2" charset="2"/>
+        <a:buChar char=""/>
+        <a:defRPr sz="2000" kern="1200">
+          <a:ln>
+            <a:solidFill>
+              <a:schemeClr val="bg1">
+                <a:lumMod val="75000"/>
+                <a:lumOff val="25000"/>
+                <a:alpha val="10000"/>
+              </a:schemeClr>
+            </a:solidFill>
+          </a:ln>
           <a:solidFill>
-            <a:schemeClr val="tx1">
-              <a:lumMod val="75000"/>
-              <a:lumOff val="25000"/>
-            </a:schemeClr>
+            <a:schemeClr val="tx2"/>
           </a:solidFill>
+          <a:effectLst>
+            <a:outerShdw blurRad="9525" dist="25400" dir="14640000" algn="tl" rotWithShape="0">
+              <a:schemeClr val="bg1">
+                <a:alpha val="30000"/>
+              </a:schemeClr>
+            </a:outerShdw>
+          </a:effectLst>
           <a:latin typeface="+mn-lt"/>
           <a:ea typeface="+mn-ea"/>
           <a:cs typeface="+mn-cs"/>
         </a:defRPr>
       </a:lvl1pPr>
-      <a:lvl2pPr marL="742950" indent="-285750" algn="l" defTabSz="457200" rtl="0" eaLnBrk="1" latinLnBrk="0" hangingPunct="1">
+      <a:lvl2pPr marL="720000" indent="-270000" algn="l" defTabSz="457200" rtl="0" eaLnBrk="1" latinLnBrk="0" hangingPunct="1">
         <a:spcBef>
-          <a:spcPts val="1000"/>
+          <a:spcPct val="20000"/>
         </a:spcBef>
         <a:spcAft>
-          <a:spcPts val="0"/>
+          <a:spcPts val="600"/>
         </a:spcAft>
         <a:buClr>
-          <a:schemeClr val="accent1"/>
+          <a:schemeClr val="tx2"/>
         </a:buClr>
-        <a:buSzPct val="80000"/>
-        <a:buFont typeface="Wingdings 3" charset="2"/>
-        <a:buChar char=""/>
-        <a:defRPr sz="1600" kern="1200">
+        <a:buSzPct val="70000"/>
+        <a:buFont typeface="Wingdings 2" charset="2"/>
+        <a:buChar char=""/>
+        <a:defRPr sz="1800" kern="1200">
+          <a:ln>
+            <a:solidFill>
+              <a:schemeClr val="bg1">
+                <a:lumMod val="75000"/>
+                <a:lumOff val="25000"/>
+                <a:alpha val="10000"/>
+              </a:schemeClr>
+            </a:solidFill>
+          </a:ln>
           <a:solidFill>
-            <a:schemeClr val="tx1">
-              <a:lumMod val="75000"/>
-              <a:lumOff val="25000"/>
-            </a:schemeClr>
+            <a:schemeClr val="tx2"/>
           </a:solidFill>
+          <a:effectLst>
+            <a:outerShdw blurRad="9525" dist="25400" dir="14640000" algn="tl" rotWithShape="0">
+              <a:schemeClr val="bg1">
+                <a:alpha val="30000"/>
+              </a:schemeClr>
+            </a:outerShdw>
+          </a:effectLst>
           <a:latin typeface="+mn-lt"/>
           <a:ea typeface="+mn-ea"/>
           <a:cs typeface="+mn-cs"/>
         </a:defRPr>
       </a:lvl2pPr>
-      <a:lvl3pPr marL="1143000" indent="-228600" algn="l" defTabSz="457200" rtl="0" eaLnBrk="1" latinLnBrk="0" hangingPunct="1">
+      <a:lvl3pPr marL="1026000" indent="-216000" algn="l" defTabSz="457200" rtl="0" eaLnBrk="1" latinLnBrk="0" hangingPunct="1">
         <a:spcBef>
-          <a:spcPts val="1000"/>
+          <a:spcPct val="20000"/>
         </a:spcBef>
         <a:spcAft>
-          <a:spcPts val="0"/>
+          <a:spcPts val="600"/>
         </a:spcAft>
         <a:buClr>
-          <a:schemeClr val="accent1"/>
+          <a:schemeClr val="tx2"/>
         </a:buClr>
-        <a:buSzPct val="80000"/>
-        <a:buFont typeface="Wingdings 3" charset="2"/>
-        <a:buChar char=""/>
-        <a:defRPr sz="1400" kern="1200">
+        <a:buSzPct val="70000"/>
+        <a:buFont typeface="Wingdings 2" charset="2"/>
+        <a:buChar char=""/>
+        <a:defRPr sz="1600" kern="1200">
+          <a:ln>
+            <a:solidFill>
+              <a:schemeClr val="bg1">
+                <a:lumMod val="75000"/>
+                <a:lumOff val="25000"/>
+                <a:alpha val="10000"/>
+              </a:schemeClr>
+            </a:solidFill>
+          </a:ln>
           <a:solidFill>
-            <a:schemeClr val="tx1">
-              <a:lumMod val="75000"/>
-              <a:lumOff val="25000"/>
-            </a:schemeClr>
+            <a:schemeClr val="tx2"/>
           </a:solidFill>
+          <a:effectLst>
+            <a:outerShdw blurRad="9525" dist="25400" dir="14640000" algn="tl" rotWithShape="0">
+              <a:schemeClr val="bg1">
+                <a:alpha val="30000"/>
+              </a:schemeClr>
+            </a:outerShdw>
+          </a:effectLst>
           <a:latin typeface="+mn-lt"/>
           <a:ea typeface="+mn-ea"/>
           <a:cs typeface="+mn-cs"/>
         </a:defRPr>
       </a:lvl3pPr>
-      <a:lvl4pPr marL="1600200" indent="-228600" algn="l" defTabSz="457200" rtl="0" eaLnBrk="1" latinLnBrk="0" hangingPunct="1">
+      <a:lvl4pPr marL="1386000" indent="-216000" algn="l" defTabSz="457200" rtl="0" eaLnBrk="1" latinLnBrk="0" hangingPunct="1">
         <a:spcBef>
-          <a:spcPts val="1000"/>
+          <a:spcPct val="20000"/>
         </a:spcBef>
         <a:spcAft>
-          <a:spcPts val="0"/>
+          <a:spcPts val="600"/>
         </a:spcAft>
         <a:buClr>
-          <a:schemeClr val="accent1"/>
+          <a:schemeClr val="tx2"/>
         </a:buClr>
-        <a:buSzPct val="80000"/>
-        <a:buFont typeface="Wingdings 3" charset="2"/>
-        <a:buChar char=""/>
-        <a:defRPr sz="1200" kern="1200">
+        <a:buSzPct val="70000"/>
+        <a:buFont typeface="Wingdings 2" charset="2"/>
+        <a:buChar char=""/>
+        <a:defRPr sz="1400" kern="1200">
+          <a:ln>
+            <a:solidFill>
+              <a:schemeClr val="bg1">
+                <a:lumMod val="75000"/>
+                <a:lumOff val="25000"/>
+                <a:alpha val="10000"/>
+              </a:schemeClr>
+            </a:solidFill>
+          </a:ln>
           <a:solidFill>
-            <a:schemeClr val="tx1">
-              <a:lumMod val="75000"/>
-              <a:lumOff val="25000"/>
-            </a:schemeClr>
+            <a:schemeClr val="tx2"/>
           </a:solidFill>
+          <a:effectLst>
+            <a:outerShdw blurRad="9525" dist="25400" dir="14640000" algn="tl" rotWithShape="0">
+              <a:schemeClr val="bg1">
+                <a:alpha val="30000"/>
+              </a:schemeClr>
+            </a:outerShdw>
+          </a:effectLst>
           <a:latin typeface="+mn-lt"/>
           <a:ea typeface="+mn-ea"/>
           <a:cs typeface="+mn-cs"/>
         </a:defRPr>
       </a:lvl4pPr>
-      <a:lvl5pPr marL="2057400" indent="-228600" algn="l" defTabSz="457200" rtl="0" eaLnBrk="1" latinLnBrk="0" hangingPunct="1">
+      <a:lvl5pPr marL="1674000" indent="-216000" algn="l" defTabSz="457200" rtl="0" eaLnBrk="1" latinLnBrk="0" hangingPunct="1">
         <a:spcBef>
-          <a:spcPts val="1000"/>
+          <a:spcPct val="20000"/>
         </a:spcBef>
         <a:spcAft>
-          <a:spcPts val="0"/>
+          <a:spcPts val="600"/>
         </a:spcAft>
         <a:buClr>
-          <a:schemeClr val="accent1"/>
+          <a:schemeClr val="tx2"/>
         </a:buClr>
-        <a:buSzPct val="80000"/>
-        <a:buFont typeface="Wingdings 3" charset="2"/>
-        <a:buChar char=""/>
-        <a:defRPr sz="1200" kern="1200">
+        <a:buSzPct val="70000"/>
+        <a:buFont typeface="Wingdings 2" charset="2"/>
+        <a:buChar char=""/>
+        <a:defRPr sz="1400" kern="1200">
+          <a:ln>
+            <a:solidFill>
+              <a:schemeClr val="bg1">
+                <a:lumMod val="75000"/>
+                <a:lumOff val="25000"/>
+                <a:alpha val="10000"/>
+              </a:schemeClr>
+            </a:solidFill>
+          </a:ln>
           <a:solidFill>
-            <a:schemeClr val="tx1">
-              <a:lumMod val="75000"/>
-              <a:lumOff val="25000"/>
-            </a:schemeClr>
+            <a:schemeClr val="tx2"/>
           </a:solidFill>
+          <a:effectLst>
+            <a:outerShdw blurRad="9525" dist="25400" dir="14640000" algn="tl" rotWithShape="0">
+              <a:schemeClr val="bg1">
+                <a:alpha val="30000"/>
+              </a:schemeClr>
+            </a:outerShdw>
+          </a:effectLst>
           <a:latin typeface="+mn-lt"/>
           <a:ea typeface="+mn-ea"/>
           <a:cs typeface="+mn-cs"/>
         </a:defRPr>
       </a:lvl5pPr>
-      <a:lvl6pPr marL="2514600" indent="-228600" algn="l" defTabSz="457200" rtl="0" eaLnBrk="1" latinLnBrk="0" hangingPunct="1">
+      <a:lvl6pPr marL="2014600" indent="-228600" algn="l" defTabSz="457200" rtl="0" eaLnBrk="1" latinLnBrk="0" hangingPunct="1">
         <a:spcBef>
-          <a:spcPts val="1000"/>
+          <a:spcPct val="20000"/>
         </a:spcBef>
         <a:spcAft>
-          <a:spcPts val="0"/>
+          <a:spcPts val="600"/>
         </a:spcAft>
         <a:buClr>
-          <a:schemeClr val="accent1"/>
+          <a:schemeClr val="tx2"/>
         </a:buClr>
-        <a:buSzPct val="80000"/>
-        <a:buFont typeface="Wingdings 3" charset="2"/>
-        <a:buChar char=""/>
-        <a:defRPr sz="1200" kern="1200">
+        <a:buSzPct val="70000"/>
+        <a:buFont typeface="Wingdings 2" charset="2"/>
+        <a:buChar char=""/>
+        <a:defRPr sz="1400" kern="1200">
+          <a:ln>
+            <a:solidFill>
+              <a:schemeClr val="bg1">
+                <a:lumMod val="75000"/>
+                <a:lumOff val="25000"/>
+                <a:alpha val="10000"/>
+              </a:schemeClr>
+            </a:solidFill>
+          </a:ln>
           <a:solidFill>
-            <a:schemeClr val="tx1">
-              <a:lumMod val="75000"/>
-              <a:lumOff val="25000"/>
-            </a:schemeClr>
+            <a:schemeClr val="tx2"/>
           </a:solidFill>
+          <a:effectLst>
+            <a:outerShdw blurRad="9525" dist="25400" dir="14640000" algn="tl" rotWithShape="0">
+              <a:schemeClr val="bg1">
+                <a:alpha val="30000"/>
+              </a:schemeClr>
+            </a:outerShdw>
+          </a:effectLst>
           <a:latin typeface="+mn-lt"/>
           <a:ea typeface="+mn-ea"/>
           <a:cs typeface="+mn-cs"/>
         </a:defRPr>
       </a:lvl6pPr>
-      <a:lvl7pPr marL="2971800" indent="-228600" algn="l" defTabSz="457200" rtl="0" eaLnBrk="1" latinLnBrk="0" hangingPunct="1">
+      <a:lvl7pPr marL="2401800" indent="-228600" algn="l" defTabSz="457200" rtl="0" eaLnBrk="1" latinLnBrk="0" hangingPunct="1">
         <a:spcBef>
-          <a:spcPts val="1000"/>
+          <a:spcPct val="20000"/>
         </a:spcBef>
         <a:spcAft>
-          <a:spcPts val="0"/>
+          <a:spcPts val="600"/>
         </a:spcAft>
         <a:buClr>
-          <a:schemeClr val="accent1"/>
+          <a:schemeClr val="tx2"/>
         </a:buClr>
-        <a:buSzPct val="80000"/>
-        <a:buFont typeface="Wingdings 3" charset="2"/>
-        <a:buChar char=""/>
-        <a:defRPr sz="1200" kern="1200">
+        <a:buSzPct val="70000"/>
+        <a:buFont typeface="Wingdings 2" charset="2"/>
+        <a:buChar char=""/>
+        <a:defRPr sz="1400" kern="1200">
+          <a:ln>
+            <a:solidFill>
+              <a:schemeClr val="bg1">
+                <a:lumMod val="75000"/>
+                <a:lumOff val="25000"/>
+                <a:alpha val="10000"/>
+              </a:schemeClr>
+            </a:solidFill>
+          </a:ln>
           <a:solidFill>
-            <a:schemeClr val="tx1">
-              <a:lumMod val="75000"/>
-              <a:lumOff val="25000"/>
-            </a:schemeClr>
+            <a:schemeClr val="tx2"/>
           </a:solidFill>
+          <a:effectLst>
+            <a:outerShdw blurRad="9525" dist="25400" dir="14640000" algn="tl" rotWithShape="0">
+              <a:schemeClr val="bg1">
+                <a:alpha val="30000"/>
+              </a:schemeClr>
+            </a:outerShdw>
+          </a:effectLst>
           <a:latin typeface="+mn-lt"/>
           <a:ea typeface="+mn-ea"/>
           <a:cs typeface="+mn-cs"/>
         </a:defRPr>
       </a:lvl7pPr>
-      <a:lvl8pPr marL="3429000" indent="-228600" algn="l" defTabSz="457200" rtl="0" eaLnBrk="1" latinLnBrk="0" hangingPunct="1">
+      <a:lvl8pPr marL="2789000" indent="-228600" algn="l" defTabSz="457200" rtl="0" eaLnBrk="1" latinLnBrk="0" hangingPunct="1">
         <a:spcBef>
-          <a:spcPts val="1000"/>
+          <a:spcPct val="20000"/>
         </a:spcBef>
         <a:spcAft>
-          <a:spcPts val="0"/>
+          <a:spcPts val="600"/>
         </a:spcAft>
         <a:buClr>
-          <a:schemeClr val="accent1"/>
+          <a:schemeClr val="tx2"/>
         </a:buClr>
-        <a:buSzPct val="80000"/>
-        <a:buFont typeface="Wingdings 3" charset="2"/>
-        <a:buChar char=""/>
-        <a:defRPr sz="1200" kern="1200">
+        <a:buSzPct val="70000"/>
+        <a:buFont typeface="Wingdings 2" charset="2"/>
+        <a:buChar char=""/>
+        <a:defRPr sz="1400" kern="1200">
+          <a:ln>
+            <a:solidFill>
+              <a:schemeClr val="bg1">
+                <a:lumMod val="75000"/>
+                <a:lumOff val="25000"/>
+                <a:alpha val="10000"/>
+              </a:schemeClr>
+            </a:solidFill>
+          </a:ln>
           <a:solidFill>
-            <a:schemeClr val="tx1">
-              <a:lumMod val="75000"/>
-              <a:lumOff val="25000"/>
-            </a:schemeClr>
+            <a:schemeClr val="tx2"/>
           </a:solidFill>
+          <a:effectLst>
+            <a:outerShdw blurRad="9525" dist="25400" dir="14640000" algn="tl" rotWithShape="0">
+              <a:schemeClr val="bg1">
+                <a:alpha val="30000"/>
+              </a:schemeClr>
+            </a:outerShdw>
+          </a:effectLst>
           <a:latin typeface="+mn-lt"/>
           <a:ea typeface="+mn-ea"/>
           <a:cs typeface="+mn-cs"/>
         </a:defRPr>
       </a:lvl8pPr>
-      <a:lvl9pPr marL="3886200" indent="-228600" algn="l" defTabSz="457200" rtl="0" eaLnBrk="1" latinLnBrk="0" hangingPunct="1">
+      <a:lvl9pPr marL="3106200" indent="-228600" algn="l" defTabSz="457200" rtl="0" eaLnBrk="1" latinLnBrk="0" hangingPunct="1">
         <a:spcBef>
-          <a:spcPts val="1000"/>
+          <a:spcPct val="20000"/>
         </a:spcBef>
         <a:spcAft>
-          <a:spcPts val="0"/>
+          <a:spcPts val="600"/>
         </a:spcAft>
         <a:buClr>
-          <a:schemeClr val="accent1"/>
+          <a:schemeClr val="tx2"/>
         </a:buClr>
-        <a:buSzPct val="80000"/>
-        <a:buFont typeface="Wingdings 3" charset="2"/>
-        <a:buChar char=""/>
-        <a:defRPr sz="1200" kern="1200">
+        <a:buSzPct val="70000"/>
+        <a:buFont typeface="Wingdings 2" charset="2"/>
+        <a:buChar char=""/>
+        <a:defRPr sz="1400" kern="1200">
+          <a:ln>
+            <a:solidFill>
+              <a:schemeClr val="bg1">
+                <a:lumMod val="75000"/>
+                <a:lumOff val="25000"/>
+                <a:alpha val="10000"/>
+              </a:schemeClr>
+            </a:solidFill>
+          </a:ln>
           <a:solidFill>
-            <a:schemeClr val="tx1">
-              <a:lumMod val="75000"/>
-              <a:lumOff val="25000"/>
-            </a:schemeClr>
+            <a:schemeClr val="tx2"/>
           </a:solidFill>
+          <a:effectLst>
+            <a:outerShdw blurRad="9525" dist="25400" dir="14640000" algn="tl" rotWithShape="0">
+              <a:schemeClr val="bg1">
+                <a:alpha val="30000"/>
+              </a:schemeClr>
+            </a:outerShdw>
+          </a:effectLst>
           <a:latin typeface="+mn-lt"/>
           <a:ea typeface="+mn-ea"/>
           <a:cs typeface="+mn-cs"/>
@@ -8185,13 +8562,50 @@
           </a:xfrm>
         </p:spPr>
         <p:txBody>
-          <a:bodyPr/>
+          <a:bodyPr>
+            <a:normAutofit fontScale="90000"/>
+          </a:bodyPr>
           <a:lstStyle/>
           <a:p>
             <a:pPr algn="ctr"/>
             <a:r>
-              <a:rPr lang="en-US"/>
+              <a:rPr lang="en-US" dirty="0"/>
               <a:t>Customer Retention Analysis</a:t>
+            </a:r>
+          </a:p>
+        </p:txBody>
+      </p:sp>
+      <p:sp>
+        <p:nvSpPr>
+          <p:cNvPr id="3" name="TextBox 2">
+            <a:extLst>
+              <a:ext uri="{FF2B5EF4-FFF2-40B4-BE49-F238E27FC236}">
+                <a16:creationId xmlns:a16="http://schemas.microsoft.com/office/drawing/2014/main" id="{CE407946-C4CB-8B60-36BF-8DAD28B0824C}"/>
+              </a:ext>
+            </a:extLst>
+          </p:cNvPr>
+          <p:cNvSpPr txBox="1"/>
+          <p:nvPr/>
+        </p:nvSpPr>
+        <p:spPr>
+          <a:xfrm>
+            <a:off x="627080" y="6076336"/>
+            <a:ext cx="1759974" cy="369332"/>
+          </a:xfrm>
+          <a:prstGeom prst="rect">
+            <a:avLst/>
+          </a:prstGeom>
+          <a:noFill/>
+        </p:spPr>
+        <p:txBody>
+          <a:bodyPr wrap="square" rtlCol="0">
+            <a:spAutoFit/>
+          </a:bodyPr>
+          <a:lstStyle/>
+          <a:p>
+            <a:r>
+              <a:rPr lang="en-US" dirty="0"/>
+              <a:t>By Henry Vo</a:t>
             </a:r>
           </a:p>
         </p:txBody>
@@ -9377,10 +9791,10 @@
       </p:grpSpPr>
       <p:sp>
         <p:nvSpPr>
-          <p:cNvPr id="2" name="Title 1">
+          <p:cNvPr id="9" name="Title 1">
             <a:extLst>
               <a:ext uri="{FF2B5EF4-FFF2-40B4-BE49-F238E27FC236}">
-                <a16:creationId xmlns:a16="http://schemas.microsoft.com/office/drawing/2014/main" id="{C25EEB97-A683-1B60-28CE-C085CD9548B0}"/>
+                <a16:creationId xmlns:a16="http://schemas.microsoft.com/office/drawing/2014/main" id="{8662D2DB-45BE-4561-C692-DA85293F1E52}"/>
               </a:ext>
             </a:extLst>
           </p:cNvPr>
@@ -9391,40 +9805,225 @@
             <p:ph type="title"/>
           </p:nvPr>
         </p:nvSpPr>
-        <p:spPr/>
-        <p:txBody>
-          <a:bodyPr/>
+        <p:spPr>
+          <a:xfrm>
+            <a:off x="126728" y="151103"/>
+            <a:ext cx="4917220" cy="891116"/>
+          </a:xfrm>
+        </p:spPr>
+        <p:txBody>
+          <a:bodyPr>
+            <a:noAutofit/>
+          </a:bodyPr>
           <a:lstStyle/>
           <a:p>
-            <a:endParaRPr lang="en-US"/>
-          </a:p>
-        </p:txBody>
-      </p:sp>
-      <p:sp>
-        <p:nvSpPr>
-          <p:cNvPr id="3" name="Content Placeholder 2">
+            <a:r>
+              <a:rPr lang="en-US" sz="2400" dirty="0"/>
+              <a:t>Top 15 Highest Churn Score Customers</a:t>
+            </a:r>
+          </a:p>
+        </p:txBody>
+      </p:sp>
+      <p:sp>
+        <p:nvSpPr>
+          <p:cNvPr id="10" name="TextBox 9">
             <a:extLst>
               <a:ext uri="{FF2B5EF4-FFF2-40B4-BE49-F238E27FC236}">
-                <a16:creationId xmlns:a16="http://schemas.microsoft.com/office/drawing/2014/main" id="{08F07BE0-530E-DBC5-0506-8821B3863CCE}"/>
+                <a16:creationId xmlns:a16="http://schemas.microsoft.com/office/drawing/2014/main" id="{96CEF7AF-6F29-5A7A-BCAF-EC122AAAB7F6}"/>
               </a:ext>
             </a:extLst>
           </p:cNvPr>
-          <p:cNvSpPr>
-            <a:spLocks noGrp="1"/>
-          </p:cNvSpPr>
-          <p:nvPr>
-            <p:ph idx="1"/>
-          </p:nvPr>
-        </p:nvSpPr>
-        <p:spPr/>
-        <p:txBody>
-          <a:bodyPr/>
+          <p:cNvSpPr txBox="1"/>
+          <p:nvPr/>
+        </p:nvSpPr>
+        <p:spPr>
+          <a:xfrm>
+            <a:off x="187397" y="2384346"/>
+            <a:ext cx="4795882" cy="1200329"/>
+          </a:xfrm>
+          <a:prstGeom prst="rect">
+            <a:avLst/>
+          </a:prstGeom>
+          <a:noFill/>
+        </p:spPr>
+        <p:txBody>
+          <a:bodyPr wrap="square" rtlCol="0">
+            <a:spAutoFit/>
+          </a:bodyPr>
           <a:lstStyle/>
           <a:p>
-            <a:endParaRPr lang="en-US" dirty="0"/>
-          </a:p>
-        </p:txBody>
-      </p:sp>
+            <a:pPr algn="ctr"/>
+            <a:r>
+              <a:rPr lang="en-US" dirty="0"/>
+              <a:t>These customers present a clear opportunity for focused retention outreach by representing the highest near-term churn risk</a:t>
+            </a:r>
+          </a:p>
+        </p:txBody>
+      </p:sp>
+      <p:sp>
+        <p:nvSpPr>
+          <p:cNvPr id="21" name="TextBox 20">
+            <a:extLst>
+              <a:ext uri="{FF2B5EF4-FFF2-40B4-BE49-F238E27FC236}">
+                <a16:creationId xmlns:a16="http://schemas.microsoft.com/office/drawing/2014/main" id="{E4343AA8-350A-43A4-2DD6-46742022C8B9}"/>
+              </a:ext>
+            </a:extLst>
+          </p:cNvPr>
+          <p:cNvSpPr txBox="1"/>
+          <p:nvPr/>
+        </p:nvSpPr>
+        <p:spPr>
+          <a:xfrm>
+            <a:off x="126728" y="4624153"/>
+            <a:ext cx="4917220" cy="923330"/>
+          </a:xfrm>
+          <a:prstGeom prst="rect">
+            <a:avLst/>
+          </a:prstGeom>
+          <a:noFill/>
+        </p:spPr>
+        <p:txBody>
+          <a:bodyPr wrap="square" rtlCol="0">
+            <a:spAutoFit/>
+          </a:bodyPr>
+          <a:lstStyle/>
+          <a:p>
+            <a:pPr algn="ctr"/>
+            <a:r>
+              <a:rPr lang="en-US" dirty="0"/>
+              <a:t>Highest risk customers are concentrated in “Lost” and “At-Risk High Value” customer segments</a:t>
+            </a:r>
+          </a:p>
+        </p:txBody>
+      </p:sp>
+      <p:grpSp>
+        <p:nvGrpSpPr>
+          <p:cNvPr id="23" name="Group 22">
+            <a:extLst>
+              <a:ext uri="{FF2B5EF4-FFF2-40B4-BE49-F238E27FC236}">
+                <a16:creationId xmlns:a16="http://schemas.microsoft.com/office/drawing/2014/main" id="{7FFC5566-F06D-4F99-D24F-FCF027ED4D94}"/>
+              </a:ext>
+            </a:extLst>
+          </p:cNvPr>
+          <p:cNvGrpSpPr/>
+          <p:nvPr/>
+        </p:nvGrpSpPr>
+        <p:grpSpPr>
+          <a:xfrm>
+            <a:off x="4983279" y="1920847"/>
+            <a:ext cx="6744930" cy="3853987"/>
+            <a:chOff x="4983279" y="1920847"/>
+            <a:chExt cx="6744930" cy="3853987"/>
+          </a:xfrm>
+        </p:grpSpPr>
+        <p:pic>
+          <p:nvPicPr>
+            <p:cNvPr id="18" name="Picture 17" descr="A graph of a bar chart&#10;&#10;AI-generated content may be incorrect.">
+              <a:extLst>
+                <a:ext uri="{FF2B5EF4-FFF2-40B4-BE49-F238E27FC236}">
+                  <a16:creationId xmlns:a16="http://schemas.microsoft.com/office/drawing/2014/main" id="{550DEA39-8CD8-88CA-D507-40D6F7FEFA54}"/>
+                </a:ext>
+              </a:extLst>
+            </p:cNvPr>
+            <p:cNvPicPr>
+              <a:picLocks noChangeAspect="1"/>
+            </p:cNvPicPr>
+            <p:nvPr/>
+          </p:nvPicPr>
+          <p:blipFill>
+            <a:blip r:embed="rId2"/>
+            <a:srcRect t="4956"/>
+            <a:stretch>
+              <a:fillRect/>
+            </a:stretch>
+          </p:blipFill>
+          <p:spPr>
+            <a:xfrm>
+              <a:off x="4983279" y="1920847"/>
+              <a:ext cx="6744930" cy="3626636"/>
+            </a:xfrm>
+            <a:prstGeom prst="rect">
+              <a:avLst/>
+            </a:prstGeom>
+          </p:spPr>
+        </p:pic>
+        <p:pic>
+          <p:nvPicPr>
+            <p:cNvPr id="20" name="Picture 19" descr="A screenshot of a computer&#10;&#10;AI-generated content may be incorrect.">
+              <a:extLst>
+                <a:ext uri="{FF2B5EF4-FFF2-40B4-BE49-F238E27FC236}">
+                  <a16:creationId xmlns:a16="http://schemas.microsoft.com/office/drawing/2014/main" id="{C878D4C1-C2A3-9B5E-687A-6A95AC47D582}"/>
+                </a:ext>
+              </a:extLst>
+            </p:cNvPr>
+            <p:cNvPicPr>
+              <a:picLocks noChangeAspect="1"/>
+            </p:cNvPicPr>
+            <p:nvPr/>
+          </p:nvPicPr>
+          <p:blipFill>
+            <a:blip r:embed="rId3"/>
+            <a:srcRect l="2468" t="9453"/>
+            <a:stretch>
+              <a:fillRect/>
+            </a:stretch>
+          </p:blipFill>
+          <p:spPr>
+            <a:xfrm>
+              <a:off x="10315950" y="1920847"/>
+              <a:ext cx="1412259" cy="603808"/>
+            </a:xfrm>
+            <a:prstGeom prst="rect">
+              <a:avLst/>
+            </a:prstGeom>
+          </p:spPr>
+        </p:pic>
+        <p:sp>
+          <p:nvSpPr>
+            <p:cNvPr id="22" name="TextBox 21">
+              <a:extLst>
+                <a:ext uri="{FF2B5EF4-FFF2-40B4-BE49-F238E27FC236}">
+                  <a16:creationId xmlns:a16="http://schemas.microsoft.com/office/drawing/2014/main" id="{9D2886ED-69E5-A58C-80E7-8ED978B8B5A8}"/>
+                </a:ext>
+              </a:extLst>
+            </p:cNvPr>
+            <p:cNvSpPr txBox="1"/>
+            <p:nvPr/>
+          </p:nvSpPr>
+          <p:spPr>
+            <a:xfrm>
+              <a:off x="4983279" y="5513224"/>
+              <a:ext cx="6744930" cy="261610"/>
+            </a:xfrm>
+            <a:prstGeom prst="rect">
+              <a:avLst/>
+            </a:prstGeom>
+            <a:solidFill>
+              <a:schemeClr val="tx1"/>
+            </a:solidFill>
+            <a:ln>
+              <a:noFill/>
+            </a:ln>
+          </p:spPr>
+          <p:txBody>
+            <a:bodyPr wrap="square" rtlCol="0">
+              <a:spAutoFit/>
+            </a:bodyPr>
+            <a:lstStyle/>
+            <a:p>
+              <a:pPr algn="ctr"/>
+              <a:r>
+                <a:rPr lang="en-US" sz="1050" dirty="0">
+                  <a:solidFill>
+                    <a:schemeClr val="bg1"/>
+                  </a:solidFill>
+                </a:rPr>
+                <a:t>Customer ID</a:t>
+              </a:r>
+            </a:p>
+          </p:txBody>
+        </p:sp>
+      </p:grpSp>
     </p:spTree>
     <p:extLst>
       <p:ext uri="{BB962C8B-B14F-4D97-AF65-F5344CB8AC3E}">
@@ -9438,10 +10037,398 @@
 </p:sld>
 </file>
 
+<file path=ppt/slides/slide8.xml><?xml version="1.0" encoding="utf-8"?>
+<p:sld xmlns:a="http://schemas.openxmlformats.org/drawingml/2006/main" xmlns:r="http://schemas.openxmlformats.org/officeDocument/2006/relationships" xmlns:p="http://schemas.openxmlformats.org/presentationml/2006/main">
+  <p:cSld>
+    <p:spTree>
+      <p:nvGrpSpPr>
+        <p:cNvPr id="1" name=""/>
+        <p:cNvGrpSpPr/>
+        <p:nvPr/>
+      </p:nvGrpSpPr>
+      <p:grpSpPr>
+        <a:xfrm>
+          <a:off x="0" y="0"/>
+          <a:ext cx="0" cy="0"/>
+          <a:chOff x="0" y="0"/>
+          <a:chExt cx="0" cy="0"/>
+        </a:xfrm>
+      </p:grpSpPr>
+      <p:sp>
+        <p:nvSpPr>
+          <p:cNvPr id="4" name="Title 1">
+            <a:extLst>
+              <a:ext uri="{FF2B5EF4-FFF2-40B4-BE49-F238E27FC236}">
+                <a16:creationId xmlns:a16="http://schemas.microsoft.com/office/drawing/2014/main" id="{A1941F0A-540A-DFB1-12F4-A44E2508BAA4}"/>
+              </a:ext>
+            </a:extLst>
+          </p:cNvPr>
+          <p:cNvSpPr>
+            <a:spLocks noGrp="1"/>
+          </p:cNvSpPr>
+          <p:nvPr>
+            <p:ph type="title"/>
+          </p:nvPr>
+        </p:nvSpPr>
+        <p:spPr>
+          <a:xfrm>
+            <a:off x="126728" y="151103"/>
+            <a:ext cx="4917220" cy="891116"/>
+          </a:xfrm>
+        </p:spPr>
+        <p:txBody>
+          <a:bodyPr>
+            <a:noAutofit/>
+          </a:bodyPr>
+          <a:lstStyle/>
+          <a:p>
+            <a:r>
+              <a:rPr lang="en-US" sz="2400" dirty="0"/>
+              <a:t>Recommendations</a:t>
+            </a:r>
+          </a:p>
+        </p:txBody>
+      </p:sp>
+      <p:sp>
+        <p:nvSpPr>
+          <p:cNvPr id="7" name="TextBox 6">
+            <a:extLst>
+              <a:ext uri="{FF2B5EF4-FFF2-40B4-BE49-F238E27FC236}">
+                <a16:creationId xmlns:a16="http://schemas.microsoft.com/office/drawing/2014/main" id="{8BBCFF16-94ED-75DF-2802-91E1D291C33A}"/>
+              </a:ext>
+            </a:extLst>
+          </p:cNvPr>
+          <p:cNvSpPr txBox="1"/>
+          <p:nvPr/>
+        </p:nvSpPr>
+        <p:spPr>
+          <a:xfrm flipH="1">
+            <a:off x="2163101" y="1042219"/>
+            <a:ext cx="1101213" cy="369332"/>
+          </a:xfrm>
+          <a:prstGeom prst="rect">
+            <a:avLst/>
+          </a:prstGeom>
+          <a:noFill/>
+        </p:spPr>
+        <p:txBody>
+          <a:bodyPr wrap="square" rtlCol="0">
+            <a:spAutoFit/>
+          </a:bodyPr>
+          <a:lstStyle/>
+          <a:p>
+            <a:r>
+              <a:rPr lang="en-US" dirty="0"/>
+              <a:t>Segment</a:t>
+            </a:r>
+          </a:p>
+        </p:txBody>
+      </p:sp>
+      <p:sp>
+        <p:nvSpPr>
+          <p:cNvPr id="8" name="TextBox 7">
+            <a:extLst>
+              <a:ext uri="{FF2B5EF4-FFF2-40B4-BE49-F238E27FC236}">
+                <a16:creationId xmlns:a16="http://schemas.microsoft.com/office/drawing/2014/main" id="{760A639C-DA42-C084-100A-BA995FABC5C5}"/>
+              </a:ext>
+            </a:extLst>
+          </p:cNvPr>
+          <p:cNvSpPr txBox="1"/>
+          <p:nvPr/>
+        </p:nvSpPr>
+        <p:spPr>
+          <a:xfrm flipH="1">
+            <a:off x="8293508" y="1042219"/>
+            <a:ext cx="2443315" cy="369332"/>
+          </a:xfrm>
+          <a:prstGeom prst="rect">
+            <a:avLst/>
+          </a:prstGeom>
+          <a:noFill/>
+        </p:spPr>
+        <p:txBody>
+          <a:bodyPr wrap="square" rtlCol="0">
+            <a:spAutoFit/>
+          </a:bodyPr>
+          <a:lstStyle/>
+          <a:p>
+            <a:r>
+              <a:rPr lang="en-US" dirty="0"/>
+              <a:t>Recommended Action</a:t>
+            </a:r>
+          </a:p>
+        </p:txBody>
+      </p:sp>
+      <p:cxnSp>
+        <p:nvCxnSpPr>
+          <p:cNvPr id="12" name="Straight Connector 11">
+            <a:extLst>
+              <a:ext uri="{FF2B5EF4-FFF2-40B4-BE49-F238E27FC236}">
+                <a16:creationId xmlns:a16="http://schemas.microsoft.com/office/drawing/2014/main" id="{6A78AD94-558E-4320-7A8B-1491AAEEA1B0}"/>
+              </a:ext>
+            </a:extLst>
+          </p:cNvPr>
+          <p:cNvCxnSpPr>
+            <a:cxnSpLocks/>
+          </p:cNvCxnSpPr>
+          <p:nvPr/>
+        </p:nvCxnSpPr>
+        <p:spPr>
+          <a:xfrm flipV="1">
+            <a:off x="6096000" y="1042219"/>
+            <a:ext cx="0" cy="5509684"/>
+          </a:xfrm>
+          <a:prstGeom prst="line">
+            <a:avLst/>
+          </a:prstGeom>
+          <a:ln w="28575"/>
+        </p:spPr>
+        <p:style>
+          <a:lnRef idx="1">
+            <a:schemeClr val="accent1"/>
+          </a:lnRef>
+          <a:fillRef idx="0">
+            <a:schemeClr val="accent1"/>
+          </a:fillRef>
+          <a:effectRef idx="0">
+            <a:schemeClr val="accent1"/>
+          </a:effectRef>
+          <a:fontRef idx="minor">
+            <a:schemeClr val="tx1"/>
+          </a:fontRef>
+        </p:style>
+      </p:cxnSp>
+      <p:sp>
+        <p:nvSpPr>
+          <p:cNvPr id="16" name="TextBox 15">
+            <a:extLst>
+              <a:ext uri="{FF2B5EF4-FFF2-40B4-BE49-F238E27FC236}">
+                <a16:creationId xmlns:a16="http://schemas.microsoft.com/office/drawing/2014/main" id="{D84DBEFF-5B15-C7AB-D8A8-28520C6632DD}"/>
+              </a:ext>
+            </a:extLst>
+          </p:cNvPr>
+          <p:cNvSpPr txBox="1"/>
+          <p:nvPr/>
+        </p:nvSpPr>
+        <p:spPr>
+          <a:xfrm>
+            <a:off x="7790832" y="1748669"/>
+            <a:ext cx="3448665" cy="923330"/>
+          </a:xfrm>
+          <a:prstGeom prst="rect">
+            <a:avLst/>
+          </a:prstGeom>
+          <a:noFill/>
+        </p:spPr>
+        <p:txBody>
+          <a:bodyPr wrap="square" rtlCol="0">
+            <a:spAutoFit/>
+          </a:bodyPr>
+          <a:lstStyle/>
+          <a:p>
+            <a:pPr algn="ctr"/>
+            <a:r>
+              <a:rPr lang="en-US" dirty="0"/>
+              <a:t>Loyalty Rewards and early access to maintain strong customer loyalty</a:t>
+            </a:r>
+          </a:p>
+        </p:txBody>
+      </p:sp>
+      <p:sp>
+        <p:nvSpPr>
+          <p:cNvPr id="17" name="TextBox 16">
+            <a:extLst>
+              <a:ext uri="{FF2B5EF4-FFF2-40B4-BE49-F238E27FC236}">
+                <a16:creationId xmlns:a16="http://schemas.microsoft.com/office/drawing/2014/main" id="{E5F98863-FBBB-852D-CFF4-A9964EF562D0}"/>
+              </a:ext>
+            </a:extLst>
+          </p:cNvPr>
+          <p:cNvSpPr txBox="1"/>
+          <p:nvPr/>
+        </p:nvSpPr>
+        <p:spPr>
+          <a:xfrm>
+            <a:off x="2030365" y="2118001"/>
+            <a:ext cx="1366684" cy="369332"/>
+          </a:xfrm>
+          <a:prstGeom prst="rect">
+            <a:avLst/>
+          </a:prstGeom>
+          <a:noFill/>
+        </p:spPr>
+        <p:txBody>
+          <a:bodyPr wrap="square" rtlCol="0">
+            <a:spAutoFit/>
+          </a:bodyPr>
+          <a:lstStyle/>
+          <a:p>
+            <a:r>
+              <a:rPr lang="en-US" dirty="0"/>
+              <a:t>Champions</a:t>
+            </a:r>
+          </a:p>
+        </p:txBody>
+      </p:sp>
+      <p:sp>
+        <p:nvSpPr>
+          <p:cNvPr id="18" name="TextBox 17">
+            <a:extLst>
+              <a:ext uri="{FF2B5EF4-FFF2-40B4-BE49-F238E27FC236}">
+                <a16:creationId xmlns:a16="http://schemas.microsoft.com/office/drawing/2014/main" id="{1B4EF4B1-F89B-3439-8CB6-2A5917BAE757}"/>
+              </a:ext>
+            </a:extLst>
+          </p:cNvPr>
+          <p:cNvSpPr txBox="1"/>
+          <p:nvPr/>
+        </p:nvSpPr>
+        <p:spPr>
+          <a:xfrm>
+            <a:off x="1575008" y="5355987"/>
+            <a:ext cx="2277399" cy="369332"/>
+          </a:xfrm>
+          <a:prstGeom prst="rect">
+            <a:avLst/>
+          </a:prstGeom>
+          <a:noFill/>
+        </p:spPr>
+        <p:txBody>
+          <a:bodyPr wrap="square" rtlCol="0">
+            <a:spAutoFit/>
+          </a:bodyPr>
+          <a:lstStyle/>
+          <a:p>
+            <a:r>
+              <a:rPr lang="en-US" dirty="0"/>
+              <a:t>Lost (Fully Churned)</a:t>
+            </a:r>
+          </a:p>
+        </p:txBody>
+      </p:sp>
+      <p:sp>
+        <p:nvSpPr>
+          <p:cNvPr id="19" name="TextBox 18">
+            <a:extLst>
+              <a:ext uri="{FF2B5EF4-FFF2-40B4-BE49-F238E27FC236}">
+                <a16:creationId xmlns:a16="http://schemas.microsoft.com/office/drawing/2014/main" id="{0BFB29CB-1E4F-87AF-4704-89BE268B1726}"/>
+              </a:ext>
+            </a:extLst>
+          </p:cNvPr>
+          <p:cNvSpPr txBox="1"/>
+          <p:nvPr/>
+        </p:nvSpPr>
+        <p:spPr>
+          <a:xfrm>
+            <a:off x="1528922" y="3736994"/>
+            <a:ext cx="2369571" cy="646331"/>
+          </a:xfrm>
+          <a:prstGeom prst="rect">
+            <a:avLst/>
+          </a:prstGeom>
+          <a:noFill/>
+        </p:spPr>
+        <p:txBody>
+          <a:bodyPr wrap="square" rtlCol="0">
+            <a:spAutoFit/>
+          </a:bodyPr>
+          <a:lstStyle/>
+          <a:p>
+            <a:pPr algn="ctr"/>
+            <a:r>
+              <a:rPr lang="en-US" dirty="0"/>
+              <a:t>At-Risk High Value (Almost churned)</a:t>
+            </a:r>
+          </a:p>
+        </p:txBody>
+      </p:sp>
+      <p:sp>
+        <p:nvSpPr>
+          <p:cNvPr id="21" name="TextBox 20">
+            <a:extLst>
+              <a:ext uri="{FF2B5EF4-FFF2-40B4-BE49-F238E27FC236}">
+                <a16:creationId xmlns:a16="http://schemas.microsoft.com/office/drawing/2014/main" id="{4FD161EC-D2B9-7082-A154-58415D1E9440}"/>
+              </a:ext>
+            </a:extLst>
+          </p:cNvPr>
+          <p:cNvSpPr txBox="1"/>
+          <p:nvPr/>
+        </p:nvSpPr>
+        <p:spPr>
+          <a:xfrm>
+            <a:off x="7790832" y="3598494"/>
+            <a:ext cx="3448665" cy="646331"/>
+          </a:xfrm>
+          <a:prstGeom prst="rect">
+            <a:avLst/>
+          </a:prstGeom>
+          <a:noFill/>
+        </p:spPr>
+        <p:txBody>
+          <a:bodyPr wrap="square" rtlCol="0">
+            <a:spAutoFit/>
+          </a:bodyPr>
+          <a:lstStyle/>
+          <a:p>
+            <a:pPr algn="ctr"/>
+            <a:r>
+              <a:rPr lang="en-US" dirty="0"/>
+              <a:t>Re-engagement emails or product reminders</a:t>
+            </a:r>
+          </a:p>
+        </p:txBody>
+      </p:sp>
+      <p:sp>
+        <p:nvSpPr>
+          <p:cNvPr id="22" name="TextBox 21">
+            <a:extLst>
+              <a:ext uri="{FF2B5EF4-FFF2-40B4-BE49-F238E27FC236}">
+                <a16:creationId xmlns:a16="http://schemas.microsoft.com/office/drawing/2014/main" id="{37CDBEF9-2C53-A1AF-D118-D49418A2E8F4}"/>
+              </a:ext>
+            </a:extLst>
+          </p:cNvPr>
+          <p:cNvSpPr txBox="1"/>
+          <p:nvPr/>
+        </p:nvSpPr>
+        <p:spPr>
+          <a:xfrm>
+            <a:off x="7790831" y="5078988"/>
+            <a:ext cx="3448665" cy="923330"/>
+          </a:xfrm>
+          <a:prstGeom prst="rect">
+            <a:avLst/>
+          </a:prstGeom>
+          <a:noFill/>
+        </p:spPr>
+        <p:txBody>
+          <a:bodyPr wrap="square" rtlCol="0">
+            <a:spAutoFit/>
+          </a:bodyPr>
+          <a:lstStyle/>
+          <a:p>
+            <a:pPr algn="ctr"/>
+            <a:r>
+              <a:rPr lang="en-US" dirty="0"/>
+              <a:t>Win-back campaign to target customers with highest churn score</a:t>
+            </a:r>
+          </a:p>
+        </p:txBody>
+      </p:sp>
+    </p:spTree>
+    <p:extLst>
+      <p:ext uri="{BB962C8B-B14F-4D97-AF65-F5344CB8AC3E}">
+        <p14:creationId xmlns:p14="http://schemas.microsoft.com/office/powerpoint/2010/main" val="2465465039"/>
+      </p:ext>
+    </p:extLst>
+  </p:cSld>
+  <p:clrMapOvr>
+    <a:masterClrMapping/>
+  </p:clrMapOvr>
+</p:sld>
+</file>
+
 <file path=ppt/theme/theme1.xml><?xml version="1.0" encoding="utf-8"?>
-<a:theme xmlns:a="http://schemas.openxmlformats.org/drawingml/2006/main" name="Facet">
+<a:theme xmlns:a="http://schemas.openxmlformats.org/drawingml/2006/main" name="Slate">
   <a:themeElements>
-    <a:clrScheme name="Facet">
+    <a:clrScheme name="Office">
       <a:dk1>
         <a:sysClr val="windowText" lastClr="000000"/>
       </a:dk1>
@@ -9449,46 +10436,46 @@
         <a:sysClr val="window" lastClr="FFFFFF"/>
       </a:lt1>
       <a:dk2>
-        <a:srgbClr val="2C3C43"/>
+        <a:srgbClr val="0E2841"/>
       </a:dk2>
       <a:lt2>
-        <a:srgbClr val="EBEBEB"/>
+        <a:srgbClr val="E8E8E8"/>
       </a:lt2>
       <a:accent1>
-        <a:srgbClr val="90C226"/>
+        <a:srgbClr val="156082"/>
       </a:accent1>
       <a:accent2>
-        <a:srgbClr val="54A021"/>
+        <a:srgbClr val="E97132"/>
       </a:accent2>
       <a:accent3>
-        <a:srgbClr val="E6B91E"/>
+        <a:srgbClr val="196B24"/>
       </a:accent3>
       <a:accent4>
-        <a:srgbClr val="E76618"/>
+        <a:srgbClr val="0F9ED5"/>
       </a:accent4>
       <a:accent5>
-        <a:srgbClr val="C42F1A"/>
+        <a:srgbClr val="A02B93"/>
       </a:accent5>
       <a:accent6>
-        <a:srgbClr val="918655"/>
+        <a:srgbClr val="4EA72E"/>
       </a:accent6>
       <a:hlink>
-        <a:srgbClr val="99CA3C"/>
+        <a:srgbClr val="467886"/>
       </a:hlink>
       <a:folHlink>
-        <a:srgbClr val="B9D181"/>
+        <a:srgbClr val="96607D"/>
       </a:folHlink>
     </a:clrScheme>
-    <a:fontScheme name="Facet">
+    <a:fontScheme name="Slate">
       <a:majorFont>
-        <a:latin typeface="Trebuchet MS" panose="020B0603020202020204"/>
+        <a:latin typeface="Calisto MT" panose="02040603050505030304"/>
         <a:ea typeface=""/>
         <a:cs typeface=""/>
-        <a:font script="Jpan" typeface="メイリオ"/>
-        <a:font script="Hang" typeface="맑은 고딕"/>
-        <a:font script="Hans" typeface="方正姚体"/>
+        <a:font script="Jpan" typeface="ＭＳ Ｐゴシック"/>
+        <a:font script="Hang" typeface="돋움"/>
+        <a:font script="Hans" typeface="方正舒体"/>
         <a:font script="Hant" typeface="微軟正黑體"/>
-        <a:font script="Arab" typeface="Tahoma"/>
+        <a:font script="Arab" typeface="Arial"/>
         <a:font script="Hebr" typeface="Arial"/>
         <a:font script="Thai" typeface="Cordia New"/>
         <a:font script="Ethi" typeface="Nyala"/>
@@ -9511,21 +10498,21 @@
         <a:font script="Laoo" typeface="DokChampa"/>
         <a:font script="Sinh" typeface="Iskoola Pota"/>
         <a:font script="Mong" typeface="Mongolian Baiti"/>
-        <a:font script="Viet" typeface="Tahoma"/>
+        <a:font script="Viet" typeface="Arial"/>
         <a:font script="Uigh" typeface="Microsoft Uighur"/>
         <a:font script="Geor" typeface="Sylfaen"/>
       </a:majorFont>
       <a:minorFont>
-        <a:latin typeface="Trebuchet MS" panose="020B0603020202020204"/>
+        <a:latin typeface="Calisto MT" panose="02040603050505030304"/>
         <a:ea typeface=""/>
         <a:cs typeface=""/>
-        <a:font script="Jpan" typeface="メイリオ"/>
-        <a:font script="Hang" typeface="HY그래픽M"/>
-        <a:font script="Hans" typeface="华文新魏"/>
+        <a:font script="Jpan" typeface="ＭＳ Ｐゴシック"/>
+        <a:font script="Hang" typeface="돋움"/>
+        <a:font script="Hans" typeface="方正舒体"/>
         <a:font script="Hant" typeface="微軟正黑體"/>
-        <a:font script="Arab" typeface="Tahoma"/>
-        <a:font script="Hebr" typeface="Gisha"/>
-        <a:font script="Thai" typeface="IrisUPC"/>
+        <a:font script="Arab" typeface="Arial"/>
+        <a:font script="Hebr" typeface="Arial"/>
+        <a:font script="Thai" typeface="Cordia New"/>
         <a:font script="Ethi" typeface="Nyala"/>
         <a:font script="Beng" typeface="Vrinda"/>
         <a:font script="Gujr" typeface="Shruti"/>
@@ -9551,7 +10538,7 @@
         <a:font script="Geor" typeface="Sylfaen"/>
       </a:minorFont>
     </a:fontScheme>
-    <a:fmtScheme name="Facet">
+    <a:fmtScheme name="Slate">
       <a:fillStyleLst>
         <a:solidFill>
           <a:schemeClr val="phClr"/>
@@ -9560,13 +10547,13 @@
           <a:gsLst>
             <a:gs pos="0">
               <a:schemeClr val="phClr">
-                <a:tint val="65000"/>
+                <a:tint val="60000"/>
                 <a:lumMod val="110000"/>
               </a:schemeClr>
             </a:gs>
-            <a:gs pos="88000">
+            <a:gs pos="100000">
               <a:schemeClr val="phClr">
-                <a:tint val="90000"/>
+                <a:tint val="88000"/>
               </a:schemeClr>
             </a:gs>
           </a:gsLst>
@@ -9577,13 +10564,13 @@
             <a:gs pos="0">
               <a:schemeClr val="phClr">
                 <a:tint val="96000"/>
-                <a:lumMod val="100000"/>
+                <a:lumMod val="104000"/>
               </a:schemeClr>
             </a:gs>
-            <a:gs pos="78000">
+            <a:gs pos="100000">
               <a:schemeClr val="phClr">
-                <a:shade val="94000"/>
-                <a:lumMod val="94000"/>
+                <a:shade val="90000"/>
+                <a:lumMod val="90000"/>
               </a:schemeClr>
             </a:gs>
           </a:gsLst>
@@ -9591,13 +10578,15 @@
         </a:gradFill>
       </a:fillStyleLst>
       <a:lnStyleLst>
-        <a:ln w="12700" cap="rnd" cmpd="sng" algn="ctr">
+        <a:ln w="9525" cap="rnd" cmpd="sng" algn="ctr">
           <a:solidFill>
-            <a:schemeClr val="phClr"/>
+            <a:schemeClr val="phClr">
+              <a:shade val="90000"/>
+            </a:schemeClr>
           </a:solidFill>
           <a:prstDash val="solid"/>
         </a:ln>
-        <a:ln w="19050" cap="rnd" cmpd="sng" algn="ctr">
+        <a:ln w="15875" cap="rnd" cmpd="sng" algn="ctr">
           <a:solidFill>
             <a:schemeClr val="phClr"/>
           </a:solidFill>
@@ -9616,18 +10605,18 @@
         </a:effectStyle>
         <a:effectStyle>
           <a:effectLst>
-            <a:outerShdw blurRad="38100" dist="25400" dir="5400000" rotWithShape="0">
+            <a:outerShdw blurRad="63500" dist="25400" dir="5400000" rotWithShape="0">
               <a:srgbClr val="000000">
-                <a:alpha val="35000"/>
+                <a:alpha val="60000"/>
               </a:srgbClr>
             </a:outerShdw>
           </a:effectLst>
         </a:effectStyle>
         <a:effectStyle>
           <a:effectLst>
-            <a:outerShdw blurRad="50800" dist="38100" dir="5400000" rotWithShape="0">
+            <a:outerShdw blurRad="76200" dist="38100" dir="5400000" rotWithShape="0">
               <a:srgbClr val="000000">
-                <a:alpha val="35000"/>
+                <a:alpha val="75000"/>
               </a:srgbClr>
             </a:outerShdw>
           </a:effectLst>
@@ -9635,10 +10624,12 @@
             <a:camera prst="orthographicFront">
               <a:rot lat="0" lon="0" rev="0"/>
             </a:camera>
-            <a:lightRig rig="threePt" dir="tl"/>
+            <a:lightRig rig="threePt" dir="t">
+              <a:rot lat="0" lon="0" rev="1200000"/>
+            </a:lightRig>
           </a:scene3d>
-          <a:sp3d prstMaterial="plastic">
-            <a:bevelT w="0" h="0"/>
+          <a:sp3d>
+            <a:bevelT w="63500" h="25400" prst="hardEdge"/>
           </a:sp3d>
         </a:effectStyle>
       </a:effectStyleLst>
@@ -9646,42 +10637,23 @@
         <a:solidFill>
           <a:schemeClr val="phClr"/>
         </a:solidFill>
-        <a:gradFill rotWithShape="1">
-          <a:gsLst>
-            <a:gs pos="0">
+        <a:solidFill>
+          <a:schemeClr val="phClr"/>
+        </a:solidFill>
+        <a:blipFill rotWithShape="1">
+          <a:blip xmlns:r="http://schemas.openxmlformats.org/officeDocument/2006/relationships" r:embed="rId1">
+            <a:duotone>
               <a:schemeClr val="phClr">
-                <a:tint val="90000"/>
-                <a:lumMod val="104000"/>
+                <a:shade val="80000"/>
+                <a:lumMod val="80000"/>
               </a:schemeClr>
-            </a:gs>
-            <a:gs pos="94000">
               <a:schemeClr val="phClr">
-                <a:shade val="96000"/>
-                <a:lumMod val="82000"/>
+                <a:tint val="98000"/>
               </a:schemeClr>
-            </a:gs>
-          </a:gsLst>
-          <a:lin ang="5400000" scaled="0"/>
-        </a:gradFill>
-        <a:gradFill rotWithShape="1">
-          <a:gsLst>
-            <a:gs pos="0">
-              <a:schemeClr val="phClr">
-                <a:tint val="90000"/>
-                <a:lumMod val="110000"/>
-              </a:schemeClr>
-            </a:gs>
-            <a:gs pos="100000">
-              <a:schemeClr val="phClr">
-                <a:shade val="94000"/>
-                <a:lumMod val="96000"/>
-              </a:schemeClr>
-            </a:gs>
-          </a:gsLst>
-          <a:path path="circle">
-            <a:fillToRect l="50000" t="50000" r="100000" b="100000"/>
-          </a:path>
-        </a:gradFill>
+            </a:duotone>
+          </a:blip>
+          <a:stretch/>
+        </a:blipFill>
       </a:bgFillStyleLst>
     </a:fmtScheme>
   </a:themeElements>
@@ -9689,7 +10661,7 @@
   <a:extraClrSchemeLst/>
   <a:extLst>
     <a:ext uri="{05A4C25C-085E-4340-85A3-A5531E510DB2}">
-      <thm15:themeFamily xmlns:thm15="http://schemas.microsoft.com/office/thememl/2012/main" name="Facet" id="{C0C680CD-088A-49FC-A102-D699147F32B2}" vid="{CFBC31BA-B70F-4F30-BCAA-4F3011E16C4D}"/>
+      <thm15:themeFamily xmlns:thm15="http://schemas.microsoft.com/office/thememl/2012/main" name="Slate" id="{C3F70B94-7CE9-428E-ADC1-3269CC2C3385}" vid="{43372978-11FE-4814-AC26-BC300187D8C7}"/>
     </a:ext>
   </a:extLst>
 </a:theme>

--- a/Customer Retention Analysis.pptx
+++ b/Customer Retention Analysis.pptx
@@ -125,7 +125,7 @@
 <file path=ppt/revisionInfo.xml><?xml version="1.0" encoding="utf-8"?>
 <p1510:revInfo xmlns:a="http://schemas.openxmlformats.org/drawingml/2006/main" xmlns:r="http://schemas.openxmlformats.org/officeDocument/2006/relationships" xmlns:p1510="http://schemas.microsoft.com/office/powerpoint/2015/10/main">
   <p1510:revLst>
-    <p1510:client id="{708AB096-502C-4CC0-9240-ACA9084E787F}" v="2752" dt="2025-12-15T16:30:46.654"/>
+    <p1510:client id="{708AB096-502C-4CC0-9240-ACA9084E787F}" v="2754" dt="2025-12-17T19:16:24.541"/>
   </p1510:revLst>
 </p1510:revInfo>
 </file>
@@ -135,7 +135,7 @@
   <pc:docChgLst>
     <pc:chgData name="Henry Vo" userId="c18cca123e130253" providerId="LiveId" clId="{CBED1F73-AEB6-48AF-B30C-D6CFC8A51246}"/>
     <pc:docChg chg="undo custSel addSld modSld">
-      <pc:chgData name="Henry Vo" userId="c18cca123e130253" providerId="LiveId" clId="{CBED1F73-AEB6-48AF-B30C-D6CFC8A51246}" dt="2025-12-15T16:30:46.654" v="5497" actId="164"/>
+      <pc:chgData name="Henry Vo" userId="c18cca123e130253" providerId="LiveId" clId="{CBED1F73-AEB6-48AF-B30C-D6CFC8A51246}" dt="2025-12-17T19:16:30.663" v="5565" actId="14100"/>
       <pc:docMkLst>
         <pc:docMk/>
       </pc:docMkLst>
@@ -266,7 +266,7 @@
         </pc:cxnChg>
       </pc:sldChg>
       <pc:sldChg chg="addSp delSp modSp new mod">
-        <pc:chgData name="Henry Vo" userId="c18cca123e130253" providerId="LiveId" clId="{CBED1F73-AEB6-48AF-B30C-D6CFC8A51246}" dt="2025-12-15T05:14:27.898" v="4156" actId="1076"/>
+        <pc:chgData name="Henry Vo" userId="c18cca123e130253" providerId="LiveId" clId="{CBED1F73-AEB6-48AF-B30C-D6CFC8A51246}" dt="2025-12-17T19:16:30.663" v="5565" actId="14100"/>
         <pc:sldMkLst>
           <pc:docMk/>
           <pc:sldMk cId="1201758319" sldId="258"/>
@@ -295,14 +295,86 @@
             <ac:spMk id="8" creationId="{672139E3-B1CA-8CC6-9E24-7512BE5CE0AE}"/>
           </ac:spMkLst>
         </pc:spChg>
-        <pc:graphicFrameChg chg="add mod">
-          <ac:chgData name="Henry Vo" userId="c18cca123e130253" providerId="LiveId" clId="{CBED1F73-AEB6-48AF-B30C-D6CFC8A51246}" dt="2025-12-09T04:04:08.235" v="1451"/>
+        <pc:grpChg chg="add mod">
+          <ac:chgData name="Henry Vo" userId="c18cca123e130253" providerId="LiveId" clId="{CBED1F73-AEB6-48AF-B30C-D6CFC8A51246}" dt="2025-12-17T19:16:30.663" v="5565" actId="14100"/>
+          <ac:grpSpMkLst>
+            <pc:docMk/>
+            <pc:sldMk cId="1201758319" sldId="258"/>
+            <ac:grpSpMk id="22" creationId="{A53BF3E9-6229-C734-A848-EDB2BAD07B56}"/>
+          </ac:grpSpMkLst>
+        </pc:grpChg>
+        <pc:graphicFrameChg chg="add del mod">
+          <ac:chgData name="Henry Vo" userId="c18cca123e130253" providerId="LiveId" clId="{CBED1F73-AEB6-48AF-B30C-D6CFC8A51246}" dt="2025-12-17T19:12:27.031" v="5498" actId="478"/>
           <ac:graphicFrameMkLst>
             <pc:docMk/>
             <pc:sldMk cId="1201758319" sldId="258"/>
             <ac:graphicFrameMk id="6" creationId="{3F6B7EF6-81DB-8E3D-3AC7-3F9ABC236B5C}"/>
           </ac:graphicFrameMkLst>
         </pc:graphicFrameChg>
+        <pc:picChg chg="add del mod">
+          <ac:chgData name="Henry Vo" userId="c18cca123e130253" providerId="LiveId" clId="{CBED1F73-AEB6-48AF-B30C-D6CFC8A51246}" dt="2025-12-17T19:14:04.939" v="5518" actId="478"/>
+          <ac:picMkLst>
+            <pc:docMk/>
+            <pc:sldMk cId="1201758319" sldId="258"/>
+            <ac:picMk id="5" creationId="{15B72031-E29F-B16A-63FA-F42905938D95}"/>
+          </ac:picMkLst>
+        </pc:picChg>
+        <pc:picChg chg="add del mod">
+          <ac:chgData name="Henry Vo" userId="c18cca123e130253" providerId="LiveId" clId="{CBED1F73-AEB6-48AF-B30C-D6CFC8A51246}" dt="2025-12-17T19:13:25.283" v="5517" actId="478"/>
+          <ac:picMkLst>
+            <pc:docMk/>
+            <pc:sldMk cId="1201758319" sldId="258"/>
+            <ac:picMk id="9" creationId="{5D561DF6-BF0B-0793-B6BA-24F478592296}"/>
+          </ac:picMkLst>
+        </pc:picChg>
+        <pc:picChg chg="add del mod">
+          <ac:chgData name="Henry Vo" userId="c18cca123e130253" providerId="LiveId" clId="{CBED1F73-AEB6-48AF-B30C-D6CFC8A51246}" dt="2025-12-17T19:14:08.907" v="5522" actId="22"/>
+          <ac:picMkLst>
+            <pc:docMk/>
+            <pc:sldMk cId="1201758319" sldId="258"/>
+            <ac:picMk id="11" creationId="{E78D49BB-557D-EC98-AEAF-9116E909492E}"/>
+          </ac:picMkLst>
+        </pc:picChg>
+        <pc:picChg chg="add del mod">
+          <ac:chgData name="Henry Vo" userId="c18cca123e130253" providerId="LiveId" clId="{CBED1F73-AEB6-48AF-B30C-D6CFC8A51246}" dt="2025-12-17T19:15:39.674" v="5545" actId="478"/>
+          <ac:picMkLst>
+            <pc:docMk/>
+            <pc:sldMk cId="1201758319" sldId="258"/>
+            <ac:picMk id="13" creationId="{1DB9388F-10FC-801E-D812-A07E5F0F3E8C}"/>
+          </ac:picMkLst>
+        </pc:picChg>
+        <pc:picChg chg="add del mod">
+          <ac:chgData name="Henry Vo" userId="c18cca123e130253" providerId="LiveId" clId="{CBED1F73-AEB6-48AF-B30C-D6CFC8A51246}" dt="2025-12-17T19:15:11.242" v="5538" actId="478"/>
+          <ac:picMkLst>
+            <pc:docMk/>
+            <pc:sldMk cId="1201758319" sldId="258"/>
+            <ac:picMk id="15" creationId="{992B3788-58BD-514B-386B-CF4E023A1C81}"/>
+          </ac:picMkLst>
+        </pc:picChg>
+        <pc:picChg chg="add del mod">
+          <ac:chgData name="Henry Vo" userId="c18cca123e130253" providerId="LiveId" clId="{CBED1F73-AEB6-48AF-B30C-D6CFC8A51246}" dt="2025-12-17T19:15:20.402" v="5544" actId="478"/>
+          <ac:picMkLst>
+            <pc:docMk/>
+            <pc:sldMk cId="1201758319" sldId="258"/>
+            <ac:picMk id="17" creationId="{9B969DB8-2940-5F49-C5A2-BD5EB473900B}"/>
+          </ac:picMkLst>
+        </pc:picChg>
+        <pc:picChg chg="add mod">
+          <ac:chgData name="Henry Vo" userId="c18cca123e130253" providerId="LiveId" clId="{CBED1F73-AEB6-48AF-B30C-D6CFC8A51246}" dt="2025-12-17T19:16:24.538" v="5563" actId="164"/>
+          <ac:picMkLst>
+            <pc:docMk/>
+            <pc:sldMk cId="1201758319" sldId="258"/>
+            <ac:picMk id="19" creationId="{2FD3FD2B-E31A-2550-B6BA-3D2167A03BA1}"/>
+          </ac:picMkLst>
+        </pc:picChg>
+        <pc:picChg chg="add mod">
+          <ac:chgData name="Henry Vo" userId="c18cca123e130253" providerId="LiveId" clId="{CBED1F73-AEB6-48AF-B30C-D6CFC8A51246}" dt="2025-12-17T19:16:24.538" v="5563" actId="164"/>
+          <ac:picMkLst>
+            <pc:docMk/>
+            <pc:sldMk cId="1201758319" sldId="258"/>
+            <ac:picMk id="21" creationId="{2BA2933C-B942-ECCC-3539-88DA578D3E5F}"/>
+          </ac:picMkLst>
+        </pc:picChg>
       </pc:sldChg>
       <pc:sldChg chg="addSp delSp modSp new mod">
         <pc:chgData name="Henry Vo" userId="c18cca123e130253" providerId="LiveId" clId="{CBED1F73-AEB6-48AF-B30C-D6CFC8A51246}" dt="2025-12-15T05:15:40.175" v="4174" actId="113"/>
@@ -388,30 +460,6 @@
           <pc:docMk/>
           <pc:sldMk cId="3083110177" sldId="261"/>
         </pc:sldMkLst>
-        <pc:spChg chg="del">
-          <ac:chgData name="Henry Vo" userId="c18cca123e130253" providerId="LiveId" clId="{CBED1F73-AEB6-48AF-B30C-D6CFC8A51246}" dt="2025-12-14T05:57:07.842" v="3580" actId="478"/>
-          <ac:spMkLst>
-            <pc:docMk/>
-            <pc:sldMk cId="3083110177" sldId="261"/>
-            <ac:spMk id="2" creationId="{AB1DF493-1A6D-C8F7-B185-2ED9E46BB76C}"/>
-          </ac:spMkLst>
-        </pc:spChg>
-        <pc:spChg chg="del">
-          <ac:chgData name="Henry Vo" userId="c18cca123e130253" providerId="LiveId" clId="{CBED1F73-AEB6-48AF-B30C-D6CFC8A51246}" dt="2025-12-14T05:57:06.449" v="3579" actId="478"/>
-          <ac:spMkLst>
-            <pc:docMk/>
-            <pc:sldMk cId="3083110177" sldId="261"/>
-            <ac:spMk id="3" creationId="{3A1AC856-690B-2C8E-83B1-008C098CE9CD}"/>
-          </ac:spMkLst>
-        </pc:spChg>
-        <pc:spChg chg="add del mod">
-          <ac:chgData name="Henry Vo" userId="c18cca123e130253" providerId="LiveId" clId="{CBED1F73-AEB6-48AF-B30C-D6CFC8A51246}" dt="2025-12-14T06:01:00.906" v="3583"/>
-          <ac:spMkLst>
-            <pc:docMk/>
-            <pc:sldMk cId="3083110177" sldId="261"/>
-            <ac:spMk id="4" creationId="{0D7E053D-9B6B-D4BC-3FB4-FB817B9A4FE0}"/>
-          </ac:spMkLst>
-        </pc:spChg>
         <pc:spChg chg="add mod">
           <ac:chgData name="Henry Vo" userId="c18cca123e130253" providerId="LiveId" clId="{CBED1F73-AEB6-48AF-B30C-D6CFC8A51246}" dt="2025-12-15T05:03:30.850" v="3654" actId="20577"/>
           <ac:spMkLst>
@@ -428,30 +476,6 @@
             <ac:spMk id="7" creationId="{142FC0C8-9160-88FE-AEBB-0AA357C23B78}"/>
           </ac:spMkLst>
         </pc:spChg>
-        <pc:picChg chg="add del mod">
-          <ac:chgData name="Henry Vo" userId="c18cca123e130253" providerId="LiveId" clId="{CBED1F73-AEB6-48AF-B30C-D6CFC8A51246}" dt="2025-12-15T05:01:48.666" v="3635" actId="478"/>
-          <ac:picMkLst>
-            <pc:docMk/>
-            <pc:sldMk cId="3083110177" sldId="261"/>
-            <ac:picMk id="3" creationId="{1E43CEDE-26D2-785F-ADE8-298D4196E218}"/>
-          </ac:picMkLst>
-        </pc:picChg>
-        <pc:picChg chg="add del mod modCrop">
-          <ac:chgData name="Henry Vo" userId="c18cca123e130253" providerId="LiveId" clId="{CBED1F73-AEB6-48AF-B30C-D6CFC8A51246}" dt="2025-12-15T05:13:07.888" v="4147" actId="478"/>
-          <ac:picMkLst>
-            <pc:docMk/>
-            <pc:sldMk cId="3083110177" sldId="261"/>
-            <ac:picMk id="6" creationId="{7AD20D24-1A39-E8D2-A488-C3AC8B13991F}"/>
-          </ac:picMkLst>
-        </pc:picChg>
-        <pc:picChg chg="add del">
-          <ac:chgData name="Henry Vo" userId="c18cca123e130253" providerId="LiveId" clId="{CBED1F73-AEB6-48AF-B30C-D6CFC8A51246}" dt="2025-12-15T05:13:06.941" v="4146" actId="22"/>
-          <ac:picMkLst>
-            <pc:docMk/>
-            <pc:sldMk cId="3083110177" sldId="261"/>
-            <ac:picMk id="9" creationId="{3B5718B7-8060-2485-AEA3-A6796F58A697}"/>
-          </ac:picMkLst>
-        </pc:picChg>
         <pc:picChg chg="add mod">
           <ac:chgData name="Henry Vo" userId="c18cca123e130253" providerId="LiveId" clId="{CBED1F73-AEB6-48AF-B30C-D6CFC8A51246}" dt="2025-12-15T05:15:05.875" v="4163" actId="1076"/>
           <ac:picMkLst>
@@ -467,30 +491,6 @@
           <pc:docMk/>
           <pc:sldMk cId="3533779975" sldId="262"/>
         </pc:sldMkLst>
-        <pc:spChg chg="del">
-          <ac:chgData name="Henry Vo" userId="c18cca123e130253" providerId="LiveId" clId="{CBED1F73-AEB6-48AF-B30C-D6CFC8A51246}" dt="2025-12-15T13:15:23.645" v="4176" actId="478"/>
-          <ac:spMkLst>
-            <pc:docMk/>
-            <pc:sldMk cId="3533779975" sldId="262"/>
-            <ac:spMk id="2" creationId="{C25EEB97-A683-1B60-28CE-C085CD9548B0}"/>
-          </ac:spMkLst>
-        </pc:spChg>
-        <pc:spChg chg="del">
-          <ac:chgData name="Henry Vo" userId="c18cca123e130253" providerId="LiveId" clId="{CBED1F73-AEB6-48AF-B30C-D6CFC8A51246}" dt="2025-12-15T13:15:23.131" v="4175" actId="478"/>
-          <ac:spMkLst>
-            <pc:docMk/>
-            <pc:sldMk cId="3533779975" sldId="262"/>
-            <ac:spMk id="3" creationId="{08F07BE0-530E-DBC5-0506-8821B3863CCE}"/>
-          </ac:spMkLst>
-        </pc:spChg>
-        <pc:spChg chg="add mod">
-          <ac:chgData name="Henry Vo" userId="c18cca123e130253" providerId="LiveId" clId="{CBED1F73-AEB6-48AF-B30C-D6CFC8A51246}" dt="2025-12-15T13:37:54.526" v="4181"/>
-          <ac:spMkLst>
-            <pc:docMk/>
-            <pc:sldMk cId="3533779975" sldId="262"/>
-            <ac:spMk id="6" creationId="{F465791A-C9DC-FE1D-94FF-0CA76773CB65}"/>
-          </ac:spMkLst>
-        </pc:spChg>
         <pc:spChg chg="add mod">
           <ac:chgData name="Henry Vo" userId="c18cca123e130253" providerId="LiveId" clId="{CBED1F73-AEB6-48AF-B30C-D6CFC8A51246}" dt="2025-12-15T13:52:35.733" v="4502" actId="20577"/>
           <ac:spMkLst>
@@ -531,46 +531,6 @@
             <ac:grpSpMk id="23" creationId="{7FFC5566-F06D-4F99-D24F-FCF027ED4D94}"/>
           </ac:grpSpMkLst>
         </pc:grpChg>
-        <pc:picChg chg="add del mod">
-          <ac:chgData name="Henry Vo" userId="c18cca123e130253" providerId="LiveId" clId="{CBED1F73-AEB6-48AF-B30C-D6CFC8A51246}" dt="2025-12-15T13:38:32.966" v="4182" actId="478"/>
-          <ac:picMkLst>
-            <pc:docMk/>
-            <pc:sldMk cId="3533779975" sldId="262"/>
-            <ac:picMk id="5" creationId="{42594865-F5C4-B32A-7950-FF2CBC023A45}"/>
-          </ac:picMkLst>
-        </pc:picChg>
-        <pc:picChg chg="add del mod modCrop">
-          <ac:chgData name="Henry Vo" userId="c18cca123e130253" providerId="LiveId" clId="{CBED1F73-AEB6-48AF-B30C-D6CFC8A51246}" dt="2025-12-15T13:44:38.170" v="4429" actId="478"/>
-          <ac:picMkLst>
-            <pc:docMk/>
-            <pc:sldMk cId="3533779975" sldId="262"/>
-            <ac:picMk id="8" creationId="{A5AFF69B-C0DB-6E5A-90D6-85E7EB6AB749}"/>
-          </ac:picMkLst>
-        </pc:picChg>
-        <pc:picChg chg="add del mod modCrop">
-          <ac:chgData name="Henry Vo" userId="c18cca123e130253" providerId="LiveId" clId="{CBED1F73-AEB6-48AF-B30C-D6CFC8A51246}" dt="2025-12-15T13:51:24.316" v="4450" actId="478"/>
-          <ac:picMkLst>
-            <pc:docMk/>
-            <pc:sldMk cId="3533779975" sldId="262"/>
-            <ac:picMk id="12" creationId="{E89309F8-8047-BA25-4E90-20796C96B838}"/>
-          </ac:picMkLst>
-        </pc:picChg>
-        <pc:picChg chg="add del mod">
-          <ac:chgData name="Henry Vo" userId="c18cca123e130253" providerId="LiveId" clId="{CBED1F73-AEB6-48AF-B30C-D6CFC8A51246}" dt="2025-12-15T13:50:50.928" v="4444" actId="22"/>
-          <ac:picMkLst>
-            <pc:docMk/>
-            <pc:sldMk cId="3533779975" sldId="262"/>
-            <ac:picMk id="14" creationId="{0E0EB9BC-AA39-D1D7-7B8D-37759C8B4297}"/>
-          </ac:picMkLst>
-        </pc:picChg>
-        <pc:picChg chg="add del mod">
-          <ac:chgData name="Henry Vo" userId="c18cca123e130253" providerId="LiveId" clId="{CBED1F73-AEB6-48AF-B30C-D6CFC8A51246}" dt="2025-12-15T13:51:25.717" v="4451" actId="478"/>
-          <ac:picMkLst>
-            <pc:docMk/>
-            <pc:sldMk cId="3533779975" sldId="262"/>
-            <ac:picMk id="16" creationId="{2D0C862B-5246-334E-0DA9-5AEE12385207}"/>
-          </ac:picMkLst>
-        </pc:picChg>
         <pc:picChg chg="add mod modCrop">
           <ac:chgData name="Henry Vo" userId="c18cca123e130253" providerId="LiveId" clId="{CBED1F73-AEB6-48AF-B30C-D6CFC8A51246}" dt="2025-12-15T16:30:46.654" v="5497" actId="164"/>
           <ac:picMkLst>
@@ -594,44 +554,12 @@
           <pc:docMk/>
           <pc:sldMk cId="2465465039" sldId="263"/>
         </pc:sldMkLst>
-        <pc:spChg chg="del">
-          <ac:chgData name="Henry Vo" userId="c18cca123e130253" providerId="LiveId" clId="{CBED1F73-AEB6-48AF-B30C-D6CFC8A51246}" dt="2025-12-15T16:20:27.527" v="4940" actId="478"/>
-          <ac:spMkLst>
-            <pc:docMk/>
-            <pc:sldMk cId="2465465039" sldId="263"/>
-            <ac:spMk id="2" creationId="{B94D5BD8-CD09-7839-B672-6224B7780DE6}"/>
-          </ac:spMkLst>
-        </pc:spChg>
-        <pc:spChg chg="del">
-          <ac:chgData name="Henry Vo" userId="c18cca123e130253" providerId="LiveId" clId="{CBED1F73-AEB6-48AF-B30C-D6CFC8A51246}" dt="2025-12-15T16:20:28.106" v="4941" actId="478"/>
-          <ac:spMkLst>
-            <pc:docMk/>
-            <pc:sldMk cId="2465465039" sldId="263"/>
-            <ac:spMk id="3" creationId="{D01E0126-8F80-EE1C-76CC-A99B9F982934}"/>
-          </ac:spMkLst>
-        </pc:spChg>
         <pc:spChg chg="add mod">
           <ac:chgData name="Henry Vo" userId="c18cca123e130253" providerId="LiveId" clId="{CBED1F73-AEB6-48AF-B30C-D6CFC8A51246}" dt="2025-12-15T16:20:37.714" v="4969" actId="20577"/>
           <ac:spMkLst>
             <pc:docMk/>
             <pc:sldMk cId="2465465039" sldId="263"/>
             <ac:spMk id="4" creationId="{A1941F0A-540A-DFB1-12F4-A44E2508BAA4}"/>
-          </ac:spMkLst>
-        </pc:spChg>
-        <pc:spChg chg="add del mod">
-          <ac:chgData name="Henry Vo" userId="c18cca123e130253" providerId="LiveId" clId="{CBED1F73-AEB6-48AF-B30C-D6CFC8A51246}" dt="2025-12-15T16:20:46.356" v="4971" actId="478"/>
-          <ac:spMkLst>
-            <pc:docMk/>
-            <pc:sldMk cId="2465465039" sldId="263"/>
-            <ac:spMk id="5" creationId="{13202E03-213D-EBEE-CB24-B5D63BE23DD0}"/>
-          </ac:spMkLst>
-        </pc:spChg>
-        <pc:spChg chg="add del mod">
-          <ac:chgData name="Henry Vo" userId="c18cca123e130253" providerId="LiveId" clId="{CBED1F73-AEB6-48AF-B30C-D6CFC8A51246}" dt="2025-12-15T16:21:14.714" v="4973" actId="478"/>
-          <ac:spMkLst>
-            <pc:docMk/>
-            <pc:sldMk cId="2465465039" sldId="263"/>
-            <ac:spMk id="6" creationId="{6196663A-FCD1-B8F7-72EA-7C612BEA2BE9}"/>
           </ac:spMkLst>
         </pc:spChg>
         <pc:spChg chg="add mod">
@@ -648,14 +576,6 @@
             <pc:docMk/>
             <pc:sldMk cId="2465465039" sldId="263"/>
             <ac:spMk id="8" creationId="{760A639C-DA42-C084-100A-BA995FABC5C5}"/>
-          </ac:spMkLst>
-        </pc:spChg>
-        <pc:spChg chg="add del mod">
-          <ac:chgData name="Henry Vo" userId="c18cca123e130253" providerId="LiveId" clId="{CBED1F73-AEB6-48AF-B30C-D6CFC8A51246}" dt="2025-12-15T16:27:12.378" v="5313" actId="478"/>
-          <ac:spMkLst>
-            <pc:docMk/>
-            <pc:sldMk cId="2465465039" sldId="263"/>
-            <ac:spMk id="15" creationId="{6FBA7CF3-32E6-CBE9-8A50-F4FCD026D42E}"/>
           </ac:spMkLst>
         </pc:spChg>
         <pc:spChg chg="add mod">
@@ -691,14 +611,6 @@
           </ac:spMkLst>
         </pc:spChg>
         <pc:spChg chg="add mod">
-          <ac:chgData name="Henry Vo" userId="c18cca123e130253" providerId="LiveId" clId="{CBED1F73-AEB6-48AF-B30C-D6CFC8A51246}" dt="2025-12-15T16:27:29.551" v="5318"/>
-          <ac:spMkLst>
-            <pc:docMk/>
-            <pc:sldMk cId="2465465039" sldId="263"/>
-            <ac:spMk id="20" creationId="{0A05155A-2F55-30F3-0D56-EDAF1CA8F640}"/>
-          </ac:spMkLst>
-        </pc:spChg>
-        <pc:spChg chg="add mod">
           <ac:chgData name="Henry Vo" userId="c18cca123e130253" providerId="LiveId" clId="{CBED1F73-AEB6-48AF-B30C-D6CFC8A51246}" dt="2025-12-15T16:28:04.534" v="5391" actId="20577"/>
           <ac:spMkLst>
             <pc:docMk/>
@@ -714,14 +626,6 @@
             <ac:spMk id="22" creationId="{37CDBEF9-2C53-A1AF-D118-D49418A2E8F4}"/>
           </ac:spMkLst>
         </pc:spChg>
-        <pc:cxnChg chg="add del">
-          <ac:chgData name="Henry Vo" userId="c18cca123e130253" providerId="LiveId" clId="{CBED1F73-AEB6-48AF-B30C-D6CFC8A51246}" dt="2025-12-15T16:21:57.343" v="4989" actId="11529"/>
-          <ac:cxnSpMkLst>
-            <pc:docMk/>
-            <pc:sldMk cId="2465465039" sldId="263"/>
-            <ac:cxnSpMk id="10" creationId="{350A1064-1E33-AA1B-CBF4-1EDD1247096C}"/>
-          </ac:cxnSpMkLst>
-        </pc:cxnChg>
         <pc:cxnChg chg="add mod">
           <ac:chgData name="Henry Vo" userId="c18cca123e130253" providerId="LiveId" clId="{CBED1F73-AEB6-48AF-B30C-D6CFC8A51246}" dt="2025-12-15T16:23:03.690" v="5044" actId="14100"/>
           <ac:cxnSpMkLst>
@@ -734,1385 +638,6 @@
     </pc:docChg>
   </pc:docChgLst>
 </pc:chgInfo>
-</file>
-
-<file path=ppt/charts/chart1.xml><?xml version="1.0" encoding="utf-8"?>
-<c:chartSpace xmlns:c="http://schemas.openxmlformats.org/drawingml/2006/chart" xmlns:a="http://schemas.openxmlformats.org/drawingml/2006/main" xmlns:r="http://schemas.openxmlformats.org/officeDocument/2006/relationships" xmlns:c16r2="http://schemas.microsoft.com/office/drawing/2015/06/chart">
-  <c:date1904 val="0"/>
-  <c:lang val="en-US"/>
-  <c:roundedCorners val="0"/>
-  <mc:AlternateContent xmlns:mc="http://schemas.openxmlformats.org/markup-compatibility/2006">
-    <mc:Choice xmlns:c14="http://schemas.microsoft.com/office/drawing/2007/8/2/chart" Requires="c14">
-      <c14:style val="102"/>
-    </mc:Choice>
-    <mc:Fallback>
-      <c:style val="2"/>
-    </mc:Fallback>
-  </mc:AlternateContent>
-  <c:chart>
-    <c:autoTitleDeleted val="1"/>
-    <c:plotArea>
-      <c:layout>
-        <c:manualLayout>
-          <c:layoutTarget val="inner"/>
-          <c:xMode val="edge"/>
-          <c:yMode val="edge"/>
-          <c:x val="8.2952380535462597E-2"/>
-          <c:y val="5.3248516650990431E-2"/>
-          <c:w val="0.72936124200970576"/>
-          <c:h val="0.78711632794680964"/>
-        </c:manualLayout>
-      </c:layout>
-      <c:lineChart>
-        <c:grouping val="standard"/>
-        <c:varyColors val="0"/>
-        <c:ser>
-          <c:idx val="0"/>
-          <c:order val="0"/>
-          <c:tx>
-            <c:v>New</c:v>
-          </c:tx>
-          <c:spPr>
-            <a:ln w="28575" cap="rnd">
-              <a:solidFill>
-                <a:schemeClr val="accent2"/>
-              </a:solidFill>
-              <a:round/>
-            </a:ln>
-            <a:effectLst/>
-          </c:spPr>
-          <c:marker>
-            <c:symbol val="none"/>
-          </c:marker>
-          <c:dLbls>
-            <c:dLbl>
-              <c:idx val="0"/>
-              <c:layout>
-                <c:manualLayout>
-                  <c:x val="4.0680046522598087E-3"/>
-                  <c:y val="-4.4907109467267316E-2"/>
-                </c:manualLayout>
-              </c:layout>
-              <c:showLegendKey val="0"/>
-              <c:showVal val="1"/>
-              <c:showCatName val="0"/>
-              <c:showSerName val="0"/>
-              <c:showPercent val="0"/>
-              <c:showBubbleSize val="0"/>
-              <c:extLst>
-                <c:ext xmlns:c15="http://schemas.microsoft.com/office/drawing/2012/chart" uri="{CE6537A1-D6FC-4f65-9D91-7224C49458BB}"/>
-                <c:ext xmlns:c16="http://schemas.microsoft.com/office/drawing/2014/chart" uri="{C3380CC4-5D6E-409C-BE32-E72D297353CC}">
-                  <c16:uniqueId val="{00000003-7A9A-44DE-8A76-D83767A67C88}"/>
-                </c:ext>
-              </c:extLst>
-            </c:dLbl>
-            <c:dLbl>
-              <c:idx val="1"/>
-              <c:delete val="1"/>
-              <c:extLst>
-                <c:ext xmlns:c15="http://schemas.microsoft.com/office/drawing/2012/chart" uri="{CE6537A1-D6FC-4f65-9D91-7224C49458BB}"/>
-                <c:ext xmlns:c16="http://schemas.microsoft.com/office/drawing/2014/chart" uri="{C3380CC4-5D6E-409C-BE32-E72D297353CC}">
-                  <c16:uniqueId val="{00000002-7A9A-44DE-8A76-D83767A67C88}"/>
-                </c:ext>
-              </c:extLst>
-            </c:dLbl>
-            <c:dLbl>
-              <c:idx val="2"/>
-              <c:delete val="1"/>
-              <c:extLst>
-                <c:ext xmlns:c15="http://schemas.microsoft.com/office/drawing/2012/chart" uri="{CE6537A1-D6FC-4f65-9D91-7224C49458BB}"/>
-                <c:ext xmlns:c16="http://schemas.microsoft.com/office/drawing/2014/chart" uri="{C3380CC4-5D6E-409C-BE32-E72D297353CC}">
-                  <c16:uniqueId val="{00000004-7A9A-44DE-8A76-D83767A67C88}"/>
-                </c:ext>
-              </c:extLst>
-            </c:dLbl>
-            <c:dLbl>
-              <c:idx val="3"/>
-              <c:delete val="1"/>
-              <c:extLst>
-                <c:ext xmlns:c15="http://schemas.microsoft.com/office/drawing/2012/chart" uri="{CE6537A1-D6FC-4f65-9D91-7224C49458BB}"/>
-                <c:ext xmlns:c16="http://schemas.microsoft.com/office/drawing/2014/chart" uri="{C3380CC4-5D6E-409C-BE32-E72D297353CC}">
-                  <c16:uniqueId val="{00000005-7A9A-44DE-8A76-D83767A67C88}"/>
-                </c:ext>
-              </c:extLst>
-            </c:dLbl>
-            <c:dLbl>
-              <c:idx val="4"/>
-              <c:delete val="1"/>
-              <c:extLst>
-                <c:ext xmlns:c15="http://schemas.microsoft.com/office/drawing/2012/chart" uri="{CE6537A1-D6FC-4f65-9D91-7224C49458BB}"/>
-                <c:ext xmlns:c16="http://schemas.microsoft.com/office/drawing/2014/chart" uri="{C3380CC4-5D6E-409C-BE32-E72D297353CC}">
-                  <c16:uniqueId val="{00000006-7A9A-44DE-8A76-D83767A67C88}"/>
-                </c:ext>
-              </c:extLst>
-            </c:dLbl>
-            <c:dLbl>
-              <c:idx val="5"/>
-              <c:delete val="1"/>
-              <c:extLst>
-                <c:ext xmlns:c15="http://schemas.microsoft.com/office/drawing/2012/chart" uri="{CE6537A1-D6FC-4f65-9D91-7224C49458BB}"/>
-                <c:ext xmlns:c16="http://schemas.microsoft.com/office/drawing/2014/chart" uri="{C3380CC4-5D6E-409C-BE32-E72D297353CC}">
-                  <c16:uniqueId val="{00000007-7A9A-44DE-8A76-D83767A67C88}"/>
-                </c:ext>
-              </c:extLst>
-            </c:dLbl>
-            <c:dLbl>
-              <c:idx val="6"/>
-              <c:delete val="1"/>
-              <c:extLst>
-                <c:ext xmlns:c15="http://schemas.microsoft.com/office/drawing/2012/chart" uri="{CE6537A1-D6FC-4f65-9D91-7224C49458BB}"/>
-                <c:ext xmlns:c16="http://schemas.microsoft.com/office/drawing/2014/chart" uri="{C3380CC4-5D6E-409C-BE32-E72D297353CC}">
-                  <c16:uniqueId val="{00000008-7A9A-44DE-8A76-D83767A67C88}"/>
-                </c:ext>
-              </c:extLst>
-            </c:dLbl>
-            <c:dLbl>
-              <c:idx val="7"/>
-              <c:layout>
-                <c:manualLayout>
-                  <c:x val="0"/>
-                  <c:y val="1.0363179107830791E-2"/>
-                </c:manualLayout>
-              </c:layout>
-              <c:showLegendKey val="0"/>
-              <c:showVal val="1"/>
-              <c:showCatName val="0"/>
-              <c:showSerName val="0"/>
-              <c:showPercent val="0"/>
-              <c:showBubbleSize val="0"/>
-              <c:extLst>
-                <c:ext xmlns:c15="http://schemas.microsoft.com/office/drawing/2012/chart" uri="{CE6537A1-D6FC-4f65-9D91-7224C49458BB}"/>
-                <c:ext xmlns:c16="http://schemas.microsoft.com/office/drawing/2014/chart" uri="{C3380CC4-5D6E-409C-BE32-E72D297353CC}">
-                  <c16:uniqueId val="{0000000B-7A9A-44DE-8A76-D83767A67C88}"/>
-                </c:ext>
-              </c:extLst>
-            </c:dLbl>
-            <c:dLbl>
-              <c:idx val="8"/>
-              <c:delete val="1"/>
-              <c:extLst>
-                <c:ext xmlns:c15="http://schemas.microsoft.com/office/drawing/2012/chart" uri="{CE6537A1-D6FC-4f65-9D91-7224C49458BB}"/>
-                <c:ext xmlns:c16="http://schemas.microsoft.com/office/drawing/2014/chart" uri="{C3380CC4-5D6E-409C-BE32-E72D297353CC}">
-                  <c16:uniqueId val="{00000009-7A9A-44DE-8A76-D83767A67C88}"/>
-                </c:ext>
-              </c:extLst>
-            </c:dLbl>
-            <c:dLbl>
-              <c:idx val="9"/>
-              <c:delete val="1"/>
-              <c:extLst>
-                <c:ext xmlns:c15="http://schemas.microsoft.com/office/drawing/2012/chart" uri="{CE6537A1-D6FC-4f65-9D91-7224C49458BB}"/>
-                <c:ext xmlns:c16="http://schemas.microsoft.com/office/drawing/2014/chart" uri="{C3380CC4-5D6E-409C-BE32-E72D297353CC}">
-                  <c16:uniqueId val="{0000000A-7A9A-44DE-8A76-D83767A67C88}"/>
-                </c:ext>
-              </c:extLst>
-            </c:dLbl>
-            <c:dLbl>
-              <c:idx val="10"/>
-              <c:layout>
-                <c:manualLayout>
-                  <c:x val="4.0680046522598087E-3"/>
-                  <c:y val="-1.7271965179718199E-2"/>
-                </c:manualLayout>
-              </c:layout>
-              <c:showLegendKey val="0"/>
-              <c:showVal val="1"/>
-              <c:showCatName val="0"/>
-              <c:showSerName val="0"/>
-              <c:showPercent val="0"/>
-              <c:showBubbleSize val="0"/>
-              <c:extLst>
-                <c:ext xmlns:c15="http://schemas.microsoft.com/office/drawing/2012/chart" uri="{CE6537A1-D6FC-4f65-9D91-7224C49458BB}"/>
-                <c:ext xmlns:c16="http://schemas.microsoft.com/office/drawing/2014/chart" uri="{C3380CC4-5D6E-409C-BE32-E72D297353CC}">
-                  <c16:uniqueId val="{0000000C-7A9A-44DE-8A76-D83767A67C88}"/>
-                </c:ext>
-              </c:extLst>
-            </c:dLbl>
-            <c:spPr>
-              <a:noFill/>
-              <a:ln>
-                <a:noFill/>
-              </a:ln>
-              <a:effectLst/>
-            </c:spPr>
-            <c:txPr>
-              <a:bodyPr rot="0" spcFirstLastPara="1" vertOverflow="ellipsis" vert="horz" wrap="square" lIns="38100" tIns="19050" rIns="38100" bIns="19050" anchor="ctr" anchorCtr="1">
-                <a:spAutoFit/>
-              </a:bodyPr>
-              <a:lstStyle/>
-              <a:p>
-                <a:pPr>
-                  <a:defRPr sz="900" b="0" i="0" u="none" strike="noStrike" kern="1200" baseline="0">
-                    <a:solidFill>
-                      <a:schemeClr val="tx1">
-                        <a:lumMod val="75000"/>
-                        <a:lumOff val="25000"/>
-                      </a:schemeClr>
-                    </a:solidFill>
-                    <a:latin typeface="+mn-lt"/>
-                    <a:ea typeface="+mn-ea"/>
-                    <a:cs typeface="+mn-cs"/>
-                  </a:defRPr>
-                </a:pPr>
-                <a:endParaRPr lang="en-US"/>
-              </a:p>
-            </c:txPr>
-            <c:showLegendKey val="0"/>
-            <c:showVal val="1"/>
-            <c:showCatName val="0"/>
-            <c:showSerName val="0"/>
-            <c:showPercent val="0"/>
-            <c:showBubbleSize val="0"/>
-            <c:showLeaderLines val="0"/>
-            <c:extLst>
-              <c:ext xmlns:c15="http://schemas.microsoft.com/office/drawing/2012/chart" uri="{CE6537A1-D6FC-4f65-9D91-7224C49458BB}">
-                <c15:showLeaderLines val="1"/>
-                <c15:leaderLines>
-                  <c:spPr>
-                    <a:ln w="9525" cap="flat" cmpd="sng" algn="ctr">
-                      <a:solidFill>
-                        <a:schemeClr val="tx1">
-                          <a:lumMod val="35000"/>
-                          <a:lumOff val="65000"/>
-                        </a:schemeClr>
-                      </a:solidFill>
-                      <a:round/>
-                    </a:ln>
-                    <a:effectLst/>
-                  </c:spPr>
-                </c15:leaderLines>
-              </c:ext>
-            </c:extLst>
-          </c:dLbls>
-          <c:cat>
-            <c:numRef>
-              <c:f>'New vs. Return'!$A$2:$A$14</c:f>
-              <c:numCache>
-                <c:formatCode>mmm\-yy</c:formatCode>
-                <c:ptCount val="13"/>
-                <c:pt idx="0">
-                  <c:v>40513</c:v>
-                </c:pt>
-                <c:pt idx="1">
-                  <c:v>40544</c:v>
-                </c:pt>
-                <c:pt idx="2">
-                  <c:v>40575</c:v>
-                </c:pt>
-                <c:pt idx="3">
-                  <c:v>40603</c:v>
-                </c:pt>
-                <c:pt idx="4">
-                  <c:v>40634</c:v>
-                </c:pt>
-                <c:pt idx="5">
-                  <c:v>40664</c:v>
-                </c:pt>
-                <c:pt idx="6">
-                  <c:v>40695</c:v>
-                </c:pt>
-                <c:pt idx="7">
-                  <c:v>40725</c:v>
-                </c:pt>
-                <c:pt idx="8">
-                  <c:v>40756</c:v>
-                </c:pt>
-                <c:pt idx="9">
-                  <c:v>40787</c:v>
-                </c:pt>
-                <c:pt idx="10">
-                  <c:v>40817</c:v>
-                </c:pt>
-                <c:pt idx="11">
-                  <c:v>40848</c:v>
-                </c:pt>
-                <c:pt idx="12">
-                  <c:v>40878</c:v>
-                </c:pt>
-              </c:numCache>
-            </c:numRef>
-          </c:cat>
-          <c:val>
-            <c:numRef>
-              <c:f>'New vs. Return'!$B$3:$B$13</c:f>
-              <c:numCache>
-                <c:formatCode>General</c:formatCode>
-                <c:ptCount val="11"/>
-                <c:pt idx="0">
-                  <c:v>417</c:v>
-                </c:pt>
-                <c:pt idx="1">
-                  <c:v>380</c:v>
-                </c:pt>
-                <c:pt idx="2">
-                  <c:v>452</c:v>
-                </c:pt>
-                <c:pt idx="3">
-                  <c:v>300</c:v>
-                </c:pt>
-                <c:pt idx="4">
-                  <c:v>284</c:v>
-                </c:pt>
-                <c:pt idx="5">
-                  <c:v>242</c:v>
-                </c:pt>
-                <c:pt idx="6">
-                  <c:v>188</c:v>
-                </c:pt>
-                <c:pt idx="7">
-                  <c:v>169</c:v>
-                </c:pt>
-                <c:pt idx="8">
-                  <c:v>299</c:v>
-                </c:pt>
-                <c:pt idx="9">
-                  <c:v>358</c:v>
-                </c:pt>
-                <c:pt idx="10">
-                  <c:v>324</c:v>
-                </c:pt>
-              </c:numCache>
-            </c:numRef>
-          </c:val>
-          <c:smooth val="0"/>
-          <c:extLst>
-            <c:ext xmlns:c16="http://schemas.microsoft.com/office/drawing/2014/chart" uri="{C3380CC4-5D6E-409C-BE32-E72D297353CC}">
-              <c16:uniqueId val="{00000000-7A9A-44DE-8A76-D83767A67C88}"/>
-            </c:ext>
-          </c:extLst>
-        </c:ser>
-        <c:ser>
-          <c:idx val="1"/>
-          <c:order val="1"/>
-          <c:tx>
-            <c:v>Returning</c:v>
-          </c:tx>
-          <c:spPr>
-            <a:ln w="28575" cap="rnd">
-              <a:solidFill>
-                <a:schemeClr val="accent4"/>
-              </a:solidFill>
-              <a:round/>
-            </a:ln>
-            <a:effectLst/>
-          </c:spPr>
-          <c:marker>
-            <c:symbol val="none"/>
-          </c:marker>
-          <c:dLbls>
-            <c:dLbl>
-              <c:idx val="0"/>
-              <c:layout>
-                <c:manualLayout>
-                  <c:x val="4.0680046522598087E-3"/>
-                  <c:y val="3.4543930359436266E-2"/>
-                </c:manualLayout>
-              </c:layout>
-              <c:showLegendKey val="0"/>
-              <c:showVal val="1"/>
-              <c:showCatName val="0"/>
-              <c:showSerName val="0"/>
-              <c:showPercent val="0"/>
-              <c:showBubbleSize val="0"/>
-              <c:extLst>
-                <c:ext xmlns:c15="http://schemas.microsoft.com/office/drawing/2012/chart" uri="{CE6537A1-D6FC-4f65-9D91-7224C49458BB}"/>
-                <c:ext xmlns:c16="http://schemas.microsoft.com/office/drawing/2014/chart" uri="{C3380CC4-5D6E-409C-BE32-E72D297353CC}">
-                  <c16:uniqueId val="{0000000D-7A9A-44DE-8A76-D83767A67C88}"/>
-                </c:ext>
-              </c:extLst>
-            </c:dLbl>
-            <c:dLbl>
-              <c:idx val="1"/>
-              <c:delete val="1"/>
-              <c:extLst>
-                <c:ext xmlns:c15="http://schemas.microsoft.com/office/drawing/2012/chart" uri="{CE6537A1-D6FC-4f65-9D91-7224C49458BB}"/>
-                <c:ext xmlns:c16="http://schemas.microsoft.com/office/drawing/2014/chart" uri="{C3380CC4-5D6E-409C-BE32-E72D297353CC}">
-                  <c16:uniqueId val="{0000000E-7A9A-44DE-8A76-D83767A67C88}"/>
-                </c:ext>
-              </c:extLst>
-            </c:dLbl>
-            <c:dLbl>
-              <c:idx val="2"/>
-              <c:delete val="1"/>
-              <c:extLst>
-                <c:ext xmlns:c15="http://schemas.microsoft.com/office/drawing/2012/chart" uri="{CE6537A1-D6FC-4f65-9D91-7224C49458BB}"/>
-                <c:ext xmlns:c16="http://schemas.microsoft.com/office/drawing/2014/chart" uri="{C3380CC4-5D6E-409C-BE32-E72D297353CC}">
-                  <c16:uniqueId val="{0000000F-7A9A-44DE-8A76-D83767A67C88}"/>
-                </c:ext>
-              </c:extLst>
-            </c:dLbl>
-            <c:dLbl>
-              <c:idx val="3"/>
-              <c:delete val="1"/>
-              <c:extLst>
-                <c:ext xmlns:c15="http://schemas.microsoft.com/office/drawing/2012/chart" uri="{CE6537A1-D6FC-4f65-9D91-7224C49458BB}"/>
-                <c:ext xmlns:c16="http://schemas.microsoft.com/office/drawing/2014/chart" uri="{C3380CC4-5D6E-409C-BE32-E72D297353CC}">
-                  <c16:uniqueId val="{00000010-7A9A-44DE-8A76-D83767A67C88}"/>
-                </c:ext>
-              </c:extLst>
-            </c:dLbl>
-            <c:dLbl>
-              <c:idx val="4"/>
-              <c:delete val="1"/>
-              <c:extLst>
-                <c:ext xmlns:c15="http://schemas.microsoft.com/office/drawing/2012/chart" uri="{CE6537A1-D6FC-4f65-9D91-7224C49458BB}"/>
-                <c:ext xmlns:c16="http://schemas.microsoft.com/office/drawing/2014/chart" uri="{C3380CC4-5D6E-409C-BE32-E72D297353CC}">
-                  <c16:uniqueId val="{00000011-7A9A-44DE-8A76-D83767A67C88}"/>
-                </c:ext>
-              </c:extLst>
-            </c:dLbl>
-            <c:dLbl>
-              <c:idx val="5"/>
-              <c:delete val="1"/>
-              <c:extLst>
-                <c:ext xmlns:c15="http://schemas.microsoft.com/office/drawing/2012/chart" uri="{CE6537A1-D6FC-4f65-9D91-7224C49458BB}"/>
-                <c:ext xmlns:c16="http://schemas.microsoft.com/office/drawing/2014/chart" uri="{C3380CC4-5D6E-409C-BE32-E72D297353CC}">
-                  <c16:uniqueId val="{00000012-7A9A-44DE-8A76-D83767A67C88}"/>
-                </c:ext>
-              </c:extLst>
-            </c:dLbl>
-            <c:dLbl>
-              <c:idx val="6"/>
-              <c:delete val="1"/>
-              <c:extLst>
-                <c:ext xmlns:c15="http://schemas.microsoft.com/office/drawing/2012/chart" uri="{CE6537A1-D6FC-4f65-9D91-7224C49458BB}"/>
-                <c:ext xmlns:c16="http://schemas.microsoft.com/office/drawing/2014/chart" uri="{C3380CC4-5D6E-409C-BE32-E72D297353CC}">
-                  <c16:uniqueId val="{00000013-7A9A-44DE-8A76-D83767A67C88}"/>
-                </c:ext>
-              </c:extLst>
-            </c:dLbl>
-            <c:dLbl>
-              <c:idx val="7"/>
-              <c:layout>
-                <c:manualLayout>
-                  <c:x val="-1.3560015507532695E-3"/>
-                  <c:y val="3.4543930359436398E-2"/>
-                </c:manualLayout>
-              </c:layout>
-              <c:showLegendKey val="0"/>
-              <c:showVal val="1"/>
-              <c:showCatName val="0"/>
-              <c:showSerName val="0"/>
-              <c:showPercent val="0"/>
-              <c:showBubbleSize val="0"/>
-              <c:extLst>
-                <c:ext xmlns:c15="http://schemas.microsoft.com/office/drawing/2012/chart" uri="{CE6537A1-D6FC-4f65-9D91-7224C49458BB}"/>
-                <c:ext xmlns:c16="http://schemas.microsoft.com/office/drawing/2014/chart" uri="{C3380CC4-5D6E-409C-BE32-E72D297353CC}">
-                  <c16:uniqueId val="{00000014-7A9A-44DE-8A76-D83767A67C88}"/>
-                </c:ext>
-              </c:extLst>
-            </c:dLbl>
-            <c:dLbl>
-              <c:idx val="8"/>
-              <c:delete val="1"/>
-              <c:extLst>
-                <c:ext xmlns:c15="http://schemas.microsoft.com/office/drawing/2012/chart" uri="{CE6537A1-D6FC-4f65-9D91-7224C49458BB}"/>
-                <c:ext xmlns:c16="http://schemas.microsoft.com/office/drawing/2014/chart" uri="{C3380CC4-5D6E-409C-BE32-E72D297353CC}">
-                  <c16:uniqueId val="{00000015-7A9A-44DE-8A76-D83767A67C88}"/>
-                </c:ext>
-              </c:extLst>
-            </c:dLbl>
-            <c:dLbl>
-              <c:idx val="9"/>
-              <c:delete val="1"/>
-              <c:extLst>
-                <c:ext xmlns:c15="http://schemas.microsoft.com/office/drawing/2012/chart" uri="{CE6537A1-D6FC-4f65-9D91-7224C49458BB}"/>
-                <c:ext xmlns:c16="http://schemas.microsoft.com/office/drawing/2014/chart" uri="{C3380CC4-5D6E-409C-BE32-E72D297353CC}">
-                  <c16:uniqueId val="{00000016-7A9A-44DE-8A76-D83767A67C88}"/>
-                </c:ext>
-              </c:extLst>
-            </c:dLbl>
-            <c:spPr>
-              <a:noFill/>
-              <a:ln>
-                <a:noFill/>
-              </a:ln>
-              <a:effectLst/>
-            </c:spPr>
-            <c:txPr>
-              <a:bodyPr rot="0" spcFirstLastPara="1" vertOverflow="ellipsis" vert="horz" wrap="square" lIns="38100" tIns="19050" rIns="38100" bIns="19050" anchor="ctr" anchorCtr="1">
-                <a:spAutoFit/>
-              </a:bodyPr>
-              <a:lstStyle/>
-              <a:p>
-                <a:pPr>
-                  <a:defRPr sz="900" b="0" i="0" u="none" strike="noStrike" kern="1200" baseline="0">
-                    <a:solidFill>
-                      <a:schemeClr val="tx1">
-                        <a:lumMod val="75000"/>
-                        <a:lumOff val="25000"/>
-                      </a:schemeClr>
-                    </a:solidFill>
-                    <a:latin typeface="+mn-lt"/>
-                    <a:ea typeface="+mn-ea"/>
-                    <a:cs typeface="+mn-cs"/>
-                  </a:defRPr>
-                </a:pPr>
-                <a:endParaRPr lang="en-US"/>
-              </a:p>
-            </c:txPr>
-            <c:showLegendKey val="0"/>
-            <c:showVal val="1"/>
-            <c:showCatName val="0"/>
-            <c:showSerName val="0"/>
-            <c:showPercent val="0"/>
-            <c:showBubbleSize val="0"/>
-            <c:showLeaderLines val="0"/>
-            <c:extLst>
-              <c:ext xmlns:c15="http://schemas.microsoft.com/office/drawing/2012/chart" uri="{CE6537A1-D6FC-4f65-9D91-7224C49458BB}">
-                <c15:showLeaderLines val="1"/>
-                <c15:leaderLines>
-                  <c:spPr>
-                    <a:ln w="9525" cap="flat" cmpd="sng" algn="ctr">
-                      <a:solidFill>
-                        <a:schemeClr val="tx1">
-                          <a:lumMod val="35000"/>
-                          <a:lumOff val="65000"/>
-                        </a:schemeClr>
-                      </a:solidFill>
-                      <a:round/>
-                    </a:ln>
-                    <a:effectLst/>
-                  </c:spPr>
-                </c15:leaderLines>
-              </c:ext>
-            </c:extLst>
-          </c:dLbls>
-          <c:cat>
-            <c:numRef>
-              <c:f>'New vs. Return'!$A$2:$A$14</c:f>
-              <c:numCache>
-                <c:formatCode>mmm\-yy</c:formatCode>
-                <c:ptCount val="13"/>
-                <c:pt idx="0">
-                  <c:v>40513</c:v>
-                </c:pt>
-                <c:pt idx="1">
-                  <c:v>40544</c:v>
-                </c:pt>
-                <c:pt idx="2">
-                  <c:v>40575</c:v>
-                </c:pt>
-                <c:pt idx="3">
-                  <c:v>40603</c:v>
-                </c:pt>
-                <c:pt idx="4">
-                  <c:v>40634</c:v>
-                </c:pt>
-                <c:pt idx="5">
-                  <c:v>40664</c:v>
-                </c:pt>
-                <c:pt idx="6">
-                  <c:v>40695</c:v>
-                </c:pt>
-                <c:pt idx="7">
-                  <c:v>40725</c:v>
-                </c:pt>
-                <c:pt idx="8">
-                  <c:v>40756</c:v>
-                </c:pt>
-                <c:pt idx="9">
-                  <c:v>40787</c:v>
-                </c:pt>
-                <c:pt idx="10">
-                  <c:v>40817</c:v>
-                </c:pt>
-                <c:pt idx="11">
-                  <c:v>40848</c:v>
-                </c:pt>
-                <c:pt idx="12">
-                  <c:v>40878</c:v>
-                </c:pt>
-              </c:numCache>
-            </c:numRef>
-          </c:cat>
-          <c:val>
-            <c:numRef>
-              <c:f>'New vs. Return'!$C$3:$C$13</c:f>
-              <c:numCache>
-                <c:formatCode>General</c:formatCode>
-                <c:ptCount val="11"/>
-                <c:pt idx="0">
-                  <c:v>324</c:v>
-                </c:pt>
-                <c:pt idx="1">
-                  <c:v>378</c:v>
-                </c:pt>
-                <c:pt idx="2">
-                  <c:v>522</c:v>
-                </c:pt>
-                <c:pt idx="3">
-                  <c:v>556</c:v>
-                </c:pt>
-                <c:pt idx="4">
-                  <c:v>772</c:v>
-                </c:pt>
-                <c:pt idx="5">
-                  <c:v>749</c:v>
-                </c:pt>
-                <c:pt idx="6">
-                  <c:v>761</c:v>
-                </c:pt>
-                <c:pt idx="7">
-                  <c:v>766</c:v>
-                </c:pt>
-                <c:pt idx="8">
-                  <c:v>967</c:v>
-                </c:pt>
-                <c:pt idx="9">
-                  <c:v>1006</c:v>
-                </c:pt>
-                <c:pt idx="10">
-                  <c:v>1341</c:v>
-                </c:pt>
-              </c:numCache>
-            </c:numRef>
-          </c:val>
-          <c:smooth val="0"/>
-          <c:extLst>
-            <c:ext xmlns:c16="http://schemas.microsoft.com/office/drawing/2014/chart" uri="{C3380CC4-5D6E-409C-BE32-E72D297353CC}">
-              <c16:uniqueId val="{00000001-7A9A-44DE-8A76-D83767A67C88}"/>
-            </c:ext>
-          </c:extLst>
-        </c:ser>
-        <c:dLbls>
-          <c:showLegendKey val="0"/>
-          <c:showVal val="0"/>
-          <c:showCatName val="0"/>
-          <c:showSerName val="0"/>
-          <c:showPercent val="0"/>
-          <c:showBubbleSize val="0"/>
-        </c:dLbls>
-        <c:smooth val="0"/>
-        <c:axId val="1578916048"/>
-        <c:axId val="1578940048"/>
-      </c:lineChart>
-      <c:dateAx>
-        <c:axId val="1578916048"/>
-        <c:scaling>
-          <c:orientation val="minMax"/>
-        </c:scaling>
-        <c:delete val="0"/>
-        <c:axPos val="b"/>
-        <c:numFmt formatCode="mmm\-yy" sourceLinked="1"/>
-        <c:majorTickMark val="out"/>
-        <c:minorTickMark val="none"/>
-        <c:tickLblPos val="nextTo"/>
-        <c:spPr>
-          <a:noFill/>
-          <a:ln w="9525" cap="flat" cmpd="sng" algn="ctr">
-            <a:solidFill>
-              <a:schemeClr val="tx1">
-                <a:lumMod val="15000"/>
-                <a:lumOff val="85000"/>
-              </a:schemeClr>
-            </a:solidFill>
-            <a:round/>
-          </a:ln>
-          <a:effectLst/>
-        </c:spPr>
-        <c:txPr>
-          <a:bodyPr rot="-60000000" spcFirstLastPara="1" vertOverflow="ellipsis" vert="horz" wrap="square" anchor="ctr" anchorCtr="1"/>
-          <a:lstStyle/>
-          <a:p>
-            <a:pPr>
-              <a:defRPr sz="900" b="0" i="0" u="none" strike="noStrike" kern="1200" baseline="0">
-                <a:solidFill>
-                  <a:schemeClr val="tx1">
-                    <a:lumMod val="65000"/>
-                    <a:lumOff val="35000"/>
-                  </a:schemeClr>
-                </a:solidFill>
-                <a:latin typeface="+mn-lt"/>
-                <a:ea typeface="+mn-ea"/>
-                <a:cs typeface="+mn-cs"/>
-              </a:defRPr>
-            </a:pPr>
-            <a:endParaRPr lang="en-US"/>
-          </a:p>
-        </c:txPr>
-        <c:crossAx val="1578940048"/>
-        <c:crosses val="autoZero"/>
-        <c:auto val="1"/>
-        <c:lblOffset val="100"/>
-        <c:baseTimeUnit val="months"/>
-      </c:dateAx>
-      <c:valAx>
-        <c:axId val="1578940048"/>
-        <c:scaling>
-          <c:orientation val="minMax"/>
-        </c:scaling>
-        <c:delete val="0"/>
-        <c:axPos val="l"/>
-        <c:numFmt formatCode="General" sourceLinked="1"/>
-        <c:majorTickMark val="none"/>
-        <c:minorTickMark val="none"/>
-        <c:tickLblPos val="nextTo"/>
-        <c:spPr>
-          <a:noFill/>
-          <a:ln>
-            <a:noFill/>
-          </a:ln>
-          <a:effectLst/>
-        </c:spPr>
-        <c:txPr>
-          <a:bodyPr rot="-60000000" spcFirstLastPara="1" vertOverflow="ellipsis" vert="horz" wrap="square" anchor="ctr" anchorCtr="1"/>
-          <a:lstStyle/>
-          <a:p>
-            <a:pPr>
-              <a:defRPr sz="900" b="0" i="0" u="none" strike="noStrike" kern="1200" baseline="0">
-                <a:solidFill>
-                  <a:schemeClr val="tx1">
-                    <a:lumMod val="65000"/>
-                    <a:lumOff val="35000"/>
-                  </a:schemeClr>
-                </a:solidFill>
-                <a:latin typeface="+mn-lt"/>
-                <a:ea typeface="+mn-ea"/>
-                <a:cs typeface="+mn-cs"/>
-              </a:defRPr>
-            </a:pPr>
-            <a:endParaRPr lang="en-US"/>
-          </a:p>
-        </c:txPr>
-        <c:crossAx val="1578916048"/>
-        <c:crosses val="autoZero"/>
-        <c:crossBetween val="between"/>
-      </c:valAx>
-      <c:spPr>
-        <a:noFill/>
-        <a:ln>
-          <a:noFill/>
-        </a:ln>
-        <a:effectLst/>
-      </c:spPr>
-    </c:plotArea>
-    <c:legend>
-      <c:legendPos val="r"/>
-      <c:layout>
-        <c:manualLayout>
-          <c:xMode val="edge"/>
-          <c:yMode val="edge"/>
-          <c:x val="0.82333529496262869"/>
-          <c:y val="0.43114137335787101"/>
-          <c:w val="0.16215305084446466"/>
-          <c:h val="0.22618423688850972"/>
-        </c:manualLayout>
-      </c:layout>
-      <c:overlay val="0"/>
-      <c:spPr>
-        <a:noFill/>
-        <a:ln>
-          <a:noFill/>
-        </a:ln>
-        <a:effectLst/>
-      </c:spPr>
-      <c:txPr>
-        <a:bodyPr rot="0" spcFirstLastPara="1" vertOverflow="ellipsis" vert="horz" wrap="square" anchor="ctr" anchorCtr="1"/>
-        <a:lstStyle/>
-        <a:p>
-          <a:pPr>
-            <a:defRPr sz="900" b="0" i="0" u="none" strike="noStrike" kern="1200" baseline="0">
-              <a:solidFill>
-                <a:schemeClr val="tx1">
-                  <a:lumMod val="65000"/>
-                  <a:lumOff val="35000"/>
-                </a:schemeClr>
-              </a:solidFill>
-              <a:latin typeface="+mn-lt"/>
-              <a:ea typeface="+mn-ea"/>
-              <a:cs typeface="+mn-cs"/>
-            </a:defRPr>
-          </a:pPr>
-          <a:endParaRPr lang="en-US"/>
-        </a:p>
-      </c:txPr>
-    </c:legend>
-    <c:plotVisOnly val="1"/>
-    <c:dispBlanksAs val="gap"/>
-    <c:showDLblsOverMax val="0"/>
-    <c:extLst>
-      <c:ext xmlns:c16r3="http://schemas.microsoft.com/office/drawing/2017/03/chart" uri="{56B9EC1D-385E-4148-901F-78D8002777C0}">
-        <c16r3:dataDisplayOptions16>
-          <c16r3:dispNaAsBlank val="1"/>
-        </c16r3:dataDisplayOptions16>
-      </c:ext>
-    </c:extLst>
-  </c:chart>
-  <c:spPr>
-    <a:noFill/>
-    <a:ln>
-      <a:noFill/>
-    </a:ln>
-    <a:effectLst/>
-  </c:spPr>
-  <c:txPr>
-    <a:bodyPr/>
-    <a:lstStyle/>
-    <a:p>
-      <a:pPr>
-        <a:defRPr/>
-      </a:pPr>
-      <a:endParaRPr lang="en-US"/>
-    </a:p>
-  </c:txPr>
-  <c:externalData r:id="rId3">
-    <c:autoUpdate val="0"/>
-  </c:externalData>
-</c:chartSpace>
-</file>
-
-<file path=ppt/charts/colors1.xml><?xml version="1.0" encoding="utf-8"?>
-<cs:colorStyle xmlns:cs="http://schemas.microsoft.com/office/drawing/2012/chartStyle" xmlns:a="http://schemas.openxmlformats.org/drawingml/2006/main" meth="cycle" id="12">
-  <a:schemeClr val="accent2"/>
-  <a:schemeClr val="accent4"/>
-  <a:schemeClr val="accent6"/>
-  <cs:variation/>
-  <cs:variation>
-    <a:lumMod val="60000"/>
-  </cs:variation>
-  <cs:variation>
-    <a:lumMod val="80000"/>
-    <a:lumOff val="20000"/>
-  </cs:variation>
-  <cs:variation>
-    <a:lumMod val="80000"/>
-  </cs:variation>
-  <cs:variation>
-    <a:lumMod val="60000"/>
-    <a:lumOff val="40000"/>
-  </cs:variation>
-  <cs:variation>
-    <a:lumMod val="50000"/>
-  </cs:variation>
-  <cs:variation>
-    <a:lumMod val="70000"/>
-    <a:lumOff val="30000"/>
-  </cs:variation>
-  <cs:variation>
-    <a:lumMod val="70000"/>
-  </cs:variation>
-  <cs:variation>
-    <a:lumMod val="50000"/>
-    <a:lumOff val="50000"/>
-  </cs:variation>
-</cs:colorStyle>
-</file>
-
-<file path=ppt/charts/style1.xml><?xml version="1.0" encoding="utf-8"?>
-<cs:chartStyle xmlns:cs="http://schemas.microsoft.com/office/drawing/2012/chartStyle" xmlns:a="http://schemas.openxmlformats.org/drawingml/2006/main" id="227">
-  <cs:axisTitle>
-    <cs:lnRef idx="0"/>
-    <cs:fillRef idx="0"/>
-    <cs:effectRef idx="0"/>
-    <cs:fontRef idx="minor">
-      <a:schemeClr val="tx1">
-        <a:lumMod val="65000"/>
-        <a:lumOff val="35000"/>
-      </a:schemeClr>
-    </cs:fontRef>
-    <cs:defRPr sz="1000" kern="1200"/>
-  </cs:axisTitle>
-  <cs:categoryAxis>
-    <cs:lnRef idx="0"/>
-    <cs:fillRef idx="0"/>
-    <cs:effectRef idx="0"/>
-    <cs:fontRef idx="minor">
-      <a:schemeClr val="tx1">
-        <a:lumMod val="65000"/>
-        <a:lumOff val="35000"/>
-      </a:schemeClr>
-    </cs:fontRef>
-    <cs:spPr>
-      <a:ln w="9525" cap="flat" cmpd="sng" algn="ctr">
-        <a:solidFill>
-          <a:schemeClr val="tx1">
-            <a:lumMod val="15000"/>
-            <a:lumOff val="85000"/>
-          </a:schemeClr>
-        </a:solidFill>
-        <a:round/>
-      </a:ln>
-    </cs:spPr>
-    <cs:defRPr sz="900" kern="1200"/>
-  </cs:categoryAxis>
-  <cs:chartArea mods="allowNoFillOverride allowNoLineOverride">
-    <cs:lnRef idx="0"/>
-    <cs:fillRef idx="0"/>
-    <cs:effectRef idx="0"/>
-    <cs:fontRef idx="minor">
-      <a:schemeClr val="tx1"/>
-    </cs:fontRef>
-    <cs:spPr>
-      <a:solidFill>
-        <a:schemeClr val="bg1"/>
-      </a:solidFill>
-      <a:ln w="9525" cap="flat" cmpd="sng" algn="ctr">
-        <a:solidFill>
-          <a:schemeClr val="tx1">
-            <a:lumMod val="15000"/>
-            <a:lumOff val="85000"/>
-          </a:schemeClr>
-        </a:solidFill>
-        <a:round/>
-      </a:ln>
-    </cs:spPr>
-    <cs:defRPr sz="1000" kern="1200"/>
-  </cs:chartArea>
-  <cs:dataLabel>
-    <cs:lnRef idx="0"/>
-    <cs:fillRef idx="0"/>
-    <cs:effectRef idx="0"/>
-    <cs:fontRef idx="minor">
-      <a:schemeClr val="tx1">
-        <a:lumMod val="75000"/>
-        <a:lumOff val="25000"/>
-      </a:schemeClr>
-    </cs:fontRef>
-    <cs:defRPr sz="900" kern="1200"/>
-  </cs:dataLabel>
-  <cs:dataLabelCallout>
-    <cs:lnRef idx="0"/>
-    <cs:fillRef idx="0"/>
-    <cs:effectRef idx="0"/>
-    <cs:fontRef idx="minor">
-      <a:schemeClr val="dk1">
-        <a:lumMod val="65000"/>
-        <a:lumOff val="35000"/>
-      </a:schemeClr>
-    </cs:fontRef>
-    <cs:spPr>
-      <a:solidFill>
-        <a:schemeClr val="lt1"/>
-      </a:solidFill>
-      <a:ln>
-        <a:solidFill>
-          <a:schemeClr val="dk1">
-            <a:lumMod val="25000"/>
-            <a:lumOff val="75000"/>
-          </a:schemeClr>
-        </a:solidFill>
-      </a:ln>
-    </cs:spPr>
-    <cs:defRPr sz="900" kern="1200"/>
-    <cs:bodyPr rot="0" spcFirstLastPara="1" vertOverflow="clip" horzOverflow="clip" vert="horz" wrap="square" lIns="36576" tIns="18288" rIns="36576" bIns="18288" anchor="ctr" anchorCtr="1">
-      <a:spAutoFit/>
-    </cs:bodyPr>
-  </cs:dataLabelCallout>
-  <cs:dataPoint>
-    <cs:lnRef idx="0"/>
-    <cs:fillRef idx="1">
-      <cs:styleClr val="auto"/>
-    </cs:fillRef>
-    <cs:effectRef idx="0"/>
-    <cs:fontRef idx="minor">
-      <a:schemeClr val="tx1"/>
-    </cs:fontRef>
-    <cs:spPr>
-      <a:solidFill>
-        <a:schemeClr val="phClr"/>
-      </a:solidFill>
-    </cs:spPr>
-  </cs:dataPoint>
-  <cs:dataPoint3D>
-    <cs:lnRef idx="0"/>
-    <cs:fillRef idx="1">
-      <cs:styleClr val="auto"/>
-    </cs:fillRef>
-    <cs:effectRef idx="0"/>
-    <cs:fontRef idx="minor">
-      <a:schemeClr val="tx1"/>
-    </cs:fontRef>
-    <cs:spPr>
-      <a:solidFill>
-        <a:schemeClr val="phClr"/>
-      </a:solidFill>
-    </cs:spPr>
-  </cs:dataPoint3D>
-  <cs:dataPointLine>
-    <cs:lnRef idx="0">
-      <cs:styleClr val="auto"/>
-    </cs:lnRef>
-    <cs:fillRef idx="1"/>
-    <cs:effectRef idx="0"/>
-    <cs:fontRef idx="minor">
-      <a:schemeClr val="tx1"/>
-    </cs:fontRef>
-    <cs:spPr>
-      <a:ln w="28575" cap="rnd">
-        <a:solidFill>
-          <a:schemeClr val="phClr"/>
-        </a:solidFill>
-        <a:round/>
-      </a:ln>
-    </cs:spPr>
-  </cs:dataPointLine>
-  <cs:dataPointMarker>
-    <cs:lnRef idx="0">
-      <cs:styleClr val="auto"/>
-    </cs:lnRef>
-    <cs:fillRef idx="1">
-      <cs:styleClr val="auto"/>
-    </cs:fillRef>
-    <cs:effectRef idx="0"/>
-    <cs:fontRef idx="minor">
-      <a:schemeClr val="tx1"/>
-    </cs:fontRef>
-    <cs:spPr>
-      <a:solidFill>
-        <a:schemeClr val="phClr"/>
-      </a:solidFill>
-      <a:ln w="9525">
-        <a:solidFill>
-          <a:schemeClr val="phClr"/>
-        </a:solidFill>
-      </a:ln>
-    </cs:spPr>
-  </cs:dataPointMarker>
-  <cs:dataPointMarkerLayout symbol="circle" size="5"/>
-  <cs:dataPointWireframe>
-    <cs:lnRef idx="0">
-      <cs:styleClr val="auto"/>
-    </cs:lnRef>
-    <cs:fillRef idx="1"/>
-    <cs:effectRef idx="0"/>
-    <cs:fontRef idx="minor">
-      <a:schemeClr val="tx1"/>
-    </cs:fontRef>
-    <cs:spPr>
-      <a:ln w="9525" cap="rnd">
-        <a:solidFill>
-          <a:schemeClr val="phClr"/>
-        </a:solidFill>
-        <a:round/>
-      </a:ln>
-    </cs:spPr>
-  </cs:dataPointWireframe>
-  <cs:dataTable>
-    <cs:lnRef idx="0"/>
-    <cs:fillRef idx="0"/>
-    <cs:effectRef idx="0"/>
-    <cs:fontRef idx="minor">
-      <a:schemeClr val="tx1">
-        <a:lumMod val="65000"/>
-        <a:lumOff val="35000"/>
-      </a:schemeClr>
-    </cs:fontRef>
-    <cs:spPr>
-      <a:noFill/>
-      <a:ln w="9525" cap="flat" cmpd="sng" algn="ctr">
-        <a:solidFill>
-          <a:schemeClr val="tx1">
-            <a:lumMod val="15000"/>
-            <a:lumOff val="85000"/>
-          </a:schemeClr>
-        </a:solidFill>
-        <a:round/>
-      </a:ln>
-    </cs:spPr>
-    <cs:defRPr sz="900" kern="1200"/>
-  </cs:dataTable>
-  <cs:downBar>
-    <cs:lnRef idx="0"/>
-    <cs:fillRef idx="0"/>
-    <cs:effectRef idx="0"/>
-    <cs:fontRef idx="minor">
-      <a:schemeClr val="dk1"/>
-    </cs:fontRef>
-    <cs:spPr>
-      <a:solidFill>
-        <a:schemeClr val="dk1">
-          <a:lumMod val="65000"/>
-          <a:lumOff val="35000"/>
-        </a:schemeClr>
-      </a:solidFill>
-      <a:ln w="9525">
-        <a:solidFill>
-          <a:schemeClr val="tx1">
-            <a:lumMod val="65000"/>
-            <a:lumOff val="35000"/>
-          </a:schemeClr>
-        </a:solidFill>
-      </a:ln>
-    </cs:spPr>
-  </cs:downBar>
-  <cs:dropLine>
-    <cs:lnRef idx="0"/>
-    <cs:fillRef idx="0"/>
-    <cs:effectRef idx="0"/>
-    <cs:fontRef idx="minor">
-      <a:schemeClr val="tx1"/>
-    </cs:fontRef>
-    <cs:spPr>
-      <a:ln w="9525" cap="flat" cmpd="sng" algn="ctr">
-        <a:solidFill>
-          <a:schemeClr val="tx1">
-            <a:lumMod val="35000"/>
-            <a:lumOff val="65000"/>
-          </a:schemeClr>
-        </a:solidFill>
-        <a:round/>
-      </a:ln>
-    </cs:spPr>
-  </cs:dropLine>
-  <cs:errorBar>
-    <cs:lnRef idx="0"/>
-    <cs:fillRef idx="0"/>
-    <cs:effectRef idx="0"/>
-    <cs:fontRef idx="minor">
-      <a:schemeClr val="tx1"/>
-    </cs:fontRef>
-    <cs:spPr>
-      <a:ln w="9525" cap="flat" cmpd="sng" algn="ctr">
-        <a:solidFill>
-          <a:schemeClr val="tx1">
-            <a:lumMod val="65000"/>
-            <a:lumOff val="35000"/>
-          </a:schemeClr>
-        </a:solidFill>
-        <a:round/>
-      </a:ln>
-    </cs:spPr>
-  </cs:errorBar>
-  <cs:floor>
-    <cs:lnRef idx="0"/>
-    <cs:fillRef idx="0"/>
-    <cs:effectRef idx="0"/>
-    <cs:fontRef idx="minor">
-      <a:schemeClr val="tx1"/>
-    </cs:fontRef>
-    <cs:spPr>
-      <a:noFill/>
-      <a:ln>
-        <a:noFill/>
-      </a:ln>
-    </cs:spPr>
-  </cs:floor>
-  <cs:gridlineMajor>
-    <cs:lnRef idx="0"/>
-    <cs:fillRef idx="0"/>
-    <cs:effectRef idx="0"/>
-    <cs:fontRef idx="minor">
-      <a:schemeClr val="tx1"/>
-    </cs:fontRef>
-    <cs:spPr>
-      <a:ln w="9525" cap="flat" cmpd="sng" algn="ctr">
-        <a:solidFill>
-          <a:schemeClr val="tx1">
-            <a:lumMod val="15000"/>
-            <a:lumOff val="85000"/>
-          </a:schemeClr>
-        </a:solidFill>
-        <a:round/>
-      </a:ln>
-    </cs:spPr>
-  </cs:gridlineMajor>
-  <cs:gridlineMinor>
-    <cs:lnRef idx="0"/>
-    <cs:fillRef idx="0"/>
-    <cs:effectRef idx="0"/>
-    <cs:fontRef idx="minor">
-      <a:schemeClr val="tx1"/>
-    </cs:fontRef>
-    <cs:spPr>
-      <a:ln w="9525" cap="flat" cmpd="sng" algn="ctr">
-        <a:solidFill>
-          <a:schemeClr val="tx1">
-            <a:lumMod val="5000"/>
-            <a:lumOff val="95000"/>
-          </a:schemeClr>
-        </a:solidFill>
-        <a:round/>
-      </a:ln>
-    </cs:spPr>
-  </cs:gridlineMinor>
-  <cs:hiLoLine>
-    <cs:lnRef idx="0"/>
-    <cs:fillRef idx="0"/>
-    <cs:effectRef idx="0"/>
-    <cs:fontRef idx="minor">
-      <a:schemeClr val="tx1"/>
-    </cs:fontRef>
-    <cs:spPr>
-      <a:ln w="9525" cap="flat" cmpd="sng" algn="ctr">
-        <a:solidFill>
-          <a:schemeClr val="tx1">
-            <a:lumMod val="75000"/>
-            <a:lumOff val="25000"/>
-          </a:schemeClr>
-        </a:solidFill>
-        <a:round/>
-      </a:ln>
-    </cs:spPr>
-  </cs:hiLoLine>
-  <cs:leaderLine>
-    <cs:lnRef idx="0"/>
-    <cs:fillRef idx="0"/>
-    <cs:effectRef idx="0"/>
-    <cs:fontRef idx="minor">
-      <a:schemeClr val="tx1"/>
-    </cs:fontRef>
-    <cs:spPr>
-      <a:ln w="9525" cap="flat" cmpd="sng" algn="ctr">
-        <a:solidFill>
-          <a:schemeClr val="tx1">
-            <a:lumMod val="35000"/>
-            <a:lumOff val="65000"/>
-          </a:schemeClr>
-        </a:solidFill>
-        <a:round/>
-      </a:ln>
-    </cs:spPr>
-  </cs:leaderLine>
-  <cs:legend>
-    <cs:lnRef idx="0"/>
-    <cs:fillRef idx="0"/>
-    <cs:effectRef idx="0"/>
-    <cs:fontRef idx="minor">
-      <a:schemeClr val="tx1">
-        <a:lumMod val="65000"/>
-        <a:lumOff val="35000"/>
-      </a:schemeClr>
-    </cs:fontRef>
-    <cs:defRPr sz="900" kern="1200"/>
-  </cs:legend>
-  <cs:plotArea mods="allowNoFillOverride allowNoLineOverride">
-    <cs:lnRef idx="0"/>
-    <cs:fillRef idx="0"/>
-    <cs:effectRef idx="0"/>
-    <cs:fontRef idx="minor">
-      <a:schemeClr val="tx1"/>
-    </cs:fontRef>
-  </cs:plotArea>
-  <cs:plotArea3D mods="allowNoFillOverride allowNoLineOverride">
-    <cs:lnRef idx="0"/>
-    <cs:fillRef idx="0"/>
-    <cs:effectRef idx="0"/>
-    <cs:fontRef idx="minor">
-      <a:schemeClr val="tx1"/>
-    </cs:fontRef>
-  </cs:plotArea3D>
-  <cs:seriesAxis>
-    <cs:lnRef idx="0"/>
-    <cs:fillRef idx="0"/>
-    <cs:effectRef idx="0"/>
-    <cs:fontRef idx="minor">
-      <a:schemeClr val="tx1">
-        <a:lumMod val="65000"/>
-        <a:lumOff val="35000"/>
-      </a:schemeClr>
-    </cs:fontRef>
-    <cs:defRPr sz="900" kern="1200"/>
-  </cs:seriesAxis>
-  <cs:seriesLine>
-    <cs:lnRef idx="0"/>
-    <cs:fillRef idx="0"/>
-    <cs:effectRef idx="0"/>
-    <cs:fontRef idx="minor">
-      <a:schemeClr val="tx1"/>
-    </cs:fontRef>
-    <cs:spPr>
-      <a:ln w="9525" cap="flat" cmpd="sng" algn="ctr">
-        <a:solidFill>
-          <a:schemeClr val="tx1">
-            <a:lumMod val="35000"/>
-            <a:lumOff val="65000"/>
-          </a:schemeClr>
-        </a:solidFill>
-        <a:round/>
-      </a:ln>
-    </cs:spPr>
-  </cs:seriesLine>
-  <cs:title>
-    <cs:lnRef idx="0"/>
-    <cs:fillRef idx="0"/>
-    <cs:effectRef idx="0"/>
-    <cs:fontRef idx="minor">
-      <a:schemeClr val="tx1">
-        <a:lumMod val="65000"/>
-        <a:lumOff val="35000"/>
-      </a:schemeClr>
-    </cs:fontRef>
-    <cs:defRPr sz="1400" b="0" kern="1200" spc="0" baseline="0"/>
-  </cs:title>
-  <cs:trendline>
-    <cs:lnRef idx="0">
-      <cs:styleClr val="auto"/>
-    </cs:lnRef>
-    <cs:fillRef idx="0"/>
-    <cs:effectRef idx="0"/>
-    <cs:fontRef idx="minor">
-      <a:schemeClr val="tx1"/>
-    </cs:fontRef>
-    <cs:spPr>
-      <a:ln w="19050" cap="rnd">
-        <a:solidFill>
-          <a:schemeClr val="phClr"/>
-        </a:solidFill>
-        <a:prstDash val="sysDot"/>
-      </a:ln>
-    </cs:spPr>
-  </cs:trendline>
-  <cs:trendlineLabel>
-    <cs:lnRef idx="0"/>
-    <cs:fillRef idx="0"/>
-    <cs:effectRef idx="0"/>
-    <cs:fontRef idx="minor">
-      <a:schemeClr val="tx1">
-        <a:lumMod val="65000"/>
-        <a:lumOff val="35000"/>
-      </a:schemeClr>
-    </cs:fontRef>
-    <cs:defRPr sz="900" kern="1200"/>
-  </cs:trendlineLabel>
-  <cs:upBar>
-    <cs:lnRef idx="0"/>
-    <cs:fillRef idx="0"/>
-    <cs:effectRef idx="0"/>
-    <cs:fontRef idx="minor">
-      <a:schemeClr val="dk1"/>
-    </cs:fontRef>
-    <cs:spPr>
-      <a:solidFill>
-        <a:schemeClr val="lt1"/>
-      </a:solidFill>
-      <a:ln w="9525">
-        <a:solidFill>
-          <a:schemeClr val="tx1">
-            <a:lumMod val="15000"/>
-            <a:lumOff val="85000"/>
-          </a:schemeClr>
-        </a:solidFill>
-      </a:ln>
-    </cs:spPr>
-  </cs:upBar>
-  <cs:valueAxis>
-    <cs:lnRef idx="0"/>
-    <cs:fillRef idx="0"/>
-    <cs:effectRef idx="0"/>
-    <cs:fontRef idx="minor">
-      <a:schemeClr val="tx1">
-        <a:lumMod val="65000"/>
-        <a:lumOff val="35000"/>
-      </a:schemeClr>
-    </cs:fontRef>
-    <cs:defRPr sz="900" kern="1200"/>
-  </cs:valueAxis>
-  <cs:wall>
-    <cs:lnRef idx="0"/>
-    <cs:fillRef idx="0"/>
-    <cs:effectRef idx="0"/>
-    <cs:fontRef idx="minor">
-      <a:schemeClr val="tx1"/>
-    </cs:fontRef>
-    <cs:spPr>
-      <a:noFill/>
-      <a:ln>
-        <a:noFill/>
-      </a:ln>
-    </cs:spPr>
-  </cs:wall>
-</cs:chartStyle>
 </file>
 
 <file path=ppt/notesMasters/notesMaster1.xml><?xml version="1.0" encoding="utf-8"?>
@@ -2197,7 +722,7 @@
           <a:p>
             <a:fld id="{9C049790-B49D-4D8D-B628-59414A006FDF}" type="datetimeFigureOut">
               <a:rPr lang="en-US" smtClean="0"/>
-              <a:t>12/15/2025</a:t>
+              <a:t>12/17/2025</a:t>
             </a:fld>
             <a:endParaRPr lang="en-US"/>
           </a:p>
@@ -2817,7 +1342,7 @@
           <a:p>
             <a:fld id="{74411A3F-4DB3-47ED-809A-CD27B21BFB64}" type="datetimeFigureOut">
               <a:rPr lang="en-US" smtClean="0"/>
-              <a:t>12/15/2025</a:t>
+              <a:t>12/17/2025</a:t>
             </a:fld>
             <a:endParaRPr lang="en-US"/>
           </a:p>
@@ -3115,7 +1640,7 @@
           <a:p>
             <a:fld id="{74411A3F-4DB3-47ED-809A-CD27B21BFB64}" type="datetimeFigureOut">
               <a:rPr lang="en-US" smtClean="0"/>
-              <a:t>12/15/2025</a:t>
+              <a:t>12/17/2025</a:t>
             </a:fld>
             <a:endParaRPr lang="en-US"/>
           </a:p>
@@ -3307,7 +1832,7 @@
           <a:p>
             <a:fld id="{74411A3F-4DB3-47ED-809A-CD27B21BFB64}" type="datetimeFigureOut">
               <a:rPr lang="en-US" smtClean="0"/>
-              <a:t>12/15/2025</a:t>
+              <a:t>12/17/2025</a:t>
             </a:fld>
             <a:endParaRPr lang="en-US"/>
           </a:p>
@@ -3568,7 +2093,7 @@
           <a:p>
             <a:fld id="{74411A3F-4DB3-47ED-809A-CD27B21BFB64}" type="datetimeFigureOut">
               <a:rPr lang="en-US" smtClean="0"/>
-              <a:t>12/15/2025</a:t>
+              <a:t>12/17/2025</a:t>
             </a:fld>
             <a:endParaRPr lang="en-US"/>
           </a:p>
@@ -3992,7 +2517,7 @@
           <a:p>
             <a:fld id="{74411A3F-4DB3-47ED-809A-CD27B21BFB64}" type="datetimeFigureOut">
               <a:rPr lang="en-US" smtClean="0"/>
-              <a:t>12/15/2025</a:t>
+              <a:t>12/17/2025</a:t>
             </a:fld>
             <a:endParaRPr lang="en-US"/>
           </a:p>
@@ -4529,7 +3054,7 @@
           <a:p>
             <a:fld id="{74411A3F-4DB3-47ED-809A-CD27B21BFB64}" type="datetimeFigureOut">
               <a:rPr lang="en-US" smtClean="0"/>
-              <a:t>12/15/2025</a:t>
+              <a:t>12/17/2025</a:t>
             </a:fld>
             <a:endParaRPr lang="en-US"/>
           </a:p>
@@ -5393,7 +3918,7 @@
           <a:p>
             <a:fld id="{74411A3F-4DB3-47ED-809A-CD27B21BFB64}" type="datetimeFigureOut">
               <a:rPr lang="en-US" smtClean="0"/>
-              <a:t>12/15/2025</a:t>
+              <a:t>12/17/2025</a:t>
             </a:fld>
             <a:endParaRPr lang="en-US"/>
           </a:p>
@@ -5563,7 +4088,7 @@
           <a:p>
             <a:fld id="{74411A3F-4DB3-47ED-809A-CD27B21BFB64}" type="datetimeFigureOut">
               <a:rPr lang="en-US" smtClean="0"/>
-              <a:t>12/15/2025</a:t>
+              <a:t>12/17/2025</a:t>
             </a:fld>
             <a:endParaRPr lang="en-US"/>
           </a:p>
@@ -5747,7 +4272,7 @@
           <a:p>
             <a:fld id="{74411A3F-4DB3-47ED-809A-CD27B21BFB64}" type="datetimeFigureOut">
               <a:rPr lang="en-US" smtClean="0"/>
-              <a:t>12/15/2025</a:t>
+              <a:t>12/17/2025</a:t>
             </a:fld>
             <a:endParaRPr lang="en-US"/>
           </a:p>
@@ -5917,7 +4442,7 @@
           <a:p>
             <a:fld id="{74411A3F-4DB3-47ED-809A-CD27B21BFB64}" type="datetimeFigureOut">
               <a:rPr lang="en-US" smtClean="0"/>
-              <a:t>12/15/2025</a:t>
+              <a:t>12/17/2025</a:t>
             </a:fld>
             <a:endParaRPr lang="en-US"/>
           </a:p>
@@ -6161,7 +4686,7 @@
           <a:p>
             <a:fld id="{74411A3F-4DB3-47ED-809A-CD27B21BFB64}" type="datetimeFigureOut">
               <a:rPr lang="en-US" smtClean="0"/>
-              <a:t>12/15/2025</a:t>
+              <a:t>12/17/2025</a:t>
             </a:fld>
             <a:endParaRPr lang="en-US"/>
           </a:p>
@@ -6397,7 +4922,7 @@
           <a:p>
             <a:fld id="{74411A3F-4DB3-47ED-809A-CD27B21BFB64}" type="datetimeFigureOut">
               <a:rPr lang="en-US" smtClean="0"/>
-              <a:t>12/15/2025</a:t>
+              <a:t>12/17/2025</a:t>
             </a:fld>
             <a:endParaRPr lang="en-US"/>
           </a:p>
@@ -6863,7 +5388,7 @@
           <a:p>
             <a:fld id="{74411A3F-4DB3-47ED-809A-CD27B21BFB64}" type="datetimeFigureOut">
               <a:rPr lang="en-US" smtClean="0"/>
-              <a:t>12/15/2025</a:t>
+              <a:t>12/17/2025</a:t>
             </a:fld>
             <a:endParaRPr lang="en-US"/>
           </a:p>
@@ -6981,7 +5506,7 @@
           <a:p>
             <a:fld id="{74411A3F-4DB3-47ED-809A-CD27B21BFB64}" type="datetimeFigureOut">
               <a:rPr lang="en-US" smtClean="0"/>
-              <a:t>12/15/2025</a:t>
+              <a:t>12/17/2025</a:t>
             </a:fld>
             <a:endParaRPr lang="en-US"/>
           </a:p>
@@ -7076,7 +5601,7 @@
           <a:p>
             <a:fld id="{74411A3F-4DB3-47ED-809A-CD27B21BFB64}" type="datetimeFigureOut">
               <a:rPr lang="en-US" smtClean="0"/>
-              <a:t>12/15/2025</a:t>
+              <a:t>12/17/2025</a:t>
             </a:fld>
             <a:endParaRPr lang="en-US"/>
           </a:p>
@@ -7331,7 +5856,7 @@
           <a:p>
             <a:fld id="{74411A3F-4DB3-47ED-809A-CD27B21BFB64}" type="datetimeFigureOut">
               <a:rPr lang="en-US" smtClean="0"/>
-              <a:t>12/15/2025</a:t>
+              <a:t>12/17/2025</a:t>
             </a:fld>
             <a:endParaRPr lang="en-US"/>
           </a:p>
@@ -7631,7 +6156,7 @@
           <a:p>
             <a:fld id="{74411A3F-4DB3-47ED-809A-CD27B21BFB64}" type="datetimeFigureOut">
               <a:rPr lang="en-US" smtClean="0"/>
-              <a:t>12/15/2025</a:t>
+              <a:t>12/17/2025</a:t>
             </a:fld>
             <a:endParaRPr lang="en-US"/>
           </a:p>
@@ -7865,7 +6390,7 @@
           <a:p>
             <a:fld id="{74411A3F-4DB3-47ED-809A-CD27B21BFB64}" type="datetimeFigureOut">
               <a:rPr lang="en-US" smtClean="0"/>
-              <a:t>12/15/2025</a:t>
+              <a:t>12/17/2025</a:t>
             </a:fld>
             <a:endParaRPr lang="en-US"/>
           </a:p>
@@ -9084,36 +7609,6 @@
           <a:chExt cx="0" cy="0"/>
         </a:xfrm>
       </p:grpSpPr>
-      <p:graphicFrame>
-        <p:nvGraphicFramePr>
-          <p:cNvPr id="6" name="Chart 5">
-            <a:extLst>
-              <a:ext uri="{FF2B5EF4-FFF2-40B4-BE49-F238E27FC236}">
-                <a16:creationId xmlns:a16="http://schemas.microsoft.com/office/drawing/2014/main" id="{3F6B7EF6-81DB-8E3D-3AC7-3F9ABC236B5C}"/>
-              </a:ext>
-            </a:extLst>
-          </p:cNvPr>
-          <p:cNvGraphicFramePr>
-            <a:graphicFrameLocks/>
-          </p:cNvGraphicFramePr>
-          <p:nvPr>
-            <p:extLst>
-              <p:ext uri="{D42A27DB-BD31-4B8C-83A1-F6EECF244321}">
-                <p14:modId xmlns:p14="http://schemas.microsoft.com/office/powerpoint/2010/main" val="3883312639"/>
-              </p:ext>
-            </p:extLst>
-          </p:nvPr>
-        </p:nvGraphicFramePr>
-        <p:xfrm>
-          <a:off x="1413114" y="1110415"/>
-          <a:ext cx="9365771" cy="3676478"/>
-        </p:xfrm>
-        <a:graphic>
-          <a:graphicData uri="http://schemas.openxmlformats.org/drawingml/2006/chart">
-            <c:chart xmlns:c="http://schemas.openxmlformats.org/drawingml/2006/chart" xmlns:r="http://schemas.openxmlformats.org/officeDocument/2006/relationships" r:id="rId2"/>
-          </a:graphicData>
-        </a:graphic>
-      </p:graphicFrame>
       <p:sp>
         <p:nvSpPr>
           <p:cNvPr id="4" name="TextBox 3">
@@ -9221,6 +7716,87 @@
           </a:p>
         </p:txBody>
       </p:sp>
+      <p:grpSp>
+        <p:nvGrpSpPr>
+          <p:cNvPr id="22" name="Group 21">
+            <a:extLst>
+              <a:ext uri="{FF2B5EF4-FFF2-40B4-BE49-F238E27FC236}">
+                <a16:creationId xmlns:a16="http://schemas.microsoft.com/office/drawing/2014/main" id="{A53BF3E9-6229-C734-A848-EDB2BAD07B56}"/>
+              </a:ext>
+            </a:extLst>
+          </p:cNvPr>
+          <p:cNvGrpSpPr/>
+          <p:nvPr/>
+        </p:nvGrpSpPr>
+        <p:grpSpPr>
+          <a:xfrm>
+            <a:off x="1173590" y="865238"/>
+            <a:ext cx="9844820" cy="4201945"/>
+            <a:chOff x="1173590" y="1016453"/>
+            <a:chExt cx="9844820" cy="3770440"/>
+          </a:xfrm>
+        </p:grpSpPr>
+        <p:pic>
+          <p:nvPicPr>
+            <p:cNvPr id="19" name="Picture 18">
+              <a:extLst>
+                <a:ext uri="{FF2B5EF4-FFF2-40B4-BE49-F238E27FC236}">
+                  <a16:creationId xmlns:a16="http://schemas.microsoft.com/office/drawing/2014/main" id="{2FD3FD2B-E31A-2550-B6BA-3D2167A03BA1}"/>
+                </a:ext>
+              </a:extLst>
+            </p:cNvPr>
+            <p:cNvPicPr>
+              <a:picLocks noChangeAspect="1"/>
+            </p:cNvPicPr>
+            <p:nvPr/>
+          </p:nvPicPr>
+          <p:blipFill>
+            <a:blip r:embed="rId2"/>
+            <a:stretch>
+              <a:fillRect/>
+            </a:stretch>
+          </p:blipFill>
+          <p:spPr>
+            <a:xfrm>
+              <a:off x="1173590" y="1016453"/>
+              <a:ext cx="9844820" cy="3770440"/>
+            </a:xfrm>
+            <a:prstGeom prst="rect">
+              <a:avLst/>
+            </a:prstGeom>
+          </p:spPr>
+        </p:pic>
+        <p:pic>
+          <p:nvPicPr>
+            <p:cNvPr id="21" name="Picture 20">
+              <a:extLst>
+                <a:ext uri="{FF2B5EF4-FFF2-40B4-BE49-F238E27FC236}">
+                  <a16:creationId xmlns:a16="http://schemas.microsoft.com/office/drawing/2014/main" id="{2BA2933C-B942-ECCC-3539-88DA578D3E5F}"/>
+                </a:ext>
+              </a:extLst>
+            </p:cNvPr>
+            <p:cNvPicPr>
+              <a:picLocks noChangeAspect="1"/>
+            </p:cNvPicPr>
+            <p:nvPr/>
+          </p:nvPicPr>
+          <p:blipFill>
+            <a:blip r:embed="rId3"/>
+            <a:stretch>
+              <a:fillRect/>
+            </a:stretch>
+          </p:blipFill>
+          <p:spPr>
+            <a:xfrm>
+              <a:off x="9513250" y="2492041"/>
+              <a:ext cx="1505160" cy="409632"/>
+            </a:xfrm>
+            <a:prstGeom prst="rect">
+              <a:avLst/>
+            </a:prstGeom>
+          </p:spPr>
+        </p:pic>
+      </p:grpSp>
     </p:spTree>
     <p:extLst>
       <p:ext uri="{BB962C8B-B14F-4D97-AF65-F5344CB8AC3E}">
